--- a/docs/pptx/carbo/jx-carbo-linsubhr-ratio-hosp6.pptx
+++ b/docs/pptx/carbo/jx-carbo-linsubhr-ratio-hosp6.pptx
@@ -2271,7 +2271,7 @@
           </p:nvSpPr>
           <p:spPr>
             <a:xfrm>
-              <a:off x="817517" y="5114368"/>
+              <a:off x="817517" y="5142518"/>
               <a:ext cx="7799693" cy="0"/>
             </a:xfrm>
             <a:custGeom>
@@ -2314,7 +2314,7 @@
           </p:nvSpPr>
           <p:spPr>
             <a:xfrm>
-              <a:off x="817517" y="4244691"/>
+              <a:off x="817517" y="4313054"/>
               <a:ext cx="7799693" cy="0"/>
             </a:xfrm>
             <a:custGeom>
@@ -2357,7 +2357,7 @@
           </p:nvSpPr>
           <p:spPr>
             <a:xfrm>
-              <a:off x="817517" y="3375014"/>
+              <a:off x="817517" y="3483591"/>
               <a:ext cx="7799693" cy="0"/>
             </a:xfrm>
             <a:custGeom>
@@ -2400,7 +2400,7 @@
           </p:nvSpPr>
           <p:spPr>
             <a:xfrm>
-              <a:off x="817517" y="2505337"/>
+              <a:off x="817517" y="2654127"/>
               <a:ext cx="7799693" cy="0"/>
             </a:xfrm>
             <a:custGeom>
@@ -2443,15 +2443,15 @@
           </p:nvSpPr>
           <p:spPr>
             <a:xfrm>
-              <a:off x="1615213" y="1896563"/>
-              <a:ext cx="0" cy="3826579"/>
+              <a:off x="1615213" y="2073503"/>
+              <a:ext cx="0" cy="3649639"/>
             </a:xfrm>
             <a:custGeom>
               <a:avLst/>
               <a:pathLst>
-                <a:path w="0" h="3826579">
+                <a:path w="0" h="3649639">
                   <a:moveTo>
-                    <a:pt x="0" y="3826579"/>
+                    <a:pt x="0" y="3649639"/>
                   </a:moveTo>
                   <a:lnTo>
                     <a:pt x="0" y="0"/>
@@ -2486,15 +2486,15 @@
           </p:nvSpPr>
           <p:spPr>
             <a:xfrm>
-              <a:off x="3387871" y="1896563"/>
-              <a:ext cx="0" cy="3826579"/>
+              <a:off x="3387871" y="2073503"/>
+              <a:ext cx="0" cy="3649639"/>
             </a:xfrm>
             <a:custGeom>
               <a:avLst/>
               <a:pathLst>
-                <a:path w="0" h="3826579">
+                <a:path w="0" h="3649639">
                   <a:moveTo>
-                    <a:pt x="0" y="3826579"/>
+                    <a:pt x="0" y="3649639"/>
                   </a:moveTo>
                   <a:lnTo>
                     <a:pt x="0" y="0"/>
@@ -2529,15 +2529,15 @@
           </p:nvSpPr>
           <p:spPr>
             <a:xfrm>
-              <a:off x="5160528" y="1896563"/>
-              <a:ext cx="0" cy="3826579"/>
+              <a:off x="5160528" y="2073503"/>
+              <a:ext cx="0" cy="3649639"/>
             </a:xfrm>
             <a:custGeom>
               <a:avLst/>
               <a:pathLst>
-                <a:path w="0" h="3826579">
+                <a:path w="0" h="3649639">
                   <a:moveTo>
-                    <a:pt x="0" y="3826579"/>
+                    <a:pt x="0" y="3649639"/>
                   </a:moveTo>
                   <a:lnTo>
                     <a:pt x="0" y="0"/>
@@ -2572,15 +2572,15 @@
           </p:nvSpPr>
           <p:spPr>
             <a:xfrm>
-              <a:off x="6933186" y="1896563"/>
-              <a:ext cx="0" cy="3826579"/>
+              <a:off x="6933186" y="2073503"/>
+              <a:ext cx="0" cy="3649639"/>
             </a:xfrm>
             <a:custGeom>
               <a:avLst/>
               <a:pathLst>
-                <a:path w="0" h="3826579">
+                <a:path w="0" h="3649639">
                   <a:moveTo>
-                    <a:pt x="0" y="3826579"/>
+                    <a:pt x="0" y="3649639"/>
                   </a:moveTo>
                   <a:lnTo>
                     <a:pt x="0" y="0"/>
@@ -2615,7 +2615,7 @@
           </p:nvSpPr>
           <p:spPr>
             <a:xfrm>
-              <a:off x="817517" y="5549207"/>
+              <a:off x="817517" y="5557249"/>
               <a:ext cx="7799693" cy="0"/>
             </a:xfrm>
             <a:custGeom>
@@ -2658,7 +2658,7 @@
           </p:nvSpPr>
           <p:spPr>
             <a:xfrm>
-              <a:off x="817517" y="4679530"/>
+              <a:off x="817517" y="4727786"/>
               <a:ext cx="7799693" cy="0"/>
             </a:xfrm>
             <a:custGeom>
@@ -2701,7 +2701,7 @@
           </p:nvSpPr>
           <p:spPr>
             <a:xfrm>
-              <a:off x="817517" y="3809853"/>
+              <a:off x="817517" y="3898322"/>
               <a:ext cx="7799693" cy="0"/>
             </a:xfrm>
             <a:custGeom>
@@ -2744,7 +2744,7 @@
           </p:nvSpPr>
           <p:spPr>
             <a:xfrm>
-              <a:off x="817517" y="2940175"/>
+              <a:off x="817517" y="3068859"/>
               <a:ext cx="7799693" cy="0"/>
             </a:xfrm>
             <a:custGeom>
@@ -2787,7 +2787,7 @@
           </p:nvSpPr>
           <p:spPr>
             <a:xfrm>
-              <a:off x="817517" y="2070498"/>
+              <a:off x="817517" y="2239395"/>
               <a:ext cx="7799693" cy="0"/>
             </a:xfrm>
             <a:custGeom>
@@ -2830,15 +2830,15 @@
           </p:nvSpPr>
           <p:spPr>
             <a:xfrm>
-              <a:off x="2501542" y="1896563"/>
-              <a:ext cx="0" cy="3826579"/>
+              <a:off x="2501542" y="2073503"/>
+              <a:ext cx="0" cy="3649639"/>
             </a:xfrm>
             <a:custGeom>
               <a:avLst/>
               <a:pathLst>
-                <a:path w="0" h="3826579">
+                <a:path w="0" h="3649639">
                   <a:moveTo>
-                    <a:pt x="0" y="3826579"/>
+                    <a:pt x="0" y="3649639"/>
                   </a:moveTo>
                   <a:lnTo>
                     <a:pt x="0" y="0"/>
@@ -2873,15 +2873,15 @@
           </p:nvSpPr>
           <p:spPr>
             <a:xfrm>
-              <a:off x="4274200" y="1896563"/>
-              <a:ext cx="0" cy="3826579"/>
+              <a:off x="4274200" y="2073503"/>
+              <a:ext cx="0" cy="3649639"/>
             </a:xfrm>
             <a:custGeom>
               <a:avLst/>
               <a:pathLst>
-                <a:path w="0" h="3826579">
+                <a:path w="0" h="3649639">
                   <a:moveTo>
-                    <a:pt x="0" y="3826579"/>
+                    <a:pt x="0" y="3649639"/>
                   </a:moveTo>
                   <a:lnTo>
                     <a:pt x="0" y="0"/>
@@ -2916,15 +2916,15 @@
           </p:nvSpPr>
           <p:spPr>
             <a:xfrm>
-              <a:off x="6046857" y="1896563"/>
-              <a:ext cx="0" cy="3826579"/>
+              <a:off x="6046857" y="2073503"/>
+              <a:ext cx="0" cy="3649639"/>
             </a:xfrm>
             <a:custGeom>
               <a:avLst/>
               <a:pathLst>
-                <a:path w="0" h="3826579">
+                <a:path w="0" h="3649639">
                   <a:moveTo>
-                    <a:pt x="0" y="3826579"/>
+                    <a:pt x="0" y="3649639"/>
                   </a:moveTo>
                   <a:lnTo>
                     <a:pt x="0" y="0"/>
@@ -2959,15 +2959,15 @@
           </p:nvSpPr>
           <p:spPr>
             <a:xfrm>
-              <a:off x="7819515" y="1896563"/>
-              <a:ext cx="0" cy="3826579"/>
+              <a:off x="7819515" y="2073503"/>
+              <a:ext cx="0" cy="3649639"/>
             </a:xfrm>
             <a:custGeom>
               <a:avLst/>
               <a:pathLst>
-                <a:path w="0" h="3826579">
+                <a:path w="0" h="3649639">
                   <a:moveTo>
-                    <a:pt x="0" y="3826579"/>
+                    <a:pt x="0" y="3649639"/>
                   </a:moveTo>
                   <a:lnTo>
                     <a:pt x="0" y="0"/>
@@ -3002,528 +3002,528 @@
           </p:nvSpPr>
           <p:spPr>
             <a:xfrm>
-              <a:off x="817517" y="1896563"/>
-              <a:ext cx="7403783" cy="3631166"/>
+              <a:off x="817517" y="2073503"/>
+              <a:ext cx="7403783" cy="3463262"/>
             </a:xfrm>
             <a:custGeom>
               <a:avLst/>
               <a:pathLst>
-                <a:path w="7403783" h="3631166">
+                <a:path w="7403783" h="3463262">
                   <a:moveTo>
                     <a:pt x="1857564" y="0"/>
                   </a:moveTo>
                   <a:lnTo>
-                    <a:pt x="1886239" y="97818"/>
-                  </a:lnTo>
-                  <a:lnTo>
-                    <a:pt x="1962872" y="341324"/>
-                  </a:lnTo>
-                  <a:lnTo>
-                    <a:pt x="2039504" y="568150"/>
-                  </a:lnTo>
-                  <a:lnTo>
-                    <a:pt x="2116137" y="779439"/>
-                  </a:lnTo>
-                  <a:lnTo>
-                    <a:pt x="2192769" y="976254"/>
-                  </a:lnTo>
-                  <a:lnTo>
-                    <a:pt x="2269402" y="1159587"/>
-                  </a:lnTo>
-                  <a:lnTo>
-                    <a:pt x="2346034" y="1330362"/>
-                  </a:lnTo>
-                  <a:lnTo>
-                    <a:pt x="2422667" y="1489439"/>
-                  </a:lnTo>
-                  <a:lnTo>
-                    <a:pt x="2499300" y="1637619"/>
-                  </a:lnTo>
-                  <a:lnTo>
-                    <a:pt x="2575932" y="1775649"/>
-                  </a:lnTo>
-                  <a:lnTo>
-                    <a:pt x="2652565" y="1904223"/>
-                  </a:lnTo>
-                  <a:lnTo>
-                    <a:pt x="2729197" y="2023990"/>
-                  </a:lnTo>
-                  <a:lnTo>
-                    <a:pt x="2805830" y="2135553"/>
-                  </a:lnTo>
-                  <a:lnTo>
-                    <a:pt x="2882462" y="2239474"/>
-                  </a:lnTo>
-                  <a:lnTo>
-                    <a:pt x="2959095" y="2336277"/>
-                  </a:lnTo>
-                  <a:lnTo>
-                    <a:pt x="3035727" y="2426448"/>
-                  </a:lnTo>
-                  <a:lnTo>
-                    <a:pt x="3112360" y="2510443"/>
-                  </a:lnTo>
-                  <a:lnTo>
-                    <a:pt x="3188993" y="2588684"/>
-                  </a:lnTo>
-                  <a:lnTo>
-                    <a:pt x="3265625" y="2661565"/>
-                  </a:lnTo>
-                  <a:lnTo>
-                    <a:pt x="3342258" y="2729454"/>
-                  </a:lnTo>
-                  <a:lnTo>
-                    <a:pt x="3418890" y="2780863"/>
-                  </a:lnTo>
-                  <a:lnTo>
-                    <a:pt x="3495523" y="2767479"/>
-                  </a:lnTo>
-                  <a:lnTo>
-                    <a:pt x="3572155" y="2753889"/>
-                  </a:lnTo>
-                  <a:lnTo>
-                    <a:pt x="3648788" y="2740091"/>
-                  </a:lnTo>
-                  <a:lnTo>
-                    <a:pt x="3725420" y="2726080"/>
-                  </a:lnTo>
-                  <a:lnTo>
-                    <a:pt x="3802053" y="2711855"/>
-                  </a:lnTo>
-                  <a:lnTo>
-                    <a:pt x="3878685" y="2697411"/>
-                  </a:lnTo>
-                  <a:lnTo>
-                    <a:pt x="3955318" y="2682745"/>
-                  </a:lnTo>
-                  <a:lnTo>
-                    <a:pt x="4031951" y="2667855"/>
-                  </a:lnTo>
-                  <a:lnTo>
-                    <a:pt x="4108583" y="2652735"/>
-                  </a:lnTo>
-                  <a:lnTo>
-                    <a:pt x="4185216" y="2637384"/>
-                  </a:lnTo>
-                  <a:lnTo>
-                    <a:pt x="4261848" y="2621796"/>
-                  </a:lnTo>
-                  <a:lnTo>
-                    <a:pt x="4338481" y="2605970"/>
-                  </a:lnTo>
-                  <a:lnTo>
-                    <a:pt x="4415113" y="2589900"/>
-                  </a:lnTo>
-                  <a:lnTo>
-                    <a:pt x="4491746" y="2573584"/>
-                  </a:lnTo>
-                  <a:lnTo>
-                    <a:pt x="4568378" y="2557017"/>
-                  </a:lnTo>
-                  <a:lnTo>
-                    <a:pt x="4645011" y="2540196"/>
-                  </a:lnTo>
-                  <a:lnTo>
-                    <a:pt x="4721644" y="2523117"/>
-                  </a:lnTo>
-                  <a:lnTo>
-                    <a:pt x="4798276" y="2505775"/>
-                  </a:lnTo>
-                  <a:lnTo>
-                    <a:pt x="4874909" y="2488168"/>
-                  </a:lnTo>
-                  <a:lnTo>
-                    <a:pt x="4951541" y="2470290"/>
-                  </a:lnTo>
-                  <a:lnTo>
-                    <a:pt x="5028174" y="2452137"/>
-                  </a:lnTo>
-                  <a:lnTo>
-                    <a:pt x="5104806" y="2433706"/>
-                  </a:lnTo>
-                  <a:lnTo>
-                    <a:pt x="5181439" y="2414991"/>
-                  </a:lnTo>
-                  <a:lnTo>
-                    <a:pt x="5258071" y="2395990"/>
-                  </a:lnTo>
-                  <a:lnTo>
-                    <a:pt x="5334704" y="2376696"/>
-                  </a:lnTo>
-                  <a:lnTo>
-                    <a:pt x="5411336" y="2357107"/>
-                  </a:lnTo>
-                  <a:lnTo>
-                    <a:pt x="5487969" y="2337217"/>
-                  </a:lnTo>
-                  <a:lnTo>
-                    <a:pt x="5564602" y="2317021"/>
-                  </a:lnTo>
-                  <a:lnTo>
-                    <a:pt x="5641234" y="2296515"/>
-                  </a:lnTo>
-                  <a:lnTo>
-                    <a:pt x="5717867" y="2275695"/>
-                  </a:lnTo>
-                  <a:lnTo>
-                    <a:pt x="5794499" y="2254555"/>
-                  </a:lnTo>
-                  <a:lnTo>
-                    <a:pt x="5871132" y="2233090"/>
-                  </a:lnTo>
-                  <a:lnTo>
-                    <a:pt x="5947764" y="2211295"/>
-                  </a:lnTo>
-                  <a:lnTo>
-                    <a:pt x="6024397" y="2189167"/>
-                  </a:lnTo>
-                  <a:lnTo>
-                    <a:pt x="6101029" y="2166698"/>
-                  </a:lnTo>
-                  <a:lnTo>
-                    <a:pt x="6177662" y="2143884"/>
-                  </a:lnTo>
-                  <a:lnTo>
-                    <a:pt x="6254294" y="2120720"/>
-                  </a:lnTo>
-                  <a:lnTo>
-                    <a:pt x="6330927" y="2097201"/>
-                  </a:lnTo>
-                  <a:lnTo>
-                    <a:pt x="6407560" y="2073320"/>
-                  </a:lnTo>
-                  <a:lnTo>
-                    <a:pt x="6484192" y="2049073"/>
-                  </a:lnTo>
-                  <a:lnTo>
-                    <a:pt x="6560825" y="2024454"/>
-                  </a:lnTo>
-                  <a:lnTo>
-                    <a:pt x="6637457" y="1999456"/>
-                  </a:lnTo>
-                  <a:lnTo>
-                    <a:pt x="6714090" y="1974075"/>
-                  </a:lnTo>
-                  <a:lnTo>
-                    <a:pt x="6790722" y="1948304"/>
-                  </a:lnTo>
-                  <a:lnTo>
-                    <a:pt x="6867355" y="1922137"/>
-                  </a:lnTo>
-                  <a:lnTo>
-                    <a:pt x="6943987" y="1895569"/>
-                  </a:lnTo>
-                  <a:lnTo>
-                    <a:pt x="7020620" y="1868593"/>
-                  </a:lnTo>
-                  <a:lnTo>
-                    <a:pt x="7097253" y="1841202"/>
-                  </a:lnTo>
-                  <a:lnTo>
-                    <a:pt x="7173885" y="1813391"/>
-                  </a:lnTo>
-                  <a:lnTo>
-                    <a:pt x="7250518" y="1785153"/>
-                  </a:lnTo>
-                  <a:lnTo>
-                    <a:pt x="7327150" y="1756482"/>
-                  </a:lnTo>
-                  <a:lnTo>
-                    <a:pt x="7403783" y="1727370"/>
-                  </a:lnTo>
-                  <a:lnTo>
-                    <a:pt x="7403783" y="3631166"/>
-                  </a:lnTo>
-                  <a:lnTo>
-                    <a:pt x="7327150" y="3629587"/>
-                  </a:lnTo>
-                  <a:lnTo>
-                    <a:pt x="7250518" y="3627891"/>
-                  </a:lnTo>
-                  <a:lnTo>
-                    <a:pt x="7173885" y="3626071"/>
-                  </a:lnTo>
-                  <a:lnTo>
-                    <a:pt x="7097253" y="3624117"/>
-                  </a:lnTo>
-                  <a:lnTo>
-                    <a:pt x="7020620" y="3622019"/>
-                  </a:lnTo>
-                  <a:lnTo>
-                    <a:pt x="6943987" y="3619767"/>
-                  </a:lnTo>
-                  <a:lnTo>
-                    <a:pt x="6867355" y="3617350"/>
-                  </a:lnTo>
-                  <a:lnTo>
-                    <a:pt x="6790722" y="3614754"/>
-                  </a:lnTo>
-                  <a:lnTo>
-                    <a:pt x="6714090" y="3611968"/>
-                  </a:lnTo>
-                  <a:lnTo>
-                    <a:pt x="6637457" y="3608977"/>
-                  </a:lnTo>
-                  <a:lnTo>
-                    <a:pt x="6560825" y="3605766"/>
-                  </a:lnTo>
-                  <a:lnTo>
-                    <a:pt x="6484192" y="3602318"/>
-                  </a:lnTo>
-                  <a:lnTo>
-                    <a:pt x="6407560" y="3598618"/>
-                  </a:lnTo>
-                  <a:lnTo>
-                    <a:pt x="6330927" y="3594645"/>
-                  </a:lnTo>
-                  <a:lnTo>
-                    <a:pt x="6254294" y="3590380"/>
-                  </a:lnTo>
-                  <a:lnTo>
-                    <a:pt x="6177662" y="3585801"/>
-                  </a:lnTo>
-                  <a:lnTo>
-                    <a:pt x="6101029" y="3580885"/>
-                  </a:lnTo>
-                  <a:lnTo>
-                    <a:pt x="6024397" y="3575609"/>
-                  </a:lnTo>
-                  <a:lnTo>
-                    <a:pt x="5947764" y="3569944"/>
-                  </a:lnTo>
-                  <a:lnTo>
-                    <a:pt x="5871132" y="3563862"/>
-                  </a:lnTo>
-                  <a:lnTo>
-                    <a:pt x="5794499" y="3557333"/>
-                  </a:lnTo>
-                  <a:lnTo>
-                    <a:pt x="5717867" y="3550324"/>
-                  </a:lnTo>
-                  <a:lnTo>
-                    <a:pt x="5641234" y="3542800"/>
-                  </a:lnTo>
-                  <a:lnTo>
-                    <a:pt x="5564602" y="3534723"/>
-                  </a:lnTo>
-                  <a:lnTo>
-                    <a:pt x="5487969" y="3526051"/>
-                  </a:lnTo>
-                  <a:lnTo>
-                    <a:pt x="5411336" y="3516742"/>
-                  </a:lnTo>
-                  <a:lnTo>
-                    <a:pt x="5334704" y="3506748"/>
-                  </a:lnTo>
-                  <a:lnTo>
-                    <a:pt x="5258071" y="3496019"/>
-                  </a:lnTo>
-                  <a:lnTo>
-                    <a:pt x="5181439" y="3484501"/>
-                  </a:lnTo>
-                  <a:lnTo>
-                    <a:pt x="5104806" y="3472136"/>
-                  </a:lnTo>
-                  <a:lnTo>
-                    <a:pt x="5028174" y="3458862"/>
-                  </a:lnTo>
-                  <a:lnTo>
-                    <a:pt x="4951541" y="3444612"/>
-                  </a:lnTo>
-                  <a:lnTo>
-                    <a:pt x="4874909" y="3429314"/>
-                  </a:lnTo>
-                  <a:lnTo>
-                    <a:pt x="4798276" y="3412891"/>
-                  </a:lnTo>
-                  <a:lnTo>
-                    <a:pt x="4721644" y="3395260"/>
-                  </a:lnTo>
-                  <a:lnTo>
-                    <a:pt x="4645011" y="3376333"/>
-                  </a:lnTo>
-                  <a:lnTo>
-                    <a:pt x="4568378" y="3356014"/>
-                  </a:lnTo>
-                  <a:lnTo>
-                    <a:pt x="4491746" y="3334200"/>
-                  </a:lnTo>
-                  <a:lnTo>
-                    <a:pt x="4415113" y="3310783"/>
-                  </a:lnTo>
-                  <a:lnTo>
-                    <a:pt x="4338481" y="3285643"/>
-                  </a:lnTo>
-                  <a:lnTo>
-                    <a:pt x="4261848" y="3258655"/>
-                  </a:lnTo>
-                  <a:lnTo>
-                    <a:pt x="4185216" y="3229682"/>
-                  </a:lnTo>
-                  <a:lnTo>
-                    <a:pt x="4108583" y="3198578"/>
-                  </a:lnTo>
-                  <a:lnTo>
-                    <a:pt x="4031951" y="3165187"/>
-                  </a:lnTo>
-                  <a:lnTo>
-                    <a:pt x="3955318" y="3129341"/>
-                  </a:lnTo>
-                  <a:lnTo>
-                    <a:pt x="3878685" y="3090859"/>
-                  </a:lnTo>
-                  <a:lnTo>
-                    <a:pt x="3802053" y="3049546"/>
-                  </a:lnTo>
-                  <a:lnTo>
-                    <a:pt x="3725420" y="3005196"/>
-                  </a:lnTo>
-                  <a:lnTo>
-                    <a:pt x="3648788" y="2957584"/>
-                  </a:lnTo>
-                  <a:lnTo>
-                    <a:pt x="3572155" y="2906472"/>
-                  </a:lnTo>
-                  <a:lnTo>
-                    <a:pt x="3495523" y="2851600"/>
-                  </a:lnTo>
-                  <a:lnTo>
-                    <a:pt x="3418890" y="2792693"/>
-                  </a:lnTo>
-                  <a:lnTo>
-                    <a:pt x="3342258" y="2794045"/>
-                  </a:lnTo>
-                  <a:lnTo>
-                    <a:pt x="3265625" y="2807028"/>
-                  </a:lnTo>
-                  <a:lnTo>
-                    <a:pt x="3188993" y="2819814"/>
-                  </a:lnTo>
-                  <a:lnTo>
-                    <a:pt x="3112360" y="2832407"/>
-                  </a:lnTo>
-                  <a:lnTo>
-                    <a:pt x="3035727" y="2844810"/>
-                  </a:lnTo>
-                  <a:lnTo>
-                    <a:pt x="2959095" y="2857025"/>
-                  </a:lnTo>
-                  <a:lnTo>
-                    <a:pt x="2882462" y="2869055"/>
-                  </a:lnTo>
-                  <a:lnTo>
-                    <a:pt x="2805830" y="2880904"/>
-                  </a:lnTo>
-                  <a:lnTo>
-                    <a:pt x="2729197" y="2892573"/>
-                  </a:lnTo>
-                  <a:lnTo>
-                    <a:pt x="2652565" y="2904066"/>
-                  </a:lnTo>
-                  <a:lnTo>
-                    <a:pt x="2575932" y="2915385"/>
-                  </a:lnTo>
-                  <a:lnTo>
-                    <a:pt x="2499300" y="2926533"/>
-                  </a:lnTo>
-                  <a:lnTo>
-                    <a:pt x="2422667" y="2937512"/>
-                  </a:lnTo>
-                  <a:lnTo>
-                    <a:pt x="2346034" y="2948326"/>
-                  </a:lnTo>
-                  <a:lnTo>
-                    <a:pt x="2269402" y="2958976"/>
-                  </a:lnTo>
-                  <a:lnTo>
-                    <a:pt x="2192769" y="2969464"/>
-                  </a:lnTo>
-                  <a:lnTo>
-                    <a:pt x="2116137" y="2979795"/>
-                  </a:lnTo>
-                  <a:lnTo>
-                    <a:pt x="2039504" y="2989969"/>
-                  </a:lnTo>
-                  <a:lnTo>
-                    <a:pt x="1962872" y="2999989"/>
-                  </a:lnTo>
-                  <a:lnTo>
-                    <a:pt x="1886239" y="3009857"/>
-                  </a:lnTo>
-                  <a:lnTo>
-                    <a:pt x="1809607" y="3019577"/>
-                  </a:lnTo>
-                  <a:lnTo>
-                    <a:pt x="1732974" y="3029149"/>
-                  </a:lnTo>
-                  <a:lnTo>
-                    <a:pt x="1656342" y="3038577"/>
-                  </a:lnTo>
-                  <a:lnTo>
-                    <a:pt x="1579709" y="3047862"/>
-                  </a:lnTo>
-                  <a:lnTo>
-                    <a:pt x="1503076" y="3057007"/>
-                  </a:lnTo>
-                  <a:lnTo>
-                    <a:pt x="1426444" y="3066013"/>
-                  </a:lnTo>
-                  <a:lnTo>
-                    <a:pt x="1349811" y="3074884"/>
-                  </a:lnTo>
-                  <a:lnTo>
-                    <a:pt x="1273179" y="3083620"/>
-                  </a:lnTo>
-                  <a:lnTo>
-                    <a:pt x="1196546" y="3092224"/>
-                  </a:lnTo>
-                  <a:lnTo>
-                    <a:pt x="1119914" y="3100698"/>
-                  </a:lnTo>
-                  <a:lnTo>
-                    <a:pt x="1043281" y="3109044"/>
-                  </a:lnTo>
-                  <a:lnTo>
-                    <a:pt x="966649" y="3117264"/>
-                  </a:lnTo>
-                  <a:lnTo>
-                    <a:pt x="890016" y="3125359"/>
-                  </a:lnTo>
-                  <a:lnTo>
-                    <a:pt x="813384" y="3133332"/>
-                  </a:lnTo>
-                  <a:lnTo>
-                    <a:pt x="736751" y="3141184"/>
-                  </a:lnTo>
-                  <a:lnTo>
-                    <a:pt x="660118" y="3148918"/>
-                  </a:lnTo>
-                  <a:lnTo>
-                    <a:pt x="583486" y="3156535"/>
-                  </a:lnTo>
-                  <a:lnTo>
-                    <a:pt x="506853" y="3164036"/>
-                  </a:lnTo>
-                  <a:lnTo>
-                    <a:pt x="430221" y="3171424"/>
-                  </a:lnTo>
-                  <a:lnTo>
-                    <a:pt x="353588" y="3178701"/>
-                  </a:lnTo>
-                  <a:lnTo>
-                    <a:pt x="276956" y="3185867"/>
-                  </a:lnTo>
-                  <a:lnTo>
-                    <a:pt x="200323" y="3192925"/>
-                  </a:lnTo>
-                  <a:lnTo>
-                    <a:pt x="123691" y="3199876"/>
-                  </a:lnTo>
-                  <a:lnTo>
-                    <a:pt x="47058" y="3206723"/>
-                  </a:lnTo>
-                  <a:lnTo>
-                    <a:pt x="0" y="3210863"/>
+                    <a:pt x="1886239" y="93294"/>
+                  </a:lnTo>
+                  <a:lnTo>
+                    <a:pt x="1962872" y="325541"/>
+                  </a:lnTo>
+                  <a:lnTo>
+                    <a:pt x="2039504" y="541879"/>
+                  </a:lnTo>
+                  <a:lnTo>
+                    <a:pt x="2116137" y="743398"/>
+                  </a:lnTo>
+                  <a:lnTo>
+                    <a:pt x="2192769" y="931112"/>
+                  </a:lnTo>
+                  <a:lnTo>
+                    <a:pt x="2269402" y="1105968"/>
+                  </a:lnTo>
+                  <a:lnTo>
+                    <a:pt x="2346034" y="1268847"/>
+                  </a:lnTo>
+                  <a:lnTo>
+                    <a:pt x="2422667" y="1420568"/>
+                  </a:lnTo>
+                  <a:lnTo>
+                    <a:pt x="2499300" y="1561896"/>
+                  </a:lnTo>
+                  <a:lnTo>
+                    <a:pt x="2575932" y="1693543"/>
+                  </a:lnTo>
+                  <a:lnTo>
+                    <a:pt x="2652565" y="1816172"/>
+                  </a:lnTo>
+                  <a:lnTo>
+                    <a:pt x="2729197" y="1930402"/>
+                  </a:lnTo>
+                  <a:lnTo>
+                    <a:pt x="2805830" y="2036806"/>
+                  </a:lnTo>
+                  <a:lnTo>
+                    <a:pt x="2882462" y="2135922"/>
+                  </a:lnTo>
+                  <a:lnTo>
+                    <a:pt x="2959095" y="2228248"/>
+                  </a:lnTo>
+                  <a:lnTo>
+                    <a:pt x="3035727" y="2314250"/>
+                  </a:lnTo>
+                  <a:lnTo>
+                    <a:pt x="3112360" y="2394361"/>
+                  </a:lnTo>
+                  <a:lnTo>
+                    <a:pt x="3188993" y="2468984"/>
+                  </a:lnTo>
+                  <a:lnTo>
+                    <a:pt x="3265625" y="2538496"/>
+                  </a:lnTo>
+                  <a:lnTo>
+                    <a:pt x="3342258" y="2603245"/>
+                  </a:lnTo>
+                  <a:lnTo>
+                    <a:pt x="3418890" y="2652277"/>
+                  </a:lnTo>
+                  <a:lnTo>
+                    <a:pt x="3495523" y="2639512"/>
+                  </a:lnTo>
+                  <a:lnTo>
+                    <a:pt x="3572155" y="2626550"/>
+                  </a:lnTo>
+                  <a:lnTo>
+                    <a:pt x="3648788" y="2613390"/>
+                  </a:lnTo>
+                  <a:lnTo>
+                    <a:pt x="3725420" y="2600027"/>
+                  </a:lnTo>
+                  <a:lnTo>
+                    <a:pt x="3802053" y="2586460"/>
+                  </a:lnTo>
+                  <a:lnTo>
+                    <a:pt x="3878685" y="2572684"/>
+                  </a:lnTo>
+                  <a:lnTo>
+                    <a:pt x="3955318" y="2558696"/>
+                  </a:lnTo>
+                  <a:lnTo>
+                    <a:pt x="4031951" y="2544494"/>
+                  </a:lnTo>
+                  <a:lnTo>
+                    <a:pt x="4108583" y="2530074"/>
+                  </a:lnTo>
+                  <a:lnTo>
+                    <a:pt x="4185216" y="2515432"/>
+                  </a:lnTo>
+                  <a:lnTo>
+                    <a:pt x="4261848" y="2500565"/>
+                  </a:lnTo>
+                  <a:lnTo>
+                    <a:pt x="4338481" y="2485471"/>
+                  </a:lnTo>
+                  <a:lnTo>
+                    <a:pt x="4415113" y="2470144"/>
+                  </a:lnTo>
+                  <a:lnTo>
+                    <a:pt x="4491746" y="2454583"/>
+                  </a:lnTo>
+                  <a:lnTo>
+                    <a:pt x="4568378" y="2438782"/>
+                  </a:lnTo>
+                  <a:lnTo>
+                    <a:pt x="4645011" y="2422739"/>
+                  </a:lnTo>
+                  <a:lnTo>
+                    <a:pt x="4721644" y="2406449"/>
+                  </a:lnTo>
+                  <a:lnTo>
+                    <a:pt x="4798276" y="2389909"/>
+                  </a:lnTo>
+                  <a:lnTo>
+                    <a:pt x="4874909" y="2373116"/>
+                  </a:lnTo>
+                  <a:lnTo>
+                    <a:pt x="4951541" y="2356064"/>
+                  </a:lnTo>
+                  <a:lnTo>
+                    <a:pt x="5028174" y="2338751"/>
+                  </a:lnTo>
+                  <a:lnTo>
+                    <a:pt x="5104806" y="2321172"/>
+                  </a:lnTo>
+                  <a:lnTo>
+                    <a:pt x="5181439" y="2303323"/>
+                  </a:lnTo>
+                  <a:lnTo>
+                    <a:pt x="5258071" y="2285200"/>
+                  </a:lnTo>
+                  <a:lnTo>
+                    <a:pt x="5334704" y="2266799"/>
+                  </a:lnTo>
+                  <a:lnTo>
+                    <a:pt x="5411336" y="2248115"/>
+                  </a:lnTo>
+                  <a:lnTo>
+                    <a:pt x="5487969" y="2229145"/>
+                  </a:lnTo>
+                  <a:lnTo>
+                    <a:pt x="5564602" y="2209883"/>
+                  </a:lnTo>
+                  <a:lnTo>
+                    <a:pt x="5641234" y="2190325"/>
+                  </a:lnTo>
+                  <a:lnTo>
+                    <a:pt x="5717867" y="2170467"/>
+                  </a:lnTo>
+                  <a:lnTo>
+                    <a:pt x="5794499" y="2150305"/>
+                  </a:lnTo>
+                  <a:lnTo>
+                    <a:pt x="5871132" y="2129833"/>
+                  </a:lnTo>
+                  <a:lnTo>
+                    <a:pt x="5947764" y="2109046"/>
+                  </a:lnTo>
+                  <a:lnTo>
+                    <a:pt x="6024397" y="2087940"/>
+                  </a:lnTo>
+                  <a:lnTo>
+                    <a:pt x="6101029" y="2066511"/>
+                  </a:lnTo>
+                  <a:lnTo>
+                    <a:pt x="6177662" y="2044752"/>
+                  </a:lnTo>
+                  <a:lnTo>
+                    <a:pt x="6254294" y="2022659"/>
+                  </a:lnTo>
+                  <a:lnTo>
+                    <a:pt x="6330927" y="2000227"/>
+                  </a:lnTo>
+                  <a:lnTo>
+                    <a:pt x="6407560" y="1977451"/>
+                  </a:lnTo>
+                  <a:lnTo>
+                    <a:pt x="6484192" y="1954325"/>
+                  </a:lnTo>
+                  <a:lnTo>
+                    <a:pt x="6560825" y="1930844"/>
+                  </a:lnTo>
+                  <a:lnTo>
+                    <a:pt x="6637457" y="1907002"/>
+                  </a:lnTo>
+                  <a:lnTo>
+                    <a:pt x="6714090" y="1882794"/>
+                  </a:lnTo>
+                  <a:lnTo>
+                    <a:pt x="6790722" y="1858215"/>
+                  </a:lnTo>
+                  <a:lnTo>
+                    <a:pt x="6867355" y="1833258"/>
+                  </a:lnTo>
+                  <a:lnTo>
+                    <a:pt x="6943987" y="1807918"/>
+                  </a:lnTo>
+                  <a:lnTo>
+                    <a:pt x="7020620" y="1782190"/>
+                  </a:lnTo>
+                  <a:lnTo>
+                    <a:pt x="7097253" y="1756066"/>
+                  </a:lnTo>
+                  <a:lnTo>
+                    <a:pt x="7173885" y="1729541"/>
+                  </a:lnTo>
+                  <a:lnTo>
+                    <a:pt x="7250518" y="1702609"/>
+                  </a:lnTo>
+                  <a:lnTo>
+                    <a:pt x="7327150" y="1675263"/>
+                  </a:lnTo>
+                  <a:lnTo>
+                    <a:pt x="7403783" y="1647497"/>
+                  </a:lnTo>
+                  <a:lnTo>
+                    <a:pt x="7403783" y="3463262"/>
+                  </a:lnTo>
+                  <a:lnTo>
+                    <a:pt x="7327150" y="3461756"/>
+                  </a:lnTo>
+                  <a:lnTo>
+                    <a:pt x="7250518" y="3460139"/>
+                  </a:lnTo>
+                  <a:lnTo>
+                    <a:pt x="7173885" y="3458403"/>
+                  </a:lnTo>
+                  <a:lnTo>
+                    <a:pt x="7097253" y="3456539"/>
+                  </a:lnTo>
+                  <a:lnTo>
+                    <a:pt x="7020620" y="3454538"/>
+                  </a:lnTo>
+                  <a:lnTo>
+                    <a:pt x="6943987" y="3452391"/>
+                  </a:lnTo>
+                  <a:lnTo>
+                    <a:pt x="6867355" y="3450085"/>
+                  </a:lnTo>
+                  <a:lnTo>
+                    <a:pt x="6790722" y="3447609"/>
+                  </a:lnTo>
+                  <a:lnTo>
+                    <a:pt x="6714090" y="3444952"/>
+                  </a:lnTo>
+                  <a:lnTo>
+                    <a:pt x="6637457" y="3442099"/>
+                  </a:lnTo>
+                  <a:lnTo>
+                    <a:pt x="6560825" y="3439036"/>
+                  </a:lnTo>
+                  <a:lnTo>
+                    <a:pt x="6484192" y="3435748"/>
+                  </a:lnTo>
+                  <a:lnTo>
+                    <a:pt x="6407560" y="3432219"/>
+                  </a:lnTo>
+                  <a:lnTo>
+                    <a:pt x="6330927" y="3428430"/>
+                  </a:lnTo>
+                  <a:lnTo>
+                    <a:pt x="6254294" y="3424362"/>
+                  </a:lnTo>
+                  <a:lnTo>
+                    <a:pt x="6177662" y="3419995"/>
+                  </a:lnTo>
+                  <a:lnTo>
+                    <a:pt x="6101029" y="3415307"/>
+                  </a:lnTo>
+                  <a:lnTo>
+                    <a:pt x="6024397" y="3410274"/>
+                  </a:lnTo>
+                  <a:lnTo>
+                    <a:pt x="5947764" y="3404871"/>
+                  </a:lnTo>
+                  <a:lnTo>
+                    <a:pt x="5871132" y="3399070"/>
+                  </a:lnTo>
+                  <a:lnTo>
+                    <a:pt x="5794499" y="3392843"/>
+                  </a:lnTo>
+                  <a:lnTo>
+                    <a:pt x="5717867" y="3386159"/>
+                  </a:lnTo>
+                  <a:lnTo>
+                    <a:pt x="5641234" y="3378982"/>
+                  </a:lnTo>
+                  <a:lnTo>
+                    <a:pt x="5564602" y="3371278"/>
+                  </a:lnTo>
+                  <a:lnTo>
+                    <a:pt x="5487969" y="3363008"/>
+                  </a:lnTo>
+                  <a:lnTo>
+                    <a:pt x="5411336" y="3354129"/>
+                  </a:lnTo>
+                  <a:lnTo>
+                    <a:pt x="5334704" y="3344597"/>
+                  </a:lnTo>
+                  <a:lnTo>
+                    <a:pt x="5258071" y="3334364"/>
+                  </a:lnTo>
+                  <a:lnTo>
+                    <a:pt x="5181439" y="3323379"/>
+                  </a:lnTo>
+                  <a:lnTo>
+                    <a:pt x="5104806" y="3311586"/>
+                  </a:lnTo>
+                  <a:lnTo>
+                    <a:pt x="5028174" y="3298926"/>
+                  </a:lnTo>
+                  <a:lnTo>
+                    <a:pt x="4951541" y="3285335"/>
+                  </a:lnTo>
+                  <a:lnTo>
+                    <a:pt x="4874909" y="3270744"/>
+                  </a:lnTo>
+                  <a:lnTo>
+                    <a:pt x="4798276" y="3255080"/>
+                  </a:lnTo>
+                  <a:lnTo>
+                    <a:pt x="4721644" y="3238265"/>
+                  </a:lnTo>
+                  <a:lnTo>
+                    <a:pt x="4645011" y="3220212"/>
+                  </a:lnTo>
+                  <a:lnTo>
+                    <a:pt x="4568378" y="3200833"/>
+                  </a:lnTo>
+                  <a:lnTo>
+                    <a:pt x="4491746" y="3180028"/>
+                  </a:lnTo>
+                  <a:lnTo>
+                    <a:pt x="4415113" y="3157693"/>
+                  </a:lnTo>
+                  <a:lnTo>
+                    <a:pt x="4338481" y="3133716"/>
+                  </a:lnTo>
+                  <a:lnTo>
+                    <a:pt x="4261848" y="3107976"/>
+                  </a:lnTo>
+                  <a:lnTo>
+                    <a:pt x="4185216" y="3080343"/>
+                  </a:lnTo>
+                  <a:lnTo>
+                    <a:pt x="4108583" y="3050677"/>
+                  </a:lnTo>
+                  <a:lnTo>
+                    <a:pt x="4031951" y="3018830"/>
+                  </a:lnTo>
+                  <a:lnTo>
+                    <a:pt x="3955318" y="2984641"/>
+                  </a:lnTo>
+                  <a:lnTo>
+                    <a:pt x="3878685" y="2947939"/>
+                  </a:lnTo>
+                  <a:lnTo>
+                    <a:pt x="3802053" y="2908537"/>
+                  </a:lnTo>
+                  <a:lnTo>
+                    <a:pt x="3725420" y="2866237"/>
+                  </a:lnTo>
+                  <a:lnTo>
+                    <a:pt x="3648788" y="2820827"/>
+                  </a:lnTo>
+                  <a:lnTo>
+                    <a:pt x="3572155" y="2772077"/>
+                  </a:lnTo>
+                  <a:lnTo>
+                    <a:pt x="3495523" y="2719743"/>
+                  </a:lnTo>
+                  <a:lnTo>
+                    <a:pt x="3418890" y="2663560"/>
+                  </a:lnTo>
+                  <a:lnTo>
+                    <a:pt x="3342258" y="2664850"/>
+                  </a:lnTo>
+                  <a:lnTo>
+                    <a:pt x="3265625" y="2677232"/>
+                  </a:lnTo>
+                  <a:lnTo>
+                    <a:pt x="3188993" y="2689427"/>
+                  </a:lnTo>
+                  <a:lnTo>
+                    <a:pt x="3112360" y="2701438"/>
+                  </a:lnTo>
+                  <a:lnTo>
+                    <a:pt x="3035727" y="2713267"/>
+                  </a:lnTo>
+                  <a:lnTo>
+                    <a:pt x="2959095" y="2724917"/>
+                  </a:lnTo>
+                  <a:lnTo>
+                    <a:pt x="2882462" y="2736391"/>
+                  </a:lnTo>
+                  <a:lnTo>
+                    <a:pt x="2805830" y="2747692"/>
+                  </a:lnTo>
+                  <a:lnTo>
+                    <a:pt x="2729197" y="2758822"/>
+                  </a:lnTo>
+                  <a:lnTo>
+                    <a:pt x="2652565" y="2769783"/>
+                  </a:lnTo>
+                  <a:lnTo>
+                    <a:pt x="2575932" y="2780579"/>
+                  </a:lnTo>
+                  <a:lnTo>
+                    <a:pt x="2499300" y="2791211"/>
+                  </a:lnTo>
+                  <a:lnTo>
+                    <a:pt x="2422667" y="2801683"/>
+                  </a:lnTo>
+                  <a:lnTo>
+                    <a:pt x="2346034" y="2811996"/>
+                  </a:lnTo>
+                  <a:lnTo>
+                    <a:pt x="2269402" y="2822154"/>
+                  </a:lnTo>
+                  <a:lnTo>
+                    <a:pt x="2192769" y="2832157"/>
+                  </a:lnTo>
+                  <a:lnTo>
+                    <a:pt x="2116137" y="2842010"/>
+                  </a:lnTo>
+                  <a:lnTo>
+                    <a:pt x="2039504" y="2851714"/>
+                  </a:lnTo>
+                  <a:lnTo>
+                    <a:pt x="1962872" y="2861270"/>
+                  </a:lnTo>
+                  <a:lnTo>
+                    <a:pt x="1886239" y="2870683"/>
+                  </a:lnTo>
+                  <a:lnTo>
+                    <a:pt x="1809607" y="2879953"/>
+                  </a:lnTo>
+                  <a:lnTo>
+                    <a:pt x="1732974" y="2889083"/>
+                  </a:lnTo>
+                  <a:lnTo>
+                    <a:pt x="1656342" y="2898074"/>
+                  </a:lnTo>
+                  <a:lnTo>
+                    <a:pt x="1579709" y="2906930"/>
+                  </a:lnTo>
+                  <a:lnTo>
+                    <a:pt x="1503076" y="2915652"/>
+                  </a:lnTo>
+                  <a:lnTo>
+                    <a:pt x="1426444" y="2924242"/>
+                  </a:lnTo>
+                  <a:lnTo>
+                    <a:pt x="1349811" y="2932702"/>
+                  </a:lnTo>
+                  <a:lnTo>
+                    <a:pt x="1273179" y="2941034"/>
+                  </a:lnTo>
+                  <a:lnTo>
+                    <a:pt x="1196546" y="2949241"/>
+                  </a:lnTo>
+                  <a:lnTo>
+                    <a:pt x="1119914" y="2957323"/>
+                  </a:lnTo>
+                  <a:lnTo>
+                    <a:pt x="1043281" y="2965283"/>
+                  </a:lnTo>
+                  <a:lnTo>
+                    <a:pt x="966649" y="2973122"/>
+                  </a:lnTo>
+                  <a:lnTo>
+                    <a:pt x="890016" y="2980843"/>
+                  </a:lnTo>
+                  <a:lnTo>
+                    <a:pt x="813384" y="2988448"/>
+                  </a:lnTo>
+                  <a:lnTo>
+                    <a:pt x="736751" y="2995937"/>
+                  </a:lnTo>
+                  <a:lnTo>
+                    <a:pt x="660118" y="3003313"/>
+                  </a:lnTo>
+                  <a:lnTo>
+                    <a:pt x="583486" y="3010578"/>
+                  </a:lnTo>
+                  <a:lnTo>
+                    <a:pt x="506853" y="3017732"/>
+                  </a:lnTo>
+                  <a:lnTo>
+                    <a:pt x="430221" y="3024779"/>
+                  </a:lnTo>
+                  <a:lnTo>
+                    <a:pt x="353588" y="3031719"/>
+                  </a:lnTo>
+                  <a:lnTo>
+                    <a:pt x="276956" y="3038554"/>
+                  </a:lnTo>
+                  <a:lnTo>
+                    <a:pt x="200323" y="3045285"/>
+                  </a:lnTo>
+                  <a:lnTo>
+                    <a:pt x="123691" y="3051915"/>
+                  </a:lnTo>
+                  <a:lnTo>
+                    <a:pt x="47058" y="3058445"/>
+                  </a:lnTo>
+                  <a:lnTo>
+                    <a:pt x="0" y="3062394"/>
                   </a:lnTo>
                   <a:close/>
                 </a:path>
@@ -3549,234 +3549,234 @@
           </p:nvSpPr>
           <p:spPr>
             <a:xfrm>
-              <a:off x="2675082" y="1896563"/>
-              <a:ext cx="5546218" cy="2780863"/>
+              <a:off x="2675082" y="2073503"/>
+              <a:ext cx="5546218" cy="2652277"/>
             </a:xfrm>
             <a:custGeom>
               <a:avLst/>
               <a:pathLst>
-                <a:path w="5546218" h="2780863">
+                <a:path w="5546218" h="2652277">
                   <a:moveTo>
                     <a:pt x="0" y="0"/>
                   </a:moveTo>
                   <a:lnTo>
-                    <a:pt x="28675" y="97818"/>
-                  </a:lnTo>
-                  <a:lnTo>
-                    <a:pt x="105307" y="341324"/>
-                  </a:lnTo>
-                  <a:lnTo>
-                    <a:pt x="181940" y="568150"/>
-                  </a:lnTo>
-                  <a:lnTo>
-                    <a:pt x="258572" y="779439"/>
-                  </a:lnTo>
-                  <a:lnTo>
-                    <a:pt x="335205" y="976254"/>
-                  </a:lnTo>
-                  <a:lnTo>
-                    <a:pt x="411837" y="1159587"/>
-                  </a:lnTo>
-                  <a:lnTo>
-                    <a:pt x="488470" y="1330362"/>
-                  </a:lnTo>
-                  <a:lnTo>
-                    <a:pt x="565102" y="1489439"/>
-                  </a:lnTo>
-                  <a:lnTo>
-                    <a:pt x="641735" y="1637619"/>
-                  </a:lnTo>
-                  <a:lnTo>
-                    <a:pt x="718368" y="1775649"/>
-                  </a:lnTo>
-                  <a:lnTo>
-                    <a:pt x="795000" y="1904223"/>
-                  </a:lnTo>
-                  <a:lnTo>
-                    <a:pt x="871633" y="2023990"/>
-                  </a:lnTo>
-                  <a:lnTo>
-                    <a:pt x="948265" y="2135553"/>
-                  </a:lnTo>
-                  <a:lnTo>
-                    <a:pt x="1024898" y="2239474"/>
-                  </a:lnTo>
-                  <a:lnTo>
-                    <a:pt x="1101530" y="2336277"/>
-                  </a:lnTo>
-                  <a:lnTo>
-                    <a:pt x="1178163" y="2426448"/>
-                  </a:lnTo>
-                  <a:lnTo>
-                    <a:pt x="1254795" y="2510443"/>
-                  </a:lnTo>
-                  <a:lnTo>
-                    <a:pt x="1331428" y="2588684"/>
-                  </a:lnTo>
-                  <a:lnTo>
-                    <a:pt x="1408060" y="2661565"/>
-                  </a:lnTo>
-                  <a:lnTo>
-                    <a:pt x="1484693" y="2729454"/>
-                  </a:lnTo>
-                  <a:lnTo>
-                    <a:pt x="1561326" y="2780863"/>
-                  </a:lnTo>
-                  <a:lnTo>
-                    <a:pt x="1637958" y="2767479"/>
-                  </a:lnTo>
-                  <a:lnTo>
-                    <a:pt x="1714591" y="2753889"/>
-                  </a:lnTo>
-                  <a:lnTo>
-                    <a:pt x="1791223" y="2740091"/>
-                  </a:lnTo>
-                  <a:lnTo>
-                    <a:pt x="1867856" y="2726080"/>
-                  </a:lnTo>
-                  <a:lnTo>
-                    <a:pt x="1944488" y="2711855"/>
-                  </a:lnTo>
-                  <a:lnTo>
-                    <a:pt x="2021121" y="2697411"/>
-                  </a:lnTo>
-                  <a:lnTo>
-                    <a:pt x="2097753" y="2682745"/>
-                  </a:lnTo>
-                  <a:lnTo>
-                    <a:pt x="2174386" y="2667855"/>
-                  </a:lnTo>
-                  <a:lnTo>
-                    <a:pt x="2251019" y="2652735"/>
-                  </a:lnTo>
-                  <a:lnTo>
-                    <a:pt x="2327651" y="2637384"/>
-                  </a:lnTo>
-                  <a:lnTo>
-                    <a:pt x="2404284" y="2621796"/>
-                  </a:lnTo>
-                  <a:lnTo>
-                    <a:pt x="2480916" y="2605970"/>
-                  </a:lnTo>
-                  <a:lnTo>
-                    <a:pt x="2557549" y="2589900"/>
-                  </a:lnTo>
-                  <a:lnTo>
-                    <a:pt x="2634181" y="2573584"/>
-                  </a:lnTo>
-                  <a:lnTo>
-                    <a:pt x="2710814" y="2557017"/>
-                  </a:lnTo>
-                  <a:lnTo>
-                    <a:pt x="2787446" y="2540196"/>
-                  </a:lnTo>
-                  <a:lnTo>
-                    <a:pt x="2864079" y="2523117"/>
-                  </a:lnTo>
-                  <a:lnTo>
-                    <a:pt x="2940711" y="2505775"/>
-                  </a:lnTo>
-                  <a:lnTo>
-                    <a:pt x="3017344" y="2488168"/>
-                  </a:lnTo>
-                  <a:lnTo>
-                    <a:pt x="3093977" y="2470290"/>
-                  </a:lnTo>
-                  <a:lnTo>
-                    <a:pt x="3170609" y="2452137"/>
-                  </a:lnTo>
-                  <a:lnTo>
-                    <a:pt x="3247242" y="2433706"/>
-                  </a:lnTo>
-                  <a:lnTo>
-                    <a:pt x="3323874" y="2414991"/>
-                  </a:lnTo>
-                  <a:lnTo>
-                    <a:pt x="3400507" y="2395990"/>
-                  </a:lnTo>
-                  <a:lnTo>
-                    <a:pt x="3477139" y="2376696"/>
-                  </a:lnTo>
-                  <a:lnTo>
-                    <a:pt x="3553772" y="2357107"/>
-                  </a:lnTo>
-                  <a:lnTo>
-                    <a:pt x="3630404" y="2337217"/>
-                  </a:lnTo>
-                  <a:lnTo>
-                    <a:pt x="3707037" y="2317021"/>
-                  </a:lnTo>
-                  <a:lnTo>
-                    <a:pt x="3783669" y="2296515"/>
-                  </a:lnTo>
-                  <a:lnTo>
-                    <a:pt x="3860302" y="2275695"/>
-                  </a:lnTo>
-                  <a:lnTo>
-                    <a:pt x="3936935" y="2254555"/>
-                  </a:lnTo>
-                  <a:lnTo>
-                    <a:pt x="4013567" y="2233090"/>
-                  </a:lnTo>
-                  <a:lnTo>
-                    <a:pt x="4090200" y="2211295"/>
-                  </a:lnTo>
-                  <a:lnTo>
-                    <a:pt x="4166832" y="2189167"/>
-                  </a:lnTo>
-                  <a:lnTo>
-                    <a:pt x="4243465" y="2166698"/>
-                  </a:lnTo>
-                  <a:lnTo>
-                    <a:pt x="4320097" y="2143884"/>
-                  </a:lnTo>
-                  <a:lnTo>
-                    <a:pt x="4396730" y="2120720"/>
-                  </a:lnTo>
-                  <a:lnTo>
-                    <a:pt x="4473362" y="2097201"/>
-                  </a:lnTo>
-                  <a:lnTo>
-                    <a:pt x="4549995" y="2073320"/>
-                  </a:lnTo>
-                  <a:lnTo>
-                    <a:pt x="4626628" y="2049073"/>
-                  </a:lnTo>
-                  <a:lnTo>
-                    <a:pt x="4703260" y="2024454"/>
-                  </a:lnTo>
-                  <a:lnTo>
-                    <a:pt x="4779893" y="1999456"/>
-                  </a:lnTo>
-                  <a:lnTo>
-                    <a:pt x="4856525" y="1974075"/>
-                  </a:lnTo>
-                  <a:lnTo>
-                    <a:pt x="4933158" y="1948304"/>
-                  </a:lnTo>
-                  <a:lnTo>
-                    <a:pt x="5009790" y="1922137"/>
-                  </a:lnTo>
-                  <a:lnTo>
-                    <a:pt x="5086423" y="1895569"/>
-                  </a:lnTo>
-                  <a:lnTo>
-                    <a:pt x="5163055" y="1868593"/>
-                  </a:lnTo>
-                  <a:lnTo>
-                    <a:pt x="5239688" y="1841202"/>
-                  </a:lnTo>
-                  <a:lnTo>
-                    <a:pt x="5316320" y="1813391"/>
-                  </a:lnTo>
-                  <a:lnTo>
-                    <a:pt x="5392953" y="1785153"/>
-                  </a:lnTo>
-                  <a:lnTo>
-                    <a:pt x="5469586" y="1756482"/>
-                  </a:lnTo>
-                  <a:lnTo>
-                    <a:pt x="5546218" y="1727370"/>
+                    <a:pt x="28675" y="93294"/>
+                  </a:lnTo>
+                  <a:lnTo>
+                    <a:pt x="105307" y="325541"/>
+                  </a:lnTo>
+                  <a:lnTo>
+                    <a:pt x="181940" y="541879"/>
+                  </a:lnTo>
+                  <a:lnTo>
+                    <a:pt x="258572" y="743398"/>
+                  </a:lnTo>
+                  <a:lnTo>
+                    <a:pt x="335205" y="931112"/>
+                  </a:lnTo>
+                  <a:lnTo>
+                    <a:pt x="411837" y="1105968"/>
+                  </a:lnTo>
+                  <a:lnTo>
+                    <a:pt x="488470" y="1268847"/>
+                  </a:lnTo>
+                  <a:lnTo>
+                    <a:pt x="565102" y="1420568"/>
+                  </a:lnTo>
+                  <a:lnTo>
+                    <a:pt x="641735" y="1561896"/>
+                  </a:lnTo>
+                  <a:lnTo>
+                    <a:pt x="718368" y="1693543"/>
+                  </a:lnTo>
+                  <a:lnTo>
+                    <a:pt x="795000" y="1816172"/>
+                  </a:lnTo>
+                  <a:lnTo>
+                    <a:pt x="871633" y="1930402"/>
+                  </a:lnTo>
+                  <a:lnTo>
+                    <a:pt x="948265" y="2036806"/>
+                  </a:lnTo>
+                  <a:lnTo>
+                    <a:pt x="1024898" y="2135922"/>
+                  </a:lnTo>
+                  <a:lnTo>
+                    <a:pt x="1101530" y="2228248"/>
+                  </a:lnTo>
+                  <a:lnTo>
+                    <a:pt x="1178163" y="2314250"/>
+                  </a:lnTo>
+                  <a:lnTo>
+                    <a:pt x="1254795" y="2394361"/>
+                  </a:lnTo>
+                  <a:lnTo>
+                    <a:pt x="1331428" y="2468984"/>
+                  </a:lnTo>
+                  <a:lnTo>
+                    <a:pt x="1408060" y="2538496"/>
+                  </a:lnTo>
+                  <a:lnTo>
+                    <a:pt x="1484693" y="2603245"/>
+                  </a:lnTo>
+                  <a:lnTo>
+                    <a:pt x="1561326" y="2652277"/>
+                  </a:lnTo>
+                  <a:lnTo>
+                    <a:pt x="1637958" y="2639512"/>
+                  </a:lnTo>
+                  <a:lnTo>
+                    <a:pt x="1714591" y="2626550"/>
+                  </a:lnTo>
+                  <a:lnTo>
+                    <a:pt x="1791223" y="2613390"/>
+                  </a:lnTo>
+                  <a:lnTo>
+                    <a:pt x="1867856" y="2600027"/>
+                  </a:lnTo>
+                  <a:lnTo>
+                    <a:pt x="1944488" y="2586460"/>
+                  </a:lnTo>
+                  <a:lnTo>
+                    <a:pt x="2021121" y="2572684"/>
+                  </a:lnTo>
+                  <a:lnTo>
+                    <a:pt x="2097753" y="2558696"/>
+                  </a:lnTo>
+                  <a:lnTo>
+                    <a:pt x="2174386" y="2544494"/>
+                  </a:lnTo>
+                  <a:lnTo>
+                    <a:pt x="2251019" y="2530074"/>
+                  </a:lnTo>
+                  <a:lnTo>
+                    <a:pt x="2327651" y="2515432"/>
+                  </a:lnTo>
+                  <a:lnTo>
+                    <a:pt x="2404284" y="2500565"/>
+                  </a:lnTo>
+                  <a:lnTo>
+                    <a:pt x="2480916" y="2485471"/>
+                  </a:lnTo>
+                  <a:lnTo>
+                    <a:pt x="2557549" y="2470144"/>
+                  </a:lnTo>
+                  <a:lnTo>
+                    <a:pt x="2634181" y="2454583"/>
+                  </a:lnTo>
+                  <a:lnTo>
+                    <a:pt x="2710814" y="2438782"/>
+                  </a:lnTo>
+                  <a:lnTo>
+                    <a:pt x="2787446" y="2422739"/>
+                  </a:lnTo>
+                  <a:lnTo>
+                    <a:pt x="2864079" y="2406449"/>
+                  </a:lnTo>
+                  <a:lnTo>
+                    <a:pt x="2940711" y="2389909"/>
+                  </a:lnTo>
+                  <a:lnTo>
+                    <a:pt x="3017344" y="2373116"/>
+                  </a:lnTo>
+                  <a:lnTo>
+                    <a:pt x="3093977" y="2356064"/>
+                  </a:lnTo>
+                  <a:lnTo>
+                    <a:pt x="3170609" y="2338751"/>
+                  </a:lnTo>
+                  <a:lnTo>
+                    <a:pt x="3247242" y="2321172"/>
+                  </a:lnTo>
+                  <a:lnTo>
+                    <a:pt x="3323874" y="2303323"/>
+                  </a:lnTo>
+                  <a:lnTo>
+                    <a:pt x="3400507" y="2285200"/>
+                  </a:lnTo>
+                  <a:lnTo>
+                    <a:pt x="3477139" y="2266799"/>
+                  </a:lnTo>
+                  <a:lnTo>
+                    <a:pt x="3553772" y="2248115"/>
+                  </a:lnTo>
+                  <a:lnTo>
+                    <a:pt x="3630404" y="2229145"/>
+                  </a:lnTo>
+                  <a:lnTo>
+                    <a:pt x="3707037" y="2209883"/>
+                  </a:lnTo>
+                  <a:lnTo>
+                    <a:pt x="3783669" y="2190325"/>
+                  </a:lnTo>
+                  <a:lnTo>
+                    <a:pt x="3860302" y="2170467"/>
+                  </a:lnTo>
+                  <a:lnTo>
+                    <a:pt x="3936935" y="2150305"/>
+                  </a:lnTo>
+                  <a:lnTo>
+                    <a:pt x="4013567" y="2129833"/>
+                  </a:lnTo>
+                  <a:lnTo>
+                    <a:pt x="4090200" y="2109046"/>
+                  </a:lnTo>
+                  <a:lnTo>
+                    <a:pt x="4166832" y="2087940"/>
+                  </a:lnTo>
+                  <a:lnTo>
+                    <a:pt x="4243465" y="2066511"/>
+                  </a:lnTo>
+                  <a:lnTo>
+                    <a:pt x="4320097" y="2044752"/>
+                  </a:lnTo>
+                  <a:lnTo>
+                    <a:pt x="4396730" y="2022659"/>
+                  </a:lnTo>
+                  <a:lnTo>
+                    <a:pt x="4473362" y="2000227"/>
+                  </a:lnTo>
+                  <a:lnTo>
+                    <a:pt x="4549995" y="1977451"/>
+                  </a:lnTo>
+                  <a:lnTo>
+                    <a:pt x="4626628" y="1954325"/>
+                  </a:lnTo>
+                  <a:lnTo>
+                    <a:pt x="4703260" y="1930844"/>
+                  </a:lnTo>
+                  <a:lnTo>
+                    <a:pt x="4779893" y="1907002"/>
+                  </a:lnTo>
+                  <a:lnTo>
+                    <a:pt x="4856525" y="1882794"/>
+                  </a:lnTo>
+                  <a:lnTo>
+                    <a:pt x="4933158" y="1858215"/>
+                  </a:lnTo>
+                  <a:lnTo>
+                    <a:pt x="5009790" y="1833258"/>
+                  </a:lnTo>
+                  <a:lnTo>
+                    <a:pt x="5086423" y="1807918"/>
+                  </a:lnTo>
+                  <a:lnTo>
+                    <a:pt x="5163055" y="1782190"/>
+                  </a:lnTo>
+                  <a:lnTo>
+                    <a:pt x="5239688" y="1756066"/>
+                  </a:lnTo>
+                  <a:lnTo>
+                    <a:pt x="5316320" y="1729541"/>
+                  </a:lnTo>
+                  <a:lnTo>
+                    <a:pt x="5392953" y="1702609"/>
+                  </a:lnTo>
+                  <a:lnTo>
+                    <a:pt x="5469586" y="1675263"/>
+                  </a:lnTo>
+                  <a:lnTo>
+                    <a:pt x="5546218" y="1647497"/>
                   </a:lnTo>
                 </a:path>
               </a:pathLst>
@@ -3796,306 +3796,306 @@
           </p:nvSpPr>
           <p:spPr>
             <a:xfrm>
-              <a:off x="817517" y="4689257"/>
-              <a:ext cx="7403783" cy="838473"/>
+              <a:off x="817517" y="4737063"/>
+              <a:ext cx="7403783" cy="799702"/>
             </a:xfrm>
             <a:custGeom>
               <a:avLst/>
               <a:pathLst>
-                <a:path w="7403783" h="838473">
+                <a:path w="7403783" h="799702">
                   <a:moveTo>
-                    <a:pt x="7403783" y="838473"/>
+                    <a:pt x="7403783" y="799702"/>
                   </a:moveTo>
                   <a:lnTo>
-                    <a:pt x="7327150" y="836893"/>
-                  </a:lnTo>
-                  <a:lnTo>
-                    <a:pt x="7250518" y="835198"/>
-                  </a:lnTo>
-                  <a:lnTo>
-                    <a:pt x="7173885" y="833378"/>
-                  </a:lnTo>
-                  <a:lnTo>
-                    <a:pt x="7097253" y="831423"/>
-                  </a:lnTo>
-                  <a:lnTo>
-                    <a:pt x="7020620" y="829326"/>
-                  </a:lnTo>
-                  <a:lnTo>
-                    <a:pt x="6943987" y="827074"/>
-                  </a:lnTo>
-                  <a:lnTo>
-                    <a:pt x="6867355" y="824656"/>
-                  </a:lnTo>
-                  <a:lnTo>
-                    <a:pt x="6790722" y="822061"/>
-                  </a:lnTo>
-                  <a:lnTo>
-                    <a:pt x="6714090" y="819274"/>
-                  </a:lnTo>
-                  <a:lnTo>
-                    <a:pt x="6637457" y="816283"/>
-                  </a:lnTo>
-                  <a:lnTo>
-                    <a:pt x="6560825" y="813072"/>
-                  </a:lnTo>
-                  <a:lnTo>
-                    <a:pt x="6484192" y="809625"/>
-                  </a:lnTo>
-                  <a:lnTo>
-                    <a:pt x="6407560" y="805924"/>
-                  </a:lnTo>
-                  <a:lnTo>
-                    <a:pt x="6330927" y="801951"/>
-                  </a:lnTo>
-                  <a:lnTo>
-                    <a:pt x="6254294" y="797686"/>
-                  </a:lnTo>
-                  <a:lnTo>
-                    <a:pt x="6177662" y="793107"/>
-                  </a:lnTo>
-                  <a:lnTo>
-                    <a:pt x="6101029" y="788192"/>
-                  </a:lnTo>
-                  <a:lnTo>
-                    <a:pt x="6024397" y="782915"/>
-                  </a:lnTo>
-                  <a:lnTo>
-                    <a:pt x="5947764" y="777250"/>
-                  </a:lnTo>
-                  <a:lnTo>
-                    <a:pt x="5871132" y="771168"/>
-                  </a:lnTo>
-                  <a:lnTo>
-                    <a:pt x="5794499" y="764640"/>
-                  </a:lnTo>
-                  <a:lnTo>
-                    <a:pt x="5717867" y="757631"/>
-                  </a:lnTo>
-                  <a:lnTo>
-                    <a:pt x="5641234" y="750107"/>
-                  </a:lnTo>
-                  <a:lnTo>
-                    <a:pt x="5564602" y="742029"/>
-                  </a:lnTo>
-                  <a:lnTo>
-                    <a:pt x="5487969" y="733357"/>
-                  </a:lnTo>
-                  <a:lnTo>
-                    <a:pt x="5411336" y="724048"/>
-                  </a:lnTo>
-                  <a:lnTo>
-                    <a:pt x="5334704" y="714054"/>
-                  </a:lnTo>
-                  <a:lnTo>
-                    <a:pt x="5258071" y="703325"/>
-                  </a:lnTo>
-                  <a:lnTo>
-                    <a:pt x="5181439" y="691808"/>
-                  </a:lnTo>
-                  <a:lnTo>
-                    <a:pt x="5104806" y="679443"/>
-                  </a:lnTo>
-                  <a:lnTo>
-                    <a:pt x="5028174" y="666169"/>
-                  </a:lnTo>
-                  <a:lnTo>
-                    <a:pt x="4951541" y="651919"/>
-                  </a:lnTo>
-                  <a:lnTo>
-                    <a:pt x="4874909" y="636621"/>
-                  </a:lnTo>
-                  <a:lnTo>
-                    <a:pt x="4798276" y="620197"/>
-                  </a:lnTo>
-                  <a:lnTo>
-                    <a:pt x="4721644" y="602567"/>
-                  </a:lnTo>
-                  <a:lnTo>
-                    <a:pt x="4645011" y="583639"/>
-                  </a:lnTo>
-                  <a:lnTo>
-                    <a:pt x="4568378" y="563320"/>
-                  </a:lnTo>
-                  <a:lnTo>
-                    <a:pt x="4491746" y="541507"/>
-                  </a:lnTo>
-                  <a:lnTo>
-                    <a:pt x="4415113" y="518089"/>
-                  </a:lnTo>
-                  <a:lnTo>
-                    <a:pt x="4338481" y="492950"/>
-                  </a:lnTo>
-                  <a:lnTo>
-                    <a:pt x="4261848" y="465961"/>
-                  </a:lnTo>
-                  <a:lnTo>
-                    <a:pt x="4185216" y="436988"/>
-                  </a:lnTo>
-                  <a:lnTo>
-                    <a:pt x="4108583" y="405885"/>
-                  </a:lnTo>
-                  <a:lnTo>
-                    <a:pt x="4031951" y="372494"/>
-                  </a:lnTo>
-                  <a:lnTo>
-                    <a:pt x="3955318" y="336648"/>
-                  </a:lnTo>
-                  <a:lnTo>
-                    <a:pt x="3878685" y="298165"/>
-                  </a:lnTo>
-                  <a:lnTo>
-                    <a:pt x="3802053" y="256853"/>
-                  </a:lnTo>
-                  <a:lnTo>
-                    <a:pt x="3725420" y="212503"/>
-                  </a:lnTo>
-                  <a:lnTo>
-                    <a:pt x="3648788" y="164891"/>
-                  </a:lnTo>
-                  <a:lnTo>
-                    <a:pt x="3572155" y="113778"/>
-                  </a:lnTo>
-                  <a:lnTo>
-                    <a:pt x="3495523" y="58906"/>
+                    <a:pt x="7327150" y="798196"/>
+                  </a:lnTo>
+                  <a:lnTo>
+                    <a:pt x="7250518" y="796578"/>
+                  </a:lnTo>
+                  <a:lnTo>
+                    <a:pt x="7173885" y="794842"/>
+                  </a:lnTo>
+                  <a:lnTo>
+                    <a:pt x="7097253" y="792979"/>
+                  </a:lnTo>
+                  <a:lnTo>
+                    <a:pt x="7020620" y="790978"/>
+                  </a:lnTo>
+                  <a:lnTo>
+                    <a:pt x="6943987" y="788830"/>
+                  </a:lnTo>
+                  <a:lnTo>
+                    <a:pt x="6867355" y="786524"/>
+                  </a:lnTo>
+                  <a:lnTo>
+                    <a:pt x="6790722" y="784049"/>
+                  </a:lnTo>
+                  <a:lnTo>
+                    <a:pt x="6714090" y="781391"/>
+                  </a:lnTo>
+                  <a:lnTo>
+                    <a:pt x="6637457" y="778539"/>
+                  </a:lnTo>
+                  <a:lnTo>
+                    <a:pt x="6560825" y="775476"/>
+                  </a:lnTo>
+                  <a:lnTo>
+                    <a:pt x="6484192" y="772188"/>
+                  </a:lnTo>
+                  <a:lnTo>
+                    <a:pt x="6407560" y="768658"/>
+                  </a:lnTo>
+                  <a:lnTo>
+                    <a:pt x="6330927" y="764869"/>
+                  </a:lnTo>
+                  <a:lnTo>
+                    <a:pt x="6254294" y="760801"/>
+                  </a:lnTo>
+                  <a:lnTo>
+                    <a:pt x="6177662" y="756434"/>
+                  </a:lnTo>
+                  <a:lnTo>
+                    <a:pt x="6101029" y="751746"/>
+                  </a:lnTo>
+                  <a:lnTo>
+                    <a:pt x="6024397" y="746713"/>
+                  </a:lnTo>
+                  <a:lnTo>
+                    <a:pt x="5947764" y="741310"/>
+                  </a:lnTo>
+                  <a:lnTo>
+                    <a:pt x="5871132" y="735510"/>
+                  </a:lnTo>
+                  <a:lnTo>
+                    <a:pt x="5794499" y="729283"/>
+                  </a:lnTo>
+                  <a:lnTo>
+                    <a:pt x="5717867" y="722598"/>
+                  </a:lnTo>
+                  <a:lnTo>
+                    <a:pt x="5641234" y="715422"/>
+                  </a:lnTo>
+                  <a:lnTo>
+                    <a:pt x="5564602" y="707718"/>
+                  </a:lnTo>
+                  <a:lnTo>
+                    <a:pt x="5487969" y="699447"/>
+                  </a:lnTo>
+                  <a:lnTo>
+                    <a:pt x="5411336" y="690568"/>
+                  </a:lnTo>
+                  <a:lnTo>
+                    <a:pt x="5334704" y="681037"/>
+                  </a:lnTo>
+                  <a:lnTo>
+                    <a:pt x="5258071" y="670804"/>
+                  </a:lnTo>
+                  <a:lnTo>
+                    <a:pt x="5181439" y="659819"/>
+                  </a:lnTo>
+                  <a:lnTo>
+                    <a:pt x="5104806" y="648026"/>
+                  </a:lnTo>
+                  <a:lnTo>
+                    <a:pt x="5028174" y="635365"/>
+                  </a:lnTo>
+                  <a:lnTo>
+                    <a:pt x="4951541" y="621774"/>
+                  </a:lnTo>
+                  <a:lnTo>
+                    <a:pt x="4874909" y="607183"/>
+                  </a:lnTo>
+                  <a:lnTo>
+                    <a:pt x="4798276" y="591520"/>
+                  </a:lnTo>
+                  <a:lnTo>
+                    <a:pt x="4721644" y="574704"/>
+                  </a:lnTo>
+                  <a:lnTo>
+                    <a:pt x="4645011" y="556652"/>
+                  </a:lnTo>
+                  <a:lnTo>
+                    <a:pt x="4568378" y="537272"/>
+                  </a:lnTo>
+                  <a:lnTo>
+                    <a:pt x="4491746" y="516468"/>
+                  </a:lnTo>
+                  <a:lnTo>
+                    <a:pt x="4415113" y="494133"/>
+                  </a:lnTo>
+                  <a:lnTo>
+                    <a:pt x="4338481" y="470156"/>
+                  </a:lnTo>
+                  <a:lnTo>
+                    <a:pt x="4261848" y="444415"/>
+                  </a:lnTo>
+                  <a:lnTo>
+                    <a:pt x="4185216" y="416782"/>
+                  </a:lnTo>
+                  <a:lnTo>
+                    <a:pt x="4108583" y="387117"/>
+                  </a:lnTo>
+                  <a:lnTo>
+                    <a:pt x="4031951" y="355270"/>
+                  </a:lnTo>
+                  <a:lnTo>
+                    <a:pt x="3955318" y="321081"/>
+                  </a:lnTo>
+                  <a:lnTo>
+                    <a:pt x="3878685" y="284378"/>
+                  </a:lnTo>
+                  <a:lnTo>
+                    <a:pt x="3802053" y="244976"/>
+                  </a:lnTo>
+                  <a:lnTo>
+                    <a:pt x="3725420" y="202677"/>
+                  </a:lnTo>
+                  <a:lnTo>
+                    <a:pt x="3648788" y="157266"/>
+                  </a:lnTo>
+                  <a:lnTo>
+                    <a:pt x="3572155" y="108517"/>
+                  </a:lnTo>
+                  <a:lnTo>
+                    <a:pt x="3495523" y="56182"/>
                   </a:lnTo>
                   <a:lnTo>
                     <a:pt x="3418890" y="0"/>
                   </a:lnTo>
                   <a:lnTo>
-                    <a:pt x="3342258" y="1352"/>
-                  </a:lnTo>
-                  <a:lnTo>
-                    <a:pt x="3265625" y="14334"/>
-                  </a:lnTo>
-                  <a:lnTo>
-                    <a:pt x="3188993" y="27121"/>
-                  </a:lnTo>
-                  <a:lnTo>
-                    <a:pt x="3112360" y="39714"/>
-                  </a:lnTo>
-                  <a:lnTo>
-                    <a:pt x="3035727" y="52116"/>
-                  </a:lnTo>
-                  <a:lnTo>
-                    <a:pt x="2959095" y="64332"/>
-                  </a:lnTo>
-                  <a:lnTo>
-                    <a:pt x="2882462" y="76362"/>
-                  </a:lnTo>
-                  <a:lnTo>
-                    <a:pt x="2805830" y="88210"/>
-                  </a:lnTo>
-                  <a:lnTo>
-                    <a:pt x="2729197" y="99880"/>
-                  </a:lnTo>
-                  <a:lnTo>
-                    <a:pt x="2652565" y="111373"/>
-                  </a:lnTo>
-                  <a:lnTo>
-                    <a:pt x="2575932" y="122692"/>
-                  </a:lnTo>
-                  <a:lnTo>
-                    <a:pt x="2499300" y="133840"/>
-                  </a:lnTo>
-                  <a:lnTo>
-                    <a:pt x="2422667" y="144819"/>
-                  </a:lnTo>
-                  <a:lnTo>
-                    <a:pt x="2346034" y="155632"/>
-                  </a:lnTo>
-                  <a:lnTo>
-                    <a:pt x="2269402" y="166282"/>
-                  </a:lnTo>
-                  <a:lnTo>
-                    <a:pt x="2192769" y="176771"/>
-                  </a:lnTo>
-                  <a:lnTo>
-                    <a:pt x="2116137" y="187101"/>
-                  </a:lnTo>
-                  <a:lnTo>
-                    <a:pt x="2039504" y="197275"/>
-                  </a:lnTo>
-                  <a:lnTo>
-                    <a:pt x="1962872" y="207295"/>
-                  </a:lnTo>
-                  <a:lnTo>
-                    <a:pt x="1886239" y="217164"/>
-                  </a:lnTo>
-                  <a:lnTo>
-                    <a:pt x="1809607" y="226883"/>
-                  </a:lnTo>
-                  <a:lnTo>
-                    <a:pt x="1732974" y="236456"/>
-                  </a:lnTo>
-                  <a:lnTo>
-                    <a:pt x="1656342" y="245883"/>
-                  </a:lnTo>
-                  <a:lnTo>
-                    <a:pt x="1579709" y="255169"/>
-                  </a:lnTo>
-                  <a:lnTo>
-                    <a:pt x="1503076" y="264313"/>
-                  </a:lnTo>
-                  <a:lnTo>
-                    <a:pt x="1426444" y="273320"/>
-                  </a:lnTo>
-                  <a:lnTo>
-                    <a:pt x="1349811" y="282190"/>
-                  </a:lnTo>
-                  <a:lnTo>
-                    <a:pt x="1273179" y="290926"/>
-                  </a:lnTo>
-                  <a:lnTo>
-                    <a:pt x="1196546" y="299530"/>
-                  </a:lnTo>
-                  <a:lnTo>
-                    <a:pt x="1119914" y="308004"/>
-                  </a:lnTo>
-                  <a:lnTo>
-                    <a:pt x="1043281" y="316350"/>
-                  </a:lnTo>
-                  <a:lnTo>
-                    <a:pt x="966649" y="324570"/>
-                  </a:lnTo>
-                  <a:lnTo>
-                    <a:pt x="890016" y="332665"/>
-                  </a:lnTo>
-                  <a:lnTo>
-                    <a:pt x="813384" y="340638"/>
-                  </a:lnTo>
-                  <a:lnTo>
-                    <a:pt x="736751" y="348491"/>
-                  </a:lnTo>
-                  <a:lnTo>
-                    <a:pt x="660118" y="356224"/>
-                  </a:lnTo>
-                  <a:lnTo>
-                    <a:pt x="583486" y="363841"/>
-                  </a:lnTo>
-                  <a:lnTo>
-                    <a:pt x="506853" y="371343"/>
-                  </a:lnTo>
-                  <a:lnTo>
-                    <a:pt x="430221" y="378731"/>
-                  </a:lnTo>
-                  <a:lnTo>
-                    <a:pt x="353588" y="386007"/>
-                  </a:lnTo>
-                  <a:lnTo>
-                    <a:pt x="276956" y="393174"/>
-                  </a:lnTo>
-                  <a:lnTo>
-                    <a:pt x="200323" y="400232"/>
-                  </a:lnTo>
-                  <a:lnTo>
-                    <a:pt x="123691" y="407183"/>
-                  </a:lnTo>
-                  <a:lnTo>
-                    <a:pt x="47058" y="414029"/>
-                  </a:lnTo>
-                  <a:lnTo>
-                    <a:pt x="0" y="418170"/>
+                    <a:pt x="3342258" y="1289"/>
+                  </a:lnTo>
+                  <a:lnTo>
+                    <a:pt x="3265625" y="13672"/>
+                  </a:lnTo>
+                  <a:lnTo>
+                    <a:pt x="3188993" y="25867"/>
+                  </a:lnTo>
+                  <a:lnTo>
+                    <a:pt x="3112360" y="37877"/>
+                  </a:lnTo>
+                  <a:lnTo>
+                    <a:pt x="3035727" y="49707"/>
+                  </a:lnTo>
+                  <a:lnTo>
+                    <a:pt x="2959095" y="61357"/>
+                  </a:lnTo>
+                  <a:lnTo>
+                    <a:pt x="2882462" y="72831"/>
+                  </a:lnTo>
+                  <a:lnTo>
+                    <a:pt x="2805830" y="84132"/>
+                  </a:lnTo>
+                  <a:lnTo>
+                    <a:pt x="2729197" y="95261"/>
+                  </a:lnTo>
+                  <a:lnTo>
+                    <a:pt x="2652565" y="106223"/>
+                  </a:lnTo>
+                  <a:lnTo>
+                    <a:pt x="2575932" y="117018"/>
+                  </a:lnTo>
+                  <a:lnTo>
+                    <a:pt x="2499300" y="127651"/>
+                  </a:lnTo>
+                  <a:lnTo>
+                    <a:pt x="2422667" y="138123"/>
+                  </a:lnTo>
+                  <a:lnTo>
+                    <a:pt x="2346034" y="148436"/>
+                  </a:lnTo>
+                  <a:lnTo>
+                    <a:pt x="2269402" y="158593"/>
+                  </a:lnTo>
+                  <a:lnTo>
+                    <a:pt x="2192769" y="168597"/>
+                  </a:lnTo>
+                  <a:lnTo>
+                    <a:pt x="2116137" y="178450"/>
+                  </a:lnTo>
+                  <a:lnTo>
+                    <a:pt x="2039504" y="188153"/>
+                  </a:lnTo>
+                  <a:lnTo>
+                    <a:pt x="1962872" y="197710"/>
+                  </a:lnTo>
+                  <a:lnTo>
+                    <a:pt x="1886239" y="207122"/>
+                  </a:lnTo>
+                  <a:lnTo>
+                    <a:pt x="1809607" y="216392"/>
+                  </a:lnTo>
+                  <a:lnTo>
+                    <a:pt x="1732974" y="225522"/>
+                  </a:lnTo>
+                  <a:lnTo>
+                    <a:pt x="1656342" y="234514"/>
+                  </a:lnTo>
+                  <a:lnTo>
+                    <a:pt x="1579709" y="243370"/>
+                  </a:lnTo>
+                  <a:lnTo>
+                    <a:pt x="1503076" y="252092"/>
+                  </a:lnTo>
+                  <a:lnTo>
+                    <a:pt x="1426444" y="260682"/>
+                  </a:lnTo>
+                  <a:lnTo>
+                    <a:pt x="1349811" y="269142"/>
+                  </a:lnTo>
+                  <a:lnTo>
+                    <a:pt x="1273179" y="277474"/>
+                  </a:lnTo>
+                  <a:lnTo>
+                    <a:pt x="1196546" y="285680"/>
+                  </a:lnTo>
+                  <a:lnTo>
+                    <a:pt x="1119914" y="293762"/>
+                  </a:lnTo>
+                  <a:lnTo>
+                    <a:pt x="1043281" y="301722"/>
+                  </a:lnTo>
+                  <a:lnTo>
+                    <a:pt x="966649" y="309562"/>
+                  </a:lnTo>
+                  <a:lnTo>
+                    <a:pt x="890016" y="317283"/>
+                  </a:lnTo>
+                  <a:lnTo>
+                    <a:pt x="813384" y="324887"/>
+                  </a:lnTo>
+                  <a:lnTo>
+                    <a:pt x="736751" y="332377"/>
+                  </a:lnTo>
+                  <a:lnTo>
+                    <a:pt x="660118" y="339753"/>
+                  </a:lnTo>
+                  <a:lnTo>
+                    <a:pt x="583486" y="347017"/>
+                  </a:lnTo>
+                  <a:lnTo>
+                    <a:pt x="506853" y="354172"/>
+                  </a:lnTo>
+                  <a:lnTo>
+                    <a:pt x="430221" y="361218"/>
+                  </a:lnTo>
+                  <a:lnTo>
+                    <a:pt x="353588" y="368158"/>
+                  </a:lnTo>
+                  <a:lnTo>
+                    <a:pt x="276956" y="374993"/>
+                  </a:lnTo>
+                  <a:lnTo>
+                    <a:pt x="200323" y="381725"/>
+                  </a:lnTo>
+                  <a:lnTo>
+                    <a:pt x="123691" y="388355"/>
+                  </a:lnTo>
+                  <a:lnTo>
+                    <a:pt x="47058" y="394884"/>
+                  </a:lnTo>
+                  <a:lnTo>
+                    <a:pt x="0" y="398834"/>
                   </a:lnTo>
                 </a:path>
               </a:pathLst>
@@ -4115,306 +4115,306 @@
           </p:nvSpPr>
           <p:spPr>
             <a:xfrm>
-              <a:off x="817517" y="2547866"/>
-              <a:ext cx="7403783" cy="2797995"/>
+              <a:off x="817517" y="2694690"/>
+              <a:ext cx="7403783" cy="2668616"/>
             </a:xfrm>
             <a:custGeom>
               <a:avLst/>
               <a:pathLst>
-                <a:path w="7403783" h="2797995">
+                <a:path w="7403783" h="2668616">
                   <a:moveTo>
                     <a:pt x="0" y="0"/>
                   </a:moveTo>
                   <a:lnTo>
-                    <a:pt x="47058" y="51184"/>
-                  </a:lnTo>
-                  <a:lnTo>
-                    <a:pt x="123691" y="132245"/>
-                  </a:lnTo>
-                  <a:lnTo>
-                    <a:pt x="200323" y="211080"/>
-                  </a:lnTo>
-                  <a:lnTo>
-                    <a:pt x="276956" y="287747"/>
-                  </a:lnTo>
-                  <a:lnTo>
-                    <a:pt x="353588" y="362309"/>
-                  </a:lnTo>
-                  <a:lnTo>
-                    <a:pt x="430221" y="434821"/>
-                  </a:lnTo>
-                  <a:lnTo>
-                    <a:pt x="506853" y="505342"/>
-                  </a:lnTo>
-                  <a:lnTo>
-                    <a:pt x="583486" y="573924"/>
-                  </a:lnTo>
-                  <a:lnTo>
-                    <a:pt x="660118" y="640622"/>
-                  </a:lnTo>
-                  <a:lnTo>
-                    <a:pt x="736751" y="705488"/>
-                  </a:lnTo>
-                  <a:lnTo>
-                    <a:pt x="813384" y="768571"/>
-                  </a:lnTo>
-                  <a:lnTo>
-                    <a:pt x="890016" y="829920"/>
-                  </a:lnTo>
-                  <a:lnTo>
-                    <a:pt x="966649" y="889584"/>
-                  </a:lnTo>
-                  <a:lnTo>
-                    <a:pt x="1043281" y="947609"/>
-                  </a:lnTo>
-                  <a:lnTo>
-                    <a:pt x="1119914" y="1004039"/>
-                  </a:lnTo>
-                  <a:lnTo>
-                    <a:pt x="1196546" y="1058919"/>
-                  </a:lnTo>
-                  <a:lnTo>
-                    <a:pt x="1273179" y="1112291"/>
-                  </a:lnTo>
-                  <a:lnTo>
-                    <a:pt x="1349811" y="1164196"/>
-                  </a:lnTo>
-                  <a:lnTo>
-                    <a:pt x="1426444" y="1214676"/>
-                  </a:lnTo>
-                  <a:lnTo>
-                    <a:pt x="1503076" y="1263768"/>
-                  </a:lnTo>
-                  <a:lnTo>
-                    <a:pt x="1579709" y="1311511"/>
-                  </a:lnTo>
-                  <a:lnTo>
-                    <a:pt x="1656342" y="1357942"/>
-                  </a:lnTo>
-                  <a:lnTo>
-                    <a:pt x="1732974" y="1403098"/>
-                  </a:lnTo>
-                  <a:lnTo>
-                    <a:pt x="1809607" y="1447013"/>
-                  </a:lnTo>
-                  <a:lnTo>
-                    <a:pt x="1886239" y="1489721"/>
-                  </a:lnTo>
-                  <a:lnTo>
-                    <a:pt x="1962872" y="1531256"/>
-                  </a:lnTo>
-                  <a:lnTo>
-                    <a:pt x="2039504" y="1571649"/>
-                  </a:lnTo>
-                  <a:lnTo>
-                    <a:pt x="2116137" y="1610933"/>
-                  </a:lnTo>
-                  <a:lnTo>
-                    <a:pt x="2192769" y="1649137"/>
-                  </a:lnTo>
-                  <a:lnTo>
-                    <a:pt x="2269402" y="1686292"/>
-                  </a:lnTo>
-                  <a:lnTo>
-                    <a:pt x="2346034" y="1722425"/>
-                  </a:lnTo>
-                  <a:lnTo>
-                    <a:pt x="2422667" y="1757566"/>
-                  </a:lnTo>
-                  <a:lnTo>
-                    <a:pt x="2499300" y="1791741"/>
-                  </a:lnTo>
-                  <a:lnTo>
-                    <a:pt x="2575932" y="1824977"/>
-                  </a:lnTo>
-                  <a:lnTo>
-                    <a:pt x="2652565" y="1857300"/>
-                  </a:lnTo>
-                  <a:lnTo>
-                    <a:pt x="2729197" y="1888735"/>
-                  </a:lnTo>
-                  <a:lnTo>
-                    <a:pt x="2805830" y="1919306"/>
-                  </a:lnTo>
-                  <a:lnTo>
-                    <a:pt x="2882462" y="1949037"/>
-                  </a:lnTo>
-                  <a:lnTo>
-                    <a:pt x="2959095" y="1977951"/>
-                  </a:lnTo>
-                  <a:lnTo>
-                    <a:pt x="3035727" y="2006071"/>
-                  </a:lnTo>
-                  <a:lnTo>
-                    <a:pt x="3112360" y="2033418"/>
-                  </a:lnTo>
-                  <a:lnTo>
-                    <a:pt x="3188993" y="2060013"/>
-                  </a:lnTo>
-                  <a:lnTo>
-                    <a:pt x="3265625" y="2085878"/>
-                  </a:lnTo>
-                  <a:lnTo>
-                    <a:pt x="3342258" y="2111032"/>
-                  </a:lnTo>
-                  <a:lnTo>
-                    <a:pt x="3418890" y="2135495"/>
-                  </a:lnTo>
-                  <a:lnTo>
-                    <a:pt x="3495523" y="2159286"/>
-                  </a:lnTo>
-                  <a:lnTo>
-                    <a:pt x="3572155" y="2182423"/>
-                  </a:lnTo>
-                  <a:lnTo>
-                    <a:pt x="3648788" y="2204924"/>
-                  </a:lnTo>
-                  <a:lnTo>
-                    <a:pt x="3725420" y="2226808"/>
-                  </a:lnTo>
-                  <a:lnTo>
-                    <a:pt x="3802053" y="2248089"/>
-                  </a:lnTo>
-                  <a:lnTo>
-                    <a:pt x="3878685" y="2268786"/>
-                  </a:lnTo>
-                  <a:lnTo>
-                    <a:pt x="3955318" y="2288915"/>
-                  </a:lnTo>
-                  <a:lnTo>
-                    <a:pt x="4031951" y="2308490"/>
-                  </a:lnTo>
-                  <a:lnTo>
-                    <a:pt x="4108583" y="2327527"/>
-                  </a:lnTo>
-                  <a:lnTo>
-                    <a:pt x="4185216" y="2346042"/>
-                  </a:lnTo>
-                  <a:lnTo>
-                    <a:pt x="4261848" y="2364047"/>
-                  </a:lnTo>
-                  <a:lnTo>
-                    <a:pt x="4338481" y="2381558"/>
-                  </a:lnTo>
-                  <a:lnTo>
-                    <a:pt x="4415113" y="2398588"/>
-                  </a:lnTo>
-                  <a:lnTo>
-                    <a:pt x="4491746" y="2415150"/>
-                  </a:lnTo>
-                  <a:lnTo>
-                    <a:pt x="4568378" y="2431257"/>
-                  </a:lnTo>
-                  <a:lnTo>
-                    <a:pt x="4645011" y="2446921"/>
-                  </a:lnTo>
-                  <a:lnTo>
-                    <a:pt x="4721644" y="2462155"/>
-                  </a:lnTo>
-                  <a:lnTo>
-                    <a:pt x="4798276" y="2476970"/>
-                  </a:lnTo>
-                  <a:lnTo>
-                    <a:pt x="4874909" y="2491378"/>
-                  </a:lnTo>
-                  <a:lnTo>
-                    <a:pt x="4951541" y="2505390"/>
-                  </a:lnTo>
-                  <a:lnTo>
-                    <a:pt x="5028174" y="2519017"/>
-                  </a:lnTo>
-                  <a:lnTo>
-                    <a:pt x="5104806" y="2532270"/>
-                  </a:lnTo>
-                  <a:lnTo>
-                    <a:pt x="5181439" y="2545159"/>
-                  </a:lnTo>
-                  <a:lnTo>
-                    <a:pt x="5258071" y="2557693"/>
-                  </a:lnTo>
-                  <a:lnTo>
-                    <a:pt x="5334704" y="2569883"/>
-                  </a:lnTo>
-                  <a:lnTo>
-                    <a:pt x="5411336" y="2581738"/>
-                  </a:lnTo>
-                  <a:lnTo>
-                    <a:pt x="5487969" y="2593268"/>
-                  </a:lnTo>
-                  <a:lnTo>
-                    <a:pt x="5564602" y="2604480"/>
-                  </a:lnTo>
-                  <a:lnTo>
-                    <a:pt x="5641234" y="2615385"/>
-                  </a:lnTo>
-                  <a:lnTo>
-                    <a:pt x="5717867" y="2625990"/>
-                  </a:lnTo>
-                  <a:lnTo>
-                    <a:pt x="5794499" y="2636303"/>
-                  </a:lnTo>
-                  <a:lnTo>
-                    <a:pt x="5871132" y="2646333"/>
-                  </a:lnTo>
-                  <a:lnTo>
-                    <a:pt x="5947764" y="2656088"/>
-                  </a:lnTo>
-                  <a:lnTo>
-                    <a:pt x="6024397" y="2665574"/>
-                  </a:lnTo>
-                  <a:lnTo>
-                    <a:pt x="6101029" y="2674800"/>
-                  </a:lnTo>
-                  <a:lnTo>
-                    <a:pt x="6177662" y="2683772"/>
-                  </a:lnTo>
-                  <a:lnTo>
-                    <a:pt x="6254294" y="2692498"/>
-                  </a:lnTo>
-                  <a:lnTo>
-                    <a:pt x="6330927" y="2700984"/>
-                  </a:lnTo>
-                  <a:lnTo>
-                    <a:pt x="6407560" y="2709237"/>
-                  </a:lnTo>
-                  <a:lnTo>
-                    <a:pt x="6484192" y="2717263"/>
-                  </a:lnTo>
-                  <a:lnTo>
-                    <a:pt x="6560825" y="2725069"/>
-                  </a:lnTo>
-                  <a:lnTo>
-                    <a:pt x="6637457" y="2732660"/>
-                  </a:lnTo>
-                  <a:lnTo>
-                    <a:pt x="6714090" y="2740042"/>
-                  </a:lnTo>
-                  <a:lnTo>
-                    <a:pt x="6790722" y="2747222"/>
-                  </a:lnTo>
-                  <a:lnTo>
-                    <a:pt x="6867355" y="2754205"/>
-                  </a:lnTo>
-                  <a:lnTo>
-                    <a:pt x="6943987" y="2760995"/>
-                  </a:lnTo>
-                  <a:lnTo>
-                    <a:pt x="7020620" y="2767599"/>
-                  </a:lnTo>
-                  <a:lnTo>
-                    <a:pt x="7097253" y="2774022"/>
-                  </a:lnTo>
-                  <a:lnTo>
-                    <a:pt x="7173885" y="2780268"/>
-                  </a:lnTo>
-                  <a:lnTo>
-                    <a:pt x="7250518" y="2786342"/>
-                  </a:lnTo>
-                  <a:lnTo>
-                    <a:pt x="7327150" y="2792249"/>
-                  </a:lnTo>
-                  <a:lnTo>
-                    <a:pt x="7403783" y="2797995"/>
+                    <a:pt x="47058" y="48817"/>
+                  </a:lnTo>
+                  <a:lnTo>
+                    <a:pt x="123691" y="126130"/>
+                  </a:lnTo>
+                  <a:lnTo>
+                    <a:pt x="200323" y="201319"/>
+                  </a:lnTo>
+                  <a:lnTo>
+                    <a:pt x="276956" y="274442"/>
+                  </a:lnTo>
+                  <a:lnTo>
+                    <a:pt x="353588" y="345556"/>
+                  </a:lnTo>
+                  <a:lnTo>
+                    <a:pt x="430221" y="414715"/>
+                  </a:lnTo>
+                  <a:lnTo>
+                    <a:pt x="506853" y="481975"/>
+                  </a:lnTo>
+                  <a:lnTo>
+                    <a:pt x="583486" y="547386"/>
+                  </a:lnTo>
+                  <a:lnTo>
+                    <a:pt x="660118" y="611000"/>
+                  </a:lnTo>
+                  <a:lnTo>
+                    <a:pt x="736751" y="672866"/>
+                  </a:lnTo>
+                  <a:lnTo>
+                    <a:pt x="813384" y="733032"/>
+                  </a:lnTo>
+                  <a:lnTo>
+                    <a:pt x="890016" y="791545"/>
+                  </a:lnTo>
+                  <a:lnTo>
+                    <a:pt x="966649" y="848450"/>
+                  </a:lnTo>
+                  <a:lnTo>
+                    <a:pt x="1043281" y="903792"/>
+                  </a:lnTo>
+                  <a:lnTo>
+                    <a:pt x="1119914" y="957613"/>
+                  </a:lnTo>
+                  <a:lnTo>
+                    <a:pt x="1196546" y="1009955"/>
+                  </a:lnTo>
+                  <a:lnTo>
+                    <a:pt x="1273179" y="1060859"/>
+                  </a:lnTo>
+                  <a:lnTo>
+                    <a:pt x="1349811" y="1110364"/>
+                  </a:lnTo>
+                  <a:lnTo>
+                    <a:pt x="1426444" y="1158509"/>
+                  </a:lnTo>
+                  <a:lnTo>
+                    <a:pt x="1503076" y="1205332"/>
+                  </a:lnTo>
+                  <a:lnTo>
+                    <a:pt x="1579709" y="1250867"/>
+                  </a:lnTo>
+                  <a:lnTo>
+                    <a:pt x="1656342" y="1295152"/>
+                  </a:lnTo>
+                  <a:lnTo>
+                    <a:pt x="1732974" y="1338219"/>
+                  </a:lnTo>
+                  <a:lnTo>
+                    <a:pt x="1809607" y="1380104"/>
+                  </a:lnTo>
+                  <a:lnTo>
+                    <a:pt x="1886239" y="1420837"/>
+                  </a:lnTo>
+                  <a:lnTo>
+                    <a:pt x="1962872" y="1460451"/>
+                  </a:lnTo>
+                  <a:lnTo>
+                    <a:pt x="2039504" y="1498977"/>
+                  </a:lnTo>
+                  <a:lnTo>
+                    <a:pt x="2116137" y="1536444"/>
+                  </a:lnTo>
+                  <a:lnTo>
+                    <a:pt x="2192769" y="1572882"/>
+                  </a:lnTo>
+                  <a:lnTo>
+                    <a:pt x="2269402" y="1608318"/>
+                  </a:lnTo>
+                  <a:lnTo>
+                    <a:pt x="2346034" y="1642781"/>
+                  </a:lnTo>
+                  <a:lnTo>
+                    <a:pt x="2422667" y="1676297"/>
+                  </a:lnTo>
+                  <a:lnTo>
+                    <a:pt x="2499300" y="1708892"/>
+                  </a:lnTo>
+                  <a:lnTo>
+                    <a:pt x="2575932" y="1740591"/>
+                  </a:lnTo>
+                  <a:lnTo>
+                    <a:pt x="2652565" y="1771419"/>
+                  </a:lnTo>
+                  <a:lnTo>
+                    <a:pt x="2729197" y="1801400"/>
+                  </a:lnTo>
+                  <a:lnTo>
+                    <a:pt x="2805830" y="1830558"/>
+                  </a:lnTo>
+                  <a:lnTo>
+                    <a:pt x="2882462" y="1858914"/>
+                  </a:lnTo>
+                  <a:lnTo>
+                    <a:pt x="2959095" y="1886491"/>
+                  </a:lnTo>
+                  <a:lnTo>
+                    <a:pt x="3035727" y="1913311"/>
+                  </a:lnTo>
+                  <a:lnTo>
+                    <a:pt x="3112360" y="1939393"/>
+                  </a:lnTo>
+                  <a:lnTo>
+                    <a:pt x="3188993" y="1964759"/>
+                  </a:lnTo>
+                  <a:lnTo>
+                    <a:pt x="3265625" y="1989428"/>
+                  </a:lnTo>
+                  <a:lnTo>
+                    <a:pt x="3342258" y="2013419"/>
+                  </a:lnTo>
+                  <a:lnTo>
+                    <a:pt x="3418890" y="2036751"/>
+                  </a:lnTo>
+                  <a:lnTo>
+                    <a:pt x="3495523" y="2059441"/>
+                  </a:lnTo>
+                  <a:lnTo>
+                    <a:pt x="3572155" y="2081509"/>
+                  </a:lnTo>
+                  <a:lnTo>
+                    <a:pt x="3648788" y="2102970"/>
+                  </a:lnTo>
+                  <a:lnTo>
+                    <a:pt x="3725420" y="2123841"/>
+                  </a:lnTo>
+                  <a:lnTo>
+                    <a:pt x="3802053" y="2144138"/>
+                  </a:lnTo>
+                  <a:lnTo>
+                    <a:pt x="3878685" y="2163879"/>
+                  </a:lnTo>
+                  <a:lnTo>
+                    <a:pt x="3955318" y="2183076"/>
+                  </a:lnTo>
+                  <a:lnTo>
+                    <a:pt x="4031951" y="2201746"/>
+                  </a:lnTo>
+                  <a:lnTo>
+                    <a:pt x="4108583" y="2219903"/>
+                  </a:lnTo>
+                  <a:lnTo>
+                    <a:pt x="4185216" y="2237562"/>
+                  </a:lnTo>
+                  <a:lnTo>
+                    <a:pt x="4261848" y="2254735"/>
+                  </a:lnTo>
+                  <a:lnTo>
+                    <a:pt x="4338481" y="2271436"/>
+                  </a:lnTo>
+                  <a:lnTo>
+                    <a:pt x="4415113" y="2287678"/>
+                  </a:lnTo>
+                  <a:lnTo>
+                    <a:pt x="4491746" y="2303474"/>
+                  </a:lnTo>
+                  <a:lnTo>
+                    <a:pt x="4568378" y="2318836"/>
+                  </a:lnTo>
+                  <a:lnTo>
+                    <a:pt x="4645011" y="2333776"/>
+                  </a:lnTo>
+                  <a:lnTo>
+                    <a:pt x="4721644" y="2348305"/>
+                  </a:lnTo>
+                  <a:lnTo>
+                    <a:pt x="4798276" y="2362436"/>
+                  </a:lnTo>
+                  <a:lnTo>
+                    <a:pt x="4874909" y="2376177"/>
+                  </a:lnTo>
+                  <a:lnTo>
+                    <a:pt x="4951541" y="2389542"/>
+                  </a:lnTo>
+                  <a:lnTo>
+                    <a:pt x="5028174" y="2402539"/>
+                  </a:lnTo>
+                  <a:lnTo>
+                    <a:pt x="5104806" y="2415179"/>
+                  </a:lnTo>
+                  <a:lnTo>
+                    <a:pt x="5181439" y="2427471"/>
+                  </a:lnTo>
+                  <a:lnTo>
+                    <a:pt x="5258071" y="2439426"/>
+                  </a:lnTo>
+                  <a:lnTo>
+                    <a:pt x="5334704" y="2451053"/>
+                  </a:lnTo>
+                  <a:lnTo>
+                    <a:pt x="5411336" y="2462360"/>
+                  </a:lnTo>
+                  <a:lnTo>
+                    <a:pt x="5487969" y="2473356"/>
+                  </a:lnTo>
+                  <a:lnTo>
+                    <a:pt x="5564602" y="2484050"/>
+                  </a:lnTo>
+                  <a:lnTo>
+                    <a:pt x="5641234" y="2494450"/>
+                  </a:lnTo>
+                  <a:lnTo>
+                    <a:pt x="5717867" y="2504565"/>
+                  </a:lnTo>
+                  <a:lnTo>
+                    <a:pt x="5794499" y="2514402"/>
+                  </a:lnTo>
+                  <a:lnTo>
+                    <a:pt x="5871132" y="2523968"/>
+                  </a:lnTo>
+                  <a:lnTo>
+                    <a:pt x="5947764" y="2533271"/>
+                  </a:lnTo>
+                  <a:lnTo>
+                    <a:pt x="6024397" y="2542319"/>
+                  </a:lnTo>
+                  <a:lnTo>
+                    <a:pt x="6101029" y="2551118"/>
+                  </a:lnTo>
+                  <a:lnTo>
+                    <a:pt x="6177662" y="2559676"/>
+                  </a:lnTo>
+                  <a:lnTo>
+                    <a:pt x="6254294" y="2567998"/>
+                  </a:lnTo>
+                  <a:lnTo>
+                    <a:pt x="6330927" y="2576092"/>
+                  </a:lnTo>
+                  <a:lnTo>
+                    <a:pt x="6407560" y="2583963"/>
+                  </a:lnTo>
+                  <a:lnTo>
+                    <a:pt x="6484192" y="2591618"/>
+                  </a:lnTo>
+                  <a:lnTo>
+                    <a:pt x="6560825" y="2599063"/>
+                  </a:lnTo>
+                  <a:lnTo>
+                    <a:pt x="6637457" y="2606303"/>
+                  </a:lnTo>
+                  <a:lnTo>
+                    <a:pt x="6714090" y="2613344"/>
+                  </a:lnTo>
+                  <a:lnTo>
+                    <a:pt x="6790722" y="2620192"/>
+                  </a:lnTo>
+                  <a:lnTo>
+                    <a:pt x="6867355" y="2626851"/>
+                  </a:lnTo>
+                  <a:lnTo>
+                    <a:pt x="6943987" y="2633328"/>
+                  </a:lnTo>
+                  <a:lnTo>
+                    <a:pt x="7020620" y="2639626"/>
+                  </a:lnTo>
+                  <a:lnTo>
+                    <a:pt x="7097253" y="2645752"/>
+                  </a:lnTo>
+                  <a:lnTo>
+                    <a:pt x="7173885" y="2651709"/>
+                  </a:lnTo>
+                  <a:lnTo>
+                    <a:pt x="7250518" y="2657503"/>
+                  </a:lnTo>
+                  <a:lnTo>
+                    <a:pt x="7327150" y="2663137"/>
+                  </a:lnTo>
+                  <a:lnTo>
+                    <a:pt x="7403783" y="2668616"/>
                   </a:lnTo>
                 </a:path>
               </a:pathLst>
@@ -4443,7 +4443,7 @@
           </p:nvSpPr>
           <p:spPr>
             <a:xfrm>
-              <a:off x="817517" y="4679530"/>
+              <a:off x="817517" y="4727786"/>
               <a:ext cx="7799693" cy="0"/>
             </a:xfrm>
             <a:custGeom>
@@ -4486,15 +4486,15 @@
           </p:nvSpPr>
           <p:spPr>
             <a:xfrm>
-              <a:off x="4224261" y="1896563"/>
-              <a:ext cx="0" cy="3826579"/>
+              <a:off x="4224261" y="2073503"/>
+              <a:ext cx="0" cy="3649639"/>
             </a:xfrm>
             <a:custGeom>
               <a:avLst/>
               <a:pathLst>
-                <a:path w="0" h="3826579">
+                <a:path w="0" h="3649639">
                   <a:moveTo>
-                    <a:pt x="0" y="3826579"/>
+                    <a:pt x="0" y="3649639"/>
                   </a:moveTo>
                   <a:lnTo>
                     <a:pt x="0" y="0"/>
@@ -4529,7 +4529,7 @@
           </p:nvSpPr>
           <p:spPr>
             <a:xfrm>
-              <a:off x="692708" y="5509156"/>
+              <a:off x="692708" y="5517199"/>
               <a:ext cx="62179" cy="80101"/>
             </a:xfrm>
             <a:prstGeom prst="rect">
@@ -4575,7 +4575,7 @@
           </p:nvSpPr>
           <p:spPr>
             <a:xfrm>
-              <a:off x="692708" y="4639479"/>
+              <a:off x="692708" y="4687735"/>
               <a:ext cx="62179" cy="80101"/>
             </a:xfrm>
             <a:prstGeom prst="rect">
@@ -4621,7 +4621,7 @@
           </p:nvSpPr>
           <p:spPr>
             <a:xfrm>
-              <a:off x="692708" y="3769802"/>
+              <a:off x="692708" y="3858272"/>
               <a:ext cx="62179" cy="80101"/>
             </a:xfrm>
             <a:prstGeom prst="rect">
@@ -4667,7 +4667,7 @@
           </p:nvSpPr>
           <p:spPr>
             <a:xfrm>
-              <a:off x="692708" y="2900125"/>
+              <a:off x="692708" y="3028808"/>
               <a:ext cx="62179" cy="80101"/>
             </a:xfrm>
             <a:prstGeom prst="rect">
@@ -4713,7 +4713,7 @@
           </p:nvSpPr>
           <p:spPr>
             <a:xfrm>
-              <a:off x="692708" y="2030448"/>
+              <a:off x="692708" y="2199345"/>
               <a:ext cx="62179" cy="80101"/>
             </a:xfrm>
             <a:prstGeom prst="rect">
@@ -4989,7 +4989,7 @@
           </p:nvSpPr>
           <p:spPr>
             <a:xfrm rot="-5400000">
-              <a:off x="68446" y="3759743"/>
+              <a:off x="68446" y="3848213"/>
               <a:ext cx="1016904" cy="100218"/>
             </a:xfrm>
             <a:prstGeom prst="rect">
@@ -5030,6 +5030,52 @@
         <p:sp>
           <p:nvSpPr>
             <p:cNvPr id="38" name="tx38"/>
+            <p:cNvSpPr/>
+            <p:nvPr/>
+          </p:nvSpPr>
+          <p:spPr>
+            <a:xfrm>
+              <a:off x="817517" y="1896563"/>
+              <a:ext cx="5689762" cy="82021"/>
+            </a:xfrm>
+            <a:prstGeom prst="rect">
+              <a:avLst/>
+            </a:prstGeom>
+            <a:noFill/>
+          </p:spPr>
+          <p:txBody>
+            <a:bodyPr lIns="0" rIns="0" tIns="0" bIns="0" anchorCtr="1" anchor="ctr" wrap="none"/>
+            <a:lstStyle/>
+            <a:p>
+              <a:pPr algn="l" marL="0" marR="0" indent="0">
+                <a:lnSpc>
+                  <a:spcPts val="900"/>
+                </a:lnSpc>
+                <a:spcBef>
+                  <a:spcPts val="0"/>
+                </a:spcBef>
+                <a:spcAft>
+                  <a:spcPts val="0"/>
+                </a:spcAft>
+              </a:pPr>
+              <a:r>
+                <a:rPr sz="900">
+                  <a:solidFill>
+                    <a:srgbClr val="404040">
+                      <a:alpha val="100000"/>
+                    </a:srgbClr>
+                  </a:solidFill>
+                  <a:latin typeface="Helvetica"/>
+                  <a:cs typeface="Helvetica"/>
+                </a:rPr>
+                <a:t>subHR per 0.1 ratio decline: 1.38 (0.84-2.27)  |  per IQR decline (Δ = 0.30): 2.62 (0.59-11.65)  |  IQR: [0.85, 1.15]</a:t>
+              </a:r>
+            </a:p>
+          </p:txBody>
+        </p:sp>
+        <p:sp>
+          <p:nvSpPr>
+            <p:cNvPr id="39" name="tx39"/>
             <p:cNvSpPr/>
             <p:nvPr/>
           </p:nvSpPr>

--- a/docs/pptx/carbo/jx-carbo-linsubhr-ratio-hosp6.pptx
+++ b/docs/pptx/carbo/jx-carbo-linsubhr-ratio-hosp6.pptx
@@ -5036,7 +5036,7 @@
           <p:spPr>
             <a:xfrm>
               <a:off x="817517" y="1896563"/>
-              <a:ext cx="5689762" cy="82021"/>
+              <a:ext cx="6232916" cy="82021"/>
             </a:xfrm>
             <a:prstGeom prst="rect">
               <a:avLst/>
@@ -5068,7 +5068,7 @@
                   <a:latin typeface="Helvetica"/>
                   <a:cs typeface="Helvetica"/>
                 </a:rPr>
-                <a:t>subHR per 0.1 ratio decline: 1.38 (0.84-2.27)  |  per IQR decline (Δ = 0.30): 2.62 (0.59-11.65)  |  IQR: [0.85, 1.15]</a:t>
+                <a:t>subHR per 0.1 ratio decline: 1.38 (0.84-2.27), p = 0.205  |  per IQR decline (Δ = 0.30): 2.62 (0.59-11.65)  |  IQR: [0.85, 1.15]</a:t>
               </a:r>
             </a:p>
           </p:txBody>

--- a/docs/pptx/carbo/jx-carbo-linsubhr-ratio-hosp6.pptx
+++ b/docs/pptx/carbo/jx-carbo-linsubhr-ratio-hosp6.pptx
@@ -2443,7 +2443,7 @@
           </p:nvSpPr>
           <p:spPr>
             <a:xfrm>
-              <a:off x="1615213" y="2073503"/>
+              <a:off x="1467192" y="2073503"/>
               <a:ext cx="0" cy="3649639"/>
             </a:xfrm>
             <a:custGeom>
@@ -2486,7 +2486,7 @@
           </p:nvSpPr>
           <p:spPr>
             <a:xfrm>
-              <a:off x="3387871" y="2073503"/>
+              <a:off x="3538150" y="2073503"/>
               <a:ext cx="0" cy="3649639"/>
             </a:xfrm>
             <a:custGeom>
@@ -2529,7 +2529,7 @@
           </p:nvSpPr>
           <p:spPr>
             <a:xfrm>
-              <a:off x="5160528" y="2073503"/>
+              <a:off x="5609107" y="2073503"/>
               <a:ext cx="0" cy="3649639"/>
             </a:xfrm>
             <a:custGeom>
@@ -2572,7 +2572,7 @@
           </p:nvSpPr>
           <p:spPr>
             <a:xfrm>
-              <a:off x="6933186" y="2073503"/>
+              <a:off x="7680065" y="2073503"/>
               <a:ext cx="0" cy="3649639"/>
             </a:xfrm>
             <a:custGeom>
@@ -2830,7 +2830,7 @@
           </p:nvSpPr>
           <p:spPr>
             <a:xfrm>
-              <a:off x="2501542" y="2073503"/>
+              <a:off x="2502671" y="2073503"/>
               <a:ext cx="0" cy="3649639"/>
             </a:xfrm>
             <a:custGeom>
@@ -2873,7 +2873,7 @@
           </p:nvSpPr>
           <p:spPr>
             <a:xfrm>
-              <a:off x="4274200" y="2073503"/>
+              <a:off x="4573628" y="2073503"/>
               <a:ext cx="0" cy="3649639"/>
             </a:xfrm>
             <a:custGeom>
@@ -2916,7 +2916,7 @@
           </p:nvSpPr>
           <p:spPr>
             <a:xfrm>
-              <a:off x="6046857" y="2073503"/>
+              <a:off x="6644586" y="2073503"/>
               <a:ext cx="0" cy="3649639"/>
             </a:xfrm>
             <a:custGeom>
@@ -2953,577 +2953,540 @@
         </p:sp>
         <p:sp>
           <p:nvSpPr>
-            <p:cNvPr id="20" name="pl20"/>
+            <p:cNvPr id="20" name="pg20"/>
             <p:cNvSpPr/>
             <p:nvPr/>
           </p:nvSpPr>
           <p:spPr>
             <a:xfrm>
-              <a:off x="7819515" y="2073503"/>
-              <a:ext cx="0" cy="3649639"/>
+              <a:off x="1172049" y="2073503"/>
+              <a:ext cx="7090630" cy="3463262"/>
             </a:xfrm>
             <a:custGeom>
               <a:avLst/>
               <a:pathLst>
-                <a:path w="0" h="3649639">
+                <a:path w="7090630" h="3463262">
                   <a:moveTo>
-                    <a:pt x="0" y="3649639"/>
+                    <a:pt x="1907007" y="0"/>
                   </a:moveTo>
                   <a:lnTo>
-                    <a:pt x="0" y="0"/>
-                  </a:lnTo>
-                  <a:lnTo>
-                    <a:pt x="0" y="0"/>
-                  </a:lnTo>
-                </a:path>
-              </a:pathLst>
-            </a:custGeom>
-            <a:ln w="13550" cap="flat">
-              <a:solidFill>
-                <a:srgbClr val="EBEBEB">
-                  <a:alpha val="100000"/>
-                </a:srgbClr>
-              </a:solidFill>
-              <a:prstDash val="solid"/>
-              <a:round/>
-            </a:ln>
-          </p:spPr>
-          <p:txBody>
-            <a:bodyPr/>
-            <a:lstStyle/>
-            <a:p/>
-          </p:txBody>
-        </p:sp>
-        <p:sp>
-          <p:nvSpPr>
-            <p:cNvPr id="21" name="pg21"/>
-            <p:cNvSpPr/>
-            <p:nvPr/>
-          </p:nvSpPr>
-          <p:spPr>
-            <a:xfrm>
-              <a:off x="817517" y="2073503"/>
-              <a:ext cx="7403783" cy="3463262"/>
-            </a:xfrm>
-            <a:custGeom>
-              <a:avLst/>
-              <a:pathLst>
-                <a:path w="7403783" h="3463262">
-                  <a:moveTo>
-                    <a:pt x="1857564" y="0"/>
-                  </a:moveTo>
-                  <a:lnTo>
-                    <a:pt x="1886239" y="93294"/>
-                  </a:lnTo>
-                  <a:lnTo>
-                    <a:pt x="1962872" y="325541"/>
-                  </a:lnTo>
-                  <a:lnTo>
-                    <a:pt x="2039504" y="541879"/>
-                  </a:lnTo>
-                  <a:lnTo>
-                    <a:pt x="2116137" y="743398"/>
-                  </a:lnTo>
-                  <a:lnTo>
-                    <a:pt x="2192769" y="931112"/>
-                  </a:lnTo>
-                  <a:lnTo>
-                    <a:pt x="2269402" y="1105968"/>
-                  </a:lnTo>
-                  <a:lnTo>
-                    <a:pt x="2346034" y="1268847"/>
-                  </a:lnTo>
-                  <a:lnTo>
-                    <a:pt x="2422667" y="1420568"/>
-                  </a:lnTo>
-                  <a:lnTo>
-                    <a:pt x="2499300" y="1561896"/>
-                  </a:lnTo>
-                  <a:lnTo>
-                    <a:pt x="2575932" y="1693543"/>
-                  </a:lnTo>
-                  <a:lnTo>
-                    <a:pt x="2652565" y="1816172"/>
-                  </a:lnTo>
-                  <a:lnTo>
-                    <a:pt x="2729197" y="1930402"/>
-                  </a:lnTo>
-                  <a:lnTo>
-                    <a:pt x="2805830" y="2036806"/>
-                  </a:lnTo>
-                  <a:lnTo>
-                    <a:pt x="2882462" y="2135922"/>
-                  </a:lnTo>
-                  <a:lnTo>
-                    <a:pt x="2959095" y="2228248"/>
-                  </a:lnTo>
-                  <a:lnTo>
-                    <a:pt x="3035727" y="2314250"/>
-                  </a:lnTo>
-                  <a:lnTo>
-                    <a:pt x="3112360" y="2394361"/>
-                  </a:lnTo>
-                  <a:lnTo>
-                    <a:pt x="3188993" y="2468984"/>
-                  </a:lnTo>
-                  <a:lnTo>
-                    <a:pt x="3265625" y="2538496"/>
-                  </a:lnTo>
-                  <a:lnTo>
-                    <a:pt x="3342258" y="2603245"/>
-                  </a:lnTo>
-                  <a:lnTo>
-                    <a:pt x="3418890" y="2652277"/>
-                  </a:lnTo>
-                  <a:lnTo>
-                    <a:pt x="3495523" y="2639512"/>
-                  </a:lnTo>
-                  <a:lnTo>
-                    <a:pt x="3572155" y="2626550"/>
-                  </a:lnTo>
-                  <a:lnTo>
-                    <a:pt x="3648788" y="2613390"/>
-                  </a:lnTo>
-                  <a:lnTo>
-                    <a:pt x="3725420" y="2600027"/>
-                  </a:lnTo>
-                  <a:lnTo>
-                    <a:pt x="3802053" y="2586460"/>
-                  </a:lnTo>
-                  <a:lnTo>
-                    <a:pt x="3878685" y="2572684"/>
-                  </a:lnTo>
-                  <a:lnTo>
-                    <a:pt x="3955318" y="2558696"/>
-                  </a:lnTo>
-                  <a:lnTo>
-                    <a:pt x="4031951" y="2544494"/>
-                  </a:lnTo>
-                  <a:lnTo>
-                    <a:pt x="4108583" y="2530074"/>
-                  </a:lnTo>
-                  <a:lnTo>
-                    <a:pt x="4185216" y="2515432"/>
-                  </a:lnTo>
-                  <a:lnTo>
-                    <a:pt x="4261848" y="2500565"/>
-                  </a:lnTo>
-                  <a:lnTo>
-                    <a:pt x="4338481" y="2485471"/>
-                  </a:lnTo>
-                  <a:lnTo>
-                    <a:pt x="4415113" y="2470144"/>
-                  </a:lnTo>
-                  <a:lnTo>
-                    <a:pt x="4491746" y="2454583"/>
-                  </a:lnTo>
-                  <a:lnTo>
-                    <a:pt x="4568378" y="2438782"/>
-                  </a:lnTo>
-                  <a:lnTo>
-                    <a:pt x="4645011" y="2422739"/>
-                  </a:lnTo>
-                  <a:lnTo>
-                    <a:pt x="4721644" y="2406449"/>
-                  </a:lnTo>
-                  <a:lnTo>
-                    <a:pt x="4798276" y="2389909"/>
-                  </a:lnTo>
-                  <a:lnTo>
-                    <a:pt x="4874909" y="2373116"/>
-                  </a:lnTo>
-                  <a:lnTo>
-                    <a:pt x="4951541" y="2356064"/>
-                  </a:lnTo>
-                  <a:lnTo>
-                    <a:pt x="5028174" y="2338751"/>
-                  </a:lnTo>
-                  <a:lnTo>
-                    <a:pt x="5104806" y="2321172"/>
-                  </a:lnTo>
-                  <a:lnTo>
-                    <a:pt x="5181439" y="2303323"/>
-                  </a:lnTo>
-                  <a:lnTo>
-                    <a:pt x="5258071" y="2285200"/>
-                  </a:lnTo>
-                  <a:lnTo>
-                    <a:pt x="5334704" y="2266799"/>
-                  </a:lnTo>
-                  <a:lnTo>
-                    <a:pt x="5411336" y="2248115"/>
-                  </a:lnTo>
-                  <a:lnTo>
-                    <a:pt x="5487969" y="2229145"/>
-                  </a:lnTo>
-                  <a:lnTo>
-                    <a:pt x="5564602" y="2209883"/>
-                  </a:lnTo>
-                  <a:lnTo>
-                    <a:pt x="5641234" y="2190325"/>
-                  </a:lnTo>
-                  <a:lnTo>
-                    <a:pt x="5717867" y="2170467"/>
-                  </a:lnTo>
-                  <a:lnTo>
-                    <a:pt x="5794499" y="2150305"/>
-                  </a:lnTo>
-                  <a:lnTo>
-                    <a:pt x="5871132" y="2129833"/>
-                  </a:lnTo>
-                  <a:lnTo>
-                    <a:pt x="5947764" y="2109046"/>
-                  </a:lnTo>
-                  <a:lnTo>
-                    <a:pt x="6024397" y="2087940"/>
-                  </a:lnTo>
-                  <a:lnTo>
-                    <a:pt x="6101029" y="2066511"/>
-                  </a:lnTo>
-                  <a:lnTo>
-                    <a:pt x="6177662" y="2044752"/>
-                  </a:lnTo>
-                  <a:lnTo>
-                    <a:pt x="6254294" y="2022659"/>
-                  </a:lnTo>
-                  <a:lnTo>
-                    <a:pt x="6330927" y="2000227"/>
-                  </a:lnTo>
-                  <a:lnTo>
-                    <a:pt x="6407560" y="1977451"/>
-                  </a:lnTo>
-                  <a:lnTo>
-                    <a:pt x="6484192" y="1954325"/>
-                  </a:lnTo>
-                  <a:lnTo>
-                    <a:pt x="6560825" y="1930844"/>
-                  </a:lnTo>
-                  <a:lnTo>
-                    <a:pt x="6637457" y="1907002"/>
-                  </a:lnTo>
-                  <a:lnTo>
-                    <a:pt x="6714090" y="1882794"/>
-                  </a:lnTo>
-                  <a:lnTo>
-                    <a:pt x="6790722" y="1858215"/>
-                  </a:lnTo>
-                  <a:lnTo>
-                    <a:pt x="6867355" y="1833258"/>
-                  </a:lnTo>
-                  <a:lnTo>
-                    <a:pt x="6943987" y="1807918"/>
-                  </a:lnTo>
-                  <a:lnTo>
-                    <a:pt x="7020620" y="1782190"/>
-                  </a:lnTo>
-                  <a:lnTo>
-                    <a:pt x="7097253" y="1756066"/>
-                  </a:lnTo>
-                  <a:lnTo>
-                    <a:pt x="7173885" y="1729541"/>
-                  </a:lnTo>
-                  <a:lnTo>
-                    <a:pt x="7250518" y="1702609"/>
-                  </a:lnTo>
-                  <a:lnTo>
-                    <a:pt x="7327150" y="1675263"/>
-                  </a:lnTo>
-                  <a:lnTo>
-                    <a:pt x="7403783" y="1647497"/>
-                  </a:lnTo>
-                  <a:lnTo>
-                    <a:pt x="7403783" y="3463262"/>
-                  </a:lnTo>
-                  <a:lnTo>
-                    <a:pt x="7327150" y="3461756"/>
-                  </a:lnTo>
-                  <a:lnTo>
-                    <a:pt x="7250518" y="3460139"/>
-                  </a:lnTo>
-                  <a:lnTo>
-                    <a:pt x="7173885" y="3458403"/>
-                  </a:lnTo>
-                  <a:lnTo>
-                    <a:pt x="7097253" y="3456539"/>
-                  </a:lnTo>
-                  <a:lnTo>
-                    <a:pt x="7020620" y="3454538"/>
-                  </a:lnTo>
-                  <a:lnTo>
-                    <a:pt x="6943987" y="3452391"/>
-                  </a:lnTo>
-                  <a:lnTo>
-                    <a:pt x="6867355" y="3450085"/>
-                  </a:lnTo>
-                  <a:lnTo>
-                    <a:pt x="6790722" y="3447609"/>
-                  </a:lnTo>
-                  <a:lnTo>
-                    <a:pt x="6714090" y="3444952"/>
-                  </a:lnTo>
-                  <a:lnTo>
-                    <a:pt x="6637457" y="3442099"/>
-                  </a:lnTo>
-                  <a:lnTo>
-                    <a:pt x="6560825" y="3439036"/>
-                  </a:lnTo>
-                  <a:lnTo>
-                    <a:pt x="6484192" y="3435748"/>
-                  </a:lnTo>
-                  <a:lnTo>
-                    <a:pt x="6407560" y="3432219"/>
-                  </a:lnTo>
-                  <a:lnTo>
-                    <a:pt x="6330927" y="3428430"/>
-                  </a:lnTo>
-                  <a:lnTo>
-                    <a:pt x="6254294" y="3424362"/>
-                  </a:lnTo>
-                  <a:lnTo>
-                    <a:pt x="6177662" y="3419995"/>
-                  </a:lnTo>
-                  <a:lnTo>
-                    <a:pt x="6101029" y="3415307"/>
-                  </a:lnTo>
-                  <a:lnTo>
-                    <a:pt x="6024397" y="3410274"/>
-                  </a:lnTo>
-                  <a:lnTo>
-                    <a:pt x="5947764" y="3404871"/>
-                  </a:lnTo>
-                  <a:lnTo>
-                    <a:pt x="5871132" y="3399070"/>
-                  </a:lnTo>
-                  <a:lnTo>
-                    <a:pt x="5794499" y="3392843"/>
-                  </a:lnTo>
-                  <a:lnTo>
-                    <a:pt x="5717867" y="3386159"/>
-                  </a:lnTo>
-                  <a:lnTo>
-                    <a:pt x="5641234" y="3378982"/>
-                  </a:lnTo>
-                  <a:lnTo>
-                    <a:pt x="5564602" y="3371278"/>
-                  </a:lnTo>
-                  <a:lnTo>
-                    <a:pt x="5487969" y="3363008"/>
-                  </a:lnTo>
-                  <a:lnTo>
-                    <a:pt x="5411336" y="3354129"/>
-                  </a:lnTo>
-                  <a:lnTo>
-                    <a:pt x="5334704" y="3344597"/>
-                  </a:lnTo>
-                  <a:lnTo>
-                    <a:pt x="5258071" y="3334364"/>
-                  </a:lnTo>
-                  <a:lnTo>
-                    <a:pt x="5181439" y="3323379"/>
-                  </a:lnTo>
-                  <a:lnTo>
-                    <a:pt x="5104806" y="3311586"/>
-                  </a:lnTo>
-                  <a:lnTo>
-                    <a:pt x="5028174" y="3298926"/>
-                  </a:lnTo>
-                  <a:lnTo>
-                    <a:pt x="4951541" y="3285335"/>
-                  </a:lnTo>
-                  <a:lnTo>
-                    <a:pt x="4874909" y="3270744"/>
-                  </a:lnTo>
-                  <a:lnTo>
-                    <a:pt x="4798276" y="3255080"/>
-                  </a:lnTo>
-                  <a:lnTo>
-                    <a:pt x="4721644" y="3238265"/>
-                  </a:lnTo>
-                  <a:lnTo>
-                    <a:pt x="4645011" y="3220212"/>
-                  </a:lnTo>
-                  <a:lnTo>
-                    <a:pt x="4568378" y="3200833"/>
-                  </a:lnTo>
-                  <a:lnTo>
-                    <a:pt x="4491746" y="3180028"/>
-                  </a:lnTo>
-                  <a:lnTo>
-                    <a:pt x="4415113" y="3157693"/>
-                  </a:lnTo>
-                  <a:lnTo>
-                    <a:pt x="4338481" y="3133716"/>
-                  </a:lnTo>
-                  <a:lnTo>
-                    <a:pt x="4261848" y="3107976"/>
-                  </a:lnTo>
-                  <a:lnTo>
-                    <a:pt x="4185216" y="3080343"/>
-                  </a:lnTo>
-                  <a:lnTo>
-                    <a:pt x="4108583" y="3050677"/>
-                  </a:lnTo>
-                  <a:lnTo>
-                    <a:pt x="4031951" y="3018830"/>
-                  </a:lnTo>
-                  <a:lnTo>
-                    <a:pt x="3955318" y="2984641"/>
-                  </a:lnTo>
-                  <a:lnTo>
-                    <a:pt x="3878685" y="2947939"/>
-                  </a:lnTo>
-                  <a:lnTo>
-                    <a:pt x="3802053" y="2908537"/>
-                  </a:lnTo>
-                  <a:lnTo>
-                    <a:pt x="3725420" y="2866237"/>
-                  </a:lnTo>
-                  <a:lnTo>
-                    <a:pt x="3648788" y="2820827"/>
-                  </a:lnTo>
-                  <a:lnTo>
-                    <a:pt x="3572155" y="2772077"/>
-                  </a:lnTo>
-                  <a:lnTo>
-                    <a:pt x="3495523" y="2719743"/>
-                  </a:lnTo>
-                  <a:lnTo>
-                    <a:pt x="3418890" y="2663560"/>
-                  </a:lnTo>
-                  <a:lnTo>
-                    <a:pt x="3342258" y="2664850"/>
-                  </a:lnTo>
-                  <a:lnTo>
-                    <a:pt x="3265625" y="2677232"/>
-                  </a:lnTo>
-                  <a:lnTo>
-                    <a:pt x="3188993" y="2689427"/>
-                  </a:lnTo>
-                  <a:lnTo>
-                    <a:pt x="3112360" y="2701438"/>
-                  </a:lnTo>
-                  <a:lnTo>
-                    <a:pt x="3035727" y="2713267"/>
-                  </a:lnTo>
-                  <a:lnTo>
-                    <a:pt x="2959095" y="2724917"/>
-                  </a:lnTo>
-                  <a:lnTo>
-                    <a:pt x="2882462" y="2736391"/>
-                  </a:lnTo>
-                  <a:lnTo>
-                    <a:pt x="2805830" y="2747692"/>
-                  </a:lnTo>
-                  <a:lnTo>
-                    <a:pt x="2729197" y="2758822"/>
-                  </a:lnTo>
-                  <a:lnTo>
-                    <a:pt x="2652565" y="2769783"/>
-                  </a:lnTo>
-                  <a:lnTo>
-                    <a:pt x="2575932" y="2780579"/>
-                  </a:lnTo>
-                  <a:lnTo>
-                    <a:pt x="2499300" y="2791211"/>
-                  </a:lnTo>
-                  <a:lnTo>
-                    <a:pt x="2422667" y="2801683"/>
-                  </a:lnTo>
-                  <a:lnTo>
-                    <a:pt x="2346034" y="2811996"/>
-                  </a:lnTo>
-                  <a:lnTo>
-                    <a:pt x="2269402" y="2822154"/>
-                  </a:lnTo>
-                  <a:lnTo>
-                    <a:pt x="2192769" y="2832157"/>
-                  </a:lnTo>
-                  <a:lnTo>
-                    <a:pt x="2116137" y="2842010"/>
-                  </a:lnTo>
-                  <a:lnTo>
-                    <a:pt x="2039504" y="2851714"/>
-                  </a:lnTo>
-                  <a:lnTo>
-                    <a:pt x="1962872" y="2861270"/>
-                  </a:lnTo>
-                  <a:lnTo>
-                    <a:pt x="1886239" y="2870683"/>
-                  </a:lnTo>
-                  <a:lnTo>
-                    <a:pt x="1809607" y="2879953"/>
-                  </a:lnTo>
-                  <a:lnTo>
-                    <a:pt x="1732974" y="2889083"/>
-                  </a:lnTo>
-                  <a:lnTo>
-                    <a:pt x="1656342" y="2898074"/>
-                  </a:lnTo>
-                  <a:lnTo>
-                    <a:pt x="1579709" y="2906930"/>
-                  </a:lnTo>
-                  <a:lnTo>
-                    <a:pt x="1503076" y="2915652"/>
-                  </a:lnTo>
-                  <a:lnTo>
-                    <a:pt x="1426444" y="2924242"/>
-                  </a:lnTo>
-                  <a:lnTo>
-                    <a:pt x="1349811" y="2932702"/>
-                  </a:lnTo>
-                  <a:lnTo>
-                    <a:pt x="1273179" y="2941034"/>
-                  </a:lnTo>
-                  <a:lnTo>
-                    <a:pt x="1196546" y="2949241"/>
-                  </a:lnTo>
-                  <a:lnTo>
-                    <a:pt x="1119914" y="2957323"/>
-                  </a:lnTo>
-                  <a:lnTo>
-                    <a:pt x="1043281" y="2965283"/>
-                  </a:lnTo>
-                  <a:lnTo>
-                    <a:pt x="966649" y="2973122"/>
-                  </a:lnTo>
-                  <a:lnTo>
-                    <a:pt x="890016" y="2980843"/>
-                  </a:lnTo>
-                  <a:lnTo>
-                    <a:pt x="813384" y="2988448"/>
-                  </a:lnTo>
-                  <a:lnTo>
-                    <a:pt x="736751" y="2995937"/>
-                  </a:lnTo>
-                  <a:lnTo>
-                    <a:pt x="660118" y="3003313"/>
-                  </a:lnTo>
-                  <a:lnTo>
-                    <a:pt x="583486" y="3010578"/>
-                  </a:lnTo>
-                  <a:lnTo>
-                    <a:pt x="506853" y="3017732"/>
-                  </a:lnTo>
-                  <a:lnTo>
-                    <a:pt x="430221" y="3024779"/>
-                  </a:lnTo>
-                  <a:lnTo>
-                    <a:pt x="353588" y="3031719"/>
-                  </a:lnTo>
-                  <a:lnTo>
-                    <a:pt x="276956" y="3038554"/>
-                  </a:lnTo>
-                  <a:lnTo>
-                    <a:pt x="200323" y="3045285"/>
-                  </a:lnTo>
-                  <a:lnTo>
-                    <a:pt x="123691" y="3051915"/>
-                  </a:lnTo>
-                  <a:lnTo>
-                    <a:pt x="47058" y="3058445"/>
-                  </a:lnTo>
-                  <a:lnTo>
-                    <a:pt x="0" y="3062394"/>
+                    <a:pt x="1933808" y="93294"/>
+                  </a:lnTo>
+                  <a:lnTo>
+                    <a:pt x="2005430" y="325541"/>
+                  </a:lnTo>
+                  <a:lnTo>
+                    <a:pt x="2077053" y="541879"/>
+                  </a:lnTo>
+                  <a:lnTo>
+                    <a:pt x="2148675" y="743398"/>
+                  </a:lnTo>
+                  <a:lnTo>
+                    <a:pt x="2220298" y="931112"/>
+                  </a:lnTo>
+                  <a:lnTo>
+                    <a:pt x="2291920" y="1105968"/>
+                  </a:lnTo>
+                  <a:lnTo>
+                    <a:pt x="2363543" y="1268847"/>
+                  </a:lnTo>
+                  <a:lnTo>
+                    <a:pt x="2435165" y="1420568"/>
+                  </a:lnTo>
+                  <a:lnTo>
+                    <a:pt x="2506788" y="1561896"/>
+                  </a:lnTo>
+                  <a:lnTo>
+                    <a:pt x="2578410" y="1693543"/>
+                  </a:lnTo>
+                  <a:lnTo>
+                    <a:pt x="2650033" y="1816172"/>
+                  </a:lnTo>
+                  <a:lnTo>
+                    <a:pt x="2721655" y="1930402"/>
+                  </a:lnTo>
+                  <a:lnTo>
+                    <a:pt x="2793278" y="2036806"/>
+                  </a:lnTo>
+                  <a:lnTo>
+                    <a:pt x="2864901" y="2135922"/>
+                  </a:lnTo>
+                  <a:lnTo>
+                    <a:pt x="2936523" y="2228248"/>
+                  </a:lnTo>
+                  <a:lnTo>
+                    <a:pt x="3008146" y="2314250"/>
+                  </a:lnTo>
+                  <a:lnTo>
+                    <a:pt x="3079768" y="2394361"/>
+                  </a:lnTo>
+                  <a:lnTo>
+                    <a:pt x="3151391" y="2468984"/>
+                  </a:lnTo>
+                  <a:lnTo>
+                    <a:pt x="3223013" y="2538496"/>
+                  </a:lnTo>
+                  <a:lnTo>
+                    <a:pt x="3294636" y="2603245"/>
+                  </a:lnTo>
+                  <a:lnTo>
+                    <a:pt x="3366258" y="2652277"/>
+                  </a:lnTo>
+                  <a:lnTo>
+                    <a:pt x="3437881" y="2639512"/>
+                  </a:lnTo>
+                  <a:lnTo>
+                    <a:pt x="3509503" y="2626550"/>
+                  </a:lnTo>
+                  <a:lnTo>
+                    <a:pt x="3581126" y="2613390"/>
+                  </a:lnTo>
+                  <a:lnTo>
+                    <a:pt x="3652748" y="2600027"/>
+                  </a:lnTo>
+                  <a:lnTo>
+                    <a:pt x="3724371" y="2586460"/>
+                  </a:lnTo>
+                  <a:lnTo>
+                    <a:pt x="3795993" y="2572684"/>
+                  </a:lnTo>
+                  <a:lnTo>
+                    <a:pt x="3867616" y="2558696"/>
+                  </a:lnTo>
+                  <a:lnTo>
+                    <a:pt x="3939238" y="2544494"/>
+                  </a:lnTo>
+                  <a:lnTo>
+                    <a:pt x="4010861" y="2530074"/>
+                  </a:lnTo>
+                  <a:lnTo>
+                    <a:pt x="4082483" y="2515432"/>
+                  </a:lnTo>
+                  <a:lnTo>
+                    <a:pt x="4154106" y="2500565"/>
+                  </a:lnTo>
+                  <a:lnTo>
+                    <a:pt x="4225729" y="2485471"/>
+                  </a:lnTo>
+                  <a:lnTo>
+                    <a:pt x="4297351" y="2470144"/>
+                  </a:lnTo>
+                  <a:lnTo>
+                    <a:pt x="4368974" y="2454583"/>
+                  </a:lnTo>
+                  <a:lnTo>
+                    <a:pt x="4440596" y="2438782"/>
+                  </a:lnTo>
+                  <a:lnTo>
+                    <a:pt x="4512219" y="2422739"/>
+                  </a:lnTo>
+                  <a:lnTo>
+                    <a:pt x="4583841" y="2406449"/>
+                  </a:lnTo>
+                  <a:lnTo>
+                    <a:pt x="4655464" y="2389909"/>
+                  </a:lnTo>
+                  <a:lnTo>
+                    <a:pt x="4727086" y="2373116"/>
+                  </a:lnTo>
+                  <a:lnTo>
+                    <a:pt x="4798709" y="2356064"/>
+                  </a:lnTo>
+                  <a:lnTo>
+                    <a:pt x="4870331" y="2338751"/>
+                  </a:lnTo>
+                  <a:lnTo>
+                    <a:pt x="4941954" y="2321172"/>
+                  </a:lnTo>
+                  <a:lnTo>
+                    <a:pt x="5013576" y="2303323"/>
+                  </a:lnTo>
+                  <a:lnTo>
+                    <a:pt x="5085199" y="2285200"/>
+                  </a:lnTo>
+                  <a:lnTo>
+                    <a:pt x="5156821" y="2266799"/>
+                  </a:lnTo>
+                  <a:lnTo>
+                    <a:pt x="5228444" y="2248115"/>
+                  </a:lnTo>
+                  <a:lnTo>
+                    <a:pt x="5300066" y="2229145"/>
+                  </a:lnTo>
+                  <a:lnTo>
+                    <a:pt x="5371689" y="2209883"/>
+                  </a:lnTo>
+                  <a:lnTo>
+                    <a:pt x="5443311" y="2190325"/>
+                  </a:lnTo>
+                  <a:lnTo>
+                    <a:pt x="5514934" y="2170467"/>
+                  </a:lnTo>
+                  <a:lnTo>
+                    <a:pt x="5586557" y="2150305"/>
+                  </a:lnTo>
+                  <a:lnTo>
+                    <a:pt x="5658179" y="2129833"/>
+                  </a:lnTo>
+                  <a:lnTo>
+                    <a:pt x="5729802" y="2109046"/>
+                  </a:lnTo>
+                  <a:lnTo>
+                    <a:pt x="5801424" y="2087940"/>
+                  </a:lnTo>
+                  <a:lnTo>
+                    <a:pt x="5873047" y="2066511"/>
+                  </a:lnTo>
+                  <a:lnTo>
+                    <a:pt x="5944669" y="2044752"/>
+                  </a:lnTo>
+                  <a:lnTo>
+                    <a:pt x="6016292" y="2022659"/>
+                  </a:lnTo>
+                  <a:lnTo>
+                    <a:pt x="6087914" y="2000227"/>
+                  </a:lnTo>
+                  <a:lnTo>
+                    <a:pt x="6159537" y="1977451"/>
+                  </a:lnTo>
+                  <a:lnTo>
+                    <a:pt x="6231159" y="1954325"/>
+                  </a:lnTo>
+                  <a:lnTo>
+                    <a:pt x="6302782" y="1930844"/>
+                  </a:lnTo>
+                  <a:lnTo>
+                    <a:pt x="6374404" y="1907002"/>
+                  </a:lnTo>
+                  <a:lnTo>
+                    <a:pt x="6446027" y="1882794"/>
+                  </a:lnTo>
+                  <a:lnTo>
+                    <a:pt x="6517649" y="1858215"/>
+                  </a:lnTo>
+                  <a:lnTo>
+                    <a:pt x="6589272" y="1833258"/>
+                  </a:lnTo>
+                  <a:lnTo>
+                    <a:pt x="6660894" y="1807918"/>
+                  </a:lnTo>
+                  <a:lnTo>
+                    <a:pt x="6732517" y="1782190"/>
+                  </a:lnTo>
+                  <a:lnTo>
+                    <a:pt x="6804139" y="1756066"/>
+                  </a:lnTo>
+                  <a:lnTo>
+                    <a:pt x="6875762" y="1729541"/>
+                  </a:lnTo>
+                  <a:lnTo>
+                    <a:pt x="6947385" y="1702609"/>
+                  </a:lnTo>
+                  <a:lnTo>
+                    <a:pt x="7019007" y="1675263"/>
+                  </a:lnTo>
+                  <a:lnTo>
+                    <a:pt x="7090630" y="1647497"/>
+                  </a:lnTo>
+                  <a:lnTo>
+                    <a:pt x="7090630" y="3463262"/>
+                  </a:lnTo>
+                  <a:lnTo>
+                    <a:pt x="7019007" y="3461756"/>
+                  </a:lnTo>
+                  <a:lnTo>
+                    <a:pt x="6947385" y="3460139"/>
+                  </a:lnTo>
+                  <a:lnTo>
+                    <a:pt x="6875762" y="3458403"/>
+                  </a:lnTo>
+                  <a:lnTo>
+                    <a:pt x="6804139" y="3456539"/>
+                  </a:lnTo>
+                  <a:lnTo>
+                    <a:pt x="6732517" y="3454538"/>
+                  </a:lnTo>
+                  <a:lnTo>
+                    <a:pt x="6660894" y="3452391"/>
+                  </a:lnTo>
+                  <a:lnTo>
+                    <a:pt x="6589272" y="3450085"/>
+                  </a:lnTo>
+                  <a:lnTo>
+                    <a:pt x="6517649" y="3447609"/>
+                  </a:lnTo>
+                  <a:lnTo>
+                    <a:pt x="6446027" y="3444952"/>
+                  </a:lnTo>
+                  <a:lnTo>
+                    <a:pt x="6374404" y="3442099"/>
+                  </a:lnTo>
+                  <a:lnTo>
+                    <a:pt x="6302782" y="3439036"/>
+                  </a:lnTo>
+                  <a:lnTo>
+                    <a:pt x="6231159" y="3435748"/>
+                  </a:lnTo>
+                  <a:lnTo>
+                    <a:pt x="6159537" y="3432219"/>
+                  </a:lnTo>
+                  <a:lnTo>
+                    <a:pt x="6087914" y="3428430"/>
+                  </a:lnTo>
+                  <a:lnTo>
+                    <a:pt x="6016292" y="3424362"/>
+                  </a:lnTo>
+                  <a:lnTo>
+                    <a:pt x="5944669" y="3419995"/>
+                  </a:lnTo>
+                  <a:lnTo>
+                    <a:pt x="5873047" y="3415307"/>
+                  </a:lnTo>
+                  <a:lnTo>
+                    <a:pt x="5801424" y="3410274"/>
+                  </a:lnTo>
+                  <a:lnTo>
+                    <a:pt x="5729802" y="3404871"/>
+                  </a:lnTo>
+                  <a:lnTo>
+                    <a:pt x="5658179" y="3399070"/>
+                  </a:lnTo>
+                  <a:lnTo>
+                    <a:pt x="5586557" y="3392843"/>
+                  </a:lnTo>
+                  <a:lnTo>
+                    <a:pt x="5514934" y="3386159"/>
+                  </a:lnTo>
+                  <a:lnTo>
+                    <a:pt x="5443311" y="3378982"/>
+                  </a:lnTo>
+                  <a:lnTo>
+                    <a:pt x="5371689" y="3371278"/>
+                  </a:lnTo>
+                  <a:lnTo>
+                    <a:pt x="5300066" y="3363008"/>
+                  </a:lnTo>
+                  <a:lnTo>
+                    <a:pt x="5228444" y="3354129"/>
+                  </a:lnTo>
+                  <a:lnTo>
+                    <a:pt x="5156821" y="3344597"/>
+                  </a:lnTo>
+                  <a:lnTo>
+                    <a:pt x="5085199" y="3334364"/>
+                  </a:lnTo>
+                  <a:lnTo>
+                    <a:pt x="5013576" y="3323379"/>
+                  </a:lnTo>
+                  <a:lnTo>
+                    <a:pt x="4941954" y="3311586"/>
+                  </a:lnTo>
+                  <a:lnTo>
+                    <a:pt x="4870331" y="3298926"/>
+                  </a:lnTo>
+                  <a:lnTo>
+                    <a:pt x="4798709" y="3285335"/>
+                  </a:lnTo>
+                  <a:lnTo>
+                    <a:pt x="4727086" y="3270744"/>
+                  </a:lnTo>
+                  <a:lnTo>
+                    <a:pt x="4655464" y="3255080"/>
+                  </a:lnTo>
+                  <a:lnTo>
+                    <a:pt x="4583841" y="3238265"/>
+                  </a:lnTo>
+                  <a:lnTo>
+                    <a:pt x="4512219" y="3220212"/>
+                  </a:lnTo>
+                  <a:lnTo>
+                    <a:pt x="4440596" y="3200833"/>
+                  </a:lnTo>
+                  <a:lnTo>
+                    <a:pt x="4368974" y="3180028"/>
+                  </a:lnTo>
+                  <a:lnTo>
+                    <a:pt x="4297351" y="3157693"/>
+                  </a:lnTo>
+                  <a:lnTo>
+                    <a:pt x="4225729" y="3133716"/>
+                  </a:lnTo>
+                  <a:lnTo>
+                    <a:pt x="4154106" y="3107976"/>
+                  </a:lnTo>
+                  <a:lnTo>
+                    <a:pt x="4082483" y="3080343"/>
+                  </a:lnTo>
+                  <a:lnTo>
+                    <a:pt x="4010861" y="3050677"/>
+                  </a:lnTo>
+                  <a:lnTo>
+                    <a:pt x="3939238" y="3018830"/>
+                  </a:lnTo>
+                  <a:lnTo>
+                    <a:pt x="3867616" y="2984641"/>
+                  </a:lnTo>
+                  <a:lnTo>
+                    <a:pt x="3795993" y="2947939"/>
+                  </a:lnTo>
+                  <a:lnTo>
+                    <a:pt x="3724371" y="2908537"/>
+                  </a:lnTo>
+                  <a:lnTo>
+                    <a:pt x="3652748" y="2866237"/>
+                  </a:lnTo>
+                  <a:lnTo>
+                    <a:pt x="3581126" y="2820827"/>
+                  </a:lnTo>
+                  <a:lnTo>
+                    <a:pt x="3509503" y="2772077"/>
+                  </a:lnTo>
+                  <a:lnTo>
+                    <a:pt x="3437881" y="2719743"/>
+                  </a:lnTo>
+                  <a:lnTo>
+                    <a:pt x="3366258" y="2663560"/>
+                  </a:lnTo>
+                  <a:lnTo>
+                    <a:pt x="3294636" y="2664850"/>
+                  </a:lnTo>
+                  <a:lnTo>
+                    <a:pt x="3223013" y="2677232"/>
+                  </a:lnTo>
+                  <a:lnTo>
+                    <a:pt x="3151391" y="2689427"/>
+                  </a:lnTo>
+                  <a:lnTo>
+                    <a:pt x="3079768" y="2701438"/>
+                  </a:lnTo>
+                  <a:lnTo>
+                    <a:pt x="3008146" y="2713267"/>
+                  </a:lnTo>
+                  <a:lnTo>
+                    <a:pt x="2936523" y="2724917"/>
+                  </a:lnTo>
+                  <a:lnTo>
+                    <a:pt x="2864901" y="2736391"/>
+                  </a:lnTo>
+                  <a:lnTo>
+                    <a:pt x="2793278" y="2747692"/>
+                  </a:lnTo>
+                  <a:lnTo>
+                    <a:pt x="2721655" y="2758822"/>
+                  </a:lnTo>
+                  <a:lnTo>
+                    <a:pt x="2650033" y="2769783"/>
+                  </a:lnTo>
+                  <a:lnTo>
+                    <a:pt x="2578410" y="2780579"/>
+                  </a:lnTo>
+                  <a:lnTo>
+                    <a:pt x="2506788" y="2791211"/>
+                  </a:lnTo>
+                  <a:lnTo>
+                    <a:pt x="2435165" y="2801683"/>
+                  </a:lnTo>
+                  <a:lnTo>
+                    <a:pt x="2363543" y="2811996"/>
+                  </a:lnTo>
+                  <a:lnTo>
+                    <a:pt x="2291920" y="2822154"/>
+                  </a:lnTo>
+                  <a:lnTo>
+                    <a:pt x="2220298" y="2832157"/>
+                  </a:lnTo>
+                  <a:lnTo>
+                    <a:pt x="2148675" y="2842010"/>
+                  </a:lnTo>
+                  <a:lnTo>
+                    <a:pt x="2077053" y="2851714"/>
+                  </a:lnTo>
+                  <a:lnTo>
+                    <a:pt x="2005430" y="2861270"/>
+                  </a:lnTo>
+                  <a:lnTo>
+                    <a:pt x="1933808" y="2870683"/>
+                  </a:lnTo>
+                  <a:lnTo>
+                    <a:pt x="1862185" y="2879953"/>
+                  </a:lnTo>
+                  <a:lnTo>
+                    <a:pt x="1790563" y="2889083"/>
+                  </a:lnTo>
+                  <a:lnTo>
+                    <a:pt x="1718940" y="2898074"/>
+                  </a:lnTo>
+                  <a:lnTo>
+                    <a:pt x="1647318" y="2906930"/>
+                  </a:lnTo>
+                  <a:lnTo>
+                    <a:pt x="1575695" y="2915652"/>
+                  </a:lnTo>
+                  <a:lnTo>
+                    <a:pt x="1504073" y="2924242"/>
+                  </a:lnTo>
+                  <a:lnTo>
+                    <a:pt x="1432450" y="2932702"/>
+                  </a:lnTo>
+                  <a:lnTo>
+                    <a:pt x="1360827" y="2941034"/>
+                  </a:lnTo>
+                  <a:lnTo>
+                    <a:pt x="1289205" y="2949241"/>
+                  </a:lnTo>
+                  <a:lnTo>
+                    <a:pt x="1217582" y="2957323"/>
+                  </a:lnTo>
+                  <a:lnTo>
+                    <a:pt x="1145960" y="2965283"/>
+                  </a:lnTo>
+                  <a:lnTo>
+                    <a:pt x="1074337" y="2973122"/>
+                  </a:lnTo>
+                  <a:lnTo>
+                    <a:pt x="1002715" y="2980843"/>
+                  </a:lnTo>
+                  <a:lnTo>
+                    <a:pt x="931092" y="2988448"/>
+                  </a:lnTo>
+                  <a:lnTo>
+                    <a:pt x="859470" y="2995937"/>
+                  </a:lnTo>
+                  <a:lnTo>
+                    <a:pt x="787847" y="3003313"/>
+                  </a:lnTo>
+                  <a:lnTo>
+                    <a:pt x="716225" y="3010578"/>
+                  </a:lnTo>
+                  <a:lnTo>
+                    <a:pt x="644602" y="3017732"/>
+                  </a:lnTo>
+                  <a:lnTo>
+                    <a:pt x="572980" y="3024779"/>
+                  </a:lnTo>
+                  <a:lnTo>
+                    <a:pt x="501357" y="3031719"/>
+                  </a:lnTo>
+                  <a:lnTo>
+                    <a:pt x="429735" y="3038554"/>
+                  </a:lnTo>
+                  <a:lnTo>
+                    <a:pt x="358112" y="3045285"/>
+                  </a:lnTo>
+                  <a:lnTo>
+                    <a:pt x="286490" y="3051915"/>
+                  </a:lnTo>
+                  <a:lnTo>
+                    <a:pt x="214867" y="3058445"/>
+                  </a:lnTo>
+                  <a:lnTo>
+                    <a:pt x="143245" y="3064876"/>
+                  </a:lnTo>
+                  <a:lnTo>
+                    <a:pt x="71622" y="3071209"/>
+                  </a:lnTo>
+                  <a:lnTo>
+                    <a:pt x="0" y="3077447"/>
                   </a:lnTo>
                   <a:close/>
                 </a:path>
@@ -3543,240 +3506,565 @@
         </p:sp>
         <p:sp>
           <p:nvSpPr>
+            <p:cNvPr id="21" name="pl21"/>
+            <p:cNvSpPr/>
+            <p:nvPr/>
+          </p:nvSpPr>
+          <p:spPr>
+            <a:xfrm>
+              <a:off x="3079057" y="2073503"/>
+              <a:ext cx="5183622" cy="2652277"/>
+            </a:xfrm>
+            <a:custGeom>
+              <a:avLst/>
+              <a:pathLst>
+                <a:path w="5183622" h="2652277">
+                  <a:moveTo>
+                    <a:pt x="0" y="0"/>
+                  </a:moveTo>
+                  <a:lnTo>
+                    <a:pt x="26800" y="93294"/>
+                  </a:lnTo>
+                  <a:lnTo>
+                    <a:pt x="98422" y="325541"/>
+                  </a:lnTo>
+                  <a:lnTo>
+                    <a:pt x="170045" y="541879"/>
+                  </a:lnTo>
+                  <a:lnTo>
+                    <a:pt x="241667" y="743398"/>
+                  </a:lnTo>
+                  <a:lnTo>
+                    <a:pt x="313290" y="931112"/>
+                  </a:lnTo>
+                  <a:lnTo>
+                    <a:pt x="384913" y="1105968"/>
+                  </a:lnTo>
+                  <a:lnTo>
+                    <a:pt x="456535" y="1268847"/>
+                  </a:lnTo>
+                  <a:lnTo>
+                    <a:pt x="528158" y="1420568"/>
+                  </a:lnTo>
+                  <a:lnTo>
+                    <a:pt x="599780" y="1561896"/>
+                  </a:lnTo>
+                  <a:lnTo>
+                    <a:pt x="671403" y="1693543"/>
+                  </a:lnTo>
+                  <a:lnTo>
+                    <a:pt x="743025" y="1816172"/>
+                  </a:lnTo>
+                  <a:lnTo>
+                    <a:pt x="814648" y="1930402"/>
+                  </a:lnTo>
+                  <a:lnTo>
+                    <a:pt x="886270" y="2036806"/>
+                  </a:lnTo>
+                  <a:lnTo>
+                    <a:pt x="957893" y="2135922"/>
+                  </a:lnTo>
+                  <a:lnTo>
+                    <a:pt x="1029515" y="2228248"/>
+                  </a:lnTo>
+                  <a:lnTo>
+                    <a:pt x="1101138" y="2314250"/>
+                  </a:lnTo>
+                  <a:lnTo>
+                    <a:pt x="1172760" y="2394361"/>
+                  </a:lnTo>
+                  <a:lnTo>
+                    <a:pt x="1244383" y="2468984"/>
+                  </a:lnTo>
+                  <a:lnTo>
+                    <a:pt x="1316005" y="2538496"/>
+                  </a:lnTo>
+                  <a:lnTo>
+                    <a:pt x="1387628" y="2603245"/>
+                  </a:lnTo>
+                  <a:lnTo>
+                    <a:pt x="1459250" y="2652277"/>
+                  </a:lnTo>
+                  <a:lnTo>
+                    <a:pt x="1530873" y="2639512"/>
+                  </a:lnTo>
+                  <a:lnTo>
+                    <a:pt x="1602495" y="2626550"/>
+                  </a:lnTo>
+                  <a:lnTo>
+                    <a:pt x="1674118" y="2613390"/>
+                  </a:lnTo>
+                  <a:lnTo>
+                    <a:pt x="1745741" y="2600027"/>
+                  </a:lnTo>
+                  <a:lnTo>
+                    <a:pt x="1817363" y="2586460"/>
+                  </a:lnTo>
+                  <a:lnTo>
+                    <a:pt x="1888986" y="2572684"/>
+                  </a:lnTo>
+                  <a:lnTo>
+                    <a:pt x="1960608" y="2558696"/>
+                  </a:lnTo>
+                  <a:lnTo>
+                    <a:pt x="2032231" y="2544494"/>
+                  </a:lnTo>
+                  <a:lnTo>
+                    <a:pt x="2103853" y="2530074"/>
+                  </a:lnTo>
+                  <a:lnTo>
+                    <a:pt x="2175476" y="2515432"/>
+                  </a:lnTo>
+                  <a:lnTo>
+                    <a:pt x="2247098" y="2500565"/>
+                  </a:lnTo>
+                  <a:lnTo>
+                    <a:pt x="2318721" y="2485471"/>
+                  </a:lnTo>
+                  <a:lnTo>
+                    <a:pt x="2390343" y="2470144"/>
+                  </a:lnTo>
+                  <a:lnTo>
+                    <a:pt x="2461966" y="2454583"/>
+                  </a:lnTo>
+                  <a:lnTo>
+                    <a:pt x="2533588" y="2438782"/>
+                  </a:lnTo>
+                  <a:lnTo>
+                    <a:pt x="2605211" y="2422739"/>
+                  </a:lnTo>
+                  <a:lnTo>
+                    <a:pt x="2676833" y="2406449"/>
+                  </a:lnTo>
+                  <a:lnTo>
+                    <a:pt x="2748456" y="2389909"/>
+                  </a:lnTo>
+                  <a:lnTo>
+                    <a:pt x="2820078" y="2373116"/>
+                  </a:lnTo>
+                  <a:lnTo>
+                    <a:pt x="2891701" y="2356064"/>
+                  </a:lnTo>
+                  <a:lnTo>
+                    <a:pt x="2963323" y="2338751"/>
+                  </a:lnTo>
+                  <a:lnTo>
+                    <a:pt x="3034946" y="2321172"/>
+                  </a:lnTo>
+                  <a:lnTo>
+                    <a:pt x="3106569" y="2303323"/>
+                  </a:lnTo>
+                  <a:lnTo>
+                    <a:pt x="3178191" y="2285200"/>
+                  </a:lnTo>
+                  <a:lnTo>
+                    <a:pt x="3249814" y="2266799"/>
+                  </a:lnTo>
+                  <a:lnTo>
+                    <a:pt x="3321436" y="2248115"/>
+                  </a:lnTo>
+                  <a:lnTo>
+                    <a:pt x="3393059" y="2229145"/>
+                  </a:lnTo>
+                  <a:lnTo>
+                    <a:pt x="3464681" y="2209883"/>
+                  </a:lnTo>
+                  <a:lnTo>
+                    <a:pt x="3536304" y="2190325"/>
+                  </a:lnTo>
+                  <a:lnTo>
+                    <a:pt x="3607926" y="2170467"/>
+                  </a:lnTo>
+                  <a:lnTo>
+                    <a:pt x="3679549" y="2150305"/>
+                  </a:lnTo>
+                  <a:lnTo>
+                    <a:pt x="3751171" y="2129833"/>
+                  </a:lnTo>
+                  <a:lnTo>
+                    <a:pt x="3822794" y="2109046"/>
+                  </a:lnTo>
+                  <a:lnTo>
+                    <a:pt x="3894416" y="2087940"/>
+                  </a:lnTo>
+                  <a:lnTo>
+                    <a:pt x="3966039" y="2066511"/>
+                  </a:lnTo>
+                  <a:lnTo>
+                    <a:pt x="4037661" y="2044752"/>
+                  </a:lnTo>
+                  <a:lnTo>
+                    <a:pt x="4109284" y="2022659"/>
+                  </a:lnTo>
+                  <a:lnTo>
+                    <a:pt x="4180906" y="2000227"/>
+                  </a:lnTo>
+                  <a:lnTo>
+                    <a:pt x="4252529" y="1977451"/>
+                  </a:lnTo>
+                  <a:lnTo>
+                    <a:pt x="4324151" y="1954325"/>
+                  </a:lnTo>
+                  <a:lnTo>
+                    <a:pt x="4395774" y="1930844"/>
+                  </a:lnTo>
+                  <a:lnTo>
+                    <a:pt x="4467397" y="1907002"/>
+                  </a:lnTo>
+                  <a:lnTo>
+                    <a:pt x="4539019" y="1882794"/>
+                  </a:lnTo>
+                  <a:lnTo>
+                    <a:pt x="4610642" y="1858215"/>
+                  </a:lnTo>
+                  <a:lnTo>
+                    <a:pt x="4682264" y="1833258"/>
+                  </a:lnTo>
+                  <a:lnTo>
+                    <a:pt x="4753887" y="1807918"/>
+                  </a:lnTo>
+                  <a:lnTo>
+                    <a:pt x="4825509" y="1782190"/>
+                  </a:lnTo>
+                  <a:lnTo>
+                    <a:pt x="4897132" y="1756066"/>
+                  </a:lnTo>
+                  <a:lnTo>
+                    <a:pt x="4968754" y="1729541"/>
+                  </a:lnTo>
+                  <a:lnTo>
+                    <a:pt x="5040377" y="1702609"/>
+                  </a:lnTo>
+                  <a:lnTo>
+                    <a:pt x="5111999" y="1675263"/>
+                  </a:lnTo>
+                  <a:lnTo>
+                    <a:pt x="5183622" y="1647497"/>
+                  </a:lnTo>
+                </a:path>
+              </a:pathLst>
+            </a:custGeom>
+          </p:spPr>
+          <p:txBody>
+            <a:bodyPr/>
+            <a:lstStyle/>
+            <a:p/>
+          </p:txBody>
+        </p:sp>
+        <p:sp>
+          <p:nvSpPr>
             <p:cNvPr id="22" name="pl22"/>
             <p:cNvSpPr/>
             <p:nvPr/>
           </p:nvSpPr>
           <p:spPr>
             <a:xfrm>
-              <a:off x="2675082" y="2073503"/>
-              <a:ext cx="5546218" cy="2652277"/>
+              <a:off x="1172049" y="4737063"/>
+              <a:ext cx="7090630" cy="799702"/>
             </a:xfrm>
             <a:custGeom>
               <a:avLst/>
               <a:pathLst>
-                <a:path w="5546218" h="2652277">
+                <a:path w="7090630" h="799702">
                   <a:moveTo>
-                    <a:pt x="0" y="0"/>
+                    <a:pt x="7090630" y="799702"/>
                   </a:moveTo>
                   <a:lnTo>
-                    <a:pt x="28675" y="93294"/>
-                  </a:lnTo>
-                  <a:lnTo>
-                    <a:pt x="105307" y="325541"/>
-                  </a:lnTo>
-                  <a:lnTo>
-                    <a:pt x="181940" y="541879"/>
-                  </a:lnTo>
-                  <a:lnTo>
-                    <a:pt x="258572" y="743398"/>
-                  </a:lnTo>
-                  <a:lnTo>
-                    <a:pt x="335205" y="931112"/>
-                  </a:lnTo>
-                  <a:lnTo>
-                    <a:pt x="411837" y="1105968"/>
-                  </a:lnTo>
-                  <a:lnTo>
-                    <a:pt x="488470" y="1268847"/>
-                  </a:lnTo>
-                  <a:lnTo>
-                    <a:pt x="565102" y="1420568"/>
-                  </a:lnTo>
-                  <a:lnTo>
-                    <a:pt x="641735" y="1561896"/>
-                  </a:lnTo>
-                  <a:lnTo>
-                    <a:pt x="718368" y="1693543"/>
-                  </a:lnTo>
-                  <a:lnTo>
-                    <a:pt x="795000" y="1816172"/>
-                  </a:lnTo>
-                  <a:lnTo>
-                    <a:pt x="871633" y="1930402"/>
-                  </a:lnTo>
-                  <a:lnTo>
-                    <a:pt x="948265" y="2036806"/>
-                  </a:lnTo>
-                  <a:lnTo>
-                    <a:pt x="1024898" y="2135922"/>
-                  </a:lnTo>
-                  <a:lnTo>
-                    <a:pt x="1101530" y="2228248"/>
-                  </a:lnTo>
-                  <a:lnTo>
-                    <a:pt x="1178163" y="2314250"/>
-                  </a:lnTo>
-                  <a:lnTo>
-                    <a:pt x="1254795" y="2394361"/>
-                  </a:lnTo>
-                  <a:lnTo>
-                    <a:pt x="1331428" y="2468984"/>
-                  </a:lnTo>
-                  <a:lnTo>
-                    <a:pt x="1408060" y="2538496"/>
-                  </a:lnTo>
-                  <a:lnTo>
-                    <a:pt x="1484693" y="2603245"/>
-                  </a:lnTo>
-                  <a:lnTo>
-                    <a:pt x="1561326" y="2652277"/>
-                  </a:lnTo>
-                  <a:lnTo>
-                    <a:pt x="1637958" y="2639512"/>
-                  </a:lnTo>
-                  <a:lnTo>
-                    <a:pt x="1714591" y="2626550"/>
-                  </a:lnTo>
-                  <a:lnTo>
-                    <a:pt x="1791223" y="2613390"/>
-                  </a:lnTo>
-                  <a:lnTo>
-                    <a:pt x="1867856" y="2600027"/>
-                  </a:lnTo>
-                  <a:lnTo>
-                    <a:pt x="1944488" y="2586460"/>
-                  </a:lnTo>
-                  <a:lnTo>
-                    <a:pt x="2021121" y="2572684"/>
-                  </a:lnTo>
-                  <a:lnTo>
-                    <a:pt x="2097753" y="2558696"/>
-                  </a:lnTo>
-                  <a:lnTo>
-                    <a:pt x="2174386" y="2544494"/>
-                  </a:lnTo>
-                  <a:lnTo>
-                    <a:pt x="2251019" y="2530074"/>
-                  </a:lnTo>
-                  <a:lnTo>
-                    <a:pt x="2327651" y="2515432"/>
-                  </a:lnTo>
-                  <a:lnTo>
-                    <a:pt x="2404284" y="2500565"/>
-                  </a:lnTo>
-                  <a:lnTo>
-                    <a:pt x="2480916" y="2485471"/>
-                  </a:lnTo>
-                  <a:lnTo>
-                    <a:pt x="2557549" y="2470144"/>
-                  </a:lnTo>
-                  <a:lnTo>
-                    <a:pt x="2634181" y="2454583"/>
-                  </a:lnTo>
-                  <a:lnTo>
-                    <a:pt x="2710814" y="2438782"/>
-                  </a:lnTo>
-                  <a:lnTo>
-                    <a:pt x="2787446" y="2422739"/>
-                  </a:lnTo>
-                  <a:lnTo>
-                    <a:pt x="2864079" y="2406449"/>
-                  </a:lnTo>
-                  <a:lnTo>
-                    <a:pt x="2940711" y="2389909"/>
-                  </a:lnTo>
-                  <a:lnTo>
-                    <a:pt x="3017344" y="2373116"/>
-                  </a:lnTo>
-                  <a:lnTo>
-                    <a:pt x="3093977" y="2356064"/>
-                  </a:lnTo>
-                  <a:lnTo>
-                    <a:pt x="3170609" y="2338751"/>
-                  </a:lnTo>
-                  <a:lnTo>
-                    <a:pt x="3247242" y="2321172"/>
-                  </a:lnTo>
-                  <a:lnTo>
-                    <a:pt x="3323874" y="2303323"/>
-                  </a:lnTo>
-                  <a:lnTo>
-                    <a:pt x="3400507" y="2285200"/>
-                  </a:lnTo>
-                  <a:lnTo>
-                    <a:pt x="3477139" y="2266799"/>
-                  </a:lnTo>
-                  <a:lnTo>
-                    <a:pt x="3553772" y="2248115"/>
-                  </a:lnTo>
-                  <a:lnTo>
-                    <a:pt x="3630404" y="2229145"/>
-                  </a:lnTo>
-                  <a:lnTo>
-                    <a:pt x="3707037" y="2209883"/>
-                  </a:lnTo>
-                  <a:lnTo>
-                    <a:pt x="3783669" y="2190325"/>
-                  </a:lnTo>
-                  <a:lnTo>
-                    <a:pt x="3860302" y="2170467"/>
-                  </a:lnTo>
-                  <a:lnTo>
-                    <a:pt x="3936935" y="2150305"/>
-                  </a:lnTo>
-                  <a:lnTo>
-                    <a:pt x="4013567" y="2129833"/>
-                  </a:lnTo>
-                  <a:lnTo>
-                    <a:pt x="4090200" y="2109046"/>
-                  </a:lnTo>
-                  <a:lnTo>
-                    <a:pt x="4166832" y="2087940"/>
-                  </a:lnTo>
-                  <a:lnTo>
-                    <a:pt x="4243465" y="2066511"/>
-                  </a:lnTo>
-                  <a:lnTo>
-                    <a:pt x="4320097" y="2044752"/>
-                  </a:lnTo>
-                  <a:lnTo>
-                    <a:pt x="4396730" y="2022659"/>
-                  </a:lnTo>
-                  <a:lnTo>
-                    <a:pt x="4473362" y="2000227"/>
-                  </a:lnTo>
-                  <a:lnTo>
-                    <a:pt x="4549995" y="1977451"/>
-                  </a:lnTo>
-                  <a:lnTo>
-                    <a:pt x="4626628" y="1954325"/>
-                  </a:lnTo>
-                  <a:lnTo>
-                    <a:pt x="4703260" y="1930844"/>
-                  </a:lnTo>
-                  <a:lnTo>
-                    <a:pt x="4779893" y="1907002"/>
-                  </a:lnTo>
-                  <a:lnTo>
-                    <a:pt x="4856525" y="1882794"/>
-                  </a:lnTo>
-                  <a:lnTo>
-                    <a:pt x="4933158" y="1858215"/>
-                  </a:lnTo>
-                  <a:lnTo>
-                    <a:pt x="5009790" y="1833258"/>
-                  </a:lnTo>
-                  <a:lnTo>
-                    <a:pt x="5086423" y="1807918"/>
-                  </a:lnTo>
-                  <a:lnTo>
-                    <a:pt x="5163055" y="1782190"/>
-                  </a:lnTo>
-                  <a:lnTo>
-                    <a:pt x="5239688" y="1756066"/>
-                  </a:lnTo>
-                  <a:lnTo>
-                    <a:pt x="5316320" y="1729541"/>
-                  </a:lnTo>
-                  <a:lnTo>
-                    <a:pt x="5392953" y="1702609"/>
-                  </a:lnTo>
-                  <a:lnTo>
-                    <a:pt x="5469586" y="1675263"/>
-                  </a:lnTo>
-                  <a:lnTo>
-                    <a:pt x="5546218" y="1647497"/>
+                    <a:pt x="7019007" y="798196"/>
+                  </a:lnTo>
+                  <a:lnTo>
+                    <a:pt x="6947385" y="796578"/>
+                  </a:lnTo>
+                  <a:lnTo>
+                    <a:pt x="6875762" y="794842"/>
+                  </a:lnTo>
+                  <a:lnTo>
+                    <a:pt x="6804139" y="792979"/>
+                  </a:lnTo>
+                  <a:lnTo>
+                    <a:pt x="6732517" y="790978"/>
+                  </a:lnTo>
+                  <a:lnTo>
+                    <a:pt x="6660894" y="788830"/>
+                  </a:lnTo>
+                  <a:lnTo>
+                    <a:pt x="6589272" y="786524"/>
+                  </a:lnTo>
+                  <a:lnTo>
+                    <a:pt x="6517649" y="784049"/>
+                  </a:lnTo>
+                  <a:lnTo>
+                    <a:pt x="6446027" y="781391"/>
+                  </a:lnTo>
+                  <a:lnTo>
+                    <a:pt x="6374404" y="778539"/>
+                  </a:lnTo>
+                  <a:lnTo>
+                    <a:pt x="6302782" y="775476"/>
+                  </a:lnTo>
+                  <a:lnTo>
+                    <a:pt x="6231159" y="772188"/>
+                  </a:lnTo>
+                  <a:lnTo>
+                    <a:pt x="6159537" y="768658"/>
+                  </a:lnTo>
+                  <a:lnTo>
+                    <a:pt x="6087914" y="764869"/>
+                  </a:lnTo>
+                  <a:lnTo>
+                    <a:pt x="6016292" y="760801"/>
+                  </a:lnTo>
+                  <a:lnTo>
+                    <a:pt x="5944669" y="756434"/>
+                  </a:lnTo>
+                  <a:lnTo>
+                    <a:pt x="5873047" y="751746"/>
+                  </a:lnTo>
+                  <a:lnTo>
+                    <a:pt x="5801424" y="746713"/>
+                  </a:lnTo>
+                  <a:lnTo>
+                    <a:pt x="5729802" y="741310"/>
+                  </a:lnTo>
+                  <a:lnTo>
+                    <a:pt x="5658179" y="735510"/>
+                  </a:lnTo>
+                  <a:lnTo>
+                    <a:pt x="5586557" y="729283"/>
+                  </a:lnTo>
+                  <a:lnTo>
+                    <a:pt x="5514934" y="722598"/>
+                  </a:lnTo>
+                  <a:lnTo>
+                    <a:pt x="5443311" y="715422"/>
+                  </a:lnTo>
+                  <a:lnTo>
+                    <a:pt x="5371689" y="707718"/>
+                  </a:lnTo>
+                  <a:lnTo>
+                    <a:pt x="5300066" y="699447"/>
+                  </a:lnTo>
+                  <a:lnTo>
+                    <a:pt x="5228444" y="690568"/>
+                  </a:lnTo>
+                  <a:lnTo>
+                    <a:pt x="5156821" y="681037"/>
+                  </a:lnTo>
+                  <a:lnTo>
+                    <a:pt x="5085199" y="670804"/>
+                  </a:lnTo>
+                  <a:lnTo>
+                    <a:pt x="5013576" y="659819"/>
+                  </a:lnTo>
+                  <a:lnTo>
+                    <a:pt x="4941954" y="648026"/>
+                  </a:lnTo>
+                  <a:lnTo>
+                    <a:pt x="4870331" y="635365"/>
+                  </a:lnTo>
+                  <a:lnTo>
+                    <a:pt x="4798709" y="621774"/>
+                  </a:lnTo>
+                  <a:lnTo>
+                    <a:pt x="4727086" y="607183"/>
+                  </a:lnTo>
+                  <a:lnTo>
+                    <a:pt x="4655464" y="591520"/>
+                  </a:lnTo>
+                  <a:lnTo>
+                    <a:pt x="4583841" y="574704"/>
+                  </a:lnTo>
+                  <a:lnTo>
+                    <a:pt x="4512219" y="556652"/>
+                  </a:lnTo>
+                  <a:lnTo>
+                    <a:pt x="4440596" y="537272"/>
+                  </a:lnTo>
+                  <a:lnTo>
+                    <a:pt x="4368974" y="516468"/>
+                  </a:lnTo>
+                  <a:lnTo>
+                    <a:pt x="4297351" y="494133"/>
+                  </a:lnTo>
+                  <a:lnTo>
+                    <a:pt x="4225729" y="470156"/>
+                  </a:lnTo>
+                  <a:lnTo>
+                    <a:pt x="4154106" y="444415"/>
+                  </a:lnTo>
+                  <a:lnTo>
+                    <a:pt x="4082483" y="416782"/>
+                  </a:lnTo>
+                  <a:lnTo>
+                    <a:pt x="4010861" y="387117"/>
+                  </a:lnTo>
+                  <a:lnTo>
+                    <a:pt x="3939238" y="355270"/>
+                  </a:lnTo>
+                  <a:lnTo>
+                    <a:pt x="3867616" y="321081"/>
+                  </a:lnTo>
+                  <a:lnTo>
+                    <a:pt x="3795993" y="284378"/>
+                  </a:lnTo>
+                  <a:lnTo>
+                    <a:pt x="3724371" y="244976"/>
+                  </a:lnTo>
+                  <a:lnTo>
+                    <a:pt x="3652748" y="202677"/>
+                  </a:lnTo>
+                  <a:lnTo>
+                    <a:pt x="3581126" y="157266"/>
+                  </a:lnTo>
+                  <a:lnTo>
+                    <a:pt x="3509503" y="108517"/>
+                  </a:lnTo>
+                  <a:lnTo>
+                    <a:pt x="3437881" y="56182"/>
+                  </a:lnTo>
+                  <a:lnTo>
+                    <a:pt x="3366258" y="0"/>
+                  </a:lnTo>
+                  <a:lnTo>
+                    <a:pt x="3294636" y="1289"/>
+                  </a:lnTo>
+                  <a:lnTo>
+                    <a:pt x="3223013" y="13672"/>
+                  </a:lnTo>
+                  <a:lnTo>
+                    <a:pt x="3151391" y="25867"/>
+                  </a:lnTo>
+                  <a:lnTo>
+                    <a:pt x="3079768" y="37877"/>
+                  </a:lnTo>
+                  <a:lnTo>
+                    <a:pt x="3008146" y="49707"/>
+                  </a:lnTo>
+                  <a:lnTo>
+                    <a:pt x="2936523" y="61357"/>
+                  </a:lnTo>
+                  <a:lnTo>
+                    <a:pt x="2864901" y="72831"/>
+                  </a:lnTo>
+                  <a:lnTo>
+                    <a:pt x="2793278" y="84132"/>
+                  </a:lnTo>
+                  <a:lnTo>
+                    <a:pt x="2721655" y="95261"/>
+                  </a:lnTo>
+                  <a:lnTo>
+                    <a:pt x="2650033" y="106223"/>
+                  </a:lnTo>
+                  <a:lnTo>
+                    <a:pt x="2578410" y="117018"/>
+                  </a:lnTo>
+                  <a:lnTo>
+                    <a:pt x="2506788" y="127651"/>
+                  </a:lnTo>
+                  <a:lnTo>
+                    <a:pt x="2435165" y="138123"/>
+                  </a:lnTo>
+                  <a:lnTo>
+                    <a:pt x="2363543" y="148436"/>
+                  </a:lnTo>
+                  <a:lnTo>
+                    <a:pt x="2291920" y="158593"/>
+                  </a:lnTo>
+                  <a:lnTo>
+                    <a:pt x="2220298" y="168597"/>
+                  </a:lnTo>
+                  <a:lnTo>
+                    <a:pt x="2148675" y="178450"/>
+                  </a:lnTo>
+                  <a:lnTo>
+                    <a:pt x="2077053" y="188153"/>
+                  </a:lnTo>
+                  <a:lnTo>
+                    <a:pt x="2005430" y="197710"/>
+                  </a:lnTo>
+                  <a:lnTo>
+                    <a:pt x="1933808" y="207122"/>
+                  </a:lnTo>
+                  <a:lnTo>
+                    <a:pt x="1862185" y="216392"/>
+                  </a:lnTo>
+                  <a:lnTo>
+                    <a:pt x="1790563" y="225522"/>
+                  </a:lnTo>
+                  <a:lnTo>
+                    <a:pt x="1718940" y="234514"/>
+                  </a:lnTo>
+                  <a:lnTo>
+                    <a:pt x="1647318" y="243370"/>
+                  </a:lnTo>
+                  <a:lnTo>
+                    <a:pt x="1575695" y="252092"/>
+                  </a:lnTo>
+                  <a:lnTo>
+                    <a:pt x="1504073" y="260682"/>
+                  </a:lnTo>
+                  <a:lnTo>
+                    <a:pt x="1432450" y="269142"/>
+                  </a:lnTo>
+                  <a:lnTo>
+                    <a:pt x="1360827" y="277474"/>
+                  </a:lnTo>
+                  <a:lnTo>
+                    <a:pt x="1289205" y="285680"/>
+                  </a:lnTo>
+                  <a:lnTo>
+                    <a:pt x="1217582" y="293762"/>
+                  </a:lnTo>
+                  <a:lnTo>
+                    <a:pt x="1145960" y="301722"/>
+                  </a:lnTo>
+                  <a:lnTo>
+                    <a:pt x="1074337" y="309562"/>
+                  </a:lnTo>
+                  <a:lnTo>
+                    <a:pt x="1002715" y="317283"/>
+                  </a:lnTo>
+                  <a:lnTo>
+                    <a:pt x="931092" y="324887"/>
+                  </a:lnTo>
+                  <a:lnTo>
+                    <a:pt x="859470" y="332377"/>
+                  </a:lnTo>
+                  <a:lnTo>
+                    <a:pt x="787847" y="339753"/>
+                  </a:lnTo>
+                  <a:lnTo>
+                    <a:pt x="716225" y="347017"/>
+                  </a:lnTo>
+                  <a:lnTo>
+                    <a:pt x="644602" y="354172"/>
+                  </a:lnTo>
+                  <a:lnTo>
+                    <a:pt x="572980" y="361218"/>
+                  </a:lnTo>
+                  <a:lnTo>
+                    <a:pt x="501357" y="368158"/>
+                  </a:lnTo>
+                  <a:lnTo>
+                    <a:pt x="429735" y="374993"/>
+                  </a:lnTo>
+                  <a:lnTo>
+                    <a:pt x="358112" y="381725"/>
+                  </a:lnTo>
+                  <a:lnTo>
+                    <a:pt x="286490" y="388355"/>
+                  </a:lnTo>
+                  <a:lnTo>
+                    <a:pt x="214867" y="394884"/>
+                  </a:lnTo>
+                  <a:lnTo>
+                    <a:pt x="143245" y="401315"/>
+                  </a:lnTo>
+                  <a:lnTo>
+                    <a:pt x="71622" y="407649"/>
+                  </a:lnTo>
+                  <a:lnTo>
+                    <a:pt x="0" y="413887"/>
                   </a:lnTo>
                 </a:path>
               </a:pathLst>
@@ -3796,625 +4084,312 @@
           </p:nvSpPr>
           <p:spPr>
             <a:xfrm>
-              <a:off x="817517" y="4737063"/>
-              <a:ext cx="7403783" cy="799702"/>
+              <a:off x="1172049" y="2498214"/>
+              <a:ext cx="7090630" cy="2865093"/>
             </a:xfrm>
             <a:custGeom>
               <a:avLst/>
               <a:pathLst>
-                <a:path w="7403783" h="799702">
-                  <a:moveTo>
-                    <a:pt x="7403783" y="799702"/>
-                  </a:moveTo>
-                  <a:lnTo>
-                    <a:pt x="7327150" y="798196"/>
-                  </a:lnTo>
-                  <a:lnTo>
-                    <a:pt x="7250518" y="796578"/>
-                  </a:lnTo>
-                  <a:lnTo>
-                    <a:pt x="7173885" y="794842"/>
-                  </a:lnTo>
-                  <a:lnTo>
-                    <a:pt x="7097253" y="792979"/>
-                  </a:lnTo>
-                  <a:lnTo>
-                    <a:pt x="7020620" y="790978"/>
-                  </a:lnTo>
-                  <a:lnTo>
-                    <a:pt x="6943987" y="788830"/>
-                  </a:lnTo>
-                  <a:lnTo>
-                    <a:pt x="6867355" y="786524"/>
-                  </a:lnTo>
-                  <a:lnTo>
-                    <a:pt x="6790722" y="784049"/>
-                  </a:lnTo>
-                  <a:lnTo>
-                    <a:pt x="6714090" y="781391"/>
-                  </a:lnTo>
-                  <a:lnTo>
-                    <a:pt x="6637457" y="778539"/>
-                  </a:lnTo>
-                  <a:lnTo>
-                    <a:pt x="6560825" y="775476"/>
-                  </a:lnTo>
-                  <a:lnTo>
-                    <a:pt x="6484192" y="772188"/>
-                  </a:lnTo>
-                  <a:lnTo>
-                    <a:pt x="6407560" y="768658"/>
-                  </a:lnTo>
-                  <a:lnTo>
-                    <a:pt x="6330927" y="764869"/>
-                  </a:lnTo>
-                  <a:lnTo>
-                    <a:pt x="6254294" y="760801"/>
-                  </a:lnTo>
-                  <a:lnTo>
-                    <a:pt x="6177662" y="756434"/>
-                  </a:lnTo>
-                  <a:lnTo>
-                    <a:pt x="6101029" y="751746"/>
-                  </a:lnTo>
-                  <a:lnTo>
-                    <a:pt x="6024397" y="746713"/>
-                  </a:lnTo>
-                  <a:lnTo>
-                    <a:pt x="5947764" y="741310"/>
-                  </a:lnTo>
-                  <a:lnTo>
-                    <a:pt x="5871132" y="735510"/>
-                  </a:lnTo>
-                  <a:lnTo>
-                    <a:pt x="5794499" y="729283"/>
-                  </a:lnTo>
-                  <a:lnTo>
-                    <a:pt x="5717867" y="722598"/>
-                  </a:lnTo>
-                  <a:lnTo>
-                    <a:pt x="5641234" y="715422"/>
-                  </a:lnTo>
-                  <a:lnTo>
-                    <a:pt x="5564602" y="707718"/>
-                  </a:lnTo>
-                  <a:lnTo>
-                    <a:pt x="5487969" y="699447"/>
-                  </a:lnTo>
-                  <a:lnTo>
-                    <a:pt x="5411336" y="690568"/>
-                  </a:lnTo>
-                  <a:lnTo>
-                    <a:pt x="5334704" y="681037"/>
-                  </a:lnTo>
-                  <a:lnTo>
-                    <a:pt x="5258071" y="670804"/>
-                  </a:lnTo>
-                  <a:lnTo>
-                    <a:pt x="5181439" y="659819"/>
-                  </a:lnTo>
-                  <a:lnTo>
-                    <a:pt x="5104806" y="648026"/>
-                  </a:lnTo>
-                  <a:lnTo>
-                    <a:pt x="5028174" y="635365"/>
-                  </a:lnTo>
-                  <a:lnTo>
-                    <a:pt x="4951541" y="621774"/>
-                  </a:lnTo>
-                  <a:lnTo>
-                    <a:pt x="4874909" y="607183"/>
-                  </a:lnTo>
-                  <a:lnTo>
-                    <a:pt x="4798276" y="591520"/>
-                  </a:lnTo>
-                  <a:lnTo>
-                    <a:pt x="4721644" y="574704"/>
-                  </a:lnTo>
-                  <a:lnTo>
-                    <a:pt x="4645011" y="556652"/>
-                  </a:lnTo>
-                  <a:lnTo>
-                    <a:pt x="4568378" y="537272"/>
-                  </a:lnTo>
-                  <a:lnTo>
-                    <a:pt x="4491746" y="516468"/>
-                  </a:lnTo>
-                  <a:lnTo>
-                    <a:pt x="4415113" y="494133"/>
-                  </a:lnTo>
-                  <a:lnTo>
-                    <a:pt x="4338481" y="470156"/>
-                  </a:lnTo>
-                  <a:lnTo>
-                    <a:pt x="4261848" y="444415"/>
-                  </a:lnTo>
-                  <a:lnTo>
-                    <a:pt x="4185216" y="416782"/>
-                  </a:lnTo>
-                  <a:lnTo>
-                    <a:pt x="4108583" y="387117"/>
-                  </a:lnTo>
-                  <a:lnTo>
-                    <a:pt x="4031951" y="355270"/>
-                  </a:lnTo>
-                  <a:lnTo>
-                    <a:pt x="3955318" y="321081"/>
-                  </a:lnTo>
-                  <a:lnTo>
-                    <a:pt x="3878685" y="284378"/>
-                  </a:lnTo>
-                  <a:lnTo>
-                    <a:pt x="3802053" y="244976"/>
-                  </a:lnTo>
-                  <a:lnTo>
-                    <a:pt x="3725420" y="202677"/>
-                  </a:lnTo>
-                  <a:lnTo>
-                    <a:pt x="3648788" y="157266"/>
-                  </a:lnTo>
-                  <a:lnTo>
-                    <a:pt x="3572155" y="108517"/>
-                  </a:lnTo>
-                  <a:lnTo>
-                    <a:pt x="3495523" y="56182"/>
-                  </a:lnTo>
-                  <a:lnTo>
-                    <a:pt x="3418890" y="0"/>
-                  </a:lnTo>
-                  <a:lnTo>
-                    <a:pt x="3342258" y="1289"/>
-                  </a:lnTo>
-                  <a:lnTo>
-                    <a:pt x="3265625" y="13672"/>
-                  </a:lnTo>
-                  <a:lnTo>
-                    <a:pt x="3188993" y="25867"/>
-                  </a:lnTo>
-                  <a:lnTo>
-                    <a:pt x="3112360" y="37877"/>
-                  </a:lnTo>
-                  <a:lnTo>
-                    <a:pt x="3035727" y="49707"/>
-                  </a:lnTo>
-                  <a:lnTo>
-                    <a:pt x="2959095" y="61357"/>
-                  </a:lnTo>
-                  <a:lnTo>
-                    <a:pt x="2882462" y="72831"/>
-                  </a:lnTo>
-                  <a:lnTo>
-                    <a:pt x="2805830" y="84132"/>
-                  </a:lnTo>
-                  <a:lnTo>
-                    <a:pt x="2729197" y="95261"/>
-                  </a:lnTo>
-                  <a:lnTo>
-                    <a:pt x="2652565" y="106223"/>
-                  </a:lnTo>
-                  <a:lnTo>
-                    <a:pt x="2575932" y="117018"/>
-                  </a:lnTo>
-                  <a:lnTo>
-                    <a:pt x="2499300" y="127651"/>
-                  </a:lnTo>
-                  <a:lnTo>
-                    <a:pt x="2422667" y="138123"/>
-                  </a:lnTo>
-                  <a:lnTo>
-                    <a:pt x="2346034" y="148436"/>
-                  </a:lnTo>
-                  <a:lnTo>
-                    <a:pt x="2269402" y="158593"/>
-                  </a:lnTo>
-                  <a:lnTo>
-                    <a:pt x="2192769" y="168597"/>
-                  </a:lnTo>
-                  <a:lnTo>
-                    <a:pt x="2116137" y="178450"/>
-                  </a:lnTo>
-                  <a:lnTo>
-                    <a:pt x="2039504" y="188153"/>
-                  </a:lnTo>
-                  <a:lnTo>
-                    <a:pt x="1962872" y="197710"/>
-                  </a:lnTo>
-                  <a:lnTo>
-                    <a:pt x="1886239" y="207122"/>
-                  </a:lnTo>
-                  <a:lnTo>
-                    <a:pt x="1809607" y="216392"/>
-                  </a:lnTo>
-                  <a:lnTo>
-                    <a:pt x="1732974" y="225522"/>
-                  </a:lnTo>
-                  <a:lnTo>
-                    <a:pt x="1656342" y="234514"/>
-                  </a:lnTo>
-                  <a:lnTo>
-                    <a:pt x="1579709" y="243370"/>
-                  </a:lnTo>
-                  <a:lnTo>
-                    <a:pt x="1503076" y="252092"/>
-                  </a:lnTo>
-                  <a:lnTo>
-                    <a:pt x="1426444" y="260682"/>
-                  </a:lnTo>
-                  <a:lnTo>
-                    <a:pt x="1349811" y="269142"/>
-                  </a:lnTo>
-                  <a:lnTo>
-                    <a:pt x="1273179" y="277474"/>
-                  </a:lnTo>
-                  <a:lnTo>
-                    <a:pt x="1196546" y="285680"/>
-                  </a:lnTo>
-                  <a:lnTo>
-                    <a:pt x="1119914" y="293762"/>
-                  </a:lnTo>
-                  <a:lnTo>
-                    <a:pt x="1043281" y="301722"/>
-                  </a:lnTo>
-                  <a:lnTo>
-                    <a:pt x="966649" y="309562"/>
-                  </a:lnTo>
-                  <a:lnTo>
-                    <a:pt x="890016" y="317283"/>
-                  </a:lnTo>
-                  <a:lnTo>
-                    <a:pt x="813384" y="324887"/>
-                  </a:lnTo>
-                  <a:lnTo>
-                    <a:pt x="736751" y="332377"/>
-                  </a:lnTo>
-                  <a:lnTo>
-                    <a:pt x="660118" y="339753"/>
-                  </a:lnTo>
-                  <a:lnTo>
-                    <a:pt x="583486" y="347017"/>
-                  </a:lnTo>
-                  <a:lnTo>
-                    <a:pt x="506853" y="354172"/>
-                  </a:lnTo>
-                  <a:lnTo>
-                    <a:pt x="430221" y="361218"/>
-                  </a:lnTo>
-                  <a:lnTo>
-                    <a:pt x="353588" y="368158"/>
-                  </a:lnTo>
-                  <a:lnTo>
-                    <a:pt x="276956" y="374993"/>
-                  </a:lnTo>
-                  <a:lnTo>
-                    <a:pt x="200323" y="381725"/>
-                  </a:lnTo>
-                  <a:lnTo>
-                    <a:pt x="123691" y="388355"/>
-                  </a:lnTo>
-                  <a:lnTo>
-                    <a:pt x="47058" y="394884"/>
-                  </a:lnTo>
-                  <a:lnTo>
-                    <a:pt x="0" y="398834"/>
-                  </a:lnTo>
-                </a:path>
-              </a:pathLst>
-            </a:custGeom>
-          </p:spPr>
-          <p:txBody>
-            <a:bodyPr/>
-            <a:lstStyle/>
-            <a:p/>
-          </p:txBody>
-        </p:sp>
-        <p:sp>
-          <p:nvSpPr>
-            <p:cNvPr id="24" name="pl24"/>
-            <p:cNvSpPr/>
-            <p:nvPr/>
-          </p:nvSpPr>
-          <p:spPr>
-            <a:xfrm>
-              <a:off x="817517" y="2694690"/>
-              <a:ext cx="7403783" cy="2668616"/>
-            </a:xfrm>
-            <a:custGeom>
-              <a:avLst/>
-              <a:pathLst>
-                <a:path w="7403783" h="2668616">
+                <a:path w="7090630" h="2865093">
                   <a:moveTo>
                     <a:pt x="0" y="0"/>
                   </a:moveTo>
                   <a:lnTo>
-                    <a:pt x="47058" y="48817"/>
-                  </a:lnTo>
-                  <a:lnTo>
-                    <a:pt x="123691" y="126130"/>
-                  </a:lnTo>
-                  <a:lnTo>
-                    <a:pt x="200323" y="201319"/>
-                  </a:lnTo>
-                  <a:lnTo>
-                    <a:pt x="276956" y="274442"/>
-                  </a:lnTo>
-                  <a:lnTo>
-                    <a:pt x="353588" y="345556"/>
-                  </a:lnTo>
-                  <a:lnTo>
-                    <a:pt x="430221" y="414715"/>
-                  </a:lnTo>
-                  <a:lnTo>
-                    <a:pt x="506853" y="481975"/>
-                  </a:lnTo>
-                  <a:lnTo>
-                    <a:pt x="583486" y="547386"/>
-                  </a:lnTo>
-                  <a:lnTo>
-                    <a:pt x="660118" y="611000"/>
-                  </a:lnTo>
-                  <a:lnTo>
-                    <a:pt x="736751" y="672866"/>
-                  </a:lnTo>
-                  <a:lnTo>
-                    <a:pt x="813384" y="733032"/>
-                  </a:lnTo>
-                  <a:lnTo>
-                    <a:pt x="890016" y="791545"/>
-                  </a:lnTo>
-                  <a:lnTo>
-                    <a:pt x="966649" y="848450"/>
-                  </a:lnTo>
-                  <a:lnTo>
-                    <a:pt x="1043281" y="903792"/>
-                  </a:lnTo>
-                  <a:lnTo>
-                    <a:pt x="1119914" y="957613"/>
-                  </a:lnTo>
-                  <a:lnTo>
-                    <a:pt x="1196546" y="1009955"/>
-                  </a:lnTo>
-                  <a:lnTo>
-                    <a:pt x="1273179" y="1060859"/>
-                  </a:lnTo>
-                  <a:lnTo>
-                    <a:pt x="1349811" y="1110364"/>
-                  </a:lnTo>
-                  <a:lnTo>
-                    <a:pt x="1426444" y="1158509"/>
-                  </a:lnTo>
-                  <a:lnTo>
-                    <a:pt x="1503076" y="1205332"/>
-                  </a:lnTo>
-                  <a:lnTo>
-                    <a:pt x="1579709" y="1250867"/>
-                  </a:lnTo>
-                  <a:lnTo>
-                    <a:pt x="1656342" y="1295152"/>
-                  </a:lnTo>
-                  <a:lnTo>
-                    <a:pt x="1732974" y="1338219"/>
-                  </a:lnTo>
-                  <a:lnTo>
-                    <a:pt x="1809607" y="1380104"/>
-                  </a:lnTo>
-                  <a:lnTo>
-                    <a:pt x="1886239" y="1420837"/>
-                  </a:lnTo>
-                  <a:lnTo>
-                    <a:pt x="1962872" y="1460451"/>
-                  </a:lnTo>
-                  <a:lnTo>
-                    <a:pt x="2039504" y="1498977"/>
-                  </a:lnTo>
-                  <a:lnTo>
-                    <a:pt x="2116137" y="1536444"/>
-                  </a:lnTo>
-                  <a:lnTo>
-                    <a:pt x="2192769" y="1572882"/>
-                  </a:lnTo>
-                  <a:lnTo>
-                    <a:pt x="2269402" y="1608318"/>
-                  </a:lnTo>
-                  <a:lnTo>
-                    <a:pt x="2346034" y="1642781"/>
-                  </a:lnTo>
-                  <a:lnTo>
-                    <a:pt x="2422667" y="1676297"/>
-                  </a:lnTo>
-                  <a:lnTo>
-                    <a:pt x="2499300" y="1708892"/>
-                  </a:lnTo>
-                  <a:lnTo>
-                    <a:pt x="2575932" y="1740591"/>
-                  </a:lnTo>
-                  <a:lnTo>
-                    <a:pt x="2652565" y="1771419"/>
-                  </a:lnTo>
-                  <a:lnTo>
-                    <a:pt x="2729197" y="1801400"/>
-                  </a:lnTo>
-                  <a:lnTo>
-                    <a:pt x="2805830" y="1830558"/>
-                  </a:lnTo>
-                  <a:lnTo>
-                    <a:pt x="2882462" y="1858914"/>
-                  </a:lnTo>
-                  <a:lnTo>
-                    <a:pt x="2959095" y="1886491"/>
-                  </a:lnTo>
-                  <a:lnTo>
-                    <a:pt x="3035727" y="1913311"/>
-                  </a:lnTo>
-                  <a:lnTo>
-                    <a:pt x="3112360" y="1939393"/>
-                  </a:lnTo>
-                  <a:lnTo>
-                    <a:pt x="3188993" y="1964759"/>
-                  </a:lnTo>
-                  <a:lnTo>
-                    <a:pt x="3265625" y="1989428"/>
-                  </a:lnTo>
-                  <a:lnTo>
-                    <a:pt x="3342258" y="2013419"/>
-                  </a:lnTo>
-                  <a:lnTo>
-                    <a:pt x="3418890" y="2036751"/>
-                  </a:lnTo>
-                  <a:lnTo>
-                    <a:pt x="3495523" y="2059441"/>
-                  </a:lnTo>
-                  <a:lnTo>
-                    <a:pt x="3572155" y="2081509"/>
-                  </a:lnTo>
-                  <a:lnTo>
-                    <a:pt x="3648788" y="2102970"/>
-                  </a:lnTo>
-                  <a:lnTo>
-                    <a:pt x="3725420" y="2123841"/>
-                  </a:lnTo>
-                  <a:lnTo>
-                    <a:pt x="3802053" y="2144138"/>
-                  </a:lnTo>
-                  <a:lnTo>
-                    <a:pt x="3878685" y="2163879"/>
-                  </a:lnTo>
-                  <a:lnTo>
-                    <a:pt x="3955318" y="2183076"/>
-                  </a:lnTo>
-                  <a:lnTo>
-                    <a:pt x="4031951" y="2201746"/>
-                  </a:lnTo>
-                  <a:lnTo>
-                    <a:pt x="4108583" y="2219903"/>
-                  </a:lnTo>
-                  <a:lnTo>
-                    <a:pt x="4185216" y="2237562"/>
-                  </a:lnTo>
-                  <a:lnTo>
-                    <a:pt x="4261848" y="2254735"/>
-                  </a:lnTo>
-                  <a:lnTo>
-                    <a:pt x="4338481" y="2271436"/>
-                  </a:lnTo>
-                  <a:lnTo>
-                    <a:pt x="4415113" y="2287678"/>
-                  </a:lnTo>
-                  <a:lnTo>
-                    <a:pt x="4491746" y="2303474"/>
-                  </a:lnTo>
-                  <a:lnTo>
-                    <a:pt x="4568378" y="2318836"/>
-                  </a:lnTo>
-                  <a:lnTo>
-                    <a:pt x="4645011" y="2333776"/>
-                  </a:lnTo>
-                  <a:lnTo>
-                    <a:pt x="4721644" y="2348305"/>
-                  </a:lnTo>
-                  <a:lnTo>
-                    <a:pt x="4798276" y="2362436"/>
-                  </a:lnTo>
-                  <a:lnTo>
-                    <a:pt x="4874909" y="2376177"/>
-                  </a:lnTo>
-                  <a:lnTo>
-                    <a:pt x="4951541" y="2389542"/>
-                  </a:lnTo>
-                  <a:lnTo>
-                    <a:pt x="5028174" y="2402539"/>
-                  </a:lnTo>
-                  <a:lnTo>
-                    <a:pt x="5104806" y="2415179"/>
-                  </a:lnTo>
-                  <a:lnTo>
-                    <a:pt x="5181439" y="2427471"/>
-                  </a:lnTo>
-                  <a:lnTo>
-                    <a:pt x="5258071" y="2439426"/>
-                  </a:lnTo>
-                  <a:lnTo>
-                    <a:pt x="5334704" y="2451053"/>
-                  </a:lnTo>
-                  <a:lnTo>
-                    <a:pt x="5411336" y="2462360"/>
-                  </a:lnTo>
-                  <a:lnTo>
-                    <a:pt x="5487969" y="2473356"/>
-                  </a:lnTo>
-                  <a:lnTo>
-                    <a:pt x="5564602" y="2484050"/>
-                  </a:lnTo>
-                  <a:lnTo>
-                    <a:pt x="5641234" y="2494450"/>
-                  </a:lnTo>
-                  <a:lnTo>
-                    <a:pt x="5717867" y="2504565"/>
-                  </a:lnTo>
-                  <a:lnTo>
-                    <a:pt x="5794499" y="2514402"/>
-                  </a:lnTo>
-                  <a:lnTo>
-                    <a:pt x="5871132" y="2523968"/>
-                  </a:lnTo>
-                  <a:lnTo>
-                    <a:pt x="5947764" y="2533271"/>
-                  </a:lnTo>
-                  <a:lnTo>
-                    <a:pt x="6024397" y="2542319"/>
-                  </a:lnTo>
-                  <a:lnTo>
-                    <a:pt x="6101029" y="2551118"/>
-                  </a:lnTo>
-                  <a:lnTo>
-                    <a:pt x="6177662" y="2559676"/>
-                  </a:lnTo>
-                  <a:lnTo>
-                    <a:pt x="6254294" y="2567998"/>
-                  </a:lnTo>
-                  <a:lnTo>
-                    <a:pt x="6330927" y="2576092"/>
-                  </a:lnTo>
-                  <a:lnTo>
-                    <a:pt x="6407560" y="2583963"/>
-                  </a:lnTo>
-                  <a:lnTo>
-                    <a:pt x="6484192" y="2591618"/>
-                  </a:lnTo>
-                  <a:lnTo>
-                    <a:pt x="6560825" y="2599063"/>
-                  </a:lnTo>
-                  <a:lnTo>
-                    <a:pt x="6637457" y="2606303"/>
-                  </a:lnTo>
-                  <a:lnTo>
-                    <a:pt x="6714090" y="2613344"/>
-                  </a:lnTo>
-                  <a:lnTo>
-                    <a:pt x="6790722" y="2620192"/>
-                  </a:lnTo>
-                  <a:lnTo>
-                    <a:pt x="6867355" y="2626851"/>
-                  </a:lnTo>
-                  <a:lnTo>
-                    <a:pt x="6943987" y="2633328"/>
-                  </a:lnTo>
-                  <a:lnTo>
-                    <a:pt x="7020620" y="2639626"/>
-                  </a:lnTo>
-                  <a:lnTo>
-                    <a:pt x="7097253" y="2645752"/>
-                  </a:lnTo>
-                  <a:lnTo>
-                    <a:pt x="7173885" y="2651709"/>
-                  </a:lnTo>
-                  <a:lnTo>
-                    <a:pt x="7250518" y="2657503"/>
-                  </a:lnTo>
-                  <a:lnTo>
-                    <a:pt x="7327150" y="2663137"/>
-                  </a:lnTo>
-                  <a:lnTo>
-                    <a:pt x="7403783" y="2668616"/>
+                    <a:pt x="71622" y="84053"/>
+                  </a:lnTo>
+                  <a:lnTo>
+                    <a:pt x="143245" y="165796"/>
+                  </a:lnTo>
+                  <a:lnTo>
+                    <a:pt x="214867" y="245294"/>
+                  </a:lnTo>
+                  <a:lnTo>
+                    <a:pt x="286490" y="322607"/>
+                  </a:lnTo>
+                  <a:lnTo>
+                    <a:pt x="358112" y="397796"/>
+                  </a:lnTo>
+                  <a:lnTo>
+                    <a:pt x="429735" y="470918"/>
+                  </a:lnTo>
+                  <a:lnTo>
+                    <a:pt x="501357" y="542032"/>
+                  </a:lnTo>
+                  <a:lnTo>
+                    <a:pt x="572980" y="611192"/>
+                  </a:lnTo>
+                  <a:lnTo>
+                    <a:pt x="644602" y="678451"/>
+                  </a:lnTo>
+                  <a:lnTo>
+                    <a:pt x="716225" y="743862"/>
+                  </a:lnTo>
+                  <a:lnTo>
+                    <a:pt x="787847" y="807476"/>
+                  </a:lnTo>
+                  <a:lnTo>
+                    <a:pt x="859470" y="869342"/>
+                  </a:lnTo>
+                  <a:lnTo>
+                    <a:pt x="931092" y="929509"/>
+                  </a:lnTo>
+                  <a:lnTo>
+                    <a:pt x="1002715" y="988021"/>
+                  </a:lnTo>
+                  <a:lnTo>
+                    <a:pt x="1074337" y="1044927"/>
+                  </a:lnTo>
+                  <a:lnTo>
+                    <a:pt x="1145960" y="1100268"/>
+                  </a:lnTo>
+                  <a:lnTo>
+                    <a:pt x="1217582" y="1154089"/>
+                  </a:lnTo>
+                  <a:lnTo>
+                    <a:pt x="1289205" y="1206432"/>
+                  </a:lnTo>
+                  <a:lnTo>
+                    <a:pt x="1360827" y="1257335"/>
+                  </a:lnTo>
+                  <a:lnTo>
+                    <a:pt x="1432450" y="1306841"/>
+                  </a:lnTo>
+                  <a:lnTo>
+                    <a:pt x="1504073" y="1354986"/>
+                  </a:lnTo>
+                  <a:lnTo>
+                    <a:pt x="1575695" y="1401808"/>
+                  </a:lnTo>
+                  <a:lnTo>
+                    <a:pt x="1647318" y="1447344"/>
+                  </a:lnTo>
+                  <a:lnTo>
+                    <a:pt x="1718940" y="1491628"/>
+                  </a:lnTo>
+                  <a:lnTo>
+                    <a:pt x="1790563" y="1534696"/>
+                  </a:lnTo>
+                  <a:lnTo>
+                    <a:pt x="1862185" y="1576580"/>
+                  </a:lnTo>
+                  <a:lnTo>
+                    <a:pt x="1933808" y="1617313"/>
+                  </a:lnTo>
+                  <a:lnTo>
+                    <a:pt x="2005430" y="1656927"/>
+                  </a:lnTo>
+                  <a:lnTo>
+                    <a:pt x="2077053" y="1695453"/>
+                  </a:lnTo>
+                  <a:lnTo>
+                    <a:pt x="2148675" y="1732920"/>
+                  </a:lnTo>
+                  <a:lnTo>
+                    <a:pt x="2220298" y="1769358"/>
+                  </a:lnTo>
+                  <a:lnTo>
+                    <a:pt x="2291920" y="1804794"/>
+                  </a:lnTo>
+                  <a:lnTo>
+                    <a:pt x="2363543" y="1839257"/>
+                  </a:lnTo>
+                  <a:lnTo>
+                    <a:pt x="2435165" y="1872773"/>
+                  </a:lnTo>
+                  <a:lnTo>
+                    <a:pt x="2506788" y="1905368"/>
+                  </a:lnTo>
+                  <a:lnTo>
+                    <a:pt x="2578410" y="1937067"/>
+                  </a:lnTo>
+                  <a:lnTo>
+                    <a:pt x="2650033" y="1967895"/>
+                  </a:lnTo>
+                  <a:lnTo>
+                    <a:pt x="2721655" y="1997877"/>
+                  </a:lnTo>
+                  <a:lnTo>
+                    <a:pt x="2793278" y="2027034"/>
+                  </a:lnTo>
+                  <a:lnTo>
+                    <a:pt x="2864901" y="2055390"/>
+                  </a:lnTo>
+                  <a:lnTo>
+                    <a:pt x="2936523" y="2082968"/>
+                  </a:lnTo>
+                  <a:lnTo>
+                    <a:pt x="3008146" y="2109787"/>
+                  </a:lnTo>
+                  <a:lnTo>
+                    <a:pt x="3079768" y="2135869"/>
+                  </a:lnTo>
+                  <a:lnTo>
+                    <a:pt x="3151391" y="2161235"/>
+                  </a:lnTo>
+                  <a:lnTo>
+                    <a:pt x="3223013" y="2185904"/>
+                  </a:lnTo>
+                  <a:lnTo>
+                    <a:pt x="3294636" y="2209895"/>
+                  </a:lnTo>
+                  <a:lnTo>
+                    <a:pt x="3366258" y="2233227"/>
+                  </a:lnTo>
+                  <a:lnTo>
+                    <a:pt x="3437881" y="2255918"/>
+                  </a:lnTo>
+                  <a:lnTo>
+                    <a:pt x="3509503" y="2277985"/>
+                  </a:lnTo>
+                  <a:lnTo>
+                    <a:pt x="3581126" y="2299446"/>
+                  </a:lnTo>
+                  <a:lnTo>
+                    <a:pt x="3652748" y="2320317"/>
+                  </a:lnTo>
+                  <a:lnTo>
+                    <a:pt x="3724371" y="2340615"/>
+                  </a:lnTo>
+                  <a:lnTo>
+                    <a:pt x="3795993" y="2360355"/>
+                  </a:lnTo>
+                  <a:lnTo>
+                    <a:pt x="3867616" y="2379552"/>
+                  </a:lnTo>
+                  <a:lnTo>
+                    <a:pt x="3939238" y="2398223"/>
+                  </a:lnTo>
+                  <a:lnTo>
+                    <a:pt x="4010861" y="2416380"/>
+                  </a:lnTo>
+                  <a:lnTo>
+                    <a:pt x="4082483" y="2434038"/>
+                  </a:lnTo>
+                  <a:lnTo>
+                    <a:pt x="4154106" y="2451211"/>
+                  </a:lnTo>
+                  <a:lnTo>
+                    <a:pt x="4225729" y="2467912"/>
+                  </a:lnTo>
+                  <a:lnTo>
+                    <a:pt x="4297351" y="2484154"/>
+                  </a:lnTo>
+                  <a:lnTo>
+                    <a:pt x="4368974" y="2499950"/>
+                  </a:lnTo>
+                  <a:lnTo>
+                    <a:pt x="4440596" y="2515312"/>
+                  </a:lnTo>
+                  <a:lnTo>
+                    <a:pt x="4512219" y="2530252"/>
+                  </a:lnTo>
+                  <a:lnTo>
+                    <a:pt x="4583841" y="2544782"/>
+                  </a:lnTo>
+                  <a:lnTo>
+                    <a:pt x="4655464" y="2558912"/>
+                  </a:lnTo>
+                  <a:lnTo>
+                    <a:pt x="4727086" y="2572654"/>
+                  </a:lnTo>
+                  <a:lnTo>
+                    <a:pt x="4798709" y="2586018"/>
+                  </a:lnTo>
+                  <a:lnTo>
+                    <a:pt x="4870331" y="2599015"/>
+                  </a:lnTo>
+                  <a:lnTo>
+                    <a:pt x="4941954" y="2611655"/>
+                  </a:lnTo>
+                  <a:lnTo>
+                    <a:pt x="5013576" y="2623948"/>
+                  </a:lnTo>
+                  <a:lnTo>
+                    <a:pt x="5085199" y="2635903"/>
+                  </a:lnTo>
+                  <a:lnTo>
+                    <a:pt x="5156821" y="2647529"/>
+                  </a:lnTo>
+                  <a:lnTo>
+                    <a:pt x="5228444" y="2658836"/>
+                  </a:lnTo>
+                  <a:lnTo>
+                    <a:pt x="5300066" y="2669832"/>
+                  </a:lnTo>
+                  <a:lnTo>
+                    <a:pt x="5371689" y="2680526"/>
+                  </a:lnTo>
+                  <a:lnTo>
+                    <a:pt x="5443311" y="2690927"/>
+                  </a:lnTo>
+                  <a:lnTo>
+                    <a:pt x="5514934" y="2701041"/>
+                  </a:lnTo>
+                  <a:lnTo>
+                    <a:pt x="5586557" y="2710878"/>
+                  </a:lnTo>
+                  <a:lnTo>
+                    <a:pt x="5658179" y="2720444"/>
+                  </a:lnTo>
+                  <a:lnTo>
+                    <a:pt x="5729802" y="2729748"/>
+                  </a:lnTo>
+                  <a:lnTo>
+                    <a:pt x="5801424" y="2738795"/>
+                  </a:lnTo>
+                  <a:lnTo>
+                    <a:pt x="5873047" y="2747595"/>
+                  </a:lnTo>
+                  <a:lnTo>
+                    <a:pt x="5944669" y="2756152"/>
+                  </a:lnTo>
+                  <a:lnTo>
+                    <a:pt x="6016292" y="2764474"/>
+                  </a:lnTo>
+                  <a:lnTo>
+                    <a:pt x="6087914" y="2772568"/>
+                  </a:lnTo>
+                  <a:lnTo>
+                    <a:pt x="6159537" y="2780439"/>
+                  </a:lnTo>
+                  <a:lnTo>
+                    <a:pt x="6231159" y="2788094"/>
+                  </a:lnTo>
+                  <a:lnTo>
+                    <a:pt x="6302782" y="2795539"/>
+                  </a:lnTo>
+                  <a:lnTo>
+                    <a:pt x="6374404" y="2802779"/>
+                  </a:lnTo>
+                  <a:lnTo>
+                    <a:pt x="6446027" y="2809820"/>
+                  </a:lnTo>
+                  <a:lnTo>
+                    <a:pt x="6517649" y="2816668"/>
+                  </a:lnTo>
+                  <a:lnTo>
+                    <a:pt x="6589272" y="2823327"/>
+                  </a:lnTo>
+                  <a:lnTo>
+                    <a:pt x="6660894" y="2829804"/>
+                  </a:lnTo>
+                  <a:lnTo>
+                    <a:pt x="6732517" y="2836103"/>
+                  </a:lnTo>
+                  <a:lnTo>
+                    <a:pt x="6804139" y="2842228"/>
+                  </a:lnTo>
+                  <a:lnTo>
+                    <a:pt x="6875762" y="2848185"/>
+                  </a:lnTo>
+                  <a:lnTo>
+                    <a:pt x="6947385" y="2853979"/>
+                  </a:lnTo>
+                  <a:lnTo>
+                    <a:pt x="7019007" y="2859613"/>
+                  </a:lnTo>
+                  <a:lnTo>
+                    <a:pt x="7090630" y="2865093"/>
                   </a:lnTo>
                 </a:path>
               </a:pathLst>
@@ -4437,7 +4412,7 @@
         </p:sp>
         <p:sp>
           <p:nvSpPr>
-            <p:cNvPr id="25" name="pl25"/>
+            <p:cNvPr id="24" name="pl24"/>
             <p:cNvSpPr/>
             <p:nvPr/>
           </p:nvSpPr>
@@ -4480,13 +4455,13 @@
         </p:sp>
         <p:sp>
           <p:nvSpPr>
-            <p:cNvPr id="26" name="pl26"/>
+            <p:cNvPr id="25" name="pl25"/>
             <p:cNvSpPr/>
             <p:nvPr/>
           </p:nvSpPr>
           <p:spPr>
             <a:xfrm>
-              <a:off x="4224261" y="2073503"/>
+              <a:off x="4526955" y="2073503"/>
               <a:ext cx="0" cy="3649639"/>
             </a:xfrm>
             <a:custGeom>
@@ -4523,7 +4498,7 @@
         </p:sp>
         <p:sp>
           <p:nvSpPr>
-            <p:cNvPr id="27" name="tx27"/>
+            <p:cNvPr id="26" name="tx26"/>
             <p:cNvSpPr/>
             <p:nvPr/>
           </p:nvSpPr>
@@ -4569,7 +4544,7 @@
         </p:sp>
         <p:sp>
           <p:nvSpPr>
-            <p:cNvPr id="28" name="tx28"/>
+            <p:cNvPr id="27" name="tx27"/>
             <p:cNvSpPr/>
             <p:nvPr/>
           </p:nvSpPr>
@@ -4615,7 +4590,7 @@
         </p:sp>
         <p:sp>
           <p:nvSpPr>
-            <p:cNvPr id="29" name="tx29"/>
+            <p:cNvPr id="28" name="tx28"/>
             <p:cNvSpPr/>
             <p:nvPr/>
           </p:nvSpPr>
@@ -4661,7 +4636,7 @@
         </p:sp>
         <p:sp>
           <p:nvSpPr>
-            <p:cNvPr id="30" name="tx30"/>
+            <p:cNvPr id="29" name="tx29"/>
             <p:cNvSpPr/>
             <p:nvPr/>
           </p:nvSpPr>
@@ -4707,7 +4682,7 @@
         </p:sp>
         <p:sp>
           <p:nvSpPr>
-            <p:cNvPr id="31" name="tx31"/>
+            <p:cNvPr id="30" name="tx30"/>
             <p:cNvSpPr/>
             <p:nvPr/>
           </p:nvSpPr>
@@ -4753,14 +4728,14 @@
         </p:sp>
         <p:sp>
           <p:nvSpPr>
-            <p:cNvPr id="32" name="tx32"/>
+            <p:cNvPr id="31" name="tx31"/>
             <p:cNvSpPr/>
             <p:nvPr/>
           </p:nvSpPr>
           <p:spPr>
             <a:xfrm>
-              <a:off x="2423864" y="5785772"/>
-              <a:ext cx="155356" cy="80101"/>
+              <a:off x="2421884" y="5785772"/>
+              <a:ext cx="161574" cy="80101"/>
             </a:xfrm>
             <a:prstGeom prst="rect">
               <a:avLst/>
@@ -4792,21 +4767,21 @@
                   <a:latin typeface="Helvetica"/>
                   <a:cs typeface="Helvetica"/>
                 </a:rPr>
-                <a:t>0.8</a:t>
+                <a:t>-25</a:t>
               </a:r>
             </a:p>
           </p:txBody>
         </p:sp>
         <p:sp>
           <p:nvSpPr>
-            <p:cNvPr id="33" name="tx33"/>
+            <p:cNvPr id="32" name="tx32"/>
             <p:cNvSpPr/>
             <p:nvPr/>
           </p:nvSpPr>
           <p:spPr>
             <a:xfrm>
-              <a:off x="4196521" y="5785772"/>
-              <a:ext cx="155356" cy="80101"/>
+              <a:off x="4542539" y="5785772"/>
+              <a:ext cx="62179" cy="80101"/>
             </a:xfrm>
             <a:prstGeom prst="rect">
               <a:avLst/>
@@ -4838,21 +4813,21 @@
                   <a:latin typeface="Helvetica"/>
                   <a:cs typeface="Helvetica"/>
                 </a:rPr>
-                <a:t>1.0</a:t>
+                <a:t>0</a:t>
               </a:r>
             </a:p>
           </p:txBody>
         </p:sp>
         <p:sp>
           <p:nvSpPr>
-            <p:cNvPr id="34" name="tx34"/>
+            <p:cNvPr id="33" name="tx33"/>
             <p:cNvSpPr/>
             <p:nvPr/>
           </p:nvSpPr>
           <p:spPr>
             <a:xfrm>
-              <a:off x="5969179" y="5785772"/>
-              <a:ext cx="155356" cy="80101"/>
+              <a:off x="6582407" y="5785772"/>
+              <a:ext cx="124358" cy="80101"/>
             </a:xfrm>
             <a:prstGeom prst="rect">
               <a:avLst/>
@@ -4884,67 +4859,21 @@
                   <a:latin typeface="Helvetica"/>
                   <a:cs typeface="Helvetica"/>
                 </a:rPr>
-                <a:t>1.2</a:t>
+                <a:t>25</a:t>
               </a:r>
             </a:p>
           </p:txBody>
         </p:sp>
         <p:sp>
           <p:nvSpPr>
-            <p:cNvPr id="35" name="tx35"/>
+            <p:cNvPr id="34" name="tx34"/>
             <p:cNvSpPr/>
             <p:nvPr/>
           </p:nvSpPr>
           <p:spPr>
             <a:xfrm>
-              <a:off x="7741836" y="5785772"/>
-              <a:ext cx="155356" cy="80101"/>
-            </a:xfrm>
-            <a:prstGeom prst="rect">
-              <a:avLst/>
-            </a:prstGeom>
-            <a:noFill/>
-          </p:spPr>
-          <p:txBody>
-            <a:bodyPr lIns="0" rIns="0" tIns="0" bIns="0" anchorCtr="1" anchor="ctr" wrap="none"/>
-            <a:lstStyle/>
-            <a:p>
-              <a:pPr algn="l" marL="0" marR="0" indent="0">
-                <a:lnSpc>
-                  <a:spcPts val="880"/>
-                </a:lnSpc>
-                <a:spcBef>
-                  <a:spcPts val="0"/>
-                </a:spcBef>
-                <a:spcAft>
-                  <a:spcPts val="0"/>
-                </a:spcAft>
-              </a:pPr>
-              <a:r>
-                <a:rPr sz="880">
-                  <a:solidFill>
-                    <a:srgbClr val="4D4D4D">
-                      <a:alpha val="100000"/>
-                    </a:srgbClr>
-                  </a:solidFill>
-                  <a:latin typeface="Helvetica"/>
-                  <a:cs typeface="Helvetica"/>
-                </a:rPr>
-                <a:t>1.4</a:t>
-              </a:r>
-            </a:p>
-          </p:txBody>
-        </p:sp>
-        <p:sp>
-          <p:nvSpPr>
-            <p:cNvPr id="36" name="tx36"/>
-            <p:cNvSpPr/>
-            <p:nvPr/>
-          </p:nvSpPr>
-          <p:spPr>
-            <a:xfrm>
-              <a:off x="3879271" y="5925448"/>
-              <a:ext cx="1676186" cy="100218"/>
+              <a:off x="2928340" y="5925448"/>
+              <a:ext cx="3578047" cy="100218"/>
             </a:xfrm>
             <a:prstGeom prst="rect">
               <a:avLst/>
@@ -4976,14 +4905,14 @@
                   <a:latin typeface="Helvetica"/>
                   <a:cs typeface="Helvetica"/>
                 </a:rPr>
-                <a:t>CKD-EPI Cr-Cys / CG ratio</a:t>
+                <a:t>eGFR difference (%): 100 × (CKD-EPI Cr-Cys − CG) / CG</a:t>
               </a:r>
             </a:p>
           </p:txBody>
         </p:sp>
         <p:sp>
           <p:nvSpPr>
-            <p:cNvPr id="37" name="tx37"/>
+            <p:cNvPr id="35" name="tx35"/>
             <p:cNvSpPr/>
             <p:nvPr/>
           </p:nvSpPr>
@@ -5029,14 +4958,14 @@
         </p:sp>
         <p:sp>
           <p:nvSpPr>
-            <p:cNvPr id="38" name="tx38"/>
+            <p:cNvPr id="36" name="tx36"/>
             <p:cNvSpPr/>
             <p:nvPr/>
           </p:nvSpPr>
           <p:spPr>
             <a:xfrm>
               <a:off x="817517" y="1896563"/>
-              <a:ext cx="6232916" cy="82021"/>
+              <a:ext cx="6385163" cy="82021"/>
             </a:xfrm>
             <a:prstGeom prst="rect">
               <a:avLst/>
@@ -5068,14 +4997,14 @@
                   <a:latin typeface="Helvetica"/>
                   <a:cs typeface="Helvetica"/>
                 </a:rPr>
-                <a:t>subHR per 0.1 ratio decline: 1.38 (0.84-2.27), p = 0.205  |  per IQR decline (Δ = 0.30): 2.62 (0.59-11.65)  |  IQR: [0.85, 1.15]</a:t>
+                <a:t>subHR per 10 % decline: 1.38 (0.84-2.27), p = 0.205  |  per IQR decline (Δ = 29.9 %): 2.62 (0.59-11.65)  |  IQR: [-15.0, 14.9] %</a:t>
               </a:r>
             </a:p>
           </p:txBody>
         </p:sp>
         <p:sp>
           <p:nvSpPr>
-            <p:cNvPr id="39" name="tx39"/>
+            <p:cNvPr id="37" name="tx37"/>
             <p:cNvSpPr/>
             <p:nvPr/>
           </p:nvSpPr>

--- a/docs/pptx/carbo/jx-carbo-linsubhr-ratio-hosp6.pptx
+++ b/docs/pptx/carbo/jx-carbo-linsubhr-ratio-hosp6.pptx
@@ -2265,34 +2265,26 @@
         </p:sp>
         <p:sp>
           <p:nvSpPr>
-            <p:cNvPr id="4" name="pl4"/>
+            <p:cNvPr id="4" name="rc4"/>
             <p:cNvSpPr/>
             <p:nvPr/>
           </p:nvSpPr>
           <p:spPr>
             <a:xfrm>
-              <a:off x="817517" y="5142518"/>
-              <a:ext cx="7799693" cy="0"/>
+              <a:off x="457200" y="1600200"/>
+              <a:ext cx="8229600" cy="4525962"/>
             </a:xfrm>
-            <a:custGeom>
+            <a:prstGeom prst="rect">
               <a:avLst/>
-              <a:pathLst>
-                <a:path w="7799693" h="0">
-                  <a:moveTo>
-                    <a:pt x="0" y="0"/>
-                  </a:moveTo>
-                  <a:lnTo>
-                    <a:pt x="7799693" y="0"/>
-                  </a:lnTo>
-                  <a:lnTo>
-                    <a:pt x="7799693" y="0"/>
-                  </a:lnTo>
-                </a:path>
-              </a:pathLst>
-            </a:custGeom>
-            <a:ln w="6775" cap="flat">
+            </a:prstGeom>
+            <a:solidFill>
+              <a:srgbClr val="FFFFFF">
+                <a:alpha val="100000"/>
+              </a:srgbClr>
+            </a:solidFill>
+            <a:ln w="13550" cap="rnd">
               <a:solidFill>
-                <a:srgbClr val="EBEBEB">
+                <a:srgbClr val="FFFFFF">
                   <a:alpha val="100000"/>
                 </a:srgbClr>
               </a:solidFill>
@@ -2314,21 +2306,21 @@
           </p:nvSpPr>
           <p:spPr>
             <a:xfrm>
-              <a:off x="817517" y="4313054"/>
-              <a:ext cx="7799693" cy="0"/>
+              <a:off x="887106" y="3250627"/>
+              <a:ext cx="7660515" cy="0"/>
             </a:xfrm>
             <a:custGeom>
               <a:avLst/>
               <a:pathLst>
-                <a:path w="7799693" h="0">
+                <a:path w="7660515" h="0">
                   <a:moveTo>
                     <a:pt x="0" y="0"/>
                   </a:moveTo>
                   <a:lnTo>
-                    <a:pt x="7799693" y="0"/>
-                  </a:lnTo>
-                  <a:lnTo>
-                    <a:pt x="7799693" y="0"/>
+                    <a:pt x="7660515" y="0"/>
+                  </a:lnTo>
+                  <a:lnTo>
+                    <a:pt x="7660515" y="0"/>
                   </a:lnTo>
                 </a:path>
               </a:pathLst>
@@ -2357,21 +2349,21 @@
           </p:nvSpPr>
           <p:spPr>
             <a:xfrm>
-              <a:off x="817517" y="3483591"/>
-              <a:ext cx="7799693" cy="0"/>
+              <a:off x="887106" y="2951293"/>
+              <a:ext cx="7660515" cy="0"/>
             </a:xfrm>
             <a:custGeom>
               <a:avLst/>
               <a:pathLst>
-                <a:path w="7799693" h="0">
+                <a:path w="7660515" h="0">
                   <a:moveTo>
                     <a:pt x="0" y="0"/>
                   </a:moveTo>
                   <a:lnTo>
-                    <a:pt x="7799693" y="0"/>
-                  </a:lnTo>
-                  <a:lnTo>
-                    <a:pt x="7799693" y="0"/>
+                    <a:pt x="7660515" y="0"/>
+                  </a:lnTo>
+                  <a:lnTo>
+                    <a:pt x="7660515" y="0"/>
                   </a:lnTo>
                 </a:path>
               </a:pathLst>
@@ -2400,21 +2392,21 @@
           </p:nvSpPr>
           <p:spPr>
             <a:xfrm>
-              <a:off x="817517" y="2654127"/>
-              <a:ext cx="7799693" cy="0"/>
+              <a:off x="887106" y="2651959"/>
+              <a:ext cx="7660515" cy="0"/>
             </a:xfrm>
             <a:custGeom>
               <a:avLst/>
               <a:pathLst>
-                <a:path w="7799693" h="0">
+                <a:path w="7660515" h="0">
                   <a:moveTo>
                     <a:pt x="0" y="0"/>
                   </a:moveTo>
                   <a:lnTo>
-                    <a:pt x="7799693" y="0"/>
-                  </a:lnTo>
-                  <a:lnTo>
-                    <a:pt x="7799693" y="0"/>
+                    <a:pt x="7660515" y="0"/>
+                  </a:lnTo>
+                  <a:lnTo>
+                    <a:pt x="7660515" y="0"/>
                   </a:lnTo>
                 </a:path>
               </a:pathLst>
@@ -2443,21 +2435,21 @@
           </p:nvSpPr>
           <p:spPr>
             <a:xfrm>
-              <a:off x="1467192" y="2073503"/>
-              <a:ext cx="0" cy="3649639"/>
+              <a:off x="887106" y="2352625"/>
+              <a:ext cx="7660515" cy="0"/>
             </a:xfrm>
             <a:custGeom>
               <a:avLst/>
               <a:pathLst>
-                <a:path w="0" h="3649639">
+                <a:path w="7660515" h="0">
                   <a:moveTo>
-                    <a:pt x="0" y="3649639"/>
+                    <a:pt x="0" y="0"/>
                   </a:moveTo>
                   <a:lnTo>
-                    <a:pt x="0" y="0"/>
-                  </a:lnTo>
-                  <a:lnTo>
-                    <a:pt x="0" y="0"/>
+                    <a:pt x="7660515" y="0"/>
+                  </a:lnTo>
+                  <a:lnTo>
+                    <a:pt x="7660515" y="0"/>
                   </a:lnTo>
                 </a:path>
               </a:pathLst>
@@ -2486,15 +2478,15 @@
           </p:nvSpPr>
           <p:spPr>
             <a:xfrm>
-              <a:off x="3538150" y="2073503"/>
-              <a:ext cx="0" cy="3649639"/>
+              <a:off x="1525188" y="2143092"/>
+              <a:ext cx="0" cy="1317069"/>
             </a:xfrm>
             <a:custGeom>
               <a:avLst/>
               <a:pathLst>
-                <a:path w="0" h="3649639">
+                <a:path w="0" h="1317069">
                   <a:moveTo>
-                    <a:pt x="0" y="3649639"/>
+                    <a:pt x="0" y="1317069"/>
                   </a:moveTo>
                   <a:lnTo>
                     <a:pt x="0" y="0"/>
@@ -2529,15 +2521,15 @@
           </p:nvSpPr>
           <p:spPr>
             <a:xfrm>
-              <a:off x="5609107" y="2073503"/>
-              <a:ext cx="0" cy="3649639"/>
+              <a:off x="3559192" y="2143092"/>
+              <a:ext cx="0" cy="1317069"/>
             </a:xfrm>
             <a:custGeom>
               <a:avLst/>
               <a:pathLst>
-                <a:path w="0" h="3649639">
+                <a:path w="0" h="1317069">
                   <a:moveTo>
-                    <a:pt x="0" y="3649639"/>
+                    <a:pt x="0" y="1317069"/>
                   </a:moveTo>
                   <a:lnTo>
                     <a:pt x="0" y="0"/>
@@ -2572,15 +2564,15 @@
           </p:nvSpPr>
           <p:spPr>
             <a:xfrm>
-              <a:off x="7680065" y="2073503"/>
-              <a:ext cx="0" cy="3649639"/>
+              <a:off x="5593195" y="2143092"/>
+              <a:ext cx="0" cy="1317069"/>
             </a:xfrm>
             <a:custGeom>
               <a:avLst/>
               <a:pathLst>
-                <a:path w="0" h="3649639">
+                <a:path w="0" h="1317069">
                   <a:moveTo>
-                    <a:pt x="0" y="3649639"/>
+                    <a:pt x="0" y="1317069"/>
                   </a:moveTo>
                   <a:lnTo>
                     <a:pt x="0" y="0"/>
@@ -2615,26 +2607,26 @@
           </p:nvSpPr>
           <p:spPr>
             <a:xfrm>
-              <a:off x="817517" y="5557249"/>
-              <a:ext cx="7799693" cy="0"/>
+              <a:off x="7627198" y="2143092"/>
+              <a:ext cx="0" cy="1317069"/>
             </a:xfrm>
             <a:custGeom>
               <a:avLst/>
               <a:pathLst>
-                <a:path w="7799693" h="0">
+                <a:path w="0" h="1317069">
                   <a:moveTo>
+                    <a:pt x="0" y="1317069"/>
+                  </a:moveTo>
+                  <a:lnTo>
                     <a:pt x="0" y="0"/>
-                  </a:moveTo>
-                  <a:lnTo>
-                    <a:pt x="7799693" y="0"/>
-                  </a:lnTo>
-                  <a:lnTo>
-                    <a:pt x="7799693" y="0"/>
+                  </a:lnTo>
+                  <a:lnTo>
+                    <a:pt x="0" y="0"/>
                   </a:lnTo>
                 </a:path>
               </a:pathLst>
             </a:custGeom>
-            <a:ln w="13550" cap="flat">
+            <a:ln w="6775" cap="flat">
               <a:solidFill>
                 <a:srgbClr val="EBEBEB">
                   <a:alpha val="100000"/>
@@ -2658,21 +2650,21 @@
           </p:nvSpPr>
           <p:spPr>
             <a:xfrm>
-              <a:off x="817517" y="4727786"/>
-              <a:ext cx="7799693" cy="0"/>
+              <a:off x="887106" y="3400294"/>
+              <a:ext cx="7660515" cy="0"/>
             </a:xfrm>
             <a:custGeom>
               <a:avLst/>
               <a:pathLst>
-                <a:path w="7799693" h="0">
+                <a:path w="7660515" h="0">
                   <a:moveTo>
                     <a:pt x="0" y="0"/>
                   </a:moveTo>
                   <a:lnTo>
-                    <a:pt x="7799693" y="0"/>
-                  </a:lnTo>
-                  <a:lnTo>
-                    <a:pt x="7799693" y="0"/>
+                    <a:pt x="7660515" y="0"/>
+                  </a:lnTo>
+                  <a:lnTo>
+                    <a:pt x="7660515" y="0"/>
                   </a:lnTo>
                 </a:path>
               </a:pathLst>
@@ -2701,21 +2693,21 @@
           </p:nvSpPr>
           <p:spPr>
             <a:xfrm>
-              <a:off x="817517" y="3898322"/>
-              <a:ext cx="7799693" cy="0"/>
+              <a:off x="887106" y="3100960"/>
+              <a:ext cx="7660515" cy="0"/>
             </a:xfrm>
             <a:custGeom>
               <a:avLst/>
               <a:pathLst>
-                <a:path w="7799693" h="0">
+                <a:path w="7660515" h="0">
                   <a:moveTo>
                     <a:pt x="0" y="0"/>
                   </a:moveTo>
                   <a:lnTo>
-                    <a:pt x="7799693" y="0"/>
-                  </a:lnTo>
-                  <a:lnTo>
-                    <a:pt x="7799693" y="0"/>
+                    <a:pt x="7660515" y="0"/>
+                  </a:lnTo>
+                  <a:lnTo>
+                    <a:pt x="7660515" y="0"/>
                   </a:lnTo>
                 </a:path>
               </a:pathLst>
@@ -2744,21 +2736,21 @@
           </p:nvSpPr>
           <p:spPr>
             <a:xfrm>
-              <a:off x="817517" y="3068859"/>
-              <a:ext cx="7799693" cy="0"/>
+              <a:off x="887106" y="2801626"/>
+              <a:ext cx="7660515" cy="0"/>
             </a:xfrm>
             <a:custGeom>
               <a:avLst/>
               <a:pathLst>
-                <a:path w="7799693" h="0">
+                <a:path w="7660515" h="0">
                   <a:moveTo>
                     <a:pt x="0" y="0"/>
                   </a:moveTo>
                   <a:lnTo>
-                    <a:pt x="7799693" y="0"/>
-                  </a:lnTo>
-                  <a:lnTo>
-                    <a:pt x="7799693" y="0"/>
+                    <a:pt x="7660515" y="0"/>
+                  </a:lnTo>
+                  <a:lnTo>
+                    <a:pt x="7660515" y="0"/>
                   </a:lnTo>
                 </a:path>
               </a:pathLst>
@@ -2787,21 +2779,21 @@
           </p:nvSpPr>
           <p:spPr>
             <a:xfrm>
-              <a:off x="817517" y="2239395"/>
-              <a:ext cx="7799693" cy="0"/>
+              <a:off x="887106" y="2502292"/>
+              <a:ext cx="7660515" cy="0"/>
             </a:xfrm>
             <a:custGeom>
               <a:avLst/>
               <a:pathLst>
-                <a:path w="7799693" h="0">
+                <a:path w="7660515" h="0">
                   <a:moveTo>
                     <a:pt x="0" y="0"/>
                   </a:moveTo>
                   <a:lnTo>
-                    <a:pt x="7799693" y="0"/>
-                  </a:lnTo>
-                  <a:lnTo>
-                    <a:pt x="7799693" y="0"/>
+                    <a:pt x="7660515" y="0"/>
+                  </a:lnTo>
+                  <a:lnTo>
+                    <a:pt x="7660515" y="0"/>
                   </a:lnTo>
                 </a:path>
               </a:pathLst>
@@ -2830,21 +2822,21 @@
           </p:nvSpPr>
           <p:spPr>
             <a:xfrm>
-              <a:off x="2502671" y="2073503"/>
-              <a:ext cx="0" cy="3649639"/>
+              <a:off x="887106" y="2202958"/>
+              <a:ext cx="7660515" cy="0"/>
             </a:xfrm>
             <a:custGeom>
               <a:avLst/>
               <a:pathLst>
-                <a:path w="0" h="3649639">
+                <a:path w="7660515" h="0">
                   <a:moveTo>
-                    <a:pt x="0" y="3649639"/>
+                    <a:pt x="0" y="0"/>
                   </a:moveTo>
                   <a:lnTo>
-                    <a:pt x="0" y="0"/>
-                  </a:lnTo>
-                  <a:lnTo>
-                    <a:pt x="0" y="0"/>
+                    <a:pt x="7660515" y="0"/>
+                  </a:lnTo>
+                  <a:lnTo>
+                    <a:pt x="7660515" y="0"/>
                   </a:lnTo>
                 </a:path>
               </a:pathLst>
@@ -2873,15 +2865,15 @@
           </p:nvSpPr>
           <p:spPr>
             <a:xfrm>
-              <a:off x="4573628" y="2073503"/>
-              <a:ext cx="0" cy="3649639"/>
+              <a:off x="2542190" y="2143092"/>
+              <a:ext cx="0" cy="1317069"/>
             </a:xfrm>
             <a:custGeom>
               <a:avLst/>
               <a:pathLst>
-                <a:path w="0" h="3649639">
+                <a:path w="0" h="1317069">
                   <a:moveTo>
-                    <a:pt x="0" y="3649639"/>
+                    <a:pt x="0" y="1317069"/>
                   </a:moveTo>
                   <a:lnTo>
                     <a:pt x="0" y="0"/>
@@ -2916,15 +2908,15 @@
           </p:nvSpPr>
           <p:spPr>
             <a:xfrm>
-              <a:off x="6644586" y="2073503"/>
-              <a:ext cx="0" cy="3649639"/>
+              <a:off x="4576193" y="2143092"/>
+              <a:ext cx="0" cy="1317069"/>
             </a:xfrm>
             <a:custGeom>
               <a:avLst/>
               <a:pathLst>
-                <a:path w="0" h="3649639">
+                <a:path w="0" h="1317069">
                   <a:moveTo>
-                    <a:pt x="0" y="3649639"/>
+                    <a:pt x="0" y="1317069"/>
                   </a:moveTo>
                   <a:lnTo>
                     <a:pt x="0" y="0"/>
@@ -2953,540 +2945,583 @@
         </p:sp>
         <p:sp>
           <p:nvSpPr>
-            <p:cNvPr id="20" name="pg20"/>
+            <p:cNvPr id="20" name="pl20"/>
             <p:cNvSpPr/>
             <p:nvPr/>
           </p:nvSpPr>
           <p:spPr>
             <a:xfrm>
-              <a:off x="1172049" y="2073503"/>
-              <a:ext cx="7090630" cy="3463262"/>
+              <a:off x="6610197" y="2143092"/>
+              <a:ext cx="0" cy="1317069"/>
             </a:xfrm>
             <a:custGeom>
               <a:avLst/>
               <a:pathLst>
-                <a:path w="7090630" h="3463262">
+                <a:path w="0" h="1317069">
                   <a:moveTo>
-                    <a:pt x="1907007" y="0"/>
+                    <a:pt x="0" y="1317069"/>
                   </a:moveTo>
                   <a:lnTo>
-                    <a:pt x="1933808" y="93294"/>
-                  </a:lnTo>
-                  <a:lnTo>
-                    <a:pt x="2005430" y="325541"/>
-                  </a:lnTo>
-                  <a:lnTo>
-                    <a:pt x="2077053" y="541879"/>
-                  </a:lnTo>
-                  <a:lnTo>
-                    <a:pt x="2148675" y="743398"/>
-                  </a:lnTo>
-                  <a:lnTo>
-                    <a:pt x="2220298" y="931112"/>
-                  </a:lnTo>
-                  <a:lnTo>
-                    <a:pt x="2291920" y="1105968"/>
-                  </a:lnTo>
-                  <a:lnTo>
-                    <a:pt x="2363543" y="1268847"/>
-                  </a:lnTo>
-                  <a:lnTo>
-                    <a:pt x="2435165" y="1420568"/>
-                  </a:lnTo>
-                  <a:lnTo>
-                    <a:pt x="2506788" y="1561896"/>
-                  </a:lnTo>
-                  <a:lnTo>
-                    <a:pt x="2578410" y="1693543"/>
-                  </a:lnTo>
-                  <a:lnTo>
-                    <a:pt x="2650033" y="1816172"/>
-                  </a:lnTo>
-                  <a:lnTo>
-                    <a:pt x="2721655" y="1930402"/>
-                  </a:lnTo>
-                  <a:lnTo>
-                    <a:pt x="2793278" y="2036806"/>
-                  </a:lnTo>
-                  <a:lnTo>
-                    <a:pt x="2864901" y="2135922"/>
-                  </a:lnTo>
-                  <a:lnTo>
-                    <a:pt x="2936523" y="2228248"/>
-                  </a:lnTo>
-                  <a:lnTo>
-                    <a:pt x="3008146" y="2314250"/>
-                  </a:lnTo>
-                  <a:lnTo>
-                    <a:pt x="3079768" y="2394361"/>
-                  </a:lnTo>
-                  <a:lnTo>
-                    <a:pt x="3151391" y="2468984"/>
-                  </a:lnTo>
-                  <a:lnTo>
-                    <a:pt x="3223013" y="2538496"/>
-                  </a:lnTo>
-                  <a:lnTo>
-                    <a:pt x="3294636" y="2603245"/>
-                  </a:lnTo>
-                  <a:lnTo>
-                    <a:pt x="3366258" y="2652277"/>
-                  </a:lnTo>
-                  <a:lnTo>
-                    <a:pt x="3437881" y="2639512"/>
-                  </a:lnTo>
-                  <a:lnTo>
-                    <a:pt x="3509503" y="2626550"/>
-                  </a:lnTo>
-                  <a:lnTo>
-                    <a:pt x="3581126" y="2613390"/>
-                  </a:lnTo>
-                  <a:lnTo>
-                    <a:pt x="3652748" y="2600027"/>
-                  </a:lnTo>
-                  <a:lnTo>
-                    <a:pt x="3724371" y="2586460"/>
-                  </a:lnTo>
-                  <a:lnTo>
-                    <a:pt x="3795993" y="2572684"/>
-                  </a:lnTo>
-                  <a:lnTo>
-                    <a:pt x="3867616" y="2558696"/>
-                  </a:lnTo>
-                  <a:lnTo>
-                    <a:pt x="3939238" y="2544494"/>
-                  </a:lnTo>
-                  <a:lnTo>
-                    <a:pt x="4010861" y="2530074"/>
-                  </a:lnTo>
-                  <a:lnTo>
-                    <a:pt x="4082483" y="2515432"/>
-                  </a:lnTo>
-                  <a:lnTo>
-                    <a:pt x="4154106" y="2500565"/>
-                  </a:lnTo>
-                  <a:lnTo>
-                    <a:pt x="4225729" y="2485471"/>
-                  </a:lnTo>
-                  <a:lnTo>
-                    <a:pt x="4297351" y="2470144"/>
-                  </a:lnTo>
-                  <a:lnTo>
-                    <a:pt x="4368974" y="2454583"/>
-                  </a:lnTo>
-                  <a:lnTo>
-                    <a:pt x="4440596" y="2438782"/>
-                  </a:lnTo>
-                  <a:lnTo>
-                    <a:pt x="4512219" y="2422739"/>
-                  </a:lnTo>
-                  <a:lnTo>
-                    <a:pt x="4583841" y="2406449"/>
-                  </a:lnTo>
-                  <a:lnTo>
-                    <a:pt x="4655464" y="2389909"/>
-                  </a:lnTo>
-                  <a:lnTo>
-                    <a:pt x="4727086" y="2373116"/>
-                  </a:lnTo>
-                  <a:lnTo>
-                    <a:pt x="4798709" y="2356064"/>
-                  </a:lnTo>
-                  <a:lnTo>
-                    <a:pt x="4870331" y="2338751"/>
-                  </a:lnTo>
-                  <a:lnTo>
-                    <a:pt x="4941954" y="2321172"/>
-                  </a:lnTo>
-                  <a:lnTo>
-                    <a:pt x="5013576" y="2303323"/>
-                  </a:lnTo>
-                  <a:lnTo>
-                    <a:pt x="5085199" y="2285200"/>
-                  </a:lnTo>
-                  <a:lnTo>
-                    <a:pt x="5156821" y="2266799"/>
-                  </a:lnTo>
-                  <a:lnTo>
-                    <a:pt x="5228444" y="2248115"/>
-                  </a:lnTo>
-                  <a:lnTo>
-                    <a:pt x="5300066" y="2229145"/>
-                  </a:lnTo>
-                  <a:lnTo>
-                    <a:pt x="5371689" y="2209883"/>
-                  </a:lnTo>
-                  <a:lnTo>
-                    <a:pt x="5443311" y="2190325"/>
-                  </a:lnTo>
-                  <a:lnTo>
-                    <a:pt x="5514934" y="2170467"/>
-                  </a:lnTo>
-                  <a:lnTo>
-                    <a:pt x="5586557" y="2150305"/>
-                  </a:lnTo>
-                  <a:lnTo>
-                    <a:pt x="5658179" y="2129833"/>
-                  </a:lnTo>
-                  <a:lnTo>
-                    <a:pt x="5729802" y="2109046"/>
-                  </a:lnTo>
-                  <a:lnTo>
-                    <a:pt x="5801424" y="2087940"/>
-                  </a:lnTo>
-                  <a:lnTo>
-                    <a:pt x="5873047" y="2066511"/>
-                  </a:lnTo>
-                  <a:lnTo>
-                    <a:pt x="5944669" y="2044752"/>
-                  </a:lnTo>
-                  <a:lnTo>
-                    <a:pt x="6016292" y="2022659"/>
-                  </a:lnTo>
-                  <a:lnTo>
-                    <a:pt x="6087914" y="2000227"/>
-                  </a:lnTo>
-                  <a:lnTo>
-                    <a:pt x="6159537" y="1977451"/>
-                  </a:lnTo>
-                  <a:lnTo>
-                    <a:pt x="6231159" y="1954325"/>
-                  </a:lnTo>
-                  <a:lnTo>
-                    <a:pt x="6302782" y="1930844"/>
-                  </a:lnTo>
-                  <a:lnTo>
-                    <a:pt x="6374404" y="1907002"/>
-                  </a:lnTo>
-                  <a:lnTo>
-                    <a:pt x="6446027" y="1882794"/>
-                  </a:lnTo>
-                  <a:lnTo>
-                    <a:pt x="6517649" y="1858215"/>
-                  </a:lnTo>
-                  <a:lnTo>
-                    <a:pt x="6589272" y="1833258"/>
-                  </a:lnTo>
-                  <a:lnTo>
-                    <a:pt x="6660894" y="1807918"/>
-                  </a:lnTo>
-                  <a:lnTo>
-                    <a:pt x="6732517" y="1782190"/>
-                  </a:lnTo>
-                  <a:lnTo>
-                    <a:pt x="6804139" y="1756066"/>
-                  </a:lnTo>
-                  <a:lnTo>
-                    <a:pt x="6875762" y="1729541"/>
-                  </a:lnTo>
-                  <a:lnTo>
-                    <a:pt x="6947385" y="1702609"/>
-                  </a:lnTo>
-                  <a:lnTo>
-                    <a:pt x="7019007" y="1675263"/>
-                  </a:lnTo>
-                  <a:lnTo>
-                    <a:pt x="7090630" y="1647497"/>
-                  </a:lnTo>
-                  <a:lnTo>
-                    <a:pt x="7090630" y="3463262"/>
-                  </a:lnTo>
-                  <a:lnTo>
-                    <a:pt x="7019007" y="3461756"/>
-                  </a:lnTo>
-                  <a:lnTo>
-                    <a:pt x="6947385" y="3460139"/>
-                  </a:lnTo>
-                  <a:lnTo>
-                    <a:pt x="6875762" y="3458403"/>
-                  </a:lnTo>
-                  <a:lnTo>
-                    <a:pt x="6804139" y="3456539"/>
-                  </a:lnTo>
-                  <a:lnTo>
-                    <a:pt x="6732517" y="3454538"/>
-                  </a:lnTo>
-                  <a:lnTo>
-                    <a:pt x="6660894" y="3452391"/>
-                  </a:lnTo>
-                  <a:lnTo>
-                    <a:pt x="6589272" y="3450085"/>
-                  </a:lnTo>
-                  <a:lnTo>
-                    <a:pt x="6517649" y="3447609"/>
-                  </a:lnTo>
-                  <a:lnTo>
-                    <a:pt x="6446027" y="3444952"/>
-                  </a:lnTo>
-                  <a:lnTo>
-                    <a:pt x="6374404" y="3442099"/>
-                  </a:lnTo>
-                  <a:lnTo>
-                    <a:pt x="6302782" y="3439036"/>
-                  </a:lnTo>
-                  <a:lnTo>
-                    <a:pt x="6231159" y="3435748"/>
-                  </a:lnTo>
-                  <a:lnTo>
-                    <a:pt x="6159537" y="3432219"/>
-                  </a:lnTo>
-                  <a:lnTo>
-                    <a:pt x="6087914" y="3428430"/>
-                  </a:lnTo>
-                  <a:lnTo>
-                    <a:pt x="6016292" y="3424362"/>
-                  </a:lnTo>
-                  <a:lnTo>
-                    <a:pt x="5944669" y="3419995"/>
-                  </a:lnTo>
-                  <a:lnTo>
-                    <a:pt x="5873047" y="3415307"/>
-                  </a:lnTo>
-                  <a:lnTo>
-                    <a:pt x="5801424" y="3410274"/>
-                  </a:lnTo>
-                  <a:lnTo>
-                    <a:pt x="5729802" y="3404871"/>
-                  </a:lnTo>
-                  <a:lnTo>
-                    <a:pt x="5658179" y="3399070"/>
-                  </a:lnTo>
-                  <a:lnTo>
-                    <a:pt x="5586557" y="3392843"/>
-                  </a:lnTo>
-                  <a:lnTo>
-                    <a:pt x="5514934" y="3386159"/>
-                  </a:lnTo>
-                  <a:lnTo>
-                    <a:pt x="5443311" y="3378982"/>
-                  </a:lnTo>
-                  <a:lnTo>
-                    <a:pt x="5371689" y="3371278"/>
-                  </a:lnTo>
-                  <a:lnTo>
-                    <a:pt x="5300066" y="3363008"/>
-                  </a:lnTo>
-                  <a:lnTo>
-                    <a:pt x="5228444" y="3354129"/>
-                  </a:lnTo>
-                  <a:lnTo>
-                    <a:pt x="5156821" y="3344597"/>
-                  </a:lnTo>
-                  <a:lnTo>
-                    <a:pt x="5085199" y="3334364"/>
-                  </a:lnTo>
-                  <a:lnTo>
-                    <a:pt x="5013576" y="3323379"/>
-                  </a:lnTo>
-                  <a:lnTo>
-                    <a:pt x="4941954" y="3311586"/>
-                  </a:lnTo>
-                  <a:lnTo>
-                    <a:pt x="4870331" y="3298926"/>
-                  </a:lnTo>
-                  <a:lnTo>
-                    <a:pt x="4798709" y="3285335"/>
-                  </a:lnTo>
-                  <a:lnTo>
-                    <a:pt x="4727086" y="3270744"/>
-                  </a:lnTo>
-                  <a:lnTo>
-                    <a:pt x="4655464" y="3255080"/>
-                  </a:lnTo>
-                  <a:lnTo>
-                    <a:pt x="4583841" y="3238265"/>
-                  </a:lnTo>
-                  <a:lnTo>
-                    <a:pt x="4512219" y="3220212"/>
-                  </a:lnTo>
-                  <a:lnTo>
-                    <a:pt x="4440596" y="3200833"/>
-                  </a:lnTo>
-                  <a:lnTo>
-                    <a:pt x="4368974" y="3180028"/>
-                  </a:lnTo>
-                  <a:lnTo>
-                    <a:pt x="4297351" y="3157693"/>
-                  </a:lnTo>
-                  <a:lnTo>
-                    <a:pt x="4225729" y="3133716"/>
-                  </a:lnTo>
-                  <a:lnTo>
-                    <a:pt x="4154106" y="3107976"/>
-                  </a:lnTo>
-                  <a:lnTo>
-                    <a:pt x="4082483" y="3080343"/>
-                  </a:lnTo>
-                  <a:lnTo>
-                    <a:pt x="4010861" y="3050677"/>
-                  </a:lnTo>
-                  <a:lnTo>
-                    <a:pt x="3939238" y="3018830"/>
-                  </a:lnTo>
-                  <a:lnTo>
-                    <a:pt x="3867616" y="2984641"/>
-                  </a:lnTo>
-                  <a:lnTo>
-                    <a:pt x="3795993" y="2947939"/>
-                  </a:lnTo>
-                  <a:lnTo>
-                    <a:pt x="3724371" y="2908537"/>
-                  </a:lnTo>
-                  <a:lnTo>
-                    <a:pt x="3652748" y="2866237"/>
-                  </a:lnTo>
-                  <a:lnTo>
-                    <a:pt x="3581126" y="2820827"/>
-                  </a:lnTo>
-                  <a:lnTo>
-                    <a:pt x="3509503" y="2772077"/>
-                  </a:lnTo>
-                  <a:lnTo>
-                    <a:pt x="3437881" y="2719743"/>
-                  </a:lnTo>
-                  <a:lnTo>
-                    <a:pt x="3366258" y="2663560"/>
-                  </a:lnTo>
-                  <a:lnTo>
-                    <a:pt x="3294636" y="2664850"/>
-                  </a:lnTo>
-                  <a:lnTo>
-                    <a:pt x="3223013" y="2677232"/>
-                  </a:lnTo>
-                  <a:lnTo>
-                    <a:pt x="3151391" y="2689427"/>
-                  </a:lnTo>
-                  <a:lnTo>
-                    <a:pt x="3079768" y="2701438"/>
-                  </a:lnTo>
-                  <a:lnTo>
-                    <a:pt x="3008146" y="2713267"/>
-                  </a:lnTo>
-                  <a:lnTo>
-                    <a:pt x="2936523" y="2724917"/>
-                  </a:lnTo>
-                  <a:lnTo>
-                    <a:pt x="2864901" y="2736391"/>
-                  </a:lnTo>
-                  <a:lnTo>
-                    <a:pt x="2793278" y="2747692"/>
-                  </a:lnTo>
-                  <a:lnTo>
-                    <a:pt x="2721655" y="2758822"/>
-                  </a:lnTo>
-                  <a:lnTo>
-                    <a:pt x="2650033" y="2769783"/>
-                  </a:lnTo>
-                  <a:lnTo>
-                    <a:pt x="2578410" y="2780579"/>
-                  </a:lnTo>
-                  <a:lnTo>
-                    <a:pt x="2506788" y="2791211"/>
-                  </a:lnTo>
-                  <a:lnTo>
-                    <a:pt x="2435165" y="2801683"/>
-                  </a:lnTo>
-                  <a:lnTo>
-                    <a:pt x="2363543" y="2811996"/>
-                  </a:lnTo>
-                  <a:lnTo>
-                    <a:pt x="2291920" y="2822154"/>
-                  </a:lnTo>
-                  <a:lnTo>
-                    <a:pt x="2220298" y="2832157"/>
-                  </a:lnTo>
-                  <a:lnTo>
-                    <a:pt x="2148675" y="2842010"/>
-                  </a:lnTo>
-                  <a:lnTo>
-                    <a:pt x="2077053" y="2851714"/>
-                  </a:lnTo>
-                  <a:lnTo>
-                    <a:pt x="2005430" y="2861270"/>
-                  </a:lnTo>
-                  <a:lnTo>
-                    <a:pt x="1933808" y="2870683"/>
-                  </a:lnTo>
-                  <a:lnTo>
-                    <a:pt x="1862185" y="2879953"/>
-                  </a:lnTo>
-                  <a:lnTo>
-                    <a:pt x="1790563" y="2889083"/>
-                  </a:lnTo>
-                  <a:lnTo>
-                    <a:pt x="1718940" y="2898074"/>
-                  </a:lnTo>
-                  <a:lnTo>
-                    <a:pt x="1647318" y="2906930"/>
-                  </a:lnTo>
-                  <a:lnTo>
-                    <a:pt x="1575695" y="2915652"/>
-                  </a:lnTo>
-                  <a:lnTo>
-                    <a:pt x="1504073" y="2924242"/>
-                  </a:lnTo>
-                  <a:lnTo>
-                    <a:pt x="1432450" y="2932702"/>
-                  </a:lnTo>
-                  <a:lnTo>
-                    <a:pt x="1360827" y="2941034"/>
-                  </a:lnTo>
-                  <a:lnTo>
-                    <a:pt x="1289205" y="2949241"/>
-                  </a:lnTo>
-                  <a:lnTo>
-                    <a:pt x="1217582" y="2957323"/>
-                  </a:lnTo>
-                  <a:lnTo>
-                    <a:pt x="1145960" y="2965283"/>
-                  </a:lnTo>
-                  <a:lnTo>
-                    <a:pt x="1074337" y="2973122"/>
-                  </a:lnTo>
-                  <a:lnTo>
-                    <a:pt x="1002715" y="2980843"/>
-                  </a:lnTo>
-                  <a:lnTo>
-                    <a:pt x="931092" y="2988448"/>
-                  </a:lnTo>
-                  <a:lnTo>
-                    <a:pt x="859470" y="2995937"/>
-                  </a:lnTo>
-                  <a:lnTo>
-                    <a:pt x="787847" y="3003313"/>
-                  </a:lnTo>
-                  <a:lnTo>
-                    <a:pt x="716225" y="3010578"/>
-                  </a:lnTo>
-                  <a:lnTo>
-                    <a:pt x="644602" y="3017732"/>
-                  </a:lnTo>
-                  <a:lnTo>
-                    <a:pt x="572980" y="3024779"/>
-                  </a:lnTo>
-                  <a:lnTo>
-                    <a:pt x="501357" y="3031719"/>
-                  </a:lnTo>
-                  <a:lnTo>
-                    <a:pt x="429735" y="3038554"/>
-                  </a:lnTo>
-                  <a:lnTo>
-                    <a:pt x="358112" y="3045285"/>
-                  </a:lnTo>
-                  <a:lnTo>
-                    <a:pt x="286490" y="3051915"/>
-                  </a:lnTo>
-                  <a:lnTo>
-                    <a:pt x="214867" y="3058445"/>
-                  </a:lnTo>
-                  <a:lnTo>
-                    <a:pt x="143245" y="3064876"/>
-                  </a:lnTo>
-                  <a:lnTo>
-                    <a:pt x="71622" y="3071209"/>
-                  </a:lnTo>
-                  <a:lnTo>
-                    <a:pt x="0" y="3077447"/>
+                    <a:pt x="0" y="0"/>
+                  </a:lnTo>
+                  <a:lnTo>
+                    <a:pt x="0" y="0"/>
+                  </a:lnTo>
+                </a:path>
+              </a:pathLst>
+            </a:custGeom>
+            <a:ln w="13550" cap="flat">
+              <a:solidFill>
+                <a:srgbClr val="EBEBEB">
+                  <a:alpha val="100000"/>
+                </a:srgbClr>
+              </a:solidFill>
+              <a:prstDash val="solid"/>
+              <a:round/>
+            </a:ln>
+          </p:spPr>
+          <p:txBody>
+            <a:bodyPr/>
+            <a:lstStyle/>
+            <a:p/>
+          </p:txBody>
+        </p:sp>
+        <p:sp>
+          <p:nvSpPr>
+            <p:cNvPr id="21" name="pg21"/>
+            <p:cNvSpPr/>
+            <p:nvPr/>
+          </p:nvSpPr>
+          <p:spPr>
+            <a:xfrm>
+              <a:off x="1235312" y="2143092"/>
+              <a:ext cx="6964104" cy="1249810"/>
+            </a:xfrm>
+            <a:custGeom>
+              <a:avLst/>
+              <a:pathLst>
+                <a:path w="6964104" h="1249810">
+                  <a:moveTo>
+                    <a:pt x="1872979" y="0"/>
+                  </a:moveTo>
+                  <a:lnTo>
+                    <a:pt x="1899301" y="33667"/>
+                  </a:lnTo>
+                  <a:lnTo>
+                    <a:pt x="1969645" y="117480"/>
+                  </a:lnTo>
+                  <a:lnTo>
+                    <a:pt x="2039990" y="195551"/>
+                  </a:lnTo>
+                  <a:lnTo>
+                    <a:pt x="2110334" y="268274"/>
+                  </a:lnTo>
+                  <a:lnTo>
+                    <a:pt x="2180679" y="336016"/>
+                  </a:lnTo>
+                  <a:lnTo>
+                    <a:pt x="2251023" y="399118"/>
+                  </a:lnTo>
+                  <a:lnTo>
+                    <a:pt x="2321368" y="457897"/>
+                  </a:lnTo>
+                  <a:lnTo>
+                    <a:pt x="2391712" y="512649"/>
+                  </a:lnTo>
+                  <a:lnTo>
+                    <a:pt x="2462057" y="563651"/>
+                  </a:lnTo>
+                  <a:lnTo>
+                    <a:pt x="2532401" y="611160"/>
+                  </a:lnTo>
+                  <a:lnTo>
+                    <a:pt x="2602746" y="655414"/>
+                  </a:lnTo>
+                  <a:lnTo>
+                    <a:pt x="2673090" y="696636"/>
+                  </a:lnTo>
+                  <a:lnTo>
+                    <a:pt x="2743435" y="735035"/>
+                  </a:lnTo>
+                  <a:lnTo>
+                    <a:pt x="2813779" y="770804"/>
+                  </a:lnTo>
+                  <a:lnTo>
+                    <a:pt x="2884124" y="804122"/>
+                  </a:lnTo>
+                  <a:lnTo>
+                    <a:pt x="2954468" y="835158"/>
+                  </a:lnTo>
+                  <a:lnTo>
+                    <a:pt x="3024813" y="864068"/>
+                  </a:lnTo>
+                  <a:lnTo>
+                    <a:pt x="3095157" y="890998"/>
+                  </a:lnTo>
+                  <a:lnTo>
+                    <a:pt x="3165502" y="916083"/>
+                  </a:lnTo>
+                  <a:lnTo>
+                    <a:pt x="3235846" y="939450"/>
+                  </a:lnTo>
+                  <a:lnTo>
+                    <a:pt x="3306191" y="957144"/>
+                  </a:lnTo>
+                  <a:lnTo>
+                    <a:pt x="3376535" y="952537"/>
+                  </a:lnTo>
+                  <a:lnTo>
+                    <a:pt x="3446880" y="947860"/>
+                  </a:lnTo>
+                  <a:lnTo>
+                    <a:pt x="3517224" y="943111"/>
+                  </a:lnTo>
+                  <a:lnTo>
+                    <a:pt x="3587569" y="938288"/>
+                  </a:lnTo>
+                  <a:lnTo>
+                    <a:pt x="3657913" y="933392"/>
+                  </a:lnTo>
+                  <a:lnTo>
+                    <a:pt x="3728257" y="928421"/>
+                  </a:lnTo>
+                  <a:lnTo>
+                    <a:pt x="3798602" y="923373"/>
+                  </a:lnTo>
+                  <a:lnTo>
+                    <a:pt x="3868946" y="918248"/>
+                  </a:lnTo>
+                  <a:lnTo>
+                    <a:pt x="3939291" y="913044"/>
+                  </a:lnTo>
+                  <a:lnTo>
+                    <a:pt x="4009635" y="907760"/>
+                  </a:lnTo>
+                  <a:lnTo>
+                    <a:pt x="4079980" y="902395"/>
+                  </a:lnTo>
+                  <a:lnTo>
+                    <a:pt x="4150324" y="896948"/>
+                  </a:lnTo>
+                  <a:lnTo>
+                    <a:pt x="4220669" y="891417"/>
+                  </a:lnTo>
+                  <a:lnTo>
+                    <a:pt x="4291013" y="885801"/>
+                  </a:lnTo>
+                  <a:lnTo>
+                    <a:pt x="4361358" y="880099"/>
+                  </a:lnTo>
+                  <a:lnTo>
+                    <a:pt x="4431702" y="874309"/>
+                  </a:lnTo>
+                  <a:lnTo>
+                    <a:pt x="4502047" y="868431"/>
+                  </a:lnTo>
+                  <a:lnTo>
+                    <a:pt x="4572391" y="862462"/>
+                  </a:lnTo>
+                  <a:lnTo>
+                    <a:pt x="4642736" y="856401"/>
+                  </a:lnTo>
+                  <a:lnTo>
+                    <a:pt x="4713080" y="850248"/>
+                  </a:lnTo>
+                  <a:lnTo>
+                    <a:pt x="4783425" y="844000"/>
+                  </a:lnTo>
+                  <a:lnTo>
+                    <a:pt x="4853769" y="837656"/>
+                  </a:lnTo>
+                  <a:lnTo>
+                    <a:pt x="4924114" y="831215"/>
+                  </a:lnTo>
+                  <a:lnTo>
+                    <a:pt x="4994458" y="824675"/>
+                  </a:lnTo>
+                  <a:lnTo>
+                    <a:pt x="5064803" y="818034"/>
+                  </a:lnTo>
+                  <a:lnTo>
+                    <a:pt x="5135147" y="811292"/>
+                  </a:lnTo>
+                  <a:lnTo>
+                    <a:pt x="5205492" y="804446"/>
+                  </a:lnTo>
+                  <a:lnTo>
+                    <a:pt x="5275836" y="797494"/>
+                  </a:lnTo>
+                  <a:lnTo>
+                    <a:pt x="5346181" y="790437"/>
+                  </a:lnTo>
+                  <a:lnTo>
+                    <a:pt x="5416525" y="783270"/>
+                  </a:lnTo>
+                  <a:lnTo>
+                    <a:pt x="5486870" y="775994"/>
+                  </a:lnTo>
+                  <a:lnTo>
+                    <a:pt x="5557214" y="768606"/>
+                  </a:lnTo>
+                  <a:lnTo>
+                    <a:pt x="5627559" y="761105"/>
+                  </a:lnTo>
+                  <a:lnTo>
+                    <a:pt x="5697903" y="753488"/>
+                  </a:lnTo>
+                  <a:lnTo>
+                    <a:pt x="5768248" y="745755"/>
+                  </a:lnTo>
+                  <a:lnTo>
+                    <a:pt x="5838592" y="737903"/>
+                  </a:lnTo>
+                  <a:lnTo>
+                    <a:pt x="5908937" y="729930"/>
+                  </a:lnTo>
+                  <a:lnTo>
+                    <a:pt x="5979281" y="721835"/>
+                  </a:lnTo>
+                  <a:lnTo>
+                    <a:pt x="6049626" y="713615"/>
+                  </a:lnTo>
+                  <a:lnTo>
+                    <a:pt x="6119970" y="705269"/>
+                  </a:lnTo>
+                  <a:lnTo>
+                    <a:pt x="6190315" y="696796"/>
+                  </a:lnTo>
+                  <a:lnTo>
+                    <a:pt x="6260659" y="688192"/>
+                  </a:lnTo>
+                  <a:lnTo>
+                    <a:pt x="6331004" y="679456"/>
+                  </a:lnTo>
+                  <a:lnTo>
+                    <a:pt x="6401348" y="670586"/>
+                  </a:lnTo>
+                  <a:lnTo>
+                    <a:pt x="6471693" y="661579"/>
+                  </a:lnTo>
+                  <a:lnTo>
+                    <a:pt x="6542037" y="652435"/>
+                  </a:lnTo>
+                  <a:lnTo>
+                    <a:pt x="6612382" y="643150"/>
+                  </a:lnTo>
+                  <a:lnTo>
+                    <a:pt x="6682726" y="633722"/>
+                  </a:lnTo>
+                  <a:lnTo>
+                    <a:pt x="6753071" y="624150"/>
+                  </a:lnTo>
+                  <a:lnTo>
+                    <a:pt x="6823415" y="614431"/>
+                  </a:lnTo>
+                  <a:lnTo>
+                    <a:pt x="6893760" y="604563"/>
+                  </a:lnTo>
+                  <a:lnTo>
+                    <a:pt x="6964104" y="594543"/>
+                  </a:lnTo>
+                  <a:lnTo>
+                    <a:pt x="6964104" y="1249810"/>
+                  </a:lnTo>
+                  <a:lnTo>
+                    <a:pt x="6893760" y="1249266"/>
+                  </a:lnTo>
+                  <a:lnTo>
+                    <a:pt x="6823415" y="1248682"/>
+                  </a:lnTo>
+                  <a:lnTo>
+                    <a:pt x="6753071" y="1248056"/>
+                  </a:lnTo>
+                  <a:lnTo>
+                    <a:pt x="6682726" y="1247383"/>
+                  </a:lnTo>
+                  <a:lnTo>
+                    <a:pt x="6612382" y="1246661"/>
+                  </a:lnTo>
+                  <a:lnTo>
+                    <a:pt x="6542037" y="1245886"/>
+                  </a:lnTo>
+                  <a:lnTo>
+                    <a:pt x="6471693" y="1245054"/>
+                  </a:lnTo>
+                  <a:lnTo>
+                    <a:pt x="6401348" y="1244161"/>
+                  </a:lnTo>
+                  <a:lnTo>
+                    <a:pt x="6331004" y="1243202"/>
+                  </a:lnTo>
+                  <a:lnTo>
+                    <a:pt x="6260659" y="1242172"/>
+                  </a:lnTo>
+                  <a:lnTo>
+                    <a:pt x="6190315" y="1241067"/>
+                  </a:lnTo>
+                  <a:lnTo>
+                    <a:pt x="6119970" y="1239880"/>
+                  </a:lnTo>
+                  <a:lnTo>
+                    <a:pt x="6049626" y="1238607"/>
+                  </a:lnTo>
+                  <a:lnTo>
+                    <a:pt x="5979281" y="1237239"/>
+                  </a:lnTo>
+                  <a:lnTo>
+                    <a:pt x="5908937" y="1235771"/>
+                  </a:lnTo>
+                  <a:lnTo>
+                    <a:pt x="5838592" y="1234195"/>
+                  </a:lnTo>
+                  <a:lnTo>
+                    <a:pt x="5768248" y="1232503"/>
+                  </a:lnTo>
+                  <a:lnTo>
+                    <a:pt x="5697903" y="1230687"/>
+                  </a:lnTo>
+                  <a:lnTo>
+                    <a:pt x="5627559" y="1228737"/>
+                  </a:lnTo>
+                  <a:lnTo>
+                    <a:pt x="5557214" y="1226644"/>
+                  </a:lnTo>
+                  <a:lnTo>
+                    <a:pt x="5486870" y="1224397"/>
+                  </a:lnTo>
+                  <a:lnTo>
+                    <a:pt x="5416525" y="1221985"/>
+                  </a:lnTo>
+                  <a:lnTo>
+                    <a:pt x="5346181" y="1219395"/>
+                  </a:lnTo>
+                  <a:lnTo>
+                    <a:pt x="5275836" y="1216615"/>
+                  </a:lnTo>
+                  <a:lnTo>
+                    <a:pt x="5205492" y="1213630"/>
+                  </a:lnTo>
+                  <a:lnTo>
+                    <a:pt x="5135147" y="1210426"/>
+                  </a:lnTo>
+                  <a:lnTo>
+                    <a:pt x="5064803" y="1206986"/>
+                  </a:lnTo>
+                  <a:lnTo>
+                    <a:pt x="4994458" y="1203293"/>
+                  </a:lnTo>
+                  <a:lnTo>
+                    <a:pt x="4924114" y="1199329"/>
+                  </a:lnTo>
+                  <a:lnTo>
+                    <a:pt x="4853769" y="1195073"/>
+                  </a:lnTo>
+                  <a:lnTo>
+                    <a:pt x="4783425" y="1190504"/>
+                  </a:lnTo>
+                  <a:lnTo>
+                    <a:pt x="4713080" y="1185600"/>
+                  </a:lnTo>
+                  <a:lnTo>
+                    <a:pt x="4642736" y="1180334"/>
+                  </a:lnTo>
+                  <a:lnTo>
+                    <a:pt x="4572391" y="1174682"/>
+                  </a:lnTo>
+                  <a:lnTo>
+                    <a:pt x="4502047" y="1168613"/>
+                  </a:lnTo>
+                  <a:lnTo>
+                    <a:pt x="4431702" y="1162099"/>
+                  </a:lnTo>
+                  <a:lnTo>
+                    <a:pt x="4361358" y="1155105"/>
+                  </a:lnTo>
+                  <a:lnTo>
+                    <a:pt x="4291013" y="1147597"/>
+                  </a:lnTo>
+                  <a:lnTo>
+                    <a:pt x="4220669" y="1139537"/>
+                  </a:lnTo>
+                  <a:lnTo>
+                    <a:pt x="4150324" y="1130884"/>
+                  </a:lnTo>
+                  <a:lnTo>
+                    <a:pt x="4079980" y="1121595"/>
+                  </a:lnTo>
+                  <a:lnTo>
+                    <a:pt x="4009635" y="1111623"/>
+                  </a:lnTo>
+                  <a:lnTo>
+                    <a:pt x="3939291" y="1100917"/>
+                  </a:lnTo>
+                  <a:lnTo>
+                    <a:pt x="3868946" y="1089425"/>
+                  </a:lnTo>
+                  <a:lnTo>
+                    <a:pt x="3798602" y="1077087"/>
+                  </a:lnTo>
+                  <a:lnTo>
+                    <a:pt x="3728257" y="1063841"/>
+                  </a:lnTo>
+                  <a:lnTo>
+                    <a:pt x="3657913" y="1049622"/>
+                  </a:lnTo>
+                  <a:lnTo>
+                    <a:pt x="3587569" y="1034357"/>
+                  </a:lnTo>
+                  <a:lnTo>
+                    <a:pt x="3517224" y="1017970"/>
+                  </a:lnTo>
+                  <a:lnTo>
+                    <a:pt x="3446880" y="1000377"/>
+                  </a:lnTo>
+                  <a:lnTo>
+                    <a:pt x="3376535" y="981491"/>
+                  </a:lnTo>
+                  <a:lnTo>
+                    <a:pt x="3306191" y="961216"/>
+                  </a:lnTo>
+                  <a:lnTo>
+                    <a:pt x="3235846" y="961681"/>
+                  </a:lnTo>
+                  <a:lnTo>
+                    <a:pt x="3165502" y="966150"/>
+                  </a:lnTo>
+                  <a:lnTo>
+                    <a:pt x="3095157" y="970551"/>
+                  </a:lnTo>
+                  <a:lnTo>
+                    <a:pt x="3024813" y="974885"/>
+                  </a:lnTo>
+                  <a:lnTo>
+                    <a:pt x="2954468" y="979154"/>
+                  </a:lnTo>
+                  <a:lnTo>
+                    <a:pt x="2884124" y="983358"/>
+                  </a:lnTo>
+                  <a:lnTo>
+                    <a:pt x="2813779" y="987499"/>
+                  </a:lnTo>
+                  <a:lnTo>
+                    <a:pt x="2743435" y="991577"/>
+                  </a:lnTo>
+                  <a:lnTo>
+                    <a:pt x="2673090" y="995594"/>
+                  </a:lnTo>
+                  <a:lnTo>
+                    <a:pt x="2602746" y="999549"/>
+                  </a:lnTo>
+                  <a:lnTo>
+                    <a:pt x="2532401" y="1003445"/>
+                  </a:lnTo>
+                  <a:lnTo>
+                    <a:pt x="2462057" y="1007282"/>
+                  </a:lnTo>
+                  <a:lnTo>
+                    <a:pt x="2391712" y="1011061"/>
+                  </a:lnTo>
+                  <a:lnTo>
+                    <a:pt x="2321368" y="1014783"/>
+                  </a:lnTo>
+                  <a:lnTo>
+                    <a:pt x="2251023" y="1018449"/>
+                  </a:lnTo>
+                  <a:lnTo>
+                    <a:pt x="2180679" y="1022059"/>
+                  </a:lnTo>
+                  <a:lnTo>
+                    <a:pt x="2110334" y="1025614"/>
+                  </a:lnTo>
+                  <a:lnTo>
+                    <a:pt x="2039990" y="1029116"/>
+                  </a:lnTo>
+                  <a:lnTo>
+                    <a:pt x="1969645" y="1032565"/>
+                  </a:lnTo>
+                  <a:lnTo>
+                    <a:pt x="1899301" y="1035962"/>
+                  </a:lnTo>
+                  <a:lnTo>
+                    <a:pt x="1828956" y="1039307"/>
+                  </a:lnTo>
+                  <a:lnTo>
+                    <a:pt x="1758612" y="1042602"/>
+                  </a:lnTo>
+                  <a:lnTo>
+                    <a:pt x="1688267" y="1045847"/>
+                  </a:lnTo>
+                  <a:lnTo>
+                    <a:pt x="1617923" y="1049042"/>
+                  </a:lnTo>
+                  <a:lnTo>
+                    <a:pt x="1547578" y="1052190"/>
+                  </a:lnTo>
+                  <a:lnTo>
+                    <a:pt x="1477234" y="1055290"/>
+                  </a:lnTo>
+                  <a:lnTo>
+                    <a:pt x="1406889" y="1058343"/>
+                  </a:lnTo>
+                  <a:lnTo>
+                    <a:pt x="1336545" y="1061350"/>
+                  </a:lnTo>
+                  <a:lnTo>
+                    <a:pt x="1266200" y="1064311"/>
+                  </a:lnTo>
+                  <a:lnTo>
+                    <a:pt x="1195856" y="1067228"/>
+                  </a:lnTo>
+                  <a:lnTo>
+                    <a:pt x="1125511" y="1070100"/>
+                  </a:lnTo>
+                  <a:lnTo>
+                    <a:pt x="1055167" y="1072930"/>
+                  </a:lnTo>
+                  <a:lnTo>
+                    <a:pt x="984822" y="1075716"/>
+                  </a:lnTo>
+                  <a:lnTo>
+                    <a:pt x="914478" y="1078460"/>
+                  </a:lnTo>
+                  <a:lnTo>
+                    <a:pt x="844133" y="1081163"/>
+                  </a:lnTo>
+                  <a:lnTo>
+                    <a:pt x="773789" y="1083825"/>
+                  </a:lnTo>
+                  <a:lnTo>
+                    <a:pt x="703444" y="1086446"/>
+                  </a:lnTo>
+                  <a:lnTo>
+                    <a:pt x="633100" y="1089028"/>
+                  </a:lnTo>
+                  <a:lnTo>
+                    <a:pt x="562755" y="1091571"/>
+                  </a:lnTo>
+                  <a:lnTo>
+                    <a:pt x="492411" y="1094076"/>
+                  </a:lnTo>
+                  <a:lnTo>
+                    <a:pt x="422066" y="1096542"/>
+                  </a:lnTo>
+                  <a:lnTo>
+                    <a:pt x="351722" y="1098972"/>
+                  </a:lnTo>
+                  <a:lnTo>
+                    <a:pt x="281377" y="1101364"/>
+                  </a:lnTo>
+                  <a:lnTo>
+                    <a:pt x="211033" y="1103720"/>
+                  </a:lnTo>
+                  <a:lnTo>
+                    <a:pt x="140688" y="1106041"/>
+                  </a:lnTo>
+                  <a:lnTo>
+                    <a:pt x="70344" y="1108327"/>
+                  </a:lnTo>
+                  <a:lnTo>
+                    <a:pt x="0" y="1110578"/>
                   </a:lnTo>
                   <a:close/>
                 </a:path>
@@ -3506,565 +3541,240 @@
         </p:sp>
         <p:sp>
           <p:nvSpPr>
-            <p:cNvPr id="21" name="pl21"/>
-            <p:cNvSpPr/>
-            <p:nvPr/>
-          </p:nvSpPr>
-          <p:spPr>
-            <a:xfrm>
-              <a:off x="3079057" y="2073503"/>
-              <a:ext cx="5183622" cy="2652277"/>
-            </a:xfrm>
-            <a:custGeom>
-              <a:avLst/>
-              <a:pathLst>
-                <a:path w="5183622" h="2652277">
-                  <a:moveTo>
-                    <a:pt x="0" y="0"/>
-                  </a:moveTo>
-                  <a:lnTo>
-                    <a:pt x="26800" y="93294"/>
-                  </a:lnTo>
-                  <a:lnTo>
-                    <a:pt x="98422" y="325541"/>
-                  </a:lnTo>
-                  <a:lnTo>
-                    <a:pt x="170045" y="541879"/>
-                  </a:lnTo>
-                  <a:lnTo>
-                    <a:pt x="241667" y="743398"/>
-                  </a:lnTo>
-                  <a:lnTo>
-                    <a:pt x="313290" y="931112"/>
-                  </a:lnTo>
-                  <a:lnTo>
-                    <a:pt x="384913" y="1105968"/>
-                  </a:lnTo>
-                  <a:lnTo>
-                    <a:pt x="456535" y="1268847"/>
-                  </a:lnTo>
-                  <a:lnTo>
-                    <a:pt x="528158" y="1420568"/>
-                  </a:lnTo>
-                  <a:lnTo>
-                    <a:pt x="599780" y="1561896"/>
-                  </a:lnTo>
-                  <a:lnTo>
-                    <a:pt x="671403" y="1693543"/>
-                  </a:lnTo>
-                  <a:lnTo>
-                    <a:pt x="743025" y="1816172"/>
-                  </a:lnTo>
-                  <a:lnTo>
-                    <a:pt x="814648" y="1930402"/>
-                  </a:lnTo>
-                  <a:lnTo>
-                    <a:pt x="886270" y="2036806"/>
-                  </a:lnTo>
-                  <a:lnTo>
-                    <a:pt x="957893" y="2135922"/>
-                  </a:lnTo>
-                  <a:lnTo>
-                    <a:pt x="1029515" y="2228248"/>
-                  </a:lnTo>
-                  <a:lnTo>
-                    <a:pt x="1101138" y="2314250"/>
-                  </a:lnTo>
-                  <a:lnTo>
-                    <a:pt x="1172760" y="2394361"/>
-                  </a:lnTo>
-                  <a:lnTo>
-                    <a:pt x="1244383" y="2468984"/>
-                  </a:lnTo>
-                  <a:lnTo>
-                    <a:pt x="1316005" y="2538496"/>
-                  </a:lnTo>
-                  <a:lnTo>
-                    <a:pt x="1387628" y="2603245"/>
-                  </a:lnTo>
-                  <a:lnTo>
-                    <a:pt x="1459250" y="2652277"/>
-                  </a:lnTo>
-                  <a:lnTo>
-                    <a:pt x="1530873" y="2639512"/>
-                  </a:lnTo>
-                  <a:lnTo>
-                    <a:pt x="1602495" y="2626550"/>
-                  </a:lnTo>
-                  <a:lnTo>
-                    <a:pt x="1674118" y="2613390"/>
-                  </a:lnTo>
-                  <a:lnTo>
-                    <a:pt x="1745741" y="2600027"/>
-                  </a:lnTo>
-                  <a:lnTo>
-                    <a:pt x="1817363" y="2586460"/>
-                  </a:lnTo>
-                  <a:lnTo>
-                    <a:pt x="1888986" y="2572684"/>
-                  </a:lnTo>
-                  <a:lnTo>
-                    <a:pt x="1960608" y="2558696"/>
-                  </a:lnTo>
-                  <a:lnTo>
-                    <a:pt x="2032231" y="2544494"/>
-                  </a:lnTo>
-                  <a:lnTo>
-                    <a:pt x="2103853" y="2530074"/>
-                  </a:lnTo>
-                  <a:lnTo>
-                    <a:pt x="2175476" y="2515432"/>
-                  </a:lnTo>
-                  <a:lnTo>
-                    <a:pt x="2247098" y="2500565"/>
-                  </a:lnTo>
-                  <a:lnTo>
-                    <a:pt x="2318721" y="2485471"/>
-                  </a:lnTo>
-                  <a:lnTo>
-                    <a:pt x="2390343" y="2470144"/>
-                  </a:lnTo>
-                  <a:lnTo>
-                    <a:pt x="2461966" y="2454583"/>
-                  </a:lnTo>
-                  <a:lnTo>
-                    <a:pt x="2533588" y="2438782"/>
-                  </a:lnTo>
-                  <a:lnTo>
-                    <a:pt x="2605211" y="2422739"/>
-                  </a:lnTo>
-                  <a:lnTo>
-                    <a:pt x="2676833" y="2406449"/>
-                  </a:lnTo>
-                  <a:lnTo>
-                    <a:pt x="2748456" y="2389909"/>
-                  </a:lnTo>
-                  <a:lnTo>
-                    <a:pt x="2820078" y="2373116"/>
-                  </a:lnTo>
-                  <a:lnTo>
-                    <a:pt x="2891701" y="2356064"/>
-                  </a:lnTo>
-                  <a:lnTo>
-                    <a:pt x="2963323" y="2338751"/>
-                  </a:lnTo>
-                  <a:lnTo>
-                    <a:pt x="3034946" y="2321172"/>
-                  </a:lnTo>
-                  <a:lnTo>
-                    <a:pt x="3106569" y="2303323"/>
-                  </a:lnTo>
-                  <a:lnTo>
-                    <a:pt x="3178191" y="2285200"/>
-                  </a:lnTo>
-                  <a:lnTo>
-                    <a:pt x="3249814" y="2266799"/>
-                  </a:lnTo>
-                  <a:lnTo>
-                    <a:pt x="3321436" y="2248115"/>
-                  </a:lnTo>
-                  <a:lnTo>
-                    <a:pt x="3393059" y="2229145"/>
-                  </a:lnTo>
-                  <a:lnTo>
-                    <a:pt x="3464681" y="2209883"/>
-                  </a:lnTo>
-                  <a:lnTo>
-                    <a:pt x="3536304" y="2190325"/>
-                  </a:lnTo>
-                  <a:lnTo>
-                    <a:pt x="3607926" y="2170467"/>
-                  </a:lnTo>
-                  <a:lnTo>
-                    <a:pt x="3679549" y="2150305"/>
-                  </a:lnTo>
-                  <a:lnTo>
-                    <a:pt x="3751171" y="2129833"/>
-                  </a:lnTo>
-                  <a:lnTo>
-                    <a:pt x="3822794" y="2109046"/>
-                  </a:lnTo>
-                  <a:lnTo>
-                    <a:pt x="3894416" y="2087940"/>
-                  </a:lnTo>
-                  <a:lnTo>
-                    <a:pt x="3966039" y="2066511"/>
-                  </a:lnTo>
-                  <a:lnTo>
-                    <a:pt x="4037661" y="2044752"/>
-                  </a:lnTo>
-                  <a:lnTo>
-                    <a:pt x="4109284" y="2022659"/>
-                  </a:lnTo>
-                  <a:lnTo>
-                    <a:pt x="4180906" y="2000227"/>
-                  </a:lnTo>
-                  <a:lnTo>
-                    <a:pt x="4252529" y="1977451"/>
-                  </a:lnTo>
-                  <a:lnTo>
-                    <a:pt x="4324151" y="1954325"/>
-                  </a:lnTo>
-                  <a:lnTo>
-                    <a:pt x="4395774" y="1930844"/>
-                  </a:lnTo>
-                  <a:lnTo>
-                    <a:pt x="4467397" y="1907002"/>
-                  </a:lnTo>
-                  <a:lnTo>
-                    <a:pt x="4539019" y="1882794"/>
-                  </a:lnTo>
-                  <a:lnTo>
-                    <a:pt x="4610642" y="1858215"/>
-                  </a:lnTo>
-                  <a:lnTo>
-                    <a:pt x="4682264" y="1833258"/>
-                  </a:lnTo>
-                  <a:lnTo>
-                    <a:pt x="4753887" y="1807918"/>
-                  </a:lnTo>
-                  <a:lnTo>
-                    <a:pt x="4825509" y="1782190"/>
-                  </a:lnTo>
-                  <a:lnTo>
-                    <a:pt x="4897132" y="1756066"/>
-                  </a:lnTo>
-                  <a:lnTo>
-                    <a:pt x="4968754" y="1729541"/>
-                  </a:lnTo>
-                  <a:lnTo>
-                    <a:pt x="5040377" y="1702609"/>
-                  </a:lnTo>
-                  <a:lnTo>
-                    <a:pt x="5111999" y="1675263"/>
-                  </a:lnTo>
-                  <a:lnTo>
-                    <a:pt x="5183622" y="1647497"/>
-                  </a:lnTo>
-                </a:path>
-              </a:pathLst>
-            </a:custGeom>
-          </p:spPr>
-          <p:txBody>
-            <a:bodyPr/>
-            <a:lstStyle/>
-            <a:p/>
-          </p:txBody>
-        </p:sp>
-        <p:sp>
-          <p:nvSpPr>
             <p:cNvPr id="22" name="pl22"/>
             <p:cNvSpPr/>
             <p:nvPr/>
           </p:nvSpPr>
           <p:spPr>
             <a:xfrm>
-              <a:off x="1172049" y="4737063"/>
-              <a:ext cx="7090630" cy="799702"/>
+              <a:off x="3108291" y="2143092"/>
+              <a:ext cx="5091125" cy="957144"/>
             </a:xfrm>
             <a:custGeom>
               <a:avLst/>
               <a:pathLst>
-                <a:path w="7090630" h="799702">
+                <a:path w="5091125" h="957144">
                   <a:moveTo>
-                    <a:pt x="7090630" y="799702"/>
+                    <a:pt x="0" y="0"/>
                   </a:moveTo>
                   <a:lnTo>
-                    <a:pt x="7019007" y="798196"/>
-                  </a:lnTo>
-                  <a:lnTo>
-                    <a:pt x="6947385" y="796578"/>
-                  </a:lnTo>
-                  <a:lnTo>
-                    <a:pt x="6875762" y="794842"/>
-                  </a:lnTo>
-                  <a:lnTo>
-                    <a:pt x="6804139" y="792979"/>
-                  </a:lnTo>
-                  <a:lnTo>
-                    <a:pt x="6732517" y="790978"/>
-                  </a:lnTo>
-                  <a:lnTo>
-                    <a:pt x="6660894" y="788830"/>
-                  </a:lnTo>
-                  <a:lnTo>
-                    <a:pt x="6589272" y="786524"/>
-                  </a:lnTo>
-                  <a:lnTo>
-                    <a:pt x="6517649" y="784049"/>
-                  </a:lnTo>
-                  <a:lnTo>
-                    <a:pt x="6446027" y="781391"/>
-                  </a:lnTo>
-                  <a:lnTo>
-                    <a:pt x="6374404" y="778539"/>
-                  </a:lnTo>
-                  <a:lnTo>
-                    <a:pt x="6302782" y="775476"/>
-                  </a:lnTo>
-                  <a:lnTo>
-                    <a:pt x="6231159" y="772188"/>
-                  </a:lnTo>
-                  <a:lnTo>
-                    <a:pt x="6159537" y="768658"/>
-                  </a:lnTo>
-                  <a:lnTo>
-                    <a:pt x="6087914" y="764869"/>
-                  </a:lnTo>
-                  <a:lnTo>
-                    <a:pt x="6016292" y="760801"/>
-                  </a:lnTo>
-                  <a:lnTo>
-                    <a:pt x="5944669" y="756434"/>
-                  </a:lnTo>
-                  <a:lnTo>
-                    <a:pt x="5873047" y="751746"/>
-                  </a:lnTo>
-                  <a:lnTo>
-                    <a:pt x="5801424" y="746713"/>
-                  </a:lnTo>
-                  <a:lnTo>
-                    <a:pt x="5729802" y="741310"/>
-                  </a:lnTo>
-                  <a:lnTo>
-                    <a:pt x="5658179" y="735510"/>
-                  </a:lnTo>
-                  <a:lnTo>
-                    <a:pt x="5586557" y="729283"/>
-                  </a:lnTo>
-                  <a:lnTo>
-                    <a:pt x="5514934" y="722598"/>
-                  </a:lnTo>
-                  <a:lnTo>
-                    <a:pt x="5443311" y="715422"/>
-                  </a:lnTo>
-                  <a:lnTo>
-                    <a:pt x="5371689" y="707718"/>
-                  </a:lnTo>
-                  <a:lnTo>
-                    <a:pt x="5300066" y="699447"/>
-                  </a:lnTo>
-                  <a:lnTo>
-                    <a:pt x="5228444" y="690568"/>
-                  </a:lnTo>
-                  <a:lnTo>
-                    <a:pt x="5156821" y="681037"/>
-                  </a:lnTo>
-                  <a:lnTo>
-                    <a:pt x="5085199" y="670804"/>
-                  </a:lnTo>
-                  <a:lnTo>
-                    <a:pt x="5013576" y="659819"/>
-                  </a:lnTo>
-                  <a:lnTo>
-                    <a:pt x="4941954" y="648026"/>
-                  </a:lnTo>
-                  <a:lnTo>
-                    <a:pt x="4870331" y="635365"/>
-                  </a:lnTo>
-                  <a:lnTo>
-                    <a:pt x="4798709" y="621774"/>
-                  </a:lnTo>
-                  <a:lnTo>
-                    <a:pt x="4727086" y="607183"/>
-                  </a:lnTo>
-                  <a:lnTo>
-                    <a:pt x="4655464" y="591520"/>
-                  </a:lnTo>
-                  <a:lnTo>
-                    <a:pt x="4583841" y="574704"/>
-                  </a:lnTo>
-                  <a:lnTo>
-                    <a:pt x="4512219" y="556652"/>
-                  </a:lnTo>
-                  <a:lnTo>
-                    <a:pt x="4440596" y="537272"/>
-                  </a:lnTo>
-                  <a:lnTo>
-                    <a:pt x="4368974" y="516468"/>
-                  </a:lnTo>
-                  <a:lnTo>
-                    <a:pt x="4297351" y="494133"/>
-                  </a:lnTo>
-                  <a:lnTo>
-                    <a:pt x="4225729" y="470156"/>
-                  </a:lnTo>
-                  <a:lnTo>
-                    <a:pt x="4154106" y="444415"/>
-                  </a:lnTo>
-                  <a:lnTo>
-                    <a:pt x="4082483" y="416782"/>
-                  </a:lnTo>
-                  <a:lnTo>
-                    <a:pt x="4010861" y="387117"/>
-                  </a:lnTo>
-                  <a:lnTo>
-                    <a:pt x="3939238" y="355270"/>
-                  </a:lnTo>
-                  <a:lnTo>
-                    <a:pt x="3867616" y="321081"/>
-                  </a:lnTo>
-                  <a:lnTo>
-                    <a:pt x="3795993" y="284378"/>
-                  </a:lnTo>
-                  <a:lnTo>
-                    <a:pt x="3724371" y="244976"/>
-                  </a:lnTo>
-                  <a:lnTo>
-                    <a:pt x="3652748" y="202677"/>
-                  </a:lnTo>
-                  <a:lnTo>
-                    <a:pt x="3581126" y="157266"/>
-                  </a:lnTo>
-                  <a:lnTo>
-                    <a:pt x="3509503" y="108517"/>
-                  </a:lnTo>
-                  <a:lnTo>
-                    <a:pt x="3437881" y="56182"/>
-                  </a:lnTo>
-                  <a:lnTo>
-                    <a:pt x="3366258" y="0"/>
-                  </a:lnTo>
-                  <a:lnTo>
-                    <a:pt x="3294636" y="1289"/>
-                  </a:lnTo>
-                  <a:lnTo>
-                    <a:pt x="3223013" y="13672"/>
-                  </a:lnTo>
-                  <a:lnTo>
-                    <a:pt x="3151391" y="25867"/>
-                  </a:lnTo>
-                  <a:lnTo>
-                    <a:pt x="3079768" y="37877"/>
-                  </a:lnTo>
-                  <a:lnTo>
-                    <a:pt x="3008146" y="49707"/>
-                  </a:lnTo>
-                  <a:lnTo>
-                    <a:pt x="2936523" y="61357"/>
-                  </a:lnTo>
-                  <a:lnTo>
-                    <a:pt x="2864901" y="72831"/>
-                  </a:lnTo>
-                  <a:lnTo>
-                    <a:pt x="2793278" y="84132"/>
-                  </a:lnTo>
-                  <a:lnTo>
-                    <a:pt x="2721655" y="95261"/>
-                  </a:lnTo>
-                  <a:lnTo>
-                    <a:pt x="2650033" y="106223"/>
-                  </a:lnTo>
-                  <a:lnTo>
-                    <a:pt x="2578410" y="117018"/>
-                  </a:lnTo>
-                  <a:lnTo>
-                    <a:pt x="2506788" y="127651"/>
-                  </a:lnTo>
-                  <a:lnTo>
-                    <a:pt x="2435165" y="138123"/>
-                  </a:lnTo>
-                  <a:lnTo>
-                    <a:pt x="2363543" y="148436"/>
-                  </a:lnTo>
-                  <a:lnTo>
-                    <a:pt x="2291920" y="158593"/>
-                  </a:lnTo>
-                  <a:lnTo>
-                    <a:pt x="2220298" y="168597"/>
-                  </a:lnTo>
-                  <a:lnTo>
-                    <a:pt x="2148675" y="178450"/>
-                  </a:lnTo>
-                  <a:lnTo>
-                    <a:pt x="2077053" y="188153"/>
-                  </a:lnTo>
-                  <a:lnTo>
-                    <a:pt x="2005430" y="197710"/>
-                  </a:lnTo>
-                  <a:lnTo>
-                    <a:pt x="1933808" y="207122"/>
-                  </a:lnTo>
-                  <a:lnTo>
-                    <a:pt x="1862185" y="216392"/>
-                  </a:lnTo>
-                  <a:lnTo>
-                    <a:pt x="1790563" y="225522"/>
-                  </a:lnTo>
-                  <a:lnTo>
-                    <a:pt x="1718940" y="234514"/>
-                  </a:lnTo>
-                  <a:lnTo>
-                    <a:pt x="1647318" y="243370"/>
-                  </a:lnTo>
-                  <a:lnTo>
-                    <a:pt x="1575695" y="252092"/>
-                  </a:lnTo>
-                  <a:lnTo>
-                    <a:pt x="1504073" y="260682"/>
-                  </a:lnTo>
-                  <a:lnTo>
-                    <a:pt x="1432450" y="269142"/>
-                  </a:lnTo>
-                  <a:lnTo>
-                    <a:pt x="1360827" y="277474"/>
-                  </a:lnTo>
-                  <a:lnTo>
-                    <a:pt x="1289205" y="285680"/>
-                  </a:lnTo>
-                  <a:lnTo>
-                    <a:pt x="1217582" y="293762"/>
-                  </a:lnTo>
-                  <a:lnTo>
-                    <a:pt x="1145960" y="301722"/>
-                  </a:lnTo>
-                  <a:lnTo>
-                    <a:pt x="1074337" y="309562"/>
-                  </a:lnTo>
-                  <a:lnTo>
-                    <a:pt x="1002715" y="317283"/>
-                  </a:lnTo>
-                  <a:lnTo>
-                    <a:pt x="931092" y="324887"/>
-                  </a:lnTo>
-                  <a:lnTo>
-                    <a:pt x="859470" y="332377"/>
-                  </a:lnTo>
-                  <a:lnTo>
-                    <a:pt x="787847" y="339753"/>
-                  </a:lnTo>
-                  <a:lnTo>
-                    <a:pt x="716225" y="347017"/>
-                  </a:lnTo>
-                  <a:lnTo>
-                    <a:pt x="644602" y="354172"/>
-                  </a:lnTo>
-                  <a:lnTo>
-                    <a:pt x="572980" y="361218"/>
-                  </a:lnTo>
-                  <a:lnTo>
-                    <a:pt x="501357" y="368158"/>
-                  </a:lnTo>
-                  <a:lnTo>
-                    <a:pt x="429735" y="374993"/>
-                  </a:lnTo>
-                  <a:lnTo>
-                    <a:pt x="358112" y="381725"/>
-                  </a:lnTo>
-                  <a:lnTo>
-                    <a:pt x="286490" y="388355"/>
-                  </a:lnTo>
-                  <a:lnTo>
-                    <a:pt x="214867" y="394884"/>
-                  </a:lnTo>
-                  <a:lnTo>
-                    <a:pt x="143245" y="401315"/>
-                  </a:lnTo>
-                  <a:lnTo>
-                    <a:pt x="71622" y="407649"/>
-                  </a:lnTo>
-                  <a:lnTo>
-                    <a:pt x="0" y="413887"/>
+                    <a:pt x="26322" y="33667"/>
+                  </a:lnTo>
+                  <a:lnTo>
+                    <a:pt x="96666" y="117480"/>
+                  </a:lnTo>
+                  <a:lnTo>
+                    <a:pt x="167011" y="195551"/>
+                  </a:lnTo>
+                  <a:lnTo>
+                    <a:pt x="237355" y="268274"/>
+                  </a:lnTo>
+                  <a:lnTo>
+                    <a:pt x="307700" y="336016"/>
+                  </a:lnTo>
+                  <a:lnTo>
+                    <a:pt x="378044" y="399118"/>
+                  </a:lnTo>
+                  <a:lnTo>
+                    <a:pt x="448389" y="457897"/>
+                  </a:lnTo>
+                  <a:lnTo>
+                    <a:pt x="518733" y="512649"/>
+                  </a:lnTo>
+                  <a:lnTo>
+                    <a:pt x="589078" y="563651"/>
+                  </a:lnTo>
+                  <a:lnTo>
+                    <a:pt x="659422" y="611160"/>
+                  </a:lnTo>
+                  <a:lnTo>
+                    <a:pt x="729767" y="655414"/>
+                  </a:lnTo>
+                  <a:lnTo>
+                    <a:pt x="800111" y="696636"/>
+                  </a:lnTo>
+                  <a:lnTo>
+                    <a:pt x="870456" y="735035"/>
+                  </a:lnTo>
+                  <a:lnTo>
+                    <a:pt x="940800" y="770804"/>
+                  </a:lnTo>
+                  <a:lnTo>
+                    <a:pt x="1011145" y="804122"/>
+                  </a:lnTo>
+                  <a:lnTo>
+                    <a:pt x="1081489" y="835158"/>
+                  </a:lnTo>
+                  <a:lnTo>
+                    <a:pt x="1151834" y="864068"/>
+                  </a:lnTo>
+                  <a:lnTo>
+                    <a:pt x="1222178" y="890998"/>
+                  </a:lnTo>
+                  <a:lnTo>
+                    <a:pt x="1292522" y="916083"/>
+                  </a:lnTo>
+                  <a:lnTo>
+                    <a:pt x="1362867" y="939450"/>
+                  </a:lnTo>
+                  <a:lnTo>
+                    <a:pt x="1433211" y="957144"/>
+                  </a:lnTo>
+                  <a:lnTo>
+                    <a:pt x="1503556" y="952537"/>
+                  </a:lnTo>
+                  <a:lnTo>
+                    <a:pt x="1573900" y="947860"/>
+                  </a:lnTo>
+                  <a:lnTo>
+                    <a:pt x="1644245" y="943111"/>
+                  </a:lnTo>
+                  <a:lnTo>
+                    <a:pt x="1714589" y="938288"/>
+                  </a:lnTo>
+                  <a:lnTo>
+                    <a:pt x="1784934" y="933392"/>
+                  </a:lnTo>
+                  <a:lnTo>
+                    <a:pt x="1855278" y="928421"/>
+                  </a:lnTo>
+                  <a:lnTo>
+                    <a:pt x="1925623" y="923373"/>
+                  </a:lnTo>
+                  <a:lnTo>
+                    <a:pt x="1995967" y="918248"/>
+                  </a:lnTo>
+                  <a:lnTo>
+                    <a:pt x="2066312" y="913044"/>
+                  </a:lnTo>
+                  <a:lnTo>
+                    <a:pt x="2136656" y="907760"/>
+                  </a:lnTo>
+                  <a:lnTo>
+                    <a:pt x="2207001" y="902395"/>
+                  </a:lnTo>
+                  <a:lnTo>
+                    <a:pt x="2277345" y="896948"/>
+                  </a:lnTo>
+                  <a:lnTo>
+                    <a:pt x="2347690" y="891417"/>
+                  </a:lnTo>
+                  <a:lnTo>
+                    <a:pt x="2418034" y="885801"/>
+                  </a:lnTo>
+                  <a:lnTo>
+                    <a:pt x="2488379" y="880099"/>
+                  </a:lnTo>
+                  <a:lnTo>
+                    <a:pt x="2558723" y="874309"/>
+                  </a:lnTo>
+                  <a:lnTo>
+                    <a:pt x="2629068" y="868431"/>
+                  </a:lnTo>
+                  <a:lnTo>
+                    <a:pt x="2699412" y="862462"/>
+                  </a:lnTo>
+                  <a:lnTo>
+                    <a:pt x="2769757" y="856401"/>
+                  </a:lnTo>
+                  <a:lnTo>
+                    <a:pt x="2840101" y="850248"/>
+                  </a:lnTo>
+                  <a:lnTo>
+                    <a:pt x="2910446" y="844000"/>
+                  </a:lnTo>
+                  <a:lnTo>
+                    <a:pt x="2980790" y="837656"/>
+                  </a:lnTo>
+                  <a:lnTo>
+                    <a:pt x="3051135" y="831215"/>
+                  </a:lnTo>
+                  <a:lnTo>
+                    <a:pt x="3121479" y="824675"/>
+                  </a:lnTo>
+                  <a:lnTo>
+                    <a:pt x="3191824" y="818034"/>
+                  </a:lnTo>
+                  <a:lnTo>
+                    <a:pt x="3262168" y="811292"/>
+                  </a:lnTo>
+                  <a:lnTo>
+                    <a:pt x="3332513" y="804446"/>
+                  </a:lnTo>
+                  <a:lnTo>
+                    <a:pt x="3402857" y="797494"/>
+                  </a:lnTo>
+                  <a:lnTo>
+                    <a:pt x="3473202" y="790437"/>
+                  </a:lnTo>
+                  <a:lnTo>
+                    <a:pt x="3543546" y="783270"/>
+                  </a:lnTo>
+                  <a:lnTo>
+                    <a:pt x="3613891" y="775994"/>
+                  </a:lnTo>
+                  <a:lnTo>
+                    <a:pt x="3684235" y="768606"/>
+                  </a:lnTo>
+                  <a:lnTo>
+                    <a:pt x="3754580" y="761105"/>
+                  </a:lnTo>
+                  <a:lnTo>
+                    <a:pt x="3824924" y="753488"/>
+                  </a:lnTo>
+                  <a:lnTo>
+                    <a:pt x="3895269" y="745755"/>
+                  </a:lnTo>
+                  <a:lnTo>
+                    <a:pt x="3965613" y="737903"/>
+                  </a:lnTo>
+                  <a:lnTo>
+                    <a:pt x="4035958" y="729930"/>
+                  </a:lnTo>
+                  <a:lnTo>
+                    <a:pt x="4106302" y="721835"/>
+                  </a:lnTo>
+                  <a:lnTo>
+                    <a:pt x="4176647" y="713615"/>
+                  </a:lnTo>
+                  <a:lnTo>
+                    <a:pt x="4246991" y="705269"/>
+                  </a:lnTo>
+                  <a:lnTo>
+                    <a:pt x="4317336" y="696796"/>
+                  </a:lnTo>
+                  <a:lnTo>
+                    <a:pt x="4387680" y="688192"/>
+                  </a:lnTo>
+                  <a:lnTo>
+                    <a:pt x="4458025" y="679456"/>
+                  </a:lnTo>
+                  <a:lnTo>
+                    <a:pt x="4528369" y="670586"/>
+                  </a:lnTo>
+                  <a:lnTo>
+                    <a:pt x="4598714" y="661579"/>
+                  </a:lnTo>
+                  <a:lnTo>
+                    <a:pt x="4669058" y="652435"/>
+                  </a:lnTo>
+                  <a:lnTo>
+                    <a:pt x="4739403" y="643150"/>
+                  </a:lnTo>
+                  <a:lnTo>
+                    <a:pt x="4809747" y="633722"/>
+                  </a:lnTo>
+                  <a:lnTo>
+                    <a:pt x="4880092" y="624150"/>
+                  </a:lnTo>
+                  <a:lnTo>
+                    <a:pt x="4950436" y="614431"/>
+                  </a:lnTo>
+                  <a:lnTo>
+                    <a:pt x="5020780" y="604563"/>
+                  </a:lnTo>
+                  <a:lnTo>
+                    <a:pt x="5091125" y="594543"/>
                   </a:lnTo>
                 </a:path>
               </a:pathLst>
@@ -4084,312 +3794,637 @@
           </p:nvSpPr>
           <p:spPr>
             <a:xfrm>
-              <a:off x="1172049" y="2498214"/>
-              <a:ext cx="7090630" cy="2865093"/>
+              <a:off x="1235312" y="3104308"/>
+              <a:ext cx="6964104" cy="288593"/>
             </a:xfrm>
             <a:custGeom>
               <a:avLst/>
               <a:pathLst>
-                <a:path w="7090630" h="2865093">
+                <a:path w="6964104" h="288593">
+                  <a:moveTo>
+                    <a:pt x="6964104" y="288593"/>
+                  </a:moveTo>
+                  <a:lnTo>
+                    <a:pt x="6893760" y="288050"/>
+                  </a:lnTo>
+                  <a:lnTo>
+                    <a:pt x="6823415" y="287466"/>
+                  </a:lnTo>
+                  <a:lnTo>
+                    <a:pt x="6753071" y="286840"/>
+                  </a:lnTo>
+                  <a:lnTo>
+                    <a:pt x="6682726" y="286167"/>
+                  </a:lnTo>
+                  <a:lnTo>
+                    <a:pt x="6612382" y="285445"/>
+                  </a:lnTo>
+                  <a:lnTo>
+                    <a:pt x="6542037" y="284670"/>
+                  </a:lnTo>
+                  <a:lnTo>
+                    <a:pt x="6471693" y="283838"/>
+                  </a:lnTo>
+                  <a:lnTo>
+                    <a:pt x="6401348" y="282944"/>
+                  </a:lnTo>
+                  <a:lnTo>
+                    <a:pt x="6331004" y="281985"/>
+                  </a:lnTo>
+                  <a:lnTo>
+                    <a:pt x="6260659" y="280956"/>
+                  </a:lnTo>
+                  <a:lnTo>
+                    <a:pt x="6190315" y="279851"/>
+                  </a:lnTo>
+                  <a:lnTo>
+                    <a:pt x="6119970" y="278664"/>
+                  </a:lnTo>
+                  <a:lnTo>
+                    <a:pt x="6049626" y="277390"/>
+                  </a:lnTo>
+                  <a:lnTo>
+                    <a:pt x="5979281" y="276023"/>
+                  </a:lnTo>
+                  <a:lnTo>
+                    <a:pt x="5908937" y="274555"/>
+                  </a:lnTo>
+                  <a:lnTo>
+                    <a:pt x="5838592" y="272979"/>
+                  </a:lnTo>
+                  <a:lnTo>
+                    <a:pt x="5768248" y="271287"/>
+                  </a:lnTo>
+                  <a:lnTo>
+                    <a:pt x="5697903" y="269471"/>
+                  </a:lnTo>
+                  <a:lnTo>
+                    <a:pt x="5627559" y="267521"/>
+                  </a:lnTo>
+                  <a:lnTo>
+                    <a:pt x="5557214" y="265428"/>
+                  </a:lnTo>
+                  <a:lnTo>
+                    <a:pt x="5486870" y="263181"/>
+                  </a:lnTo>
+                  <a:lnTo>
+                    <a:pt x="5416525" y="260768"/>
+                  </a:lnTo>
+                  <a:lnTo>
+                    <a:pt x="5346181" y="258179"/>
+                  </a:lnTo>
+                  <a:lnTo>
+                    <a:pt x="5275836" y="255398"/>
+                  </a:lnTo>
+                  <a:lnTo>
+                    <a:pt x="5205492" y="252414"/>
+                  </a:lnTo>
+                  <a:lnTo>
+                    <a:pt x="5135147" y="249210"/>
+                  </a:lnTo>
+                  <a:lnTo>
+                    <a:pt x="5064803" y="245770"/>
+                  </a:lnTo>
+                  <a:lnTo>
+                    <a:pt x="4994458" y="242077"/>
+                  </a:lnTo>
+                  <a:lnTo>
+                    <a:pt x="4924114" y="238113"/>
+                  </a:lnTo>
+                  <a:lnTo>
+                    <a:pt x="4853769" y="233857"/>
+                  </a:lnTo>
+                  <a:lnTo>
+                    <a:pt x="4783425" y="229288"/>
+                  </a:lnTo>
+                  <a:lnTo>
+                    <a:pt x="4713080" y="224383"/>
+                  </a:lnTo>
+                  <a:lnTo>
+                    <a:pt x="4642736" y="219118"/>
+                  </a:lnTo>
+                  <a:lnTo>
+                    <a:pt x="4572391" y="213465"/>
+                  </a:lnTo>
+                  <a:lnTo>
+                    <a:pt x="4502047" y="207397"/>
+                  </a:lnTo>
+                  <a:lnTo>
+                    <a:pt x="4431702" y="200882"/>
+                  </a:lnTo>
+                  <a:lnTo>
+                    <a:pt x="4361358" y="193889"/>
+                  </a:lnTo>
+                  <a:lnTo>
+                    <a:pt x="4291013" y="186381"/>
+                  </a:lnTo>
+                  <a:lnTo>
+                    <a:pt x="4220669" y="178321"/>
+                  </a:lnTo>
+                  <a:lnTo>
+                    <a:pt x="4150324" y="169668"/>
+                  </a:lnTo>
+                  <a:lnTo>
+                    <a:pt x="4079980" y="160379"/>
+                  </a:lnTo>
+                  <a:lnTo>
+                    <a:pt x="4009635" y="150407"/>
+                  </a:lnTo>
+                  <a:lnTo>
+                    <a:pt x="3939291" y="139701"/>
+                  </a:lnTo>
+                  <a:lnTo>
+                    <a:pt x="3868946" y="128208"/>
+                  </a:lnTo>
+                  <a:lnTo>
+                    <a:pt x="3798602" y="115870"/>
+                  </a:lnTo>
+                  <a:lnTo>
+                    <a:pt x="3728257" y="102625"/>
+                  </a:lnTo>
+                  <a:lnTo>
+                    <a:pt x="3657913" y="88406"/>
+                  </a:lnTo>
+                  <a:lnTo>
+                    <a:pt x="3587569" y="73141"/>
+                  </a:lnTo>
+                  <a:lnTo>
+                    <a:pt x="3517224" y="56753"/>
+                  </a:lnTo>
+                  <a:lnTo>
+                    <a:pt x="3446880" y="39161"/>
+                  </a:lnTo>
+                  <a:lnTo>
+                    <a:pt x="3376535" y="20275"/>
+                  </a:lnTo>
+                  <a:lnTo>
+                    <a:pt x="3306191" y="0"/>
+                  </a:lnTo>
+                  <a:lnTo>
+                    <a:pt x="3235846" y="465"/>
+                  </a:lnTo>
+                  <a:lnTo>
+                    <a:pt x="3165502" y="4933"/>
+                  </a:lnTo>
+                  <a:lnTo>
+                    <a:pt x="3095157" y="9334"/>
+                  </a:lnTo>
+                  <a:lnTo>
+                    <a:pt x="3024813" y="13669"/>
+                  </a:lnTo>
+                  <a:lnTo>
+                    <a:pt x="2954468" y="17938"/>
+                  </a:lnTo>
+                  <a:lnTo>
+                    <a:pt x="2884124" y="22142"/>
+                  </a:lnTo>
+                  <a:lnTo>
+                    <a:pt x="2813779" y="26283"/>
+                  </a:lnTo>
+                  <a:lnTo>
+                    <a:pt x="2743435" y="30361"/>
+                  </a:lnTo>
+                  <a:lnTo>
+                    <a:pt x="2673090" y="34377"/>
+                  </a:lnTo>
+                  <a:lnTo>
+                    <a:pt x="2602746" y="38333"/>
+                  </a:lnTo>
+                  <a:lnTo>
+                    <a:pt x="2532401" y="42229"/>
+                  </a:lnTo>
+                  <a:lnTo>
+                    <a:pt x="2462057" y="46066"/>
+                  </a:lnTo>
+                  <a:lnTo>
+                    <a:pt x="2391712" y="49845"/>
+                  </a:lnTo>
+                  <a:lnTo>
+                    <a:pt x="2321368" y="53567"/>
+                  </a:lnTo>
+                  <a:lnTo>
+                    <a:pt x="2251023" y="57232"/>
+                  </a:lnTo>
+                  <a:lnTo>
+                    <a:pt x="2180679" y="60842"/>
+                  </a:lnTo>
+                  <a:lnTo>
+                    <a:pt x="2110334" y="64398"/>
+                  </a:lnTo>
+                  <a:lnTo>
+                    <a:pt x="2039990" y="67900"/>
+                  </a:lnTo>
+                  <a:lnTo>
+                    <a:pt x="1969645" y="71349"/>
+                  </a:lnTo>
+                  <a:lnTo>
+                    <a:pt x="1899301" y="74745"/>
+                  </a:lnTo>
+                  <a:lnTo>
+                    <a:pt x="1828956" y="78091"/>
+                  </a:lnTo>
+                  <a:lnTo>
+                    <a:pt x="1758612" y="81385"/>
+                  </a:lnTo>
+                  <a:lnTo>
+                    <a:pt x="1688267" y="84630"/>
+                  </a:lnTo>
+                  <a:lnTo>
+                    <a:pt x="1617923" y="87826"/>
+                  </a:lnTo>
+                  <a:lnTo>
+                    <a:pt x="1547578" y="90974"/>
+                  </a:lnTo>
+                  <a:lnTo>
+                    <a:pt x="1477234" y="94074"/>
+                  </a:lnTo>
+                  <a:lnTo>
+                    <a:pt x="1406889" y="97127"/>
+                  </a:lnTo>
+                  <a:lnTo>
+                    <a:pt x="1336545" y="100134"/>
+                  </a:lnTo>
+                  <a:lnTo>
+                    <a:pt x="1266200" y="103095"/>
+                  </a:lnTo>
+                  <a:lnTo>
+                    <a:pt x="1195856" y="106012"/>
+                  </a:lnTo>
+                  <a:lnTo>
+                    <a:pt x="1125511" y="108884"/>
+                  </a:lnTo>
+                  <a:lnTo>
+                    <a:pt x="1055167" y="111713"/>
+                  </a:lnTo>
+                  <a:lnTo>
+                    <a:pt x="984822" y="114500"/>
+                  </a:lnTo>
+                  <a:lnTo>
+                    <a:pt x="914478" y="117244"/>
+                  </a:lnTo>
+                  <a:lnTo>
+                    <a:pt x="844133" y="119947"/>
+                  </a:lnTo>
+                  <a:lnTo>
+                    <a:pt x="773789" y="122608"/>
+                  </a:lnTo>
+                  <a:lnTo>
+                    <a:pt x="703444" y="125230"/>
+                  </a:lnTo>
+                  <a:lnTo>
+                    <a:pt x="633100" y="127812"/>
+                  </a:lnTo>
+                  <a:lnTo>
+                    <a:pt x="562755" y="130355"/>
+                  </a:lnTo>
+                  <a:lnTo>
+                    <a:pt x="492411" y="132859"/>
+                  </a:lnTo>
+                  <a:lnTo>
+                    <a:pt x="422066" y="135326"/>
+                  </a:lnTo>
+                  <a:lnTo>
+                    <a:pt x="351722" y="137755"/>
+                  </a:lnTo>
+                  <a:lnTo>
+                    <a:pt x="281377" y="140148"/>
+                  </a:lnTo>
+                  <a:lnTo>
+                    <a:pt x="211033" y="142504"/>
+                  </a:lnTo>
+                  <a:lnTo>
+                    <a:pt x="140688" y="144825"/>
+                  </a:lnTo>
+                  <a:lnTo>
+                    <a:pt x="70344" y="147111"/>
+                  </a:lnTo>
+                  <a:lnTo>
+                    <a:pt x="0" y="149362"/>
+                  </a:lnTo>
+                </a:path>
+              </a:pathLst>
+            </a:custGeom>
+          </p:spPr>
+          <p:txBody>
+            <a:bodyPr/>
+            <a:lstStyle/>
+            <a:p/>
+          </p:txBody>
+        </p:sp>
+        <p:sp>
+          <p:nvSpPr>
+            <p:cNvPr id="24" name="pl24"/>
+            <p:cNvSpPr/>
+            <p:nvPr/>
+          </p:nvSpPr>
+          <p:spPr>
+            <a:xfrm>
+              <a:off x="1235312" y="2296360"/>
+              <a:ext cx="6964104" cy="1033944"/>
+            </a:xfrm>
+            <a:custGeom>
+              <a:avLst/>
+              <a:pathLst>
+                <a:path w="6964104" h="1033944">
                   <a:moveTo>
                     <a:pt x="0" y="0"/>
                   </a:moveTo>
                   <a:lnTo>
-                    <a:pt x="71622" y="84053"/>
-                  </a:lnTo>
-                  <a:lnTo>
-                    <a:pt x="143245" y="165796"/>
-                  </a:lnTo>
-                  <a:lnTo>
-                    <a:pt x="214867" y="245294"/>
-                  </a:lnTo>
-                  <a:lnTo>
-                    <a:pt x="286490" y="322607"/>
-                  </a:lnTo>
-                  <a:lnTo>
-                    <a:pt x="358112" y="397796"/>
-                  </a:lnTo>
-                  <a:lnTo>
-                    <a:pt x="429735" y="470918"/>
-                  </a:lnTo>
-                  <a:lnTo>
-                    <a:pt x="501357" y="542032"/>
-                  </a:lnTo>
-                  <a:lnTo>
-                    <a:pt x="572980" y="611192"/>
-                  </a:lnTo>
-                  <a:lnTo>
-                    <a:pt x="644602" y="678451"/>
-                  </a:lnTo>
-                  <a:lnTo>
-                    <a:pt x="716225" y="743862"/>
-                  </a:lnTo>
-                  <a:lnTo>
-                    <a:pt x="787847" y="807476"/>
-                  </a:lnTo>
-                  <a:lnTo>
-                    <a:pt x="859470" y="869342"/>
-                  </a:lnTo>
-                  <a:lnTo>
-                    <a:pt x="931092" y="929509"/>
-                  </a:lnTo>
-                  <a:lnTo>
-                    <a:pt x="1002715" y="988021"/>
-                  </a:lnTo>
-                  <a:lnTo>
-                    <a:pt x="1074337" y="1044927"/>
-                  </a:lnTo>
-                  <a:lnTo>
-                    <a:pt x="1145960" y="1100268"/>
-                  </a:lnTo>
-                  <a:lnTo>
-                    <a:pt x="1217582" y="1154089"/>
-                  </a:lnTo>
-                  <a:lnTo>
-                    <a:pt x="1289205" y="1206432"/>
-                  </a:lnTo>
-                  <a:lnTo>
-                    <a:pt x="1360827" y="1257335"/>
-                  </a:lnTo>
-                  <a:lnTo>
-                    <a:pt x="1432450" y="1306841"/>
-                  </a:lnTo>
-                  <a:lnTo>
-                    <a:pt x="1504073" y="1354986"/>
-                  </a:lnTo>
-                  <a:lnTo>
-                    <a:pt x="1575695" y="1401808"/>
-                  </a:lnTo>
-                  <a:lnTo>
-                    <a:pt x="1647318" y="1447344"/>
-                  </a:lnTo>
-                  <a:lnTo>
-                    <a:pt x="1718940" y="1491628"/>
-                  </a:lnTo>
-                  <a:lnTo>
-                    <a:pt x="1790563" y="1534696"/>
-                  </a:lnTo>
-                  <a:lnTo>
-                    <a:pt x="1862185" y="1576580"/>
-                  </a:lnTo>
-                  <a:lnTo>
-                    <a:pt x="1933808" y="1617313"/>
-                  </a:lnTo>
-                  <a:lnTo>
-                    <a:pt x="2005430" y="1656927"/>
-                  </a:lnTo>
-                  <a:lnTo>
-                    <a:pt x="2077053" y="1695453"/>
-                  </a:lnTo>
-                  <a:lnTo>
-                    <a:pt x="2148675" y="1732920"/>
-                  </a:lnTo>
-                  <a:lnTo>
-                    <a:pt x="2220298" y="1769358"/>
-                  </a:lnTo>
-                  <a:lnTo>
-                    <a:pt x="2291920" y="1804794"/>
-                  </a:lnTo>
-                  <a:lnTo>
-                    <a:pt x="2363543" y="1839257"/>
-                  </a:lnTo>
-                  <a:lnTo>
-                    <a:pt x="2435165" y="1872773"/>
-                  </a:lnTo>
-                  <a:lnTo>
-                    <a:pt x="2506788" y="1905368"/>
-                  </a:lnTo>
-                  <a:lnTo>
-                    <a:pt x="2578410" y="1937067"/>
-                  </a:lnTo>
-                  <a:lnTo>
-                    <a:pt x="2650033" y="1967895"/>
-                  </a:lnTo>
-                  <a:lnTo>
-                    <a:pt x="2721655" y="1997877"/>
-                  </a:lnTo>
-                  <a:lnTo>
-                    <a:pt x="2793278" y="2027034"/>
-                  </a:lnTo>
-                  <a:lnTo>
-                    <a:pt x="2864901" y="2055390"/>
-                  </a:lnTo>
-                  <a:lnTo>
-                    <a:pt x="2936523" y="2082968"/>
-                  </a:lnTo>
-                  <a:lnTo>
-                    <a:pt x="3008146" y="2109787"/>
-                  </a:lnTo>
-                  <a:lnTo>
-                    <a:pt x="3079768" y="2135869"/>
-                  </a:lnTo>
-                  <a:lnTo>
-                    <a:pt x="3151391" y="2161235"/>
-                  </a:lnTo>
-                  <a:lnTo>
-                    <a:pt x="3223013" y="2185904"/>
-                  </a:lnTo>
-                  <a:lnTo>
-                    <a:pt x="3294636" y="2209895"/>
-                  </a:lnTo>
-                  <a:lnTo>
-                    <a:pt x="3366258" y="2233227"/>
-                  </a:lnTo>
-                  <a:lnTo>
-                    <a:pt x="3437881" y="2255918"/>
-                  </a:lnTo>
-                  <a:lnTo>
-                    <a:pt x="3509503" y="2277985"/>
-                  </a:lnTo>
-                  <a:lnTo>
-                    <a:pt x="3581126" y="2299446"/>
-                  </a:lnTo>
-                  <a:lnTo>
-                    <a:pt x="3652748" y="2320317"/>
-                  </a:lnTo>
-                  <a:lnTo>
-                    <a:pt x="3724371" y="2340615"/>
-                  </a:lnTo>
-                  <a:lnTo>
-                    <a:pt x="3795993" y="2360355"/>
-                  </a:lnTo>
-                  <a:lnTo>
-                    <a:pt x="3867616" y="2379552"/>
-                  </a:lnTo>
-                  <a:lnTo>
-                    <a:pt x="3939238" y="2398223"/>
-                  </a:lnTo>
-                  <a:lnTo>
-                    <a:pt x="4010861" y="2416380"/>
-                  </a:lnTo>
-                  <a:lnTo>
-                    <a:pt x="4082483" y="2434038"/>
-                  </a:lnTo>
-                  <a:lnTo>
-                    <a:pt x="4154106" y="2451211"/>
-                  </a:lnTo>
-                  <a:lnTo>
-                    <a:pt x="4225729" y="2467912"/>
-                  </a:lnTo>
-                  <a:lnTo>
-                    <a:pt x="4297351" y="2484154"/>
-                  </a:lnTo>
-                  <a:lnTo>
-                    <a:pt x="4368974" y="2499950"/>
-                  </a:lnTo>
-                  <a:lnTo>
-                    <a:pt x="4440596" y="2515312"/>
-                  </a:lnTo>
-                  <a:lnTo>
-                    <a:pt x="4512219" y="2530252"/>
-                  </a:lnTo>
-                  <a:lnTo>
-                    <a:pt x="4583841" y="2544782"/>
-                  </a:lnTo>
-                  <a:lnTo>
-                    <a:pt x="4655464" y="2558912"/>
-                  </a:lnTo>
-                  <a:lnTo>
-                    <a:pt x="4727086" y="2572654"/>
-                  </a:lnTo>
-                  <a:lnTo>
-                    <a:pt x="4798709" y="2586018"/>
-                  </a:lnTo>
-                  <a:lnTo>
-                    <a:pt x="4870331" y="2599015"/>
-                  </a:lnTo>
-                  <a:lnTo>
-                    <a:pt x="4941954" y="2611655"/>
-                  </a:lnTo>
-                  <a:lnTo>
-                    <a:pt x="5013576" y="2623948"/>
-                  </a:lnTo>
-                  <a:lnTo>
-                    <a:pt x="5085199" y="2635903"/>
-                  </a:lnTo>
-                  <a:lnTo>
-                    <a:pt x="5156821" y="2647529"/>
-                  </a:lnTo>
-                  <a:lnTo>
-                    <a:pt x="5228444" y="2658836"/>
-                  </a:lnTo>
-                  <a:lnTo>
-                    <a:pt x="5300066" y="2669832"/>
-                  </a:lnTo>
-                  <a:lnTo>
-                    <a:pt x="5371689" y="2680526"/>
-                  </a:lnTo>
-                  <a:lnTo>
-                    <a:pt x="5443311" y="2690927"/>
-                  </a:lnTo>
-                  <a:lnTo>
-                    <a:pt x="5514934" y="2701041"/>
-                  </a:lnTo>
-                  <a:lnTo>
-                    <a:pt x="5586557" y="2710878"/>
-                  </a:lnTo>
-                  <a:lnTo>
-                    <a:pt x="5658179" y="2720444"/>
-                  </a:lnTo>
-                  <a:lnTo>
-                    <a:pt x="5729802" y="2729748"/>
-                  </a:lnTo>
-                  <a:lnTo>
-                    <a:pt x="5801424" y="2738795"/>
-                  </a:lnTo>
-                  <a:lnTo>
-                    <a:pt x="5873047" y="2747595"/>
-                  </a:lnTo>
-                  <a:lnTo>
-                    <a:pt x="5944669" y="2756152"/>
-                  </a:lnTo>
-                  <a:lnTo>
-                    <a:pt x="6016292" y="2764474"/>
-                  </a:lnTo>
-                  <a:lnTo>
-                    <a:pt x="6087914" y="2772568"/>
-                  </a:lnTo>
-                  <a:lnTo>
-                    <a:pt x="6159537" y="2780439"/>
-                  </a:lnTo>
-                  <a:lnTo>
-                    <a:pt x="6231159" y="2788094"/>
-                  </a:lnTo>
-                  <a:lnTo>
-                    <a:pt x="6302782" y="2795539"/>
-                  </a:lnTo>
-                  <a:lnTo>
-                    <a:pt x="6374404" y="2802779"/>
-                  </a:lnTo>
-                  <a:lnTo>
-                    <a:pt x="6446027" y="2809820"/>
-                  </a:lnTo>
-                  <a:lnTo>
-                    <a:pt x="6517649" y="2816668"/>
-                  </a:lnTo>
-                  <a:lnTo>
-                    <a:pt x="6589272" y="2823327"/>
-                  </a:lnTo>
-                  <a:lnTo>
-                    <a:pt x="6660894" y="2829804"/>
-                  </a:lnTo>
-                  <a:lnTo>
-                    <a:pt x="6732517" y="2836103"/>
-                  </a:lnTo>
-                  <a:lnTo>
-                    <a:pt x="6804139" y="2842228"/>
-                  </a:lnTo>
-                  <a:lnTo>
-                    <a:pt x="6875762" y="2848185"/>
-                  </a:lnTo>
-                  <a:lnTo>
-                    <a:pt x="6947385" y="2853979"/>
-                  </a:lnTo>
-                  <a:lnTo>
-                    <a:pt x="7019007" y="2859613"/>
-                  </a:lnTo>
-                  <a:lnTo>
-                    <a:pt x="7090630" y="2865093"/>
+                    <a:pt x="70344" y="30332"/>
+                  </a:lnTo>
+                  <a:lnTo>
+                    <a:pt x="140688" y="59832"/>
+                  </a:lnTo>
+                  <a:lnTo>
+                    <a:pt x="211033" y="88520"/>
+                  </a:lnTo>
+                  <a:lnTo>
+                    <a:pt x="281377" y="116421"/>
+                  </a:lnTo>
+                  <a:lnTo>
+                    <a:pt x="351722" y="143555"/>
+                  </a:lnTo>
+                  <a:lnTo>
+                    <a:pt x="422066" y="169943"/>
+                  </a:lnTo>
+                  <a:lnTo>
+                    <a:pt x="492411" y="195606"/>
+                  </a:lnTo>
+                  <a:lnTo>
+                    <a:pt x="562755" y="220564"/>
+                  </a:lnTo>
+                  <a:lnTo>
+                    <a:pt x="633100" y="244837"/>
+                  </a:lnTo>
+                  <a:lnTo>
+                    <a:pt x="703444" y="268442"/>
+                  </a:lnTo>
+                  <a:lnTo>
+                    <a:pt x="773789" y="291399"/>
+                  </a:lnTo>
+                  <a:lnTo>
+                    <a:pt x="844133" y="313725"/>
+                  </a:lnTo>
+                  <a:lnTo>
+                    <a:pt x="914478" y="335437"/>
+                  </a:lnTo>
+                  <a:lnTo>
+                    <a:pt x="984822" y="356553"/>
+                  </a:lnTo>
+                  <a:lnTo>
+                    <a:pt x="1055167" y="377089"/>
+                  </a:lnTo>
+                  <a:lnTo>
+                    <a:pt x="1125511" y="397061"/>
+                  </a:lnTo>
+                  <a:lnTo>
+                    <a:pt x="1195856" y="416483"/>
+                  </a:lnTo>
+                  <a:lnTo>
+                    <a:pt x="1266200" y="435372"/>
+                  </a:lnTo>
+                  <a:lnTo>
+                    <a:pt x="1336545" y="453742"/>
+                  </a:lnTo>
+                  <a:lnTo>
+                    <a:pt x="1406889" y="471608"/>
+                  </a:lnTo>
+                  <a:lnTo>
+                    <a:pt x="1477234" y="488982"/>
+                  </a:lnTo>
+                  <a:lnTo>
+                    <a:pt x="1547578" y="505879"/>
+                  </a:lnTo>
+                  <a:lnTo>
+                    <a:pt x="1617923" y="522312"/>
+                  </a:lnTo>
+                  <a:lnTo>
+                    <a:pt x="1688267" y="538293"/>
+                  </a:lnTo>
+                  <a:lnTo>
+                    <a:pt x="1758612" y="553835"/>
+                  </a:lnTo>
+                  <a:lnTo>
+                    <a:pt x="1828956" y="568950"/>
+                  </a:lnTo>
+                  <a:lnTo>
+                    <a:pt x="1899301" y="583650"/>
+                  </a:lnTo>
+                  <a:lnTo>
+                    <a:pt x="1969645" y="597946"/>
+                  </a:lnTo>
+                  <a:lnTo>
+                    <a:pt x="2039990" y="611849"/>
+                  </a:lnTo>
+                  <a:lnTo>
+                    <a:pt x="2110334" y="625370"/>
+                  </a:lnTo>
+                  <a:lnTo>
+                    <a:pt x="2180679" y="638519"/>
+                  </a:lnTo>
+                  <a:lnTo>
+                    <a:pt x="2251023" y="651307"/>
+                  </a:lnTo>
+                  <a:lnTo>
+                    <a:pt x="2321368" y="663744"/>
+                  </a:lnTo>
+                  <a:lnTo>
+                    <a:pt x="2391712" y="675839"/>
+                  </a:lnTo>
+                  <a:lnTo>
+                    <a:pt x="2462057" y="687602"/>
+                  </a:lnTo>
+                  <a:lnTo>
+                    <a:pt x="2532401" y="699042"/>
+                  </a:lnTo>
+                  <a:lnTo>
+                    <a:pt x="2602746" y="710167"/>
+                  </a:lnTo>
+                  <a:lnTo>
+                    <a:pt x="2673090" y="720986"/>
+                  </a:lnTo>
+                  <a:lnTo>
+                    <a:pt x="2743435" y="731509"/>
+                  </a:lnTo>
+                  <a:lnTo>
+                    <a:pt x="2813779" y="741742"/>
+                  </a:lnTo>
+                  <a:lnTo>
+                    <a:pt x="2884124" y="751694"/>
+                  </a:lnTo>
+                  <a:lnTo>
+                    <a:pt x="2954468" y="761372"/>
+                  </a:lnTo>
+                  <a:lnTo>
+                    <a:pt x="3024813" y="770785"/>
+                  </a:lnTo>
+                  <a:lnTo>
+                    <a:pt x="3095157" y="779939"/>
+                  </a:lnTo>
+                  <a:lnTo>
+                    <a:pt x="3165502" y="788841"/>
+                  </a:lnTo>
+                  <a:lnTo>
+                    <a:pt x="3235846" y="797499"/>
+                  </a:lnTo>
+                  <a:lnTo>
+                    <a:pt x="3306191" y="805919"/>
+                  </a:lnTo>
+                  <a:lnTo>
+                    <a:pt x="3376535" y="814107"/>
+                  </a:lnTo>
+                  <a:lnTo>
+                    <a:pt x="3446880" y="822071"/>
+                  </a:lnTo>
+                  <a:lnTo>
+                    <a:pt x="3517224" y="829816"/>
+                  </a:lnTo>
+                  <a:lnTo>
+                    <a:pt x="3587569" y="837348"/>
+                  </a:lnTo>
+                  <a:lnTo>
+                    <a:pt x="3657913" y="844672"/>
+                  </a:lnTo>
+                  <a:lnTo>
+                    <a:pt x="3728257" y="851796"/>
+                  </a:lnTo>
+                  <a:lnTo>
+                    <a:pt x="3798602" y="858724"/>
+                  </a:lnTo>
+                  <a:lnTo>
+                    <a:pt x="3868946" y="865462"/>
+                  </a:lnTo>
+                  <a:lnTo>
+                    <a:pt x="3939291" y="872014"/>
+                  </a:lnTo>
+                  <a:lnTo>
+                    <a:pt x="4009635" y="878387"/>
+                  </a:lnTo>
+                  <a:lnTo>
+                    <a:pt x="4079980" y="884584"/>
+                  </a:lnTo>
+                  <a:lnTo>
+                    <a:pt x="4150324" y="890611"/>
+                  </a:lnTo>
+                  <a:lnTo>
+                    <a:pt x="4220669" y="896473"/>
+                  </a:lnTo>
+                  <a:lnTo>
+                    <a:pt x="4291013" y="902173"/>
+                  </a:lnTo>
+                  <a:lnTo>
+                    <a:pt x="4361358" y="907717"/>
+                  </a:lnTo>
+                  <a:lnTo>
+                    <a:pt x="4431702" y="913108"/>
+                  </a:lnTo>
+                  <a:lnTo>
+                    <a:pt x="4502047" y="918352"/>
+                  </a:lnTo>
+                  <a:lnTo>
+                    <a:pt x="4572391" y="923451"/>
+                  </a:lnTo>
+                  <a:lnTo>
+                    <a:pt x="4642736" y="928410"/>
+                  </a:lnTo>
+                  <a:lnTo>
+                    <a:pt x="4713080" y="933233"/>
+                  </a:lnTo>
+                  <a:lnTo>
+                    <a:pt x="4783425" y="937923"/>
+                  </a:lnTo>
+                  <a:lnTo>
+                    <a:pt x="4853769" y="942485"/>
+                  </a:lnTo>
+                  <a:lnTo>
+                    <a:pt x="4924114" y="946921"/>
+                  </a:lnTo>
+                  <a:lnTo>
+                    <a:pt x="4994458" y="951235"/>
+                  </a:lnTo>
+                  <a:lnTo>
+                    <a:pt x="5064803" y="955431"/>
+                  </a:lnTo>
+                  <a:lnTo>
+                    <a:pt x="5135147" y="959511"/>
+                  </a:lnTo>
+                  <a:lnTo>
+                    <a:pt x="5205492" y="963479"/>
+                  </a:lnTo>
+                  <a:lnTo>
+                    <a:pt x="5275836" y="967339"/>
+                  </a:lnTo>
+                  <a:lnTo>
+                    <a:pt x="5346181" y="971092"/>
+                  </a:lnTo>
+                  <a:lnTo>
+                    <a:pt x="5416525" y="974742"/>
+                  </a:lnTo>
+                  <a:lnTo>
+                    <a:pt x="5486870" y="978292"/>
+                  </a:lnTo>
+                  <a:lnTo>
+                    <a:pt x="5557214" y="981744"/>
+                  </a:lnTo>
+                  <a:lnTo>
+                    <a:pt x="5627559" y="985101"/>
+                  </a:lnTo>
+                  <a:lnTo>
+                    <a:pt x="5697903" y="988367"/>
+                  </a:lnTo>
+                  <a:lnTo>
+                    <a:pt x="5768248" y="991542"/>
+                  </a:lnTo>
+                  <a:lnTo>
+                    <a:pt x="5838592" y="994630"/>
+                  </a:lnTo>
+                  <a:lnTo>
+                    <a:pt x="5908937" y="997633"/>
+                  </a:lnTo>
+                  <a:lnTo>
+                    <a:pt x="5979281" y="1000554"/>
+                  </a:lnTo>
+                  <a:lnTo>
+                    <a:pt x="6049626" y="1003395"/>
+                  </a:lnTo>
+                  <a:lnTo>
+                    <a:pt x="6119970" y="1006157"/>
+                  </a:lnTo>
+                  <a:lnTo>
+                    <a:pt x="6190315" y="1008844"/>
+                  </a:lnTo>
+                  <a:lnTo>
+                    <a:pt x="6260659" y="1011457"/>
+                  </a:lnTo>
+                  <a:lnTo>
+                    <a:pt x="6331004" y="1013998"/>
+                  </a:lnTo>
+                  <a:lnTo>
+                    <a:pt x="6401348" y="1016469"/>
+                  </a:lnTo>
+                  <a:lnTo>
+                    <a:pt x="6471693" y="1018872"/>
+                  </a:lnTo>
+                  <a:lnTo>
+                    <a:pt x="6542037" y="1021209"/>
+                  </a:lnTo>
+                  <a:lnTo>
+                    <a:pt x="6612382" y="1023482"/>
+                  </a:lnTo>
+                  <a:lnTo>
+                    <a:pt x="6682726" y="1025693"/>
+                  </a:lnTo>
+                  <a:lnTo>
+                    <a:pt x="6753071" y="1027843"/>
+                  </a:lnTo>
+                  <a:lnTo>
+                    <a:pt x="6823415" y="1029933"/>
+                  </a:lnTo>
+                  <a:lnTo>
+                    <a:pt x="6893760" y="1031967"/>
+                  </a:lnTo>
+                  <a:lnTo>
+                    <a:pt x="6964104" y="1033944"/>
                   </a:lnTo>
                 </a:path>
               </a:pathLst>
@@ -4412,27 +4447,27 @@
         </p:sp>
         <p:sp>
           <p:nvSpPr>
-            <p:cNvPr id="24" name="pl24"/>
+            <p:cNvPr id="25" name="pl25"/>
             <p:cNvSpPr/>
             <p:nvPr/>
           </p:nvSpPr>
           <p:spPr>
             <a:xfrm>
-              <a:off x="817517" y="4727786"/>
-              <a:ext cx="7799693" cy="0"/>
+              <a:off x="887106" y="3100960"/>
+              <a:ext cx="7660515" cy="0"/>
             </a:xfrm>
             <a:custGeom>
               <a:avLst/>
               <a:pathLst>
-                <a:path w="7799693" h="0">
+                <a:path w="7660515" h="0">
                   <a:moveTo>
                     <a:pt x="0" y="0"/>
                   </a:moveTo>
                   <a:lnTo>
-                    <a:pt x="7799693" y="0"/>
-                  </a:lnTo>
-                  <a:lnTo>
-                    <a:pt x="7799693" y="0"/>
+                    <a:pt x="7660515" y="0"/>
+                  </a:lnTo>
+                  <a:lnTo>
+                    <a:pt x="7660515" y="0"/>
                   </a:lnTo>
                 </a:path>
               </a:pathLst>
@@ -4455,21 +4490,21 @@
         </p:sp>
         <p:sp>
           <p:nvSpPr>
-            <p:cNvPr id="25" name="pl25"/>
+            <p:cNvPr id="26" name="pl26"/>
             <p:cNvSpPr/>
             <p:nvPr/>
           </p:nvSpPr>
           <p:spPr>
             <a:xfrm>
-              <a:off x="4526955" y="2073503"/>
-              <a:ext cx="0" cy="3649639"/>
+              <a:off x="4530353" y="2143092"/>
+              <a:ext cx="0" cy="1317069"/>
             </a:xfrm>
             <a:custGeom>
               <a:avLst/>
               <a:pathLst>
-                <a:path w="0" h="3649639">
+                <a:path w="0" h="1317069">
                   <a:moveTo>
-                    <a:pt x="0" y="3649639"/>
+                    <a:pt x="0" y="1317069"/>
                   </a:moveTo>
                   <a:lnTo>
                     <a:pt x="0" y="0"/>
@@ -4498,13 +4533,13 @@
         </p:sp>
         <p:sp>
           <p:nvSpPr>
-            <p:cNvPr id="26" name="tx26"/>
+            <p:cNvPr id="27" name="tx27"/>
             <p:cNvSpPr/>
             <p:nvPr/>
           </p:nvSpPr>
           <p:spPr>
             <a:xfrm>
-              <a:off x="692708" y="5517199"/>
+              <a:off x="762297" y="3360243"/>
               <a:ext cx="62179" cy="80101"/>
             </a:xfrm>
             <a:prstGeom prst="rect">
@@ -4544,13 +4579,13 @@
         </p:sp>
         <p:sp>
           <p:nvSpPr>
-            <p:cNvPr id="27" name="tx27"/>
+            <p:cNvPr id="28" name="tx28"/>
             <p:cNvSpPr/>
             <p:nvPr/>
           </p:nvSpPr>
           <p:spPr>
             <a:xfrm>
-              <a:off x="692708" y="4687735"/>
+              <a:off x="762297" y="3060909"/>
               <a:ext cx="62179" cy="80101"/>
             </a:xfrm>
             <a:prstGeom prst="rect">
@@ -4590,13 +4625,13 @@
         </p:sp>
         <p:sp>
           <p:nvSpPr>
-            <p:cNvPr id="28" name="tx28"/>
+            <p:cNvPr id="29" name="tx29"/>
             <p:cNvSpPr/>
             <p:nvPr/>
           </p:nvSpPr>
           <p:spPr>
             <a:xfrm>
-              <a:off x="692708" y="3858272"/>
+              <a:off x="762297" y="2761575"/>
               <a:ext cx="62179" cy="80101"/>
             </a:xfrm>
             <a:prstGeom prst="rect">
@@ -4636,13 +4671,13 @@
         </p:sp>
         <p:sp>
           <p:nvSpPr>
-            <p:cNvPr id="29" name="tx29"/>
+            <p:cNvPr id="30" name="tx30"/>
             <p:cNvSpPr/>
             <p:nvPr/>
           </p:nvSpPr>
           <p:spPr>
             <a:xfrm>
-              <a:off x="692708" y="3028808"/>
+              <a:off x="762297" y="2462242"/>
               <a:ext cx="62179" cy="80101"/>
             </a:xfrm>
             <a:prstGeom prst="rect">
@@ -4682,13 +4717,13 @@
         </p:sp>
         <p:sp>
           <p:nvSpPr>
-            <p:cNvPr id="30" name="tx30"/>
+            <p:cNvPr id="31" name="tx31"/>
             <p:cNvSpPr/>
             <p:nvPr/>
           </p:nvSpPr>
           <p:spPr>
             <a:xfrm>
-              <a:off x="692708" y="2199345"/>
+              <a:off x="762297" y="2162908"/>
               <a:ext cx="62179" cy="80101"/>
             </a:xfrm>
             <a:prstGeom prst="rect">
@@ -4728,13 +4763,13 @@
         </p:sp>
         <p:sp>
           <p:nvSpPr>
-            <p:cNvPr id="31" name="tx31"/>
+            <p:cNvPr id="32" name="tx32"/>
             <p:cNvSpPr/>
             <p:nvPr/>
           </p:nvSpPr>
           <p:spPr>
             <a:xfrm>
-              <a:off x="2421884" y="5785772"/>
+              <a:off x="2461403" y="3522791"/>
               <a:ext cx="161574" cy="80101"/>
             </a:xfrm>
             <a:prstGeom prst="rect">
@@ -4774,13 +4809,13 @@
         </p:sp>
         <p:sp>
           <p:nvSpPr>
-            <p:cNvPr id="32" name="tx32"/>
+            <p:cNvPr id="33" name="tx33"/>
             <p:cNvSpPr/>
             <p:nvPr/>
           </p:nvSpPr>
           <p:spPr>
             <a:xfrm>
-              <a:off x="4542539" y="5785772"/>
+              <a:off x="4545104" y="3522791"/>
               <a:ext cx="62179" cy="80101"/>
             </a:xfrm>
             <a:prstGeom prst="rect">
@@ -4820,13 +4855,13 @@
         </p:sp>
         <p:sp>
           <p:nvSpPr>
-            <p:cNvPr id="33" name="tx33"/>
+            <p:cNvPr id="34" name="tx34"/>
             <p:cNvSpPr/>
             <p:nvPr/>
           </p:nvSpPr>
           <p:spPr>
             <a:xfrm>
-              <a:off x="6582407" y="5785772"/>
+              <a:off x="6548017" y="3522791"/>
               <a:ext cx="124358" cy="80101"/>
             </a:xfrm>
             <a:prstGeom prst="rect">
@@ -4866,13 +4901,13 @@
         </p:sp>
         <p:sp>
           <p:nvSpPr>
-            <p:cNvPr id="34" name="tx34"/>
+            <p:cNvPr id="35" name="tx35"/>
             <p:cNvSpPr/>
             <p:nvPr/>
           </p:nvSpPr>
           <p:spPr>
             <a:xfrm>
-              <a:off x="2928340" y="5925448"/>
+              <a:off x="2928340" y="3662467"/>
               <a:ext cx="3578047" cy="100218"/>
             </a:xfrm>
             <a:prstGeom prst="rect">
@@ -4912,13 +4947,13 @@
         </p:sp>
         <p:sp>
           <p:nvSpPr>
-            <p:cNvPr id="35" name="tx35"/>
+            <p:cNvPr id="36" name="tx36"/>
             <p:cNvSpPr/>
             <p:nvPr/>
           </p:nvSpPr>
           <p:spPr>
             <a:xfrm rot="-5400000">
-              <a:off x="68446" y="3848213"/>
+              <a:off x="138035" y="2751517"/>
               <a:ext cx="1016904" cy="100218"/>
             </a:xfrm>
             <a:prstGeom prst="rect">
@@ -4958,13 +4993,13 @@
         </p:sp>
         <p:sp>
           <p:nvSpPr>
-            <p:cNvPr id="36" name="tx36"/>
+            <p:cNvPr id="37" name="tx37"/>
             <p:cNvSpPr/>
             <p:nvPr/>
           </p:nvSpPr>
           <p:spPr>
             <a:xfrm>
-              <a:off x="817517" y="1896563"/>
+              <a:off x="887106" y="1966152"/>
               <a:ext cx="6385163" cy="82021"/>
             </a:xfrm>
             <a:prstGeom prst="rect">
@@ -5004,13 +5039,3590 @@
         </p:sp>
         <p:sp>
           <p:nvSpPr>
-            <p:cNvPr id="37" name="tx37"/>
+            <p:cNvPr id="38" name="tx38"/>
             <p:cNvSpPr/>
             <p:nvPr/>
           </p:nvSpPr>
           <p:spPr>
             <a:xfrm>
-              <a:off x="817517" y="1669789"/>
+              <a:off x="887106" y="1739378"/>
+              <a:ext cx="2486253" cy="120152"/>
+            </a:xfrm>
+            <a:prstGeom prst="rect">
+              <a:avLst/>
+            </a:prstGeom>
+            <a:noFill/>
+          </p:spPr>
+          <p:txBody>
+            <a:bodyPr lIns="0" rIns="0" tIns="0" bIns="0" anchorCtr="1" anchor="ctr" wrap="none"/>
+            <a:lstStyle/>
+            <a:p>
+              <a:pPr algn="l" marL="0" marR="0" indent="0">
+                <a:lnSpc>
+                  <a:spcPts val="1320"/>
+                </a:lnSpc>
+                <a:spcBef>
+                  <a:spcPts val="0"/>
+                </a:spcBef>
+                <a:spcAft>
+                  <a:spcPts val="0"/>
+                </a:spcAft>
+              </a:pPr>
+              <a:r>
+                <a:rPr sz="1320">
+                  <a:solidFill>
+                    <a:srgbClr val="000000">
+                      <a:alpha val="100000"/>
+                    </a:srgbClr>
+                  </a:solidFill>
+                  <a:latin typeface="Helvetica"/>
+                  <a:cs typeface="Helvetica"/>
+                </a:rPr>
+                <a:t>Febrile Neutropenia (Carboplatin)</a:t>
+              </a:r>
+            </a:p>
+          </p:txBody>
+        </p:sp>
+        <p:sp>
+          <p:nvSpPr>
+            <p:cNvPr id="39" name="pl39"/>
+            <p:cNvSpPr/>
+            <p:nvPr/>
+          </p:nvSpPr>
+          <p:spPr>
+            <a:xfrm>
+              <a:off x="887106" y="5444019"/>
+              <a:ext cx="7660515" cy="0"/>
+            </a:xfrm>
+            <a:custGeom>
+              <a:avLst/>
+              <a:pathLst>
+                <a:path w="7660515" h="0">
+                  <a:moveTo>
+                    <a:pt x="0" y="0"/>
+                  </a:moveTo>
+                  <a:lnTo>
+                    <a:pt x="7660515" y="0"/>
+                  </a:lnTo>
+                  <a:lnTo>
+                    <a:pt x="7660515" y="0"/>
+                  </a:lnTo>
+                </a:path>
+              </a:pathLst>
+            </a:custGeom>
+            <a:ln w="6775" cap="flat">
+              <a:solidFill>
+                <a:srgbClr val="EBEBEB">
+                  <a:alpha val="100000"/>
+                </a:srgbClr>
+              </a:solidFill>
+              <a:prstDash val="solid"/>
+              <a:round/>
+            </a:ln>
+          </p:spPr>
+          <p:txBody>
+            <a:bodyPr/>
+            <a:lstStyle/>
+            <a:p/>
+          </p:txBody>
+        </p:sp>
+        <p:sp>
+          <p:nvSpPr>
+            <p:cNvPr id="40" name="pl40"/>
+            <p:cNvSpPr/>
+            <p:nvPr/>
+          </p:nvSpPr>
+          <p:spPr>
+            <a:xfrm>
+              <a:off x="887106" y="5144686"/>
+              <a:ext cx="7660515" cy="0"/>
+            </a:xfrm>
+            <a:custGeom>
+              <a:avLst/>
+              <a:pathLst>
+                <a:path w="7660515" h="0">
+                  <a:moveTo>
+                    <a:pt x="0" y="0"/>
+                  </a:moveTo>
+                  <a:lnTo>
+                    <a:pt x="7660515" y="0"/>
+                  </a:lnTo>
+                  <a:lnTo>
+                    <a:pt x="7660515" y="0"/>
+                  </a:lnTo>
+                </a:path>
+              </a:pathLst>
+            </a:custGeom>
+            <a:ln w="6775" cap="flat">
+              <a:solidFill>
+                <a:srgbClr val="EBEBEB">
+                  <a:alpha val="100000"/>
+                </a:srgbClr>
+              </a:solidFill>
+              <a:prstDash val="solid"/>
+              <a:round/>
+            </a:ln>
+          </p:spPr>
+          <p:txBody>
+            <a:bodyPr/>
+            <a:lstStyle/>
+            <a:p/>
+          </p:txBody>
+        </p:sp>
+        <p:sp>
+          <p:nvSpPr>
+            <p:cNvPr id="41" name="pl41"/>
+            <p:cNvSpPr/>
+            <p:nvPr/>
+          </p:nvSpPr>
+          <p:spPr>
+            <a:xfrm>
+              <a:off x="887106" y="4845352"/>
+              <a:ext cx="7660515" cy="0"/>
+            </a:xfrm>
+            <a:custGeom>
+              <a:avLst/>
+              <a:pathLst>
+                <a:path w="7660515" h="0">
+                  <a:moveTo>
+                    <a:pt x="0" y="0"/>
+                  </a:moveTo>
+                  <a:lnTo>
+                    <a:pt x="7660515" y="0"/>
+                  </a:lnTo>
+                  <a:lnTo>
+                    <a:pt x="7660515" y="0"/>
+                  </a:lnTo>
+                </a:path>
+              </a:pathLst>
+            </a:custGeom>
+            <a:ln w="6775" cap="flat">
+              <a:solidFill>
+                <a:srgbClr val="EBEBEB">
+                  <a:alpha val="100000"/>
+                </a:srgbClr>
+              </a:solidFill>
+              <a:prstDash val="solid"/>
+              <a:round/>
+            </a:ln>
+          </p:spPr>
+          <p:txBody>
+            <a:bodyPr/>
+            <a:lstStyle/>
+            <a:p/>
+          </p:txBody>
+        </p:sp>
+        <p:sp>
+          <p:nvSpPr>
+            <p:cNvPr id="42" name="pl42"/>
+            <p:cNvSpPr/>
+            <p:nvPr/>
+          </p:nvSpPr>
+          <p:spPr>
+            <a:xfrm>
+              <a:off x="887106" y="4546018"/>
+              <a:ext cx="7660515" cy="0"/>
+            </a:xfrm>
+            <a:custGeom>
+              <a:avLst/>
+              <a:pathLst>
+                <a:path w="7660515" h="0">
+                  <a:moveTo>
+                    <a:pt x="0" y="0"/>
+                  </a:moveTo>
+                  <a:lnTo>
+                    <a:pt x="7660515" y="0"/>
+                  </a:lnTo>
+                  <a:lnTo>
+                    <a:pt x="7660515" y="0"/>
+                  </a:lnTo>
+                </a:path>
+              </a:pathLst>
+            </a:custGeom>
+            <a:ln w="6775" cap="flat">
+              <a:solidFill>
+                <a:srgbClr val="EBEBEB">
+                  <a:alpha val="100000"/>
+                </a:srgbClr>
+              </a:solidFill>
+              <a:prstDash val="solid"/>
+              <a:round/>
+            </a:ln>
+          </p:spPr>
+          <p:txBody>
+            <a:bodyPr/>
+            <a:lstStyle/>
+            <a:p/>
+          </p:txBody>
+        </p:sp>
+        <p:sp>
+          <p:nvSpPr>
+            <p:cNvPr id="43" name="pl43"/>
+            <p:cNvSpPr/>
+            <p:nvPr/>
+          </p:nvSpPr>
+          <p:spPr>
+            <a:xfrm>
+              <a:off x="914987" y="4336484"/>
+              <a:ext cx="0" cy="1317069"/>
+            </a:xfrm>
+            <a:custGeom>
+              <a:avLst/>
+              <a:pathLst>
+                <a:path w="0" h="1317069">
+                  <a:moveTo>
+                    <a:pt x="0" y="1317069"/>
+                  </a:moveTo>
+                  <a:lnTo>
+                    <a:pt x="0" y="0"/>
+                  </a:lnTo>
+                  <a:lnTo>
+                    <a:pt x="0" y="0"/>
+                  </a:lnTo>
+                </a:path>
+              </a:pathLst>
+            </a:custGeom>
+            <a:ln w="6775" cap="flat">
+              <a:solidFill>
+                <a:srgbClr val="EBEBEB">
+                  <a:alpha val="100000"/>
+                </a:srgbClr>
+              </a:solidFill>
+              <a:prstDash val="solid"/>
+              <a:round/>
+            </a:ln>
+          </p:spPr>
+          <p:txBody>
+            <a:bodyPr/>
+            <a:lstStyle/>
+            <a:p/>
+          </p:txBody>
+        </p:sp>
+        <p:sp>
+          <p:nvSpPr>
+            <p:cNvPr id="44" name="pl44"/>
+            <p:cNvSpPr/>
+            <p:nvPr/>
+          </p:nvSpPr>
+          <p:spPr>
+            <a:xfrm>
+              <a:off x="1728588" y="4336484"/>
+              <a:ext cx="0" cy="1317069"/>
+            </a:xfrm>
+            <a:custGeom>
+              <a:avLst/>
+              <a:pathLst>
+                <a:path w="0" h="1317069">
+                  <a:moveTo>
+                    <a:pt x="0" y="1317069"/>
+                  </a:moveTo>
+                  <a:lnTo>
+                    <a:pt x="0" y="0"/>
+                  </a:lnTo>
+                  <a:lnTo>
+                    <a:pt x="0" y="0"/>
+                  </a:lnTo>
+                </a:path>
+              </a:pathLst>
+            </a:custGeom>
+            <a:ln w="6775" cap="flat">
+              <a:solidFill>
+                <a:srgbClr val="EBEBEB">
+                  <a:alpha val="100000"/>
+                </a:srgbClr>
+              </a:solidFill>
+              <a:prstDash val="solid"/>
+              <a:round/>
+            </a:ln>
+          </p:spPr>
+          <p:txBody>
+            <a:bodyPr/>
+            <a:lstStyle/>
+            <a:p/>
+          </p:txBody>
+        </p:sp>
+        <p:sp>
+          <p:nvSpPr>
+            <p:cNvPr id="45" name="pl45"/>
+            <p:cNvSpPr/>
+            <p:nvPr/>
+          </p:nvSpPr>
+          <p:spPr>
+            <a:xfrm>
+              <a:off x="2542190" y="4336484"/>
+              <a:ext cx="0" cy="1317069"/>
+            </a:xfrm>
+            <a:custGeom>
+              <a:avLst/>
+              <a:pathLst>
+                <a:path w="0" h="1317069">
+                  <a:moveTo>
+                    <a:pt x="0" y="1317069"/>
+                  </a:moveTo>
+                  <a:lnTo>
+                    <a:pt x="0" y="0"/>
+                  </a:lnTo>
+                  <a:lnTo>
+                    <a:pt x="0" y="0"/>
+                  </a:lnTo>
+                </a:path>
+              </a:pathLst>
+            </a:custGeom>
+            <a:ln w="6775" cap="flat">
+              <a:solidFill>
+                <a:srgbClr val="EBEBEB">
+                  <a:alpha val="100000"/>
+                </a:srgbClr>
+              </a:solidFill>
+              <a:prstDash val="solid"/>
+              <a:round/>
+            </a:ln>
+          </p:spPr>
+          <p:txBody>
+            <a:bodyPr/>
+            <a:lstStyle/>
+            <a:p/>
+          </p:txBody>
+        </p:sp>
+        <p:sp>
+          <p:nvSpPr>
+            <p:cNvPr id="46" name="pl46"/>
+            <p:cNvSpPr/>
+            <p:nvPr/>
+          </p:nvSpPr>
+          <p:spPr>
+            <a:xfrm>
+              <a:off x="3355791" y="4336484"/>
+              <a:ext cx="0" cy="1317069"/>
+            </a:xfrm>
+            <a:custGeom>
+              <a:avLst/>
+              <a:pathLst>
+                <a:path w="0" h="1317069">
+                  <a:moveTo>
+                    <a:pt x="0" y="1317069"/>
+                  </a:moveTo>
+                  <a:lnTo>
+                    <a:pt x="0" y="0"/>
+                  </a:lnTo>
+                  <a:lnTo>
+                    <a:pt x="0" y="0"/>
+                  </a:lnTo>
+                </a:path>
+              </a:pathLst>
+            </a:custGeom>
+            <a:ln w="6775" cap="flat">
+              <a:solidFill>
+                <a:srgbClr val="EBEBEB">
+                  <a:alpha val="100000"/>
+                </a:srgbClr>
+              </a:solidFill>
+              <a:prstDash val="solid"/>
+              <a:round/>
+            </a:ln>
+          </p:spPr>
+          <p:txBody>
+            <a:bodyPr/>
+            <a:lstStyle/>
+            <a:p/>
+          </p:txBody>
+        </p:sp>
+        <p:sp>
+          <p:nvSpPr>
+            <p:cNvPr id="47" name="pl47"/>
+            <p:cNvSpPr/>
+            <p:nvPr/>
+          </p:nvSpPr>
+          <p:spPr>
+            <a:xfrm>
+              <a:off x="4169393" y="4336484"/>
+              <a:ext cx="0" cy="1317069"/>
+            </a:xfrm>
+            <a:custGeom>
+              <a:avLst/>
+              <a:pathLst>
+                <a:path w="0" h="1317069">
+                  <a:moveTo>
+                    <a:pt x="0" y="1317069"/>
+                  </a:moveTo>
+                  <a:lnTo>
+                    <a:pt x="0" y="0"/>
+                  </a:lnTo>
+                  <a:lnTo>
+                    <a:pt x="0" y="0"/>
+                  </a:lnTo>
+                </a:path>
+              </a:pathLst>
+            </a:custGeom>
+            <a:ln w="6775" cap="flat">
+              <a:solidFill>
+                <a:srgbClr val="EBEBEB">
+                  <a:alpha val="100000"/>
+                </a:srgbClr>
+              </a:solidFill>
+              <a:prstDash val="solid"/>
+              <a:round/>
+            </a:ln>
+          </p:spPr>
+          <p:txBody>
+            <a:bodyPr/>
+            <a:lstStyle/>
+            <a:p/>
+          </p:txBody>
+        </p:sp>
+        <p:sp>
+          <p:nvSpPr>
+            <p:cNvPr id="48" name="pl48"/>
+            <p:cNvSpPr/>
+            <p:nvPr/>
+          </p:nvSpPr>
+          <p:spPr>
+            <a:xfrm>
+              <a:off x="4982994" y="4336484"/>
+              <a:ext cx="0" cy="1317069"/>
+            </a:xfrm>
+            <a:custGeom>
+              <a:avLst/>
+              <a:pathLst>
+                <a:path w="0" h="1317069">
+                  <a:moveTo>
+                    <a:pt x="0" y="1317069"/>
+                  </a:moveTo>
+                  <a:lnTo>
+                    <a:pt x="0" y="0"/>
+                  </a:lnTo>
+                  <a:lnTo>
+                    <a:pt x="0" y="0"/>
+                  </a:lnTo>
+                </a:path>
+              </a:pathLst>
+            </a:custGeom>
+            <a:ln w="6775" cap="flat">
+              <a:solidFill>
+                <a:srgbClr val="EBEBEB">
+                  <a:alpha val="100000"/>
+                </a:srgbClr>
+              </a:solidFill>
+              <a:prstDash val="solid"/>
+              <a:round/>
+            </a:ln>
+          </p:spPr>
+          <p:txBody>
+            <a:bodyPr/>
+            <a:lstStyle/>
+            <a:p/>
+          </p:txBody>
+        </p:sp>
+        <p:sp>
+          <p:nvSpPr>
+            <p:cNvPr id="49" name="pl49"/>
+            <p:cNvSpPr/>
+            <p:nvPr/>
+          </p:nvSpPr>
+          <p:spPr>
+            <a:xfrm>
+              <a:off x="5796595" y="4336484"/>
+              <a:ext cx="0" cy="1317069"/>
+            </a:xfrm>
+            <a:custGeom>
+              <a:avLst/>
+              <a:pathLst>
+                <a:path w="0" h="1317069">
+                  <a:moveTo>
+                    <a:pt x="0" y="1317069"/>
+                  </a:moveTo>
+                  <a:lnTo>
+                    <a:pt x="0" y="0"/>
+                  </a:lnTo>
+                  <a:lnTo>
+                    <a:pt x="0" y="0"/>
+                  </a:lnTo>
+                </a:path>
+              </a:pathLst>
+            </a:custGeom>
+            <a:ln w="6775" cap="flat">
+              <a:solidFill>
+                <a:srgbClr val="EBEBEB">
+                  <a:alpha val="100000"/>
+                </a:srgbClr>
+              </a:solidFill>
+              <a:prstDash val="solid"/>
+              <a:round/>
+            </a:ln>
+          </p:spPr>
+          <p:txBody>
+            <a:bodyPr/>
+            <a:lstStyle/>
+            <a:p/>
+          </p:txBody>
+        </p:sp>
+        <p:sp>
+          <p:nvSpPr>
+            <p:cNvPr id="50" name="pl50"/>
+            <p:cNvSpPr/>
+            <p:nvPr/>
+          </p:nvSpPr>
+          <p:spPr>
+            <a:xfrm>
+              <a:off x="6610197" y="4336484"/>
+              <a:ext cx="0" cy="1317069"/>
+            </a:xfrm>
+            <a:custGeom>
+              <a:avLst/>
+              <a:pathLst>
+                <a:path w="0" h="1317069">
+                  <a:moveTo>
+                    <a:pt x="0" y="1317069"/>
+                  </a:moveTo>
+                  <a:lnTo>
+                    <a:pt x="0" y="0"/>
+                  </a:lnTo>
+                  <a:lnTo>
+                    <a:pt x="0" y="0"/>
+                  </a:lnTo>
+                </a:path>
+              </a:pathLst>
+            </a:custGeom>
+            <a:ln w="6775" cap="flat">
+              <a:solidFill>
+                <a:srgbClr val="EBEBEB">
+                  <a:alpha val="100000"/>
+                </a:srgbClr>
+              </a:solidFill>
+              <a:prstDash val="solid"/>
+              <a:round/>
+            </a:ln>
+          </p:spPr>
+          <p:txBody>
+            <a:bodyPr/>
+            <a:lstStyle/>
+            <a:p/>
+          </p:txBody>
+        </p:sp>
+        <p:sp>
+          <p:nvSpPr>
+            <p:cNvPr id="51" name="pl51"/>
+            <p:cNvSpPr/>
+            <p:nvPr/>
+          </p:nvSpPr>
+          <p:spPr>
+            <a:xfrm>
+              <a:off x="7423798" y="4336484"/>
+              <a:ext cx="0" cy="1317069"/>
+            </a:xfrm>
+            <a:custGeom>
+              <a:avLst/>
+              <a:pathLst>
+                <a:path w="0" h="1317069">
+                  <a:moveTo>
+                    <a:pt x="0" y="1317069"/>
+                  </a:moveTo>
+                  <a:lnTo>
+                    <a:pt x="0" y="0"/>
+                  </a:lnTo>
+                  <a:lnTo>
+                    <a:pt x="0" y="0"/>
+                  </a:lnTo>
+                </a:path>
+              </a:pathLst>
+            </a:custGeom>
+            <a:ln w="6775" cap="flat">
+              <a:solidFill>
+                <a:srgbClr val="EBEBEB">
+                  <a:alpha val="100000"/>
+                </a:srgbClr>
+              </a:solidFill>
+              <a:prstDash val="solid"/>
+              <a:round/>
+            </a:ln>
+          </p:spPr>
+          <p:txBody>
+            <a:bodyPr/>
+            <a:lstStyle/>
+            <a:p/>
+          </p:txBody>
+        </p:sp>
+        <p:sp>
+          <p:nvSpPr>
+            <p:cNvPr id="52" name="pl52"/>
+            <p:cNvSpPr/>
+            <p:nvPr/>
+          </p:nvSpPr>
+          <p:spPr>
+            <a:xfrm>
+              <a:off x="8237399" y="4336484"/>
+              <a:ext cx="0" cy="1317069"/>
+            </a:xfrm>
+            <a:custGeom>
+              <a:avLst/>
+              <a:pathLst>
+                <a:path w="0" h="1317069">
+                  <a:moveTo>
+                    <a:pt x="0" y="1317069"/>
+                  </a:moveTo>
+                  <a:lnTo>
+                    <a:pt x="0" y="0"/>
+                  </a:lnTo>
+                  <a:lnTo>
+                    <a:pt x="0" y="0"/>
+                  </a:lnTo>
+                </a:path>
+              </a:pathLst>
+            </a:custGeom>
+            <a:ln w="6775" cap="flat">
+              <a:solidFill>
+                <a:srgbClr val="EBEBEB">
+                  <a:alpha val="100000"/>
+                </a:srgbClr>
+              </a:solidFill>
+              <a:prstDash val="solid"/>
+              <a:round/>
+            </a:ln>
+          </p:spPr>
+          <p:txBody>
+            <a:bodyPr/>
+            <a:lstStyle/>
+            <a:p/>
+          </p:txBody>
+        </p:sp>
+        <p:sp>
+          <p:nvSpPr>
+            <p:cNvPr id="53" name="pl53"/>
+            <p:cNvSpPr/>
+            <p:nvPr/>
+          </p:nvSpPr>
+          <p:spPr>
+            <a:xfrm>
+              <a:off x="887106" y="5593686"/>
+              <a:ext cx="7660515" cy="0"/>
+            </a:xfrm>
+            <a:custGeom>
+              <a:avLst/>
+              <a:pathLst>
+                <a:path w="7660515" h="0">
+                  <a:moveTo>
+                    <a:pt x="0" y="0"/>
+                  </a:moveTo>
+                  <a:lnTo>
+                    <a:pt x="7660515" y="0"/>
+                  </a:lnTo>
+                  <a:lnTo>
+                    <a:pt x="7660515" y="0"/>
+                  </a:lnTo>
+                </a:path>
+              </a:pathLst>
+            </a:custGeom>
+            <a:ln w="13550" cap="flat">
+              <a:solidFill>
+                <a:srgbClr val="EBEBEB">
+                  <a:alpha val="100000"/>
+                </a:srgbClr>
+              </a:solidFill>
+              <a:prstDash val="solid"/>
+              <a:round/>
+            </a:ln>
+          </p:spPr>
+          <p:txBody>
+            <a:bodyPr/>
+            <a:lstStyle/>
+            <a:p/>
+          </p:txBody>
+        </p:sp>
+        <p:sp>
+          <p:nvSpPr>
+            <p:cNvPr id="54" name="pl54"/>
+            <p:cNvSpPr/>
+            <p:nvPr/>
+          </p:nvSpPr>
+          <p:spPr>
+            <a:xfrm>
+              <a:off x="887106" y="5294352"/>
+              <a:ext cx="7660515" cy="0"/>
+            </a:xfrm>
+            <a:custGeom>
+              <a:avLst/>
+              <a:pathLst>
+                <a:path w="7660515" h="0">
+                  <a:moveTo>
+                    <a:pt x="0" y="0"/>
+                  </a:moveTo>
+                  <a:lnTo>
+                    <a:pt x="7660515" y="0"/>
+                  </a:lnTo>
+                  <a:lnTo>
+                    <a:pt x="7660515" y="0"/>
+                  </a:lnTo>
+                </a:path>
+              </a:pathLst>
+            </a:custGeom>
+            <a:ln w="13550" cap="flat">
+              <a:solidFill>
+                <a:srgbClr val="EBEBEB">
+                  <a:alpha val="100000"/>
+                </a:srgbClr>
+              </a:solidFill>
+              <a:prstDash val="solid"/>
+              <a:round/>
+            </a:ln>
+          </p:spPr>
+          <p:txBody>
+            <a:bodyPr/>
+            <a:lstStyle/>
+            <a:p/>
+          </p:txBody>
+        </p:sp>
+        <p:sp>
+          <p:nvSpPr>
+            <p:cNvPr id="55" name="pl55"/>
+            <p:cNvSpPr/>
+            <p:nvPr/>
+          </p:nvSpPr>
+          <p:spPr>
+            <a:xfrm>
+              <a:off x="887106" y="4995019"/>
+              <a:ext cx="7660515" cy="0"/>
+            </a:xfrm>
+            <a:custGeom>
+              <a:avLst/>
+              <a:pathLst>
+                <a:path w="7660515" h="0">
+                  <a:moveTo>
+                    <a:pt x="0" y="0"/>
+                  </a:moveTo>
+                  <a:lnTo>
+                    <a:pt x="7660515" y="0"/>
+                  </a:lnTo>
+                  <a:lnTo>
+                    <a:pt x="7660515" y="0"/>
+                  </a:lnTo>
+                </a:path>
+              </a:pathLst>
+            </a:custGeom>
+            <a:ln w="13550" cap="flat">
+              <a:solidFill>
+                <a:srgbClr val="EBEBEB">
+                  <a:alpha val="100000"/>
+                </a:srgbClr>
+              </a:solidFill>
+              <a:prstDash val="solid"/>
+              <a:round/>
+            </a:ln>
+          </p:spPr>
+          <p:txBody>
+            <a:bodyPr/>
+            <a:lstStyle/>
+            <a:p/>
+          </p:txBody>
+        </p:sp>
+        <p:sp>
+          <p:nvSpPr>
+            <p:cNvPr id="56" name="pl56"/>
+            <p:cNvSpPr/>
+            <p:nvPr/>
+          </p:nvSpPr>
+          <p:spPr>
+            <a:xfrm>
+              <a:off x="887106" y="4695685"/>
+              <a:ext cx="7660515" cy="0"/>
+            </a:xfrm>
+            <a:custGeom>
+              <a:avLst/>
+              <a:pathLst>
+                <a:path w="7660515" h="0">
+                  <a:moveTo>
+                    <a:pt x="0" y="0"/>
+                  </a:moveTo>
+                  <a:lnTo>
+                    <a:pt x="7660515" y="0"/>
+                  </a:lnTo>
+                  <a:lnTo>
+                    <a:pt x="7660515" y="0"/>
+                  </a:lnTo>
+                </a:path>
+              </a:pathLst>
+            </a:custGeom>
+            <a:ln w="13550" cap="flat">
+              <a:solidFill>
+                <a:srgbClr val="EBEBEB">
+                  <a:alpha val="100000"/>
+                </a:srgbClr>
+              </a:solidFill>
+              <a:prstDash val="solid"/>
+              <a:round/>
+            </a:ln>
+          </p:spPr>
+          <p:txBody>
+            <a:bodyPr/>
+            <a:lstStyle/>
+            <a:p/>
+          </p:txBody>
+        </p:sp>
+        <p:sp>
+          <p:nvSpPr>
+            <p:cNvPr id="57" name="pl57"/>
+            <p:cNvSpPr/>
+            <p:nvPr/>
+          </p:nvSpPr>
+          <p:spPr>
+            <a:xfrm>
+              <a:off x="887106" y="4396351"/>
+              <a:ext cx="7660515" cy="0"/>
+            </a:xfrm>
+            <a:custGeom>
+              <a:avLst/>
+              <a:pathLst>
+                <a:path w="7660515" h="0">
+                  <a:moveTo>
+                    <a:pt x="0" y="0"/>
+                  </a:moveTo>
+                  <a:lnTo>
+                    <a:pt x="7660515" y="0"/>
+                  </a:lnTo>
+                  <a:lnTo>
+                    <a:pt x="7660515" y="0"/>
+                  </a:lnTo>
+                </a:path>
+              </a:pathLst>
+            </a:custGeom>
+            <a:ln w="13550" cap="flat">
+              <a:solidFill>
+                <a:srgbClr val="EBEBEB">
+                  <a:alpha val="100000"/>
+                </a:srgbClr>
+              </a:solidFill>
+              <a:prstDash val="solid"/>
+              <a:round/>
+            </a:ln>
+          </p:spPr>
+          <p:txBody>
+            <a:bodyPr/>
+            <a:lstStyle/>
+            <a:p/>
+          </p:txBody>
+        </p:sp>
+        <p:sp>
+          <p:nvSpPr>
+            <p:cNvPr id="58" name="pl58"/>
+            <p:cNvSpPr/>
+            <p:nvPr/>
+          </p:nvSpPr>
+          <p:spPr>
+            <a:xfrm>
+              <a:off x="1321788" y="4336484"/>
+              <a:ext cx="0" cy="1317069"/>
+            </a:xfrm>
+            <a:custGeom>
+              <a:avLst/>
+              <a:pathLst>
+                <a:path w="0" h="1317069">
+                  <a:moveTo>
+                    <a:pt x="0" y="1317069"/>
+                  </a:moveTo>
+                  <a:lnTo>
+                    <a:pt x="0" y="0"/>
+                  </a:lnTo>
+                  <a:lnTo>
+                    <a:pt x="0" y="0"/>
+                  </a:lnTo>
+                </a:path>
+              </a:pathLst>
+            </a:custGeom>
+            <a:ln w="13550" cap="flat">
+              <a:solidFill>
+                <a:srgbClr val="EBEBEB">
+                  <a:alpha val="100000"/>
+                </a:srgbClr>
+              </a:solidFill>
+              <a:prstDash val="solid"/>
+              <a:round/>
+            </a:ln>
+          </p:spPr>
+          <p:txBody>
+            <a:bodyPr/>
+            <a:lstStyle/>
+            <a:p/>
+          </p:txBody>
+        </p:sp>
+        <p:sp>
+          <p:nvSpPr>
+            <p:cNvPr id="59" name="pl59"/>
+            <p:cNvSpPr/>
+            <p:nvPr/>
+          </p:nvSpPr>
+          <p:spPr>
+            <a:xfrm>
+              <a:off x="2135389" y="4336484"/>
+              <a:ext cx="0" cy="1317069"/>
+            </a:xfrm>
+            <a:custGeom>
+              <a:avLst/>
+              <a:pathLst>
+                <a:path w="0" h="1317069">
+                  <a:moveTo>
+                    <a:pt x="0" y="1317069"/>
+                  </a:moveTo>
+                  <a:lnTo>
+                    <a:pt x="0" y="0"/>
+                  </a:lnTo>
+                  <a:lnTo>
+                    <a:pt x="0" y="0"/>
+                  </a:lnTo>
+                </a:path>
+              </a:pathLst>
+            </a:custGeom>
+            <a:ln w="13550" cap="flat">
+              <a:solidFill>
+                <a:srgbClr val="EBEBEB">
+                  <a:alpha val="100000"/>
+                </a:srgbClr>
+              </a:solidFill>
+              <a:prstDash val="solid"/>
+              <a:round/>
+            </a:ln>
+          </p:spPr>
+          <p:txBody>
+            <a:bodyPr/>
+            <a:lstStyle/>
+            <a:p/>
+          </p:txBody>
+        </p:sp>
+        <p:sp>
+          <p:nvSpPr>
+            <p:cNvPr id="60" name="pl60"/>
+            <p:cNvSpPr/>
+            <p:nvPr/>
+          </p:nvSpPr>
+          <p:spPr>
+            <a:xfrm>
+              <a:off x="2948991" y="4336484"/>
+              <a:ext cx="0" cy="1317069"/>
+            </a:xfrm>
+            <a:custGeom>
+              <a:avLst/>
+              <a:pathLst>
+                <a:path w="0" h="1317069">
+                  <a:moveTo>
+                    <a:pt x="0" y="1317069"/>
+                  </a:moveTo>
+                  <a:lnTo>
+                    <a:pt x="0" y="0"/>
+                  </a:lnTo>
+                  <a:lnTo>
+                    <a:pt x="0" y="0"/>
+                  </a:lnTo>
+                </a:path>
+              </a:pathLst>
+            </a:custGeom>
+            <a:ln w="13550" cap="flat">
+              <a:solidFill>
+                <a:srgbClr val="EBEBEB">
+                  <a:alpha val="100000"/>
+                </a:srgbClr>
+              </a:solidFill>
+              <a:prstDash val="solid"/>
+              <a:round/>
+            </a:ln>
+          </p:spPr>
+          <p:txBody>
+            <a:bodyPr/>
+            <a:lstStyle/>
+            <a:p/>
+          </p:txBody>
+        </p:sp>
+        <p:sp>
+          <p:nvSpPr>
+            <p:cNvPr id="61" name="pl61"/>
+            <p:cNvSpPr/>
+            <p:nvPr/>
+          </p:nvSpPr>
+          <p:spPr>
+            <a:xfrm>
+              <a:off x="3762592" y="4336484"/>
+              <a:ext cx="0" cy="1317069"/>
+            </a:xfrm>
+            <a:custGeom>
+              <a:avLst/>
+              <a:pathLst>
+                <a:path w="0" h="1317069">
+                  <a:moveTo>
+                    <a:pt x="0" y="1317069"/>
+                  </a:moveTo>
+                  <a:lnTo>
+                    <a:pt x="0" y="0"/>
+                  </a:lnTo>
+                  <a:lnTo>
+                    <a:pt x="0" y="0"/>
+                  </a:lnTo>
+                </a:path>
+              </a:pathLst>
+            </a:custGeom>
+            <a:ln w="13550" cap="flat">
+              <a:solidFill>
+                <a:srgbClr val="EBEBEB">
+                  <a:alpha val="100000"/>
+                </a:srgbClr>
+              </a:solidFill>
+              <a:prstDash val="solid"/>
+              <a:round/>
+            </a:ln>
+          </p:spPr>
+          <p:txBody>
+            <a:bodyPr/>
+            <a:lstStyle/>
+            <a:p/>
+          </p:txBody>
+        </p:sp>
+        <p:sp>
+          <p:nvSpPr>
+            <p:cNvPr id="62" name="pl62"/>
+            <p:cNvSpPr/>
+            <p:nvPr/>
+          </p:nvSpPr>
+          <p:spPr>
+            <a:xfrm>
+              <a:off x="4576193" y="4336484"/>
+              <a:ext cx="0" cy="1317069"/>
+            </a:xfrm>
+            <a:custGeom>
+              <a:avLst/>
+              <a:pathLst>
+                <a:path w="0" h="1317069">
+                  <a:moveTo>
+                    <a:pt x="0" y="1317069"/>
+                  </a:moveTo>
+                  <a:lnTo>
+                    <a:pt x="0" y="0"/>
+                  </a:lnTo>
+                  <a:lnTo>
+                    <a:pt x="0" y="0"/>
+                  </a:lnTo>
+                </a:path>
+              </a:pathLst>
+            </a:custGeom>
+            <a:ln w="13550" cap="flat">
+              <a:solidFill>
+                <a:srgbClr val="EBEBEB">
+                  <a:alpha val="100000"/>
+                </a:srgbClr>
+              </a:solidFill>
+              <a:prstDash val="solid"/>
+              <a:round/>
+            </a:ln>
+          </p:spPr>
+          <p:txBody>
+            <a:bodyPr/>
+            <a:lstStyle/>
+            <a:p/>
+          </p:txBody>
+        </p:sp>
+        <p:sp>
+          <p:nvSpPr>
+            <p:cNvPr id="63" name="pl63"/>
+            <p:cNvSpPr/>
+            <p:nvPr/>
+          </p:nvSpPr>
+          <p:spPr>
+            <a:xfrm>
+              <a:off x="5389795" y="4336484"/>
+              <a:ext cx="0" cy="1317069"/>
+            </a:xfrm>
+            <a:custGeom>
+              <a:avLst/>
+              <a:pathLst>
+                <a:path w="0" h="1317069">
+                  <a:moveTo>
+                    <a:pt x="0" y="1317069"/>
+                  </a:moveTo>
+                  <a:lnTo>
+                    <a:pt x="0" y="0"/>
+                  </a:lnTo>
+                  <a:lnTo>
+                    <a:pt x="0" y="0"/>
+                  </a:lnTo>
+                </a:path>
+              </a:pathLst>
+            </a:custGeom>
+            <a:ln w="13550" cap="flat">
+              <a:solidFill>
+                <a:srgbClr val="EBEBEB">
+                  <a:alpha val="100000"/>
+                </a:srgbClr>
+              </a:solidFill>
+              <a:prstDash val="solid"/>
+              <a:round/>
+            </a:ln>
+          </p:spPr>
+          <p:txBody>
+            <a:bodyPr/>
+            <a:lstStyle/>
+            <a:p/>
+          </p:txBody>
+        </p:sp>
+        <p:sp>
+          <p:nvSpPr>
+            <p:cNvPr id="64" name="pl64"/>
+            <p:cNvSpPr/>
+            <p:nvPr/>
+          </p:nvSpPr>
+          <p:spPr>
+            <a:xfrm>
+              <a:off x="6203396" y="4336484"/>
+              <a:ext cx="0" cy="1317069"/>
+            </a:xfrm>
+            <a:custGeom>
+              <a:avLst/>
+              <a:pathLst>
+                <a:path w="0" h="1317069">
+                  <a:moveTo>
+                    <a:pt x="0" y="1317069"/>
+                  </a:moveTo>
+                  <a:lnTo>
+                    <a:pt x="0" y="0"/>
+                  </a:lnTo>
+                  <a:lnTo>
+                    <a:pt x="0" y="0"/>
+                  </a:lnTo>
+                </a:path>
+              </a:pathLst>
+            </a:custGeom>
+            <a:ln w="13550" cap="flat">
+              <a:solidFill>
+                <a:srgbClr val="EBEBEB">
+                  <a:alpha val="100000"/>
+                </a:srgbClr>
+              </a:solidFill>
+              <a:prstDash val="solid"/>
+              <a:round/>
+            </a:ln>
+          </p:spPr>
+          <p:txBody>
+            <a:bodyPr/>
+            <a:lstStyle/>
+            <a:p/>
+          </p:txBody>
+        </p:sp>
+        <p:sp>
+          <p:nvSpPr>
+            <p:cNvPr id="65" name="pl65"/>
+            <p:cNvSpPr/>
+            <p:nvPr/>
+          </p:nvSpPr>
+          <p:spPr>
+            <a:xfrm>
+              <a:off x="7016997" y="4336484"/>
+              <a:ext cx="0" cy="1317069"/>
+            </a:xfrm>
+            <a:custGeom>
+              <a:avLst/>
+              <a:pathLst>
+                <a:path w="0" h="1317069">
+                  <a:moveTo>
+                    <a:pt x="0" y="1317069"/>
+                  </a:moveTo>
+                  <a:lnTo>
+                    <a:pt x="0" y="0"/>
+                  </a:lnTo>
+                  <a:lnTo>
+                    <a:pt x="0" y="0"/>
+                  </a:lnTo>
+                </a:path>
+              </a:pathLst>
+            </a:custGeom>
+            <a:ln w="13550" cap="flat">
+              <a:solidFill>
+                <a:srgbClr val="EBEBEB">
+                  <a:alpha val="100000"/>
+                </a:srgbClr>
+              </a:solidFill>
+              <a:prstDash val="solid"/>
+              <a:round/>
+            </a:ln>
+          </p:spPr>
+          <p:txBody>
+            <a:bodyPr/>
+            <a:lstStyle/>
+            <a:p/>
+          </p:txBody>
+        </p:sp>
+        <p:sp>
+          <p:nvSpPr>
+            <p:cNvPr id="66" name="pl66"/>
+            <p:cNvSpPr/>
+            <p:nvPr/>
+          </p:nvSpPr>
+          <p:spPr>
+            <a:xfrm>
+              <a:off x="7830599" y="4336484"/>
+              <a:ext cx="0" cy="1317069"/>
+            </a:xfrm>
+            <a:custGeom>
+              <a:avLst/>
+              <a:pathLst>
+                <a:path w="0" h="1317069">
+                  <a:moveTo>
+                    <a:pt x="0" y="1317069"/>
+                  </a:moveTo>
+                  <a:lnTo>
+                    <a:pt x="0" y="0"/>
+                  </a:lnTo>
+                  <a:lnTo>
+                    <a:pt x="0" y="0"/>
+                  </a:lnTo>
+                </a:path>
+              </a:pathLst>
+            </a:custGeom>
+            <a:ln w="13550" cap="flat">
+              <a:solidFill>
+                <a:srgbClr val="EBEBEB">
+                  <a:alpha val="100000"/>
+                </a:srgbClr>
+              </a:solidFill>
+              <a:prstDash val="solid"/>
+              <a:round/>
+            </a:ln>
+          </p:spPr>
+          <p:txBody>
+            <a:bodyPr/>
+            <a:lstStyle/>
+            <a:p/>
+          </p:txBody>
+        </p:sp>
+        <p:sp>
+          <p:nvSpPr>
+            <p:cNvPr id="67" name="pg67"/>
+            <p:cNvSpPr/>
+            <p:nvPr/>
+          </p:nvSpPr>
+          <p:spPr>
+            <a:xfrm>
+              <a:off x="1235312" y="4336484"/>
+              <a:ext cx="6964104" cy="1249810"/>
+            </a:xfrm>
+            <a:custGeom>
+              <a:avLst/>
+              <a:pathLst>
+                <a:path w="6964104" h="1249810">
+                  <a:moveTo>
+                    <a:pt x="1872979" y="0"/>
+                  </a:moveTo>
+                  <a:lnTo>
+                    <a:pt x="1899301" y="33667"/>
+                  </a:lnTo>
+                  <a:lnTo>
+                    <a:pt x="1969645" y="117480"/>
+                  </a:lnTo>
+                  <a:lnTo>
+                    <a:pt x="2039990" y="195551"/>
+                  </a:lnTo>
+                  <a:lnTo>
+                    <a:pt x="2110334" y="268274"/>
+                  </a:lnTo>
+                  <a:lnTo>
+                    <a:pt x="2180679" y="336016"/>
+                  </a:lnTo>
+                  <a:lnTo>
+                    <a:pt x="2251023" y="399118"/>
+                  </a:lnTo>
+                  <a:lnTo>
+                    <a:pt x="2321368" y="457897"/>
+                  </a:lnTo>
+                  <a:lnTo>
+                    <a:pt x="2391712" y="512649"/>
+                  </a:lnTo>
+                  <a:lnTo>
+                    <a:pt x="2462057" y="563651"/>
+                  </a:lnTo>
+                  <a:lnTo>
+                    <a:pt x="2532401" y="611160"/>
+                  </a:lnTo>
+                  <a:lnTo>
+                    <a:pt x="2602746" y="655414"/>
+                  </a:lnTo>
+                  <a:lnTo>
+                    <a:pt x="2673090" y="696636"/>
+                  </a:lnTo>
+                  <a:lnTo>
+                    <a:pt x="2743435" y="735035"/>
+                  </a:lnTo>
+                  <a:lnTo>
+                    <a:pt x="2813779" y="770804"/>
+                  </a:lnTo>
+                  <a:lnTo>
+                    <a:pt x="2884124" y="804122"/>
+                  </a:lnTo>
+                  <a:lnTo>
+                    <a:pt x="2954468" y="835158"/>
+                  </a:lnTo>
+                  <a:lnTo>
+                    <a:pt x="3024813" y="864068"/>
+                  </a:lnTo>
+                  <a:lnTo>
+                    <a:pt x="3095157" y="890998"/>
+                  </a:lnTo>
+                  <a:lnTo>
+                    <a:pt x="3165502" y="916083"/>
+                  </a:lnTo>
+                  <a:lnTo>
+                    <a:pt x="3235846" y="939450"/>
+                  </a:lnTo>
+                  <a:lnTo>
+                    <a:pt x="3306191" y="957144"/>
+                  </a:lnTo>
+                  <a:lnTo>
+                    <a:pt x="3376535" y="952537"/>
+                  </a:lnTo>
+                  <a:lnTo>
+                    <a:pt x="3446880" y="947860"/>
+                  </a:lnTo>
+                  <a:lnTo>
+                    <a:pt x="3517224" y="943111"/>
+                  </a:lnTo>
+                  <a:lnTo>
+                    <a:pt x="3587569" y="938288"/>
+                  </a:lnTo>
+                  <a:lnTo>
+                    <a:pt x="3657913" y="933392"/>
+                  </a:lnTo>
+                  <a:lnTo>
+                    <a:pt x="3728257" y="928421"/>
+                  </a:lnTo>
+                  <a:lnTo>
+                    <a:pt x="3798602" y="923373"/>
+                  </a:lnTo>
+                  <a:lnTo>
+                    <a:pt x="3868946" y="918248"/>
+                  </a:lnTo>
+                  <a:lnTo>
+                    <a:pt x="3939291" y="913044"/>
+                  </a:lnTo>
+                  <a:lnTo>
+                    <a:pt x="4009635" y="907760"/>
+                  </a:lnTo>
+                  <a:lnTo>
+                    <a:pt x="4079980" y="902395"/>
+                  </a:lnTo>
+                  <a:lnTo>
+                    <a:pt x="4150324" y="896948"/>
+                  </a:lnTo>
+                  <a:lnTo>
+                    <a:pt x="4220669" y="891417"/>
+                  </a:lnTo>
+                  <a:lnTo>
+                    <a:pt x="4291013" y="885801"/>
+                  </a:lnTo>
+                  <a:lnTo>
+                    <a:pt x="4361358" y="880099"/>
+                  </a:lnTo>
+                  <a:lnTo>
+                    <a:pt x="4431702" y="874309"/>
+                  </a:lnTo>
+                  <a:lnTo>
+                    <a:pt x="4502047" y="868431"/>
+                  </a:lnTo>
+                  <a:lnTo>
+                    <a:pt x="4572391" y="862462"/>
+                  </a:lnTo>
+                  <a:lnTo>
+                    <a:pt x="4642736" y="856401"/>
+                  </a:lnTo>
+                  <a:lnTo>
+                    <a:pt x="4713080" y="850248"/>
+                  </a:lnTo>
+                  <a:lnTo>
+                    <a:pt x="4783425" y="844000"/>
+                  </a:lnTo>
+                  <a:lnTo>
+                    <a:pt x="4853769" y="837656"/>
+                  </a:lnTo>
+                  <a:lnTo>
+                    <a:pt x="4924114" y="831215"/>
+                  </a:lnTo>
+                  <a:lnTo>
+                    <a:pt x="4994458" y="824675"/>
+                  </a:lnTo>
+                  <a:lnTo>
+                    <a:pt x="5064803" y="818034"/>
+                  </a:lnTo>
+                  <a:lnTo>
+                    <a:pt x="5135147" y="811292"/>
+                  </a:lnTo>
+                  <a:lnTo>
+                    <a:pt x="5205492" y="804446"/>
+                  </a:lnTo>
+                  <a:lnTo>
+                    <a:pt x="5275836" y="797494"/>
+                  </a:lnTo>
+                  <a:lnTo>
+                    <a:pt x="5346181" y="790437"/>
+                  </a:lnTo>
+                  <a:lnTo>
+                    <a:pt x="5416525" y="783270"/>
+                  </a:lnTo>
+                  <a:lnTo>
+                    <a:pt x="5486870" y="775994"/>
+                  </a:lnTo>
+                  <a:lnTo>
+                    <a:pt x="5557214" y="768606"/>
+                  </a:lnTo>
+                  <a:lnTo>
+                    <a:pt x="5627559" y="761105"/>
+                  </a:lnTo>
+                  <a:lnTo>
+                    <a:pt x="5697903" y="753488"/>
+                  </a:lnTo>
+                  <a:lnTo>
+                    <a:pt x="5768248" y="745755"/>
+                  </a:lnTo>
+                  <a:lnTo>
+                    <a:pt x="5838592" y="737903"/>
+                  </a:lnTo>
+                  <a:lnTo>
+                    <a:pt x="5908937" y="729930"/>
+                  </a:lnTo>
+                  <a:lnTo>
+                    <a:pt x="5979281" y="721835"/>
+                  </a:lnTo>
+                  <a:lnTo>
+                    <a:pt x="6049626" y="713615"/>
+                  </a:lnTo>
+                  <a:lnTo>
+                    <a:pt x="6119970" y="705269"/>
+                  </a:lnTo>
+                  <a:lnTo>
+                    <a:pt x="6190315" y="696796"/>
+                  </a:lnTo>
+                  <a:lnTo>
+                    <a:pt x="6260659" y="688192"/>
+                  </a:lnTo>
+                  <a:lnTo>
+                    <a:pt x="6331004" y="679456"/>
+                  </a:lnTo>
+                  <a:lnTo>
+                    <a:pt x="6401348" y="670586"/>
+                  </a:lnTo>
+                  <a:lnTo>
+                    <a:pt x="6471693" y="661579"/>
+                  </a:lnTo>
+                  <a:lnTo>
+                    <a:pt x="6542037" y="652435"/>
+                  </a:lnTo>
+                  <a:lnTo>
+                    <a:pt x="6612382" y="643150"/>
+                  </a:lnTo>
+                  <a:lnTo>
+                    <a:pt x="6682726" y="633722"/>
+                  </a:lnTo>
+                  <a:lnTo>
+                    <a:pt x="6753071" y="624150"/>
+                  </a:lnTo>
+                  <a:lnTo>
+                    <a:pt x="6823415" y="614431"/>
+                  </a:lnTo>
+                  <a:lnTo>
+                    <a:pt x="6893760" y="604563"/>
+                  </a:lnTo>
+                  <a:lnTo>
+                    <a:pt x="6964104" y="594543"/>
+                  </a:lnTo>
+                  <a:lnTo>
+                    <a:pt x="6964104" y="1249810"/>
+                  </a:lnTo>
+                  <a:lnTo>
+                    <a:pt x="6893760" y="1249266"/>
+                  </a:lnTo>
+                  <a:lnTo>
+                    <a:pt x="6823415" y="1248682"/>
+                  </a:lnTo>
+                  <a:lnTo>
+                    <a:pt x="6753071" y="1248056"/>
+                  </a:lnTo>
+                  <a:lnTo>
+                    <a:pt x="6682726" y="1247383"/>
+                  </a:lnTo>
+                  <a:lnTo>
+                    <a:pt x="6612382" y="1246661"/>
+                  </a:lnTo>
+                  <a:lnTo>
+                    <a:pt x="6542037" y="1245886"/>
+                  </a:lnTo>
+                  <a:lnTo>
+                    <a:pt x="6471693" y="1245054"/>
+                  </a:lnTo>
+                  <a:lnTo>
+                    <a:pt x="6401348" y="1244161"/>
+                  </a:lnTo>
+                  <a:lnTo>
+                    <a:pt x="6331004" y="1243202"/>
+                  </a:lnTo>
+                  <a:lnTo>
+                    <a:pt x="6260659" y="1242172"/>
+                  </a:lnTo>
+                  <a:lnTo>
+                    <a:pt x="6190315" y="1241067"/>
+                  </a:lnTo>
+                  <a:lnTo>
+                    <a:pt x="6119970" y="1239880"/>
+                  </a:lnTo>
+                  <a:lnTo>
+                    <a:pt x="6049626" y="1238607"/>
+                  </a:lnTo>
+                  <a:lnTo>
+                    <a:pt x="5979281" y="1237239"/>
+                  </a:lnTo>
+                  <a:lnTo>
+                    <a:pt x="5908937" y="1235771"/>
+                  </a:lnTo>
+                  <a:lnTo>
+                    <a:pt x="5838592" y="1234195"/>
+                  </a:lnTo>
+                  <a:lnTo>
+                    <a:pt x="5768248" y="1232503"/>
+                  </a:lnTo>
+                  <a:lnTo>
+                    <a:pt x="5697903" y="1230687"/>
+                  </a:lnTo>
+                  <a:lnTo>
+                    <a:pt x="5627559" y="1228737"/>
+                  </a:lnTo>
+                  <a:lnTo>
+                    <a:pt x="5557214" y="1226644"/>
+                  </a:lnTo>
+                  <a:lnTo>
+                    <a:pt x="5486870" y="1224397"/>
+                  </a:lnTo>
+                  <a:lnTo>
+                    <a:pt x="5416525" y="1221985"/>
+                  </a:lnTo>
+                  <a:lnTo>
+                    <a:pt x="5346181" y="1219395"/>
+                  </a:lnTo>
+                  <a:lnTo>
+                    <a:pt x="5275836" y="1216615"/>
+                  </a:lnTo>
+                  <a:lnTo>
+                    <a:pt x="5205492" y="1213630"/>
+                  </a:lnTo>
+                  <a:lnTo>
+                    <a:pt x="5135147" y="1210426"/>
+                  </a:lnTo>
+                  <a:lnTo>
+                    <a:pt x="5064803" y="1206986"/>
+                  </a:lnTo>
+                  <a:lnTo>
+                    <a:pt x="4994458" y="1203293"/>
+                  </a:lnTo>
+                  <a:lnTo>
+                    <a:pt x="4924114" y="1199329"/>
+                  </a:lnTo>
+                  <a:lnTo>
+                    <a:pt x="4853769" y="1195073"/>
+                  </a:lnTo>
+                  <a:lnTo>
+                    <a:pt x="4783425" y="1190504"/>
+                  </a:lnTo>
+                  <a:lnTo>
+                    <a:pt x="4713080" y="1185600"/>
+                  </a:lnTo>
+                  <a:lnTo>
+                    <a:pt x="4642736" y="1180334"/>
+                  </a:lnTo>
+                  <a:lnTo>
+                    <a:pt x="4572391" y="1174682"/>
+                  </a:lnTo>
+                  <a:lnTo>
+                    <a:pt x="4502047" y="1168613"/>
+                  </a:lnTo>
+                  <a:lnTo>
+                    <a:pt x="4431702" y="1162099"/>
+                  </a:lnTo>
+                  <a:lnTo>
+                    <a:pt x="4361358" y="1155105"/>
+                  </a:lnTo>
+                  <a:lnTo>
+                    <a:pt x="4291013" y="1147597"/>
+                  </a:lnTo>
+                  <a:lnTo>
+                    <a:pt x="4220669" y="1139537"/>
+                  </a:lnTo>
+                  <a:lnTo>
+                    <a:pt x="4150324" y="1130884"/>
+                  </a:lnTo>
+                  <a:lnTo>
+                    <a:pt x="4079980" y="1121595"/>
+                  </a:lnTo>
+                  <a:lnTo>
+                    <a:pt x="4009635" y="1111623"/>
+                  </a:lnTo>
+                  <a:lnTo>
+                    <a:pt x="3939291" y="1100917"/>
+                  </a:lnTo>
+                  <a:lnTo>
+                    <a:pt x="3868946" y="1089425"/>
+                  </a:lnTo>
+                  <a:lnTo>
+                    <a:pt x="3798602" y="1077087"/>
+                  </a:lnTo>
+                  <a:lnTo>
+                    <a:pt x="3728257" y="1063841"/>
+                  </a:lnTo>
+                  <a:lnTo>
+                    <a:pt x="3657913" y="1049622"/>
+                  </a:lnTo>
+                  <a:lnTo>
+                    <a:pt x="3587569" y="1034357"/>
+                  </a:lnTo>
+                  <a:lnTo>
+                    <a:pt x="3517224" y="1017970"/>
+                  </a:lnTo>
+                  <a:lnTo>
+                    <a:pt x="3446880" y="1000377"/>
+                  </a:lnTo>
+                  <a:lnTo>
+                    <a:pt x="3376535" y="981491"/>
+                  </a:lnTo>
+                  <a:lnTo>
+                    <a:pt x="3306191" y="961216"/>
+                  </a:lnTo>
+                  <a:lnTo>
+                    <a:pt x="3235846" y="961681"/>
+                  </a:lnTo>
+                  <a:lnTo>
+                    <a:pt x="3165502" y="966150"/>
+                  </a:lnTo>
+                  <a:lnTo>
+                    <a:pt x="3095157" y="970551"/>
+                  </a:lnTo>
+                  <a:lnTo>
+                    <a:pt x="3024813" y="974885"/>
+                  </a:lnTo>
+                  <a:lnTo>
+                    <a:pt x="2954468" y="979154"/>
+                  </a:lnTo>
+                  <a:lnTo>
+                    <a:pt x="2884124" y="983358"/>
+                  </a:lnTo>
+                  <a:lnTo>
+                    <a:pt x="2813779" y="987499"/>
+                  </a:lnTo>
+                  <a:lnTo>
+                    <a:pt x="2743435" y="991577"/>
+                  </a:lnTo>
+                  <a:lnTo>
+                    <a:pt x="2673090" y="995594"/>
+                  </a:lnTo>
+                  <a:lnTo>
+                    <a:pt x="2602746" y="999549"/>
+                  </a:lnTo>
+                  <a:lnTo>
+                    <a:pt x="2532401" y="1003445"/>
+                  </a:lnTo>
+                  <a:lnTo>
+                    <a:pt x="2462057" y="1007282"/>
+                  </a:lnTo>
+                  <a:lnTo>
+                    <a:pt x="2391712" y="1011061"/>
+                  </a:lnTo>
+                  <a:lnTo>
+                    <a:pt x="2321368" y="1014783"/>
+                  </a:lnTo>
+                  <a:lnTo>
+                    <a:pt x="2251023" y="1018449"/>
+                  </a:lnTo>
+                  <a:lnTo>
+                    <a:pt x="2180679" y="1022059"/>
+                  </a:lnTo>
+                  <a:lnTo>
+                    <a:pt x="2110334" y="1025614"/>
+                  </a:lnTo>
+                  <a:lnTo>
+                    <a:pt x="2039990" y="1029116"/>
+                  </a:lnTo>
+                  <a:lnTo>
+                    <a:pt x="1969645" y="1032565"/>
+                  </a:lnTo>
+                  <a:lnTo>
+                    <a:pt x="1899301" y="1035962"/>
+                  </a:lnTo>
+                  <a:lnTo>
+                    <a:pt x="1828956" y="1039307"/>
+                  </a:lnTo>
+                  <a:lnTo>
+                    <a:pt x="1758612" y="1042602"/>
+                  </a:lnTo>
+                  <a:lnTo>
+                    <a:pt x="1688267" y="1045847"/>
+                  </a:lnTo>
+                  <a:lnTo>
+                    <a:pt x="1617923" y="1049042"/>
+                  </a:lnTo>
+                  <a:lnTo>
+                    <a:pt x="1547578" y="1052190"/>
+                  </a:lnTo>
+                  <a:lnTo>
+                    <a:pt x="1477234" y="1055290"/>
+                  </a:lnTo>
+                  <a:lnTo>
+                    <a:pt x="1406889" y="1058343"/>
+                  </a:lnTo>
+                  <a:lnTo>
+                    <a:pt x="1336545" y="1061350"/>
+                  </a:lnTo>
+                  <a:lnTo>
+                    <a:pt x="1266200" y="1064311"/>
+                  </a:lnTo>
+                  <a:lnTo>
+                    <a:pt x="1195856" y="1067228"/>
+                  </a:lnTo>
+                  <a:lnTo>
+                    <a:pt x="1125511" y="1070100"/>
+                  </a:lnTo>
+                  <a:lnTo>
+                    <a:pt x="1055167" y="1072930"/>
+                  </a:lnTo>
+                  <a:lnTo>
+                    <a:pt x="984822" y="1075716"/>
+                  </a:lnTo>
+                  <a:lnTo>
+                    <a:pt x="914478" y="1078460"/>
+                  </a:lnTo>
+                  <a:lnTo>
+                    <a:pt x="844133" y="1081163"/>
+                  </a:lnTo>
+                  <a:lnTo>
+                    <a:pt x="773789" y="1083825"/>
+                  </a:lnTo>
+                  <a:lnTo>
+                    <a:pt x="703444" y="1086446"/>
+                  </a:lnTo>
+                  <a:lnTo>
+                    <a:pt x="633100" y="1089028"/>
+                  </a:lnTo>
+                  <a:lnTo>
+                    <a:pt x="562755" y="1091571"/>
+                  </a:lnTo>
+                  <a:lnTo>
+                    <a:pt x="492411" y="1094076"/>
+                  </a:lnTo>
+                  <a:lnTo>
+                    <a:pt x="422066" y="1096542"/>
+                  </a:lnTo>
+                  <a:lnTo>
+                    <a:pt x="351722" y="1098972"/>
+                  </a:lnTo>
+                  <a:lnTo>
+                    <a:pt x="281377" y="1101364"/>
+                  </a:lnTo>
+                  <a:lnTo>
+                    <a:pt x="211033" y="1103720"/>
+                  </a:lnTo>
+                  <a:lnTo>
+                    <a:pt x="140688" y="1106041"/>
+                  </a:lnTo>
+                  <a:lnTo>
+                    <a:pt x="70344" y="1108327"/>
+                  </a:lnTo>
+                  <a:lnTo>
+                    <a:pt x="0" y="1110578"/>
+                  </a:lnTo>
+                  <a:close/>
+                </a:path>
+              </a:pathLst>
+            </a:custGeom>
+            <a:solidFill>
+              <a:srgbClr val="FF8C00">
+                <a:alpha val="20000"/>
+              </a:srgbClr>
+            </a:solidFill>
+          </p:spPr>
+          <p:txBody>
+            <a:bodyPr/>
+            <a:lstStyle/>
+            <a:p/>
+          </p:txBody>
+        </p:sp>
+        <p:sp>
+          <p:nvSpPr>
+            <p:cNvPr id="68" name="pl68"/>
+            <p:cNvSpPr/>
+            <p:nvPr/>
+          </p:nvSpPr>
+          <p:spPr>
+            <a:xfrm>
+              <a:off x="3108291" y="4336484"/>
+              <a:ext cx="5091125" cy="957144"/>
+            </a:xfrm>
+            <a:custGeom>
+              <a:avLst/>
+              <a:pathLst>
+                <a:path w="5091125" h="957144">
+                  <a:moveTo>
+                    <a:pt x="0" y="0"/>
+                  </a:moveTo>
+                  <a:lnTo>
+                    <a:pt x="26322" y="33667"/>
+                  </a:lnTo>
+                  <a:lnTo>
+                    <a:pt x="96666" y="117480"/>
+                  </a:lnTo>
+                  <a:lnTo>
+                    <a:pt x="167011" y="195551"/>
+                  </a:lnTo>
+                  <a:lnTo>
+                    <a:pt x="237355" y="268274"/>
+                  </a:lnTo>
+                  <a:lnTo>
+                    <a:pt x="307700" y="336016"/>
+                  </a:lnTo>
+                  <a:lnTo>
+                    <a:pt x="378044" y="399118"/>
+                  </a:lnTo>
+                  <a:lnTo>
+                    <a:pt x="448389" y="457897"/>
+                  </a:lnTo>
+                  <a:lnTo>
+                    <a:pt x="518733" y="512649"/>
+                  </a:lnTo>
+                  <a:lnTo>
+                    <a:pt x="589078" y="563651"/>
+                  </a:lnTo>
+                  <a:lnTo>
+                    <a:pt x="659422" y="611160"/>
+                  </a:lnTo>
+                  <a:lnTo>
+                    <a:pt x="729767" y="655414"/>
+                  </a:lnTo>
+                  <a:lnTo>
+                    <a:pt x="800111" y="696636"/>
+                  </a:lnTo>
+                  <a:lnTo>
+                    <a:pt x="870456" y="735035"/>
+                  </a:lnTo>
+                  <a:lnTo>
+                    <a:pt x="940800" y="770804"/>
+                  </a:lnTo>
+                  <a:lnTo>
+                    <a:pt x="1011145" y="804122"/>
+                  </a:lnTo>
+                  <a:lnTo>
+                    <a:pt x="1081489" y="835158"/>
+                  </a:lnTo>
+                  <a:lnTo>
+                    <a:pt x="1151834" y="864068"/>
+                  </a:lnTo>
+                  <a:lnTo>
+                    <a:pt x="1222178" y="890998"/>
+                  </a:lnTo>
+                  <a:lnTo>
+                    <a:pt x="1292522" y="916083"/>
+                  </a:lnTo>
+                  <a:lnTo>
+                    <a:pt x="1362867" y="939450"/>
+                  </a:lnTo>
+                  <a:lnTo>
+                    <a:pt x="1433211" y="957144"/>
+                  </a:lnTo>
+                  <a:lnTo>
+                    <a:pt x="1503556" y="952537"/>
+                  </a:lnTo>
+                  <a:lnTo>
+                    <a:pt x="1573900" y="947860"/>
+                  </a:lnTo>
+                  <a:lnTo>
+                    <a:pt x="1644245" y="943111"/>
+                  </a:lnTo>
+                  <a:lnTo>
+                    <a:pt x="1714589" y="938288"/>
+                  </a:lnTo>
+                  <a:lnTo>
+                    <a:pt x="1784934" y="933392"/>
+                  </a:lnTo>
+                  <a:lnTo>
+                    <a:pt x="1855278" y="928421"/>
+                  </a:lnTo>
+                  <a:lnTo>
+                    <a:pt x="1925623" y="923373"/>
+                  </a:lnTo>
+                  <a:lnTo>
+                    <a:pt x="1995967" y="918248"/>
+                  </a:lnTo>
+                  <a:lnTo>
+                    <a:pt x="2066312" y="913044"/>
+                  </a:lnTo>
+                  <a:lnTo>
+                    <a:pt x="2136656" y="907760"/>
+                  </a:lnTo>
+                  <a:lnTo>
+                    <a:pt x="2207001" y="902395"/>
+                  </a:lnTo>
+                  <a:lnTo>
+                    <a:pt x="2277345" y="896948"/>
+                  </a:lnTo>
+                  <a:lnTo>
+                    <a:pt x="2347690" y="891417"/>
+                  </a:lnTo>
+                  <a:lnTo>
+                    <a:pt x="2418034" y="885801"/>
+                  </a:lnTo>
+                  <a:lnTo>
+                    <a:pt x="2488379" y="880099"/>
+                  </a:lnTo>
+                  <a:lnTo>
+                    <a:pt x="2558723" y="874309"/>
+                  </a:lnTo>
+                  <a:lnTo>
+                    <a:pt x="2629068" y="868431"/>
+                  </a:lnTo>
+                  <a:lnTo>
+                    <a:pt x="2699412" y="862462"/>
+                  </a:lnTo>
+                  <a:lnTo>
+                    <a:pt x="2769757" y="856401"/>
+                  </a:lnTo>
+                  <a:lnTo>
+                    <a:pt x="2840101" y="850248"/>
+                  </a:lnTo>
+                  <a:lnTo>
+                    <a:pt x="2910446" y="844000"/>
+                  </a:lnTo>
+                  <a:lnTo>
+                    <a:pt x="2980790" y="837656"/>
+                  </a:lnTo>
+                  <a:lnTo>
+                    <a:pt x="3051135" y="831215"/>
+                  </a:lnTo>
+                  <a:lnTo>
+                    <a:pt x="3121479" y="824675"/>
+                  </a:lnTo>
+                  <a:lnTo>
+                    <a:pt x="3191824" y="818034"/>
+                  </a:lnTo>
+                  <a:lnTo>
+                    <a:pt x="3262168" y="811292"/>
+                  </a:lnTo>
+                  <a:lnTo>
+                    <a:pt x="3332513" y="804446"/>
+                  </a:lnTo>
+                  <a:lnTo>
+                    <a:pt x="3402857" y="797494"/>
+                  </a:lnTo>
+                  <a:lnTo>
+                    <a:pt x="3473202" y="790437"/>
+                  </a:lnTo>
+                  <a:lnTo>
+                    <a:pt x="3543546" y="783270"/>
+                  </a:lnTo>
+                  <a:lnTo>
+                    <a:pt x="3613891" y="775994"/>
+                  </a:lnTo>
+                  <a:lnTo>
+                    <a:pt x="3684235" y="768606"/>
+                  </a:lnTo>
+                  <a:lnTo>
+                    <a:pt x="3754580" y="761105"/>
+                  </a:lnTo>
+                  <a:lnTo>
+                    <a:pt x="3824924" y="753488"/>
+                  </a:lnTo>
+                  <a:lnTo>
+                    <a:pt x="3895269" y="745755"/>
+                  </a:lnTo>
+                  <a:lnTo>
+                    <a:pt x="3965613" y="737903"/>
+                  </a:lnTo>
+                  <a:lnTo>
+                    <a:pt x="4035958" y="729930"/>
+                  </a:lnTo>
+                  <a:lnTo>
+                    <a:pt x="4106302" y="721835"/>
+                  </a:lnTo>
+                  <a:lnTo>
+                    <a:pt x="4176647" y="713615"/>
+                  </a:lnTo>
+                  <a:lnTo>
+                    <a:pt x="4246991" y="705269"/>
+                  </a:lnTo>
+                  <a:lnTo>
+                    <a:pt x="4317336" y="696796"/>
+                  </a:lnTo>
+                  <a:lnTo>
+                    <a:pt x="4387680" y="688192"/>
+                  </a:lnTo>
+                  <a:lnTo>
+                    <a:pt x="4458025" y="679456"/>
+                  </a:lnTo>
+                  <a:lnTo>
+                    <a:pt x="4528369" y="670586"/>
+                  </a:lnTo>
+                  <a:lnTo>
+                    <a:pt x="4598714" y="661579"/>
+                  </a:lnTo>
+                  <a:lnTo>
+                    <a:pt x="4669058" y="652435"/>
+                  </a:lnTo>
+                  <a:lnTo>
+                    <a:pt x="4739403" y="643150"/>
+                  </a:lnTo>
+                  <a:lnTo>
+                    <a:pt x="4809747" y="633722"/>
+                  </a:lnTo>
+                  <a:lnTo>
+                    <a:pt x="4880092" y="624150"/>
+                  </a:lnTo>
+                  <a:lnTo>
+                    <a:pt x="4950436" y="614431"/>
+                  </a:lnTo>
+                  <a:lnTo>
+                    <a:pt x="5020780" y="604563"/>
+                  </a:lnTo>
+                  <a:lnTo>
+                    <a:pt x="5091125" y="594543"/>
+                  </a:lnTo>
+                </a:path>
+              </a:pathLst>
+            </a:custGeom>
+          </p:spPr>
+          <p:txBody>
+            <a:bodyPr/>
+            <a:lstStyle/>
+            <a:p/>
+          </p:txBody>
+        </p:sp>
+        <p:sp>
+          <p:nvSpPr>
+            <p:cNvPr id="69" name="pl69"/>
+            <p:cNvSpPr/>
+            <p:nvPr/>
+          </p:nvSpPr>
+          <p:spPr>
+            <a:xfrm>
+              <a:off x="1235312" y="5297700"/>
+              <a:ext cx="6964104" cy="288593"/>
+            </a:xfrm>
+            <a:custGeom>
+              <a:avLst/>
+              <a:pathLst>
+                <a:path w="6964104" h="288593">
+                  <a:moveTo>
+                    <a:pt x="6964104" y="288593"/>
+                  </a:moveTo>
+                  <a:lnTo>
+                    <a:pt x="6893760" y="288050"/>
+                  </a:lnTo>
+                  <a:lnTo>
+                    <a:pt x="6823415" y="287466"/>
+                  </a:lnTo>
+                  <a:lnTo>
+                    <a:pt x="6753071" y="286840"/>
+                  </a:lnTo>
+                  <a:lnTo>
+                    <a:pt x="6682726" y="286167"/>
+                  </a:lnTo>
+                  <a:lnTo>
+                    <a:pt x="6612382" y="285445"/>
+                  </a:lnTo>
+                  <a:lnTo>
+                    <a:pt x="6542037" y="284670"/>
+                  </a:lnTo>
+                  <a:lnTo>
+                    <a:pt x="6471693" y="283838"/>
+                  </a:lnTo>
+                  <a:lnTo>
+                    <a:pt x="6401348" y="282944"/>
+                  </a:lnTo>
+                  <a:lnTo>
+                    <a:pt x="6331004" y="281985"/>
+                  </a:lnTo>
+                  <a:lnTo>
+                    <a:pt x="6260659" y="280956"/>
+                  </a:lnTo>
+                  <a:lnTo>
+                    <a:pt x="6190315" y="279851"/>
+                  </a:lnTo>
+                  <a:lnTo>
+                    <a:pt x="6119970" y="278664"/>
+                  </a:lnTo>
+                  <a:lnTo>
+                    <a:pt x="6049626" y="277390"/>
+                  </a:lnTo>
+                  <a:lnTo>
+                    <a:pt x="5979281" y="276023"/>
+                  </a:lnTo>
+                  <a:lnTo>
+                    <a:pt x="5908937" y="274555"/>
+                  </a:lnTo>
+                  <a:lnTo>
+                    <a:pt x="5838592" y="272979"/>
+                  </a:lnTo>
+                  <a:lnTo>
+                    <a:pt x="5768248" y="271287"/>
+                  </a:lnTo>
+                  <a:lnTo>
+                    <a:pt x="5697903" y="269471"/>
+                  </a:lnTo>
+                  <a:lnTo>
+                    <a:pt x="5627559" y="267521"/>
+                  </a:lnTo>
+                  <a:lnTo>
+                    <a:pt x="5557214" y="265428"/>
+                  </a:lnTo>
+                  <a:lnTo>
+                    <a:pt x="5486870" y="263181"/>
+                  </a:lnTo>
+                  <a:lnTo>
+                    <a:pt x="5416525" y="260768"/>
+                  </a:lnTo>
+                  <a:lnTo>
+                    <a:pt x="5346181" y="258179"/>
+                  </a:lnTo>
+                  <a:lnTo>
+                    <a:pt x="5275836" y="255398"/>
+                  </a:lnTo>
+                  <a:lnTo>
+                    <a:pt x="5205492" y="252414"/>
+                  </a:lnTo>
+                  <a:lnTo>
+                    <a:pt x="5135147" y="249210"/>
+                  </a:lnTo>
+                  <a:lnTo>
+                    <a:pt x="5064803" y="245770"/>
+                  </a:lnTo>
+                  <a:lnTo>
+                    <a:pt x="4994458" y="242077"/>
+                  </a:lnTo>
+                  <a:lnTo>
+                    <a:pt x="4924114" y="238113"/>
+                  </a:lnTo>
+                  <a:lnTo>
+                    <a:pt x="4853769" y="233857"/>
+                  </a:lnTo>
+                  <a:lnTo>
+                    <a:pt x="4783425" y="229288"/>
+                  </a:lnTo>
+                  <a:lnTo>
+                    <a:pt x="4713080" y="224383"/>
+                  </a:lnTo>
+                  <a:lnTo>
+                    <a:pt x="4642736" y="219118"/>
+                  </a:lnTo>
+                  <a:lnTo>
+                    <a:pt x="4572391" y="213465"/>
+                  </a:lnTo>
+                  <a:lnTo>
+                    <a:pt x="4502047" y="207397"/>
+                  </a:lnTo>
+                  <a:lnTo>
+                    <a:pt x="4431702" y="200882"/>
+                  </a:lnTo>
+                  <a:lnTo>
+                    <a:pt x="4361358" y="193889"/>
+                  </a:lnTo>
+                  <a:lnTo>
+                    <a:pt x="4291013" y="186381"/>
+                  </a:lnTo>
+                  <a:lnTo>
+                    <a:pt x="4220669" y="178321"/>
+                  </a:lnTo>
+                  <a:lnTo>
+                    <a:pt x="4150324" y="169668"/>
+                  </a:lnTo>
+                  <a:lnTo>
+                    <a:pt x="4079980" y="160379"/>
+                  </a:lnTo>
+                  <a:lnTo>
+                    <a:pt x="4009635" y="150407"/>
+                  </a:lnTo>
+                  <a:lnTo>
+                    <a:pt x="3939291" y="139701"/>
+                  </a:lnTo>
+                  <a:lnTo>
+                    <a:pt x="3868946" y="128208"/>
+                  </a:lnTo>
+                  <a:lnTo>
+                    <a:pt x="3798602" y="115870"/>
+                  </a:lnTo>
+                  <a:lnTo>
+                    <a:pt x="3728257" y="102625"/>
+                  </a:lnTo>
+                  <a:lnTo>
+                    <a:pt x="3657913" y="88406"/>
+                  </a:lnTo>
+                  <a:lnTo>
+                    <a:pt x="3587569" y="73141"/>
+                  </a:lnTo>
+                  <a:lnTo>
+                    <a:pt x="3517224" y="56753"/>
+                  </a:lnTo>
+                  <a:lnTo>
+                    <a:pt x="3446880" y="39161"/>
+                  </a:lnTo>
+                  <a:lnTo>
+                    <a:pt x="3376535" y="20275"/>
+                  </a:lnTo>
+                  <a:lnTo>
+                    <a:pt x="3306191" y="0"/>
+                  </a:lnTo>
+                  <a:lnTo>
+                    <a:pt x="3235846" y="465"/>
+                  </a:lnTo>
+                  <a:lnTo>
+                    <a:pt x="3165502" y="4933"/>
+                  </a:lnTo>
+                  <a:lnTo>
+                    <a:pt x="3095157" y="9334"/>
+                  </a:lnTo>
+                  <a:lnTo>
+                    <a:pt x="3024813" y="13669"/>
+                  </a:lnTo>
+                  <a:lnTo>
+                    <a:pt x="2954468" y="17938"/>
+                  </a:lnTo>
+                  <a:lnTo>
+                    <a:pt x="2884124" y="22142"/>
+                  </a:lnTo>
+                  <a:lnTo>
+                    <a:pt x="2813779" y="26283"/>
+                  </a:lnTo>
+                  <a:lnTo>
+                    <a:pt x="2743435" y="30361"/>
+                  </a:lnTo>
+                  <a:lnTo>
+                    <a:pt x="2673090" y="34377"/>
+                  </a:lnTo>
+                  <a:lnTo>
+                    <a:pt x="2602746" y="38333"/>
+                  </a:lnTo>
+                  <a:lnTo>
+                    <a:pt x="2532401" y="42229"/>
+                  </a:lnTo>
+                  <a:lnTo>
+                    <a:pt x="2462057" y="46066"/>
+                  </a:lnTo>
+                  <a:lnTo>
+                    <a:pt x="2391712" y="49845"/>
+                  </a:lnTo>
+                  <a:lnTo>
+                    <a:pt x="2321368" y="53567"/>
+                  </a:lnTo>
+                  <a:lnTo>
+                    <a:pt x="2251023" y="57232"/>
+                  </a:lnTo>
+                  <a:lnTo>
+                    <a:pt x="2180679" y="60842"/>
+                  </a:lnTo>
+                  <a:lnTo>
+                    <a:pt x="2110334" y="64398"/>
+                  </a:lnTo>
+                  <a:lnTo>
+                    <a:pt x="2039990" y="67900"/>
+                  </a:lnTo>
+                  <a:lnTo>
+                    <a:pt x="1969645" y="71349"/>
+                  </a:lnTo>
+                  <a:lnTo>
+                    <a:pt x="1899301" y="74745"/>
+                  </a:lnTo>
+                  <a:lnTo>
+                    <a:pt x="1828956" y="78091"/>
+                  </a:lnTo>
+                  <a:lnTo>
+                    <a:pt x="1758612" y="81385"/>
+                  </a:lnTo>
+                  <a:lnTo>
+                    <a:pt x="1688267" y="84630"/>
+                  </a:lnTo>
+                  <a:lnTo>
+                    <a:pt x="1617923" y="87826"/>
+                  </a:lnTo>
+                  <a:lnTo>
+                    <a:pt x="1547578" y="90974"/>
+                  </a:lnTo>
+                  <a:lnTo>
+                    <a:pt x="1477234" y="94074"/>
+                  </a:lnTo>
+                  <a:lnTo>
+                    <a:pt x="1406889" y="97127"/>
+                  </a:lnTo>
+                  <a:lnTo>
+                    <a:pt x="1336545" y="100134"/>
+                  </a:lnTo>
+                  <a:lnTo>
+                    <a:pt x="1266200" y="103095"/>
+                  </a:lnTo>
+                  <a:lnTo>
+                    <a:pt x="1195856" y="106012"/>
+                  </a:lnTo>
+                  <a:lnTo>
+                    <a:pt x="1125511" y="108884"/>
+                  </a:lnTo>
+                  <a:lnTo>
+                    <a:pt x="1055167" y="111713"/>
+                  </a:lnTo>
+                  <a:lnTo>
+                    <a:pt x="984822" y="114500"/>
+                  </a:lnTo>
+                  <a:lnTo>
+                    <a:pt x="914478" y="117244"/>
+                  </a:lnTo>
+                  <a:lnTo>
+                    <a:pt x="844133" y="119947"/>
+                  </a:lnTo>
+                  <a:lnTo>
+                    <a:pt x="773789" y="122608"/>
+                  </a:lnTo>
+                  <a:lnTo>
+                    <a:pt x="703444" y="125230"/>
+                  </a:lnTo>
+                  <a:lnTo>
+                    <a:pt x="633100" y="127812"/>
+                  </a:lnTo>
+                  <a:lnTo>
+                    <a:pt x="562755" y="130355"/>
+                  </a:lnTo>
+                  <a:lnTo>
+                    <a:pt x="492411" y="132859"/>
+                  </a:lnTo>
+                  <a:lnTo>
+                    <a:pt x="422066" y="135326"/>
+                  </a:lnTo>
+                  <a:lnTo>
+                    <a:pt x="351722" y="137755"/>
+                  </a:lnTo>
+                  <a:lnTo>
+                    <a:pt x="281377" y="140148"/>
+                  </a:lnTo>
+                  <a:lnTo>
+                    <a:pt x="211033" y="142504"/>
+                  </a:lnTo>
+                  <a:lnTo>
+                    <a:pt x="140688" y="144825"/>
+                  </a:lnTo>
+                  <a:lnTo>
+                    <a:pt x="70344" y="147111"/>
+                  </a:lnTo>
+                  <a:lnTo>
+                    <a:pt x="0" y="149362"/>
+                  </a:lnTo>
+                </a:path>
+              </a:pathLst>
+            </a:custGeom>
+          </p:spPr>
+          <p:txBody>
+            <a:bodyPr/>
+            <a:lstStyle/>
+            <a:p/>
+          </p:txBody>
+        </p:sp>
+        <p:sp>
+          <p:nvSpPr>
+            <p:cNvPr id="70" name="pl70"/>
+            <p:cNvSpPr/>
+            <p:nvPr/>
+          </p:nvSpPr>
+          <p:spPr>
+            <a:xfrm>
+              <a:off x="1235312" y="4489752"/>
+              <a:ext cx="6964104" cy="1033944"/>
+            </a:xfrm>
+            <a:custGeom>
+              <a:avLst/>
+              <a:pathLst>
+                <a:path w="6964104" h="1033944">
+                  <a:moveTo>
+                    <a:pt x="0" y="0"/>
+                  </a:moveTo>
+                  <a:lnTo>
+                    <a:pt x="70344" y="30332"/>
+                  </a:lnTo>
+                  <a:lnTo>
+                    <a:pt x="140688" y="59832"/>
+                  </a:lnTo>
+                  <a:lnTo>
+                    <a:pt x="211033" y="88520"/>
+                  </a:lnTo>
+                  <a:lnTo>
+                    <a:pt x="281377" y="116421"/>
+                  </a:lnTo>
+                  <a:lnTo>
+                    <a:pt x="351722" y="143555"/>
+                  </a:lnTo>
+                  <a:lnTo>
+                    <a:pt x="422066" y="169943"/>
+                  </a:lnTo>
+                  <a:lnTo>
+                    <a:pt x="492411" y="195606"/>
+                  </a:lnTo>
+                  <a:lnTo>
+                    <a:pt x="562755" y="220564"/>
+                  </a:lnTo>
+                  <a:lnTo>
+                    <a:pt x="633100" y="244837"/>
+                  </a:lnTo>
+                  <a:lnTo>
+                    <a:pt x="703444" y="268442"/>
+                  </a:lnTo>
+                  <a:lnTo>
+                    <a:pt x="773789" y="291399"/>
+                  </a:lnTo>
+                  <a:lnTo>
+                    <a:pt x="844133" y="313725"/>
+                  </a:lnTo>
+                  <a:lnTo>
+                    <a:pt x="914478" y="335437"/>
+                  </a:lnTo>
+                  <a:lnTo>
+                    <a:pt x="984822" y="356553"/>
+                  </a:lnTo>
+                  <a:lnTo>
+                    <a:pt x="1055167" y="377089"/>
+                  </a:lnTo>
+                  <a:lnTo>
+                    <a:pt x="1125511" y="397061"/>
+                  </a:lnTo>
+                  <a:lnTo>
+                    <a:pt x="1195856" y="416483"/>
+                  </a:lnTo>
+                  <a:lnTo>
+                    <a:pt x="1266200" y="435372"/>
+                  </a:lnTo>
+                  <a:lnTo>
+                    <a:pt x="1336545" y="453742"/>
+                  </a:lnTo>
+                  <a:lnTo>
+                    <a:pt x="1406889" y="471608"/>
+                  </a:lnTo>
+                  <a:lnTo>
+                    <a:pt x="1477234" y="488982"/>
+                  </a:lnTo>
+                  <a:lnTo>
+                    <a:pt x="1547578" y="505879"/>
+                  </a:lnTo>
+                  <a:lnTo>
+                    <a:pt x="1617923" y="522312"/>
+                  </a:lnTo>
+                  <a:lnTo>
+                    <a:pt x="1688267" y="538293"/>
+                  </a:lnTo>
+                  <a:lnTo>
+                    <a:pt x="1758612" y="553835"/>
+                  </a:lnTo>
+                  <a:lnTo>
+                    <a:pt x="1828956" y="568950"/>
+                  </a:lnTo>
+                  <a:lnTo>
+                    <a:pt x="1899301" y="583650"/>
+                  </a:lnTo>
+                  <a:lnTo>
+                    <a:pt x="1969645" y="597946"/>
+                  </a:lnTo>
+                  <a:lnTo>
+                    <a:pt x="2039990" y="611849"/>
+                  </a:lnTo>
+                  <a:lnTo>
+                    <a:pt x="2110334" y="625370"/>
+                  </a:lnTo>
+                  <a:lnTo>
+                    <a:pt x="2180679" y="638519"/>
+                  </a:lnTo>
+                  <a:lnTo>
+                    <a:pt x="2251023" y="651307"/>
+                  </a:lnTo>
+                  <a:lnTo>
+                    <a:pt x="2321368" y="663744"/>
+                  </a:lnTo>
+                  <a:lnTo>
+                    <a:pt x="2391712" y="675839"/>
+                  </a:lnTo>
+                  <a:lnTo>
+                    <a:pt x="2462057" y="687602"/>
+                  </a:lnTo>
+                  <a:lnTo>
+                    <a:pt x="2532401" y="699042"/>
+                  </a:lnTo>
+                  <a:lnTo>
+                    <a:pt x="2602746" y="710167"/>
+                  </a:lnTo>
+                  <a:lnTo>
+                    <a:pt x="2673090" y="720986"/>
+                  </a:lnTo>
+                  <a:lnTo>
+                    <a:pt x="2743435" y="731509"/>
+                  </a:lnTo>
+                  <a:lnTo>
+                    <a:pt x="2813779" y="741742"/>
+                  </a:lnTo>
+                  <a:lnTo>
+                    <a:pt x="2884124" y="751694"/>
+                  </a:lnTo>
+                  <a:lnTo>
+                    <a:pt x="2954468" y="761372"/>
+                  </a:lnTo>
+                  <a:lnTo>
+                    <a:pt x="3024813" y="770785"/>
+                  </a:lnTo>
+                  <a:lnTo>
+                    <a:pt x="3095157" y="779939"/>
+                  </a:lnTo>
+                  <a:lnTo>
+                    <a:pt x="3165502" y="788841"/>
+                  </a:lnTo>
+                  <a:lnTo>
+                    <a:pt x="3235846" y="797499"/>
+                  </a:lnTo>
+                  <a:lnTo>
+                    <a:pt x="3306191" y="805919"/>
+                  </a:lnTo>
+                  <a:lnTo>
+                    <a:pt x="3376535" y="814107"/>
+                  </a:lnTo>
+                  <a:lnTo>
+                    <a:pt x="3446880" y="822071"/>
+                  </a:lnTo>
+                  <a:lnTo>
+                    <a:pt x="3517224" y="829816"/>
+                  </a:lnTo>
+                  <a:lnTo>
+                    <a:pt x="3587569" y="837348"/>
+                  </a:lnTo>
+                  <a:lnTo>
+                    <a:pt x="3657913" y="844672"/>
+                  </a:lnTo>
+                  <a:lnTo>
+                    <a:pt x="3728257" y="851796"/>
+                  </a:lnTo>
+                  <a:lnTo>
+                    <a:pt x="3798602" y="858724"/>
+                  </a:lnTo>
+                  <a:lnTo>
+                    <a:pt x="3868946" y="865462"/>
+                  </a:lnTo>
+                  <a:lnTo>
+                    <a:pt x="3939291" y="872014"/>
+                  </a:lnTo>
+                  <a:lnTo>
+                    <a:pt x="4009635" y="878387"/>
+                  </a:lnTo>
+                  <a:lnTo>
+                    <a:pt x="4079980" y="884584"/>
+                  </a:lnTo>
+                  <a:lnTo>
+                    <a:pt x="4150324" y="890611"/>
+                  </a:lnTo>
+                  <a:lnTo>
+                    <a:pt x="4220669" y="896473"/>
+                  </a:lnTo>
+                  <a:lnTo>
+                    <a:pt x="4291013" y="902173"/>
+                  </a:lnTo>
+                  <a:lnTo>
+                    <a:pt x="4361358" y="907717"/>
+                  </a:lnTo>
+                  <a:lnTo>
+                    <a:pt x="4431702" y="913108"/>
+                  </a:lnTo>
+                  <a:lnTo>
+                    <a:pt x="4502047" y="918352"/>
+                  </a:lnTo>
+                  <a:lnTo>
+                    <a:pt x="4572391" y="923451"/>
+                  </a:lnTo>
+                  <a:lnTo>
+                    <a:pt x="4642736" y="928410"/>
+                  </a:lnTo>
+                  <a:lnTo>
+                    <a:pt x="4713080" y="933233"/>
+                  </a:lnTo>
+                  <a:lnTo>
+                    <a:pt x="4783425" y="937923"/>
+                  </a:lnTo>
+                  <a:lnTo>
+                    <a:pt x="4853769" y="942485"/>
+                  </a:lnTo>
+                  <a:lnTo>
+                    <a:pt x="4924114" y="946921"/>
+                  </a:lnTo>
+                  <a:lnTo>
+                    <a:pt x="4994458" y="951235"/>
+                  </a:lnTo>
+                  <a:lnTo>
+                    <a:pt x="5064803" y="955431"/>
+                  </a:lnTo>
+                  <a:lnTo>
+                    <a:pt x="5135147" y="959511"/>
+                  </a:lnTo>
+                  <a:lnTo>
+                    <a:pt x="5205492" y="963479"/>
+                  </a:lnTo>
+                  <a:lnTo>
+                    <a:pt x="5275836" y="967339"/>
+                  </a:lnTo>
+                  <a:lnTo>
+                    <a:pt x="5346181" y="971092"/>
+                  </a:lnTo>
+                  <a:lnTo>
+                    <a:pt x="5416525" y="974742"/>
+                  </a:lnTo>
+                  <a:lnTo>
+                    <a:pt x="5486870" y="978292"/>
+                  </a:lnTo>
+                  <a:lnTo>
+                    <a:pt x="5557214" y="981744"/>
+                  </a:lnTo>
+                  <a:lnTo>
+                    <a:pt x="5627559" y="985101"/>
+                  </a:lnTo>
+                  <a:lnTo>
+                    <a:pt x="5697903" y="988367"/>
+                  </a:lnTo>
+                  <a:lnTo>
+                    <a:pt x="5768248" y="991542"/>
+                  </a:lnTo>
+                  <a:lnTo>
+                    <a:pt x="5838592" y="994630"/>
+                  </a:lnTo>
+                  <a:lnTo>
+                    <a:pt x="5908937" y="997633"/>
+                  </a:lnTo>
+                  <a:lnTo>
+                    <a:pt x="5979281" y="1000554"/>
+                  </a:lnTo>
+                  <a:lnTo>
+                    <a:pt x="6049626" y="1003395"/>
+                  </a:lnTo>
+                  <a:lnTo>
+                    <a:pt x="6119970" y="1006157"/>
+                  </a:lnTo>
+                  <a:lnTo>
+                    <a:pt x="6190315" y="1008844"/>
+                  </a:lnTo>
+                  <a:lnTo>
+                    <a:pt x="6260659" y="1011457"/>
+                  </a:lnTo>
+                  <a:lnTo>
+                    <a:pt x="6331004" y="1013998"/>
+                  </a:lnTo>
+                  <a:lnTo>
+                    <a:pt x="6401348" y="1016469"/>
+                  </a:lnTo>
+                  <a:lnTo>
+                    <a:pt x="6471693" y="1018872"/>
+                  </a:lnTo>
+                  <a:lnTo>
+                    <a:pt x="6542037" y="1021209"/>
+                  </a:lnTo>
+                  <a:lnTo>
+                    <a:pt x="6612382" y="1023482"/>
+                  </a:lnTo>
+                  <a:lnTo>
+                    <a:pt x="6682726" y="1025693"/>
+                  </a:lnTo>
+                  <a:lnTo>
+                    <a:pt x="6753071" y="1027843"/>
+                  </a:lnTo>
+                  <a:lnTo>
+                    <a:pt x="6823415" y="1029933"/>
+                  </a:lnTo>
+                  <a:lnTo>
+                    <a:pt x="6893760" y="1031967"/>
+                  </a:lnTo>
+                  <a:lnTo>
+                    <a:pt x="6964104" y="1033944"/>
+                  </a:lnTo>
+                </a:path>
+              </a:pathLst>
+            </a:custGeom>
+            <a:ln w="27101" cap="flat">
+              <a:solidFill>
+                <a:srgbClr val="FF8C00">
+                  <a:alpha val="100000"/>
+                </a:srgbClr>
+              </a:solidFill>
+              <a:prstDash val="solid"/>
+              <a:round/>
+            </a:ln>
+          </p:spPr>
+          <p:txBody>
+            <a:bodyPr/>
+            <a:lstStyle/>
+            <a:p/>
+          </p:txBody>
+        </p:sp>
+        <p:sp>
+          <p:nvSpPr>
+            <p:cNvPr id="71" name="pl71"/>
+            <p:cNvSpPr/>
+            <p:nvPr/>
+          </p:nvSpPr>
+          <p:spPr>
+            <a:xfrm>
+              <a:off x="887106" y="5294352"/>
+              <a:ext cx="7660515" cy="0"/>
+            </a:xfrm>
+            <a:custGeom>
+              <a:avLst/>
+              <a:pathLst>
+                <a:path w="7660515" h="0">
+                  <a:moveTo>
+                    <a:pt x="0" y="0"/>
+                  </a:moveTo>
+                  <a:lnTo>
+                    <a:pt x="7660515" y="0"/>
+                  </a:lnTo>
+                  <a:lnTo>
+                    <a:pt x="7660515" y="0"/>
+                  </a:lnTo>
+                </a:path>
+              </a:pathLst>
+            </a:custGeom>
+            <a:ln w="13550" cap="flat">
+              <a:solidFill>
+                <a:srgbClr val="7F7F7F">
+                  <a:alpha val="100000"/>
+                </a:srgbClr>
+              </a:solidFill>
+              <a:prstDash val="dash"/>
+              <a:round/>
+            </a:ln>
+          </p:spPr>
+          <p:txBody>
+            <a:bodyPr/>
+            <a:lstStyle/>
+            <a:p/>
+          </p:txBody>
+        </p:sp>
+        <p:sp>
+          <p:nvSpPr>
+            <p:cNvPr id="72" name="pl72"/>
+            <p:cNvSpPr/>
+            <p:nvPr/>
+          </p:nvSpPr>
+          <p:spPr>
+            <a:xfrm>
+              <a:off x="4530353" y="4336484"/>
+              <a:ext cx="0" cy="1317069"/>
+            </a:xfrm>
+            <a:custGeom>
+              <a:avLst/>
+              <a:pathLst>
+                <a:path w="0" h="1317069">
+                  <a:moveTo>
+                    <a:pt x="0" y="1317069"/>
+                  </a:moveTo>
+                  <a:lnTo>
+                    <a:pt x="0" y="0"/>
+                  </a:lnTo>
+                  <a:lnTo>
+                    <a:pt x="0" y="0"/>
+                  </a:lnTo>
+                </a:path>
+              </a:pathLst>
+            </a:custGeom>
+            <a:ln w="13550" cap="flat">
+              <a:solidFill>
+                <a:srgbClr val="666666">
+                  <a:alpha val="100000"/>
+                </a:srgbClr>
+              </a:solidFill>
+              <a:prstDash val="dot"/>
+              <a:round/>
+            </a:ln>
+          </p:spPr>
+          <p:txBody>
+            <a:bodyPr/>
+            <a:lstStyle/>
+            <a:p/>
+          </p:txBody>
+        </p:sp>
+        <p:sp>
+          <p:nvSpPr>
+            <p:cNvPr id="73" name="tx73"/>
+            <p:cNvSpPr/>
+            <p:nvPr/>
+          </p:nvSpPr>
+          <p:spPr>
+            <a:xfrm>
+              <a:off x="762297" y="5553636"/>
+              <a:ext cx="62179" cy="80101"/>
+            </a:xfrm>
+            <a:prstGeom prst="rect">
+              <a:avLst/>
+            </a:prstGeom>
+            <a:noFill/>
+          </p:spPr>
+          <p:txBody>
+            <a:bodyPr lIns="0" rIns="0" tIns="0" bIns="0" anchorCtr="1" anchor="ctr" wrap="none"/>
+            <a:lstStyle/>
+            <a:p>
+              <a:pPr algn="l" marL="0" marR="0" indent="0">
+                <a:lnSpc>
+                  <a:spcPts val="880"/>
+                </a:lnSpc>
+                <a:spcBef>
+                  <a:spcPts val="0"/>
+                </a:spcBef>
+                <a:spcAft>
+                  <a:spcPts val="0"/>
+                </a:spcAft>
+              </a:pPr>
+              <a:r>
+                <a:rPr sz="880">
+                  <a:solidFill>
+                    <a:srgbClr val="4D4D4D">
+                      <a:alpha val="100000"/>
+                    </a:srgbClr>
+                  </a:solidFill>
+                  <a:latin typeface="Helvetica"/>
+                  <a:cs typeface="Helvetica"/>
+                </a:rPr>
+                <a:t>0</a:t>
+              </a:r>
+            </a:p>
+          </p:txBody>
+        </p:sp>
+        <p:sp>
+          <p:nvSpPr>
+            <p:cNvPr id="74" name="tx74"/>
+            <p:cNvSpPr/>
+            <p:nvPr/>
+          </p:nvSpPr>
+          <p:spPr>
+            <a:xfrm>
+              <a:off x="762297" y="5254302"/>
+              <a:ext cx="62179" cy="80101"/>
+            </a:xfrm>
+            <a:prstGeom prst="rect">
+              <a:avLst/>
+            </a:prstGeom>
+            <a:noFill/>
+          </p:spPr>
+          <p:txBody>
+            <a:bodyPr lIns="0" rIns="0" tIns="0" bIns="0" anchorCtr="1" anchor="ctr" wrap="none"/>
+            <a:lstStyle/>
+            <a:p>
+              <a:pPr algn="l" marL="0" marR="0" indent="0">
+                <a:lnSpc>
+                  <a:spcPts val="880"/>
+                </a:lnSpc>
+                <a:spcBef>
+                  <a:spcPts val="0"/>
+                </a:spcBef>
+                <a:spcAft>
+                  <a:spcPts val="0"/>
+                </a:spcAft>
+              </a:pPr>
+              <a:r>
+                <a:rPr sz="880">
+                  <a:solidFill>
+                    <a:srgbClr val="4D4D4D">
+                      <a:alpha val="100000"/>
+                    </a:srgbClr>
+                  </a:solidFill>
+                  <a:latin typeface="Helvetica"/>
+                  <a:cs typeface="Helvetica"/>
+                </a:rPr>
+                <a:t>1</a:t>
+              </a:r>
+            </a:p>
+          </p:txBody>
+        </p:sp>
+        <p:sp>
+          <p:nvSpPr>
+            <p:cNvPr id="75" name="tx75"/>
+            <p:cNvSpPr/>
+            <p:nvPr/>
+          </p:nvSpPr>
+          <p:spPr>
+            <a:xfrm>
+              <a:off x="762297" y="4954968"/>
+              <a:ext cx="62179" cy="80101"/>
+            </a:xfrm>
+            <a:prstGeom prst="rect">
+              <a:avLst/>
+            </a:prstGeom>
+            <a:noFill/>
+          </p:spPr>
+          <p:txBody>
+            <a:bodyPr lIns="0" rIns="0" tIns="0" bIns="0" anchorCtr="1" anchor="ctr" wrap="none"/>
+            <a:lstStyle/>
+            <a:p>
+              <a:pPr algn="l" marL="0" marR="0" indent="0">
+                <a:lnSpc>
+                  <a:spcPts val="880"/>
+                </a:lnSpc>
+                <a:spcBef>
+                  <a:spcPts val="0"/>
+                </a:spcBef>
+                <a:spcAft>
+                  <a:spcPts val="0"/>
+                </a:spcAft>
+              </a:pPr>
+              <a:r>
+                <a:rPr sz="880">
+                  <a:solidFill>
+                    <a:srgbClr val="4D4D4D">
+                      <a:alpha val="100000"/>
+                    </a:srgbClr>
+                  </a:solidFill>
+                  <a:latin typeface="Helvetica"/>
+                  <a:cs typeface="Helvetica"/>
+                </a:rPr>
+                <a:t>2</a:t>
+              </a:r>
+            </a:p>
+          </p:txBody>
+        </p:sp>
+        <p:sp>
+          <p:nvSpPr>
+            <p:cNvPr id="76" name="tx76"/>
+            <p:cNvSpPr/>
+            <p:nvPr/>
+          </p:nvSpPr>
+          <p:spPr>
+            <a:xfrm>
+              <a:off x="762297" y="4655634"/>
+              <a:ext cx="62179" cy="80101"/>
+            </a:xfrm>
+            <a:prstGeom prst="rect">
+              <a:avLst/>
+            </a:prstGeom>
+            <a:noFill/>
+          </p:spPr>
+          <p:txBody>
+            <a:bodyPr lIns="0" rIns="0" tIns="0" bIns="0" anchorCtr="1" anchor="ctr" wrap="none"/>
+            <a:lstStyle/>
+            <a:p>
+              <a:pPr algn="l" marL="0" marR="0" indent="0">
+                <a:lnSpc>
+                  <a:spcPts val="880"/>
+                </a:lnSpc>
+                <a:spcBef>
+                  <a:spcPts val="0"/>
+                </a:spcBef>
+                <a:spcAft>
+                  <a:spcPts val="0"/>
+                </a:spcAft>
+              </a:pPr>
+              <a:r>
+                <a:rPr sz="880">
+                  <a:solidFill>
+                    <a:srgbClr val="4D4D4D">
+                      <a:alpha val="100000"/>
+                    </a:srgbClr>
+                  </a:solidFill>
+                  <a:latin typeface="Helvetica"/>
+                  <a:cs typeface="Helvetica"/>
+                </a:rPr>
+                <a:t>3</a:t>
+              </a:r>
+            </a:p>
+          </p:txBody>
+        </p:sp>
+        <p:sp>
+          <p:nvSpPr>
+            <p:cNvPr id="77" name="tx77"/>
+            <p:cNvSpPr/>
+            <p:nvPr/>
+          </p:nvSpPr>
+          <p:spPr>
+            <a:xfrm>
+              <a:off x="762297" y="4356300"/>
+              <a:ext cx="62179" cy="80101"/>
+            </a:xfrm>
+            <a:prstGeom prst="rect">
+              <a:avLst/>
+            </a:prstGeom>
+            <a:noFill/>
+          </p:spPr>
+          <p:txBody>
+            <a:bodyPr lIns="0" rIns="0" tIns="0" bIns="0" anchorCtr="1" anchor="ctr" wrap="none"/>
+            <a:lstStyle/>
+            <a:p>
+              <a:pPr algn="l" marL="0" marR="0" indent="0">
+                <a:lnSpc>
+                  <a:spcPts val="880"/>
+                </a:lnSpc>
+                <a:spcBef>
+                  <a:spcPts val="0"/>
+                </a:spcBef>
+                <a:spcAft>
+                  <a:spcPts val="0"/>
+                </a:spcAft>
+              </a:pPr>
+              <a:r>
+                <a:rPr sz="880">
+                  <a:solidFill>
+                    <a:srgbClr val="4D4D4D">
+                      <a:alpha val="100000"/>
+                    </a:srgbClr>
+                  </a:solidFill>
+                  <a:latin typeface="Helvetica"/>
+                  <a:cs typeface="Helvetica"/>
+                </a:rPr>
+                <a:t>4</a:t>
+              </a:r>
+            </a:p>
+          </p:txBody>
+        </p:sp>
+        <p:sp>
+          <p:nvSpPr>
+            <p:cNvPr id="78" name="tx78"/>
+            <p:cNvSpPr/>
+            <p:nvPr/>
+          </p:nvSpPr>
+          <p:spPr>
+            <a:xfrm>
+              <a:off x="1241001" y="5716183"/>
+              <a:ext cx="161574" cy="80101"/>
+            </a:xfrm>
+            <a:prstGeom prst="rect">
+              <a:avLst/>
+            </a:prstGeom>
+            <a:noFill/>
+          </p:spPr>
+          <p:txBody>
+            <a:bodyPr lIns="0" rIns="0" tIns="0" bIns="0" anchorCtr="1" anchor="ctr" wrap="none"/>
+            <a:lstStyle/>
+            <a:p>
+              <a:pPr algn="l" marL="0" marR="0" indent="0">
+                <a:lnSpc>
+                  <a:spcPts val="880"/>
+                </a:lnSpc>
+                <a:spcBef>
+                  <a:spcPts val="0"/>
+                </a:spcBef>
+                <a:spcAft>
+                  <a:spcPts val="0"/>
+                </a:spcAft>
+              </a:pPr>
+              <a:r>
+                <a:rPr sz="880">
+                  <a:solidFill>
+                    <a:srgbClr val="4D4D4D">
+                      <a:alpha val="100000"/>
+                    </a:srgbClr>
+                  </a:solidFill>
+                  <a:latin typeface="Helvetica"/>
+                  <a:cs typeface="Helvetica"/>
+                </a:rPr>
+                <a:t>-40</a:t>
+              </a:r>
+            </a:p>
+          </p:txBody>
+        </p:sp>
+        <p:sp>
+          <p:nvSpPr>
+            <p:cNvPr id="79" name="tx79"/>
+            <p:cNvSpPr/>
+            <p:nvPr/>
+          </p:nvSpPr>
+          <p:spPr>
+            <a:xfrm>
+              <a:off x="2054602" y="5716183"/>
+              <a:ext cx="161574" cy="80101"/>
+            </a:xfrm>
+            <a:prstGeom prst="rect">
+              <a:avLst/>
+            </a:prstGeom>
+            <a:noFill/>
+          </p:spPr>
+          <p:txBody>
+            <a:bodyPr lIns="0" rIns="0" tIns="0" bIns="0" anchorCtr="1" anchor="ctr" wrap="none"/>
+            <a:lstStyle/>
+            <a:p>
+              <a:pPr algn="l" marL="0" marR="0" indent="0">
+                <a:lnSpc>
+                  <a:spcPts val="880"/>
+                </a:lnSpc>
+                <a:spcBef>
+                  <a:spcPts val="0"/>
+                </a:spcBef>
+                <a:spcAft>
+                  <a:spcPts val="0"/>
+                </a:spcAft>
+              </a:pPr>
+              <a:r>
+                <a:rPr sz="880">
+                  <a:solidFill>
+                    <a:srgbClr val="4D4D4D">
+                      <a:alpha val="100000"/>
+                    </a:srgbClr>
+                  </a:solidFill>
+                  <a:latin typeface="Helvetica"/>
+                  <a:cs typeface="Helvetica"/>
+                </a:rPr>
+                <a:t>-30</a:t>
+              </a:r>
+            </a:p>
+          </p:txBody>
+        </p:sp>
+        <p:sp>
+          <p:nvSpPr>
+            <p:cNvPr id="80" name="tx80"/>
+            <p:cNvSpPr/>
+            <p:nvPr/>
+          </p:nvSpPr>
+          <p:spPr>
+            <a:xfrm>
+              <a:off x="2868203" y="5716183"/>
+              <a:ext cx="161574" cy="80101"/>
+            </a:xfrm>
+            <a:prstGeom prst="rect">
+              <a:avLst/>
+            </a:prstGeom>
+            <a:noFill/>
+          </p:spPr>
+          <p:txBody>
+            <a:bodyPr lIns="0" rIns="0" tIns="0" bIns="0" anchorCtr="1" anchor="ctr" wrap="none"/>
+            <a:lstStyle/>
+            <a:p>
+              <a:pPr algn="l" marL="0" marR="0" indent="0">
+                <a:lnSpc>
+                  <a:spcPts val="880"/>
+                </a:lnSpc>
+                <a:spcBef>
+                  <a:spcPts val="0"/>
+                </a:spcBef>
+                <a:spcAft>
+                  <a:spcPts val="0"/>
+                </a:spcAft>
+              </a:pPr>
+              <a:r>
+                <a:rPr sz="880">
+                  <a:solidFill>
+                    <a:srgbClr val="4D4D4D">
+                      <a:alpha val="100000"/>
+                    </a:srgbClr>
+                  </a:solidFill>
+                  <a:latin typeface="Helvetica"/>
+                  <a:cs typeface="Helvetica"/>
+                </a:rPr>
+                <a:t>-20</a:t>
+              </a:r>
+            </a:p>
+          </p:txBody>
+        </p:sp>
+        <p:sp>
+          <p:nvSpPr>
+            <p:cNvPr id="81" name="tx81"/>
+            <p:cNvSpPr/>
+            <p:nvPr/>
+          </p:nvSpPr>
+          <p:spPr>
+            <a:xfrm>
+              <a:off x="3681805" y="5716183"/>
+              <a:ext cx="161574" cy="80101"/>
+            </a:xfrm>
+            <a:prstGeom prst="rect">
+              <a:avLst/>
+            </a:prstGeom>
+            <a:noFill/>
+          </p:spPr>
+          <p:txBody>
+            <a:bodyPr lIns="0" rIns="0" tIns="0" bIns="0" anchorCtr="1" anchor="ctr" wrap="none"/>
+            <a:lstStyle/>
+            <a:p>
+              <a:pPr algn="l" marL="0" marR="0" indent="0">
+                <a:lnSpc>
+                  <a:spcPts val="880"/>
+                </a:lnSpc>
+                <a:spcBef>
+                  <a:spcPts val="0"/>
+                </a:spcBef>
+                <a:spcAft>
+                  <a:spcPts val="0"/>
+                </a:spcAft>
+              </a:pPr>
+              <a:r>
+                <a:rPr sz="880">
+                  <a:solidFill>
+                    <a:srgbClr val="4D4D4D">
+                      <a:alpha val="100000"/>
+                    </a:srgbClr>
+                  </a:solidFill>
+                  <a:latin typeface="Helvetica"/>
+                  <a:cs typeface="Helvetica"/>
+                </a:rPr>
+                <a:t>-10</a:t>
+              </a:r>
+            </a:p>
+          </p:txBody>
+        </p:sp>
+        <p:sp>
+          <p:nvSpPr>
+            <p:cNvPr id="82" name="tx82"/>
+            <p:cNvSpPr/>
+            <p:nvPr/>
+          </p:nvSpPr>
+          <p:spPr>
+            <a:xfrm>
+              <a:off x="4545104" y="5716183"/>
+              <a:ext cx="62179" cy="80101"/>
+            </a:xfrm>
+            <a:prstGeom prst="rect">
+              <a:avLst/>
+            </a:prstGeom>
+            <a:noFill/>
+          </p:spPr>
+          <p:txBody>
+            <a:bodyPr lIns="0" rIns="0" tIns="0" bIns="0" anchorCtr="1" anchor="ctr" wrap="none"/>
+            <a:lstStyle/>
+            <a:p>
+              <a:pPr algn="l" marL="0" marR="0" indent="0">
+                <a:lnSpc>
+                  <a:spcPts val="880"/>
+                </a:lnSpc>
+                <a:spcBef>
+                  <a:spcPts val="0"/>
+                </a:spcBef>
+                <a:spcAft>
+                  <a:spcPts val="0"/>
+                </a:spcAft>
+              </a:pPr>
+              <a:r>
+                <a:rPr sz="880">
+                  <a:solidFill>
+                    <a:srgbClr val="4D4D4D">
+                      <a:alpha val="100000"/>
+                    </a:srgbClr>
+                  </a:solidFill>
+                  <a:latin typeface="Helvetica"/>
+                  <a:cs typeface="Helvetica"/>
+                </a:rPr>
+                <a:t>0</a:t>
+              </a:r>
+            </a:p>
+          </p:txBody>
+        </p:sp>
+        <p:sp>
+          <p:nvSpPr>
+            <p:cNvPr id="83" name="tx83"/>
+            <p:cNvSpPr/>
+            <p:nvPr/>
+          </p:nvSpPr>
+          <p:spPr>
+            <a:xfrm>
+              <a:off x="5327615" y="5716183"/>
+              <a:ext cx="124358" cy="80101"/>
+            </a:xfrm>
+            <a:prstGeom prst="rect">
+              <a:avLst/>
+            </a:prstGeom>
+            <a:noFill/>
+          </p:spPr>
+          <p:txBody>
+            <a:bodyPr lIns="0" rIns="0" tIns="0" bIns="0" anchorCtr="1" anchor="ctr" wrap="none"/>
+            <a:lstStyle/>
+            <a:p>
+              <a:pPr algn="l" marL="0" marR="0" indent="0">
+                <a:lnSpc>
+                  <a:spcPts val="880"/>
+                </a:lnSpc>
+                <a:spcBef>
+                  <a:spcPts val="0"/>
+                </a:spcBef>
+                <a:spcAft>
+                  <a:spcPts val="0"/>
+                </a:spcAft>
+              </a:pPr>
+              <a:r>
+                <a:rPr sz="880">
+                  <a:solidFill>
+                    <a:srgbClr val="4D4D4D">
+                      <a:alpha val="100000"/>
+                    </a:srgbClr>
+                  </a:solidFill>
+                  <a:latin typeface="Helvetica"/>
+                  <a:cs typeface="Helvetica"/>
+                </a:rPr>
+                <a:t>10</a:t>
+              </a:r>
+            </a:p>
+          </p:txBody>
+        </p:sp>
+        <p:sp>
+          <p:nvSpPr>
+            <p:cNvPr id="84" name="tx84"/>
+            <p:cNvSpPr/>
+            <p:nvPr/>
+          </p:nvSpPr>
+          <p:spPr>
+            <a:xfrm>
+              <a:off x="6141217" y="5716183"/>
+              <a:ext cx="124358" cy="80101"/>
+            </a:xfrm>
+            <a:prstGeom prst="rect">
+              <a:avLst/>
+            </a:prstGeom>
+            <a:noFill/>
+          </p:spPr>
+          <p:txBody>
+            <a:bodyPr lIns="0" rIns="0" tIns="0" bIns="0" anchorCtr="1" anchor="ctr" wrap="none"/>
+            <a:lstStyle/>
+            <a:p>
+              <a:pPr algn="l" marL="0" marR="0" indent="0">
+                <a:lnSpc>
+                  <a:spcPts val="880"/>
+                </a:lnSpc>
+                <a:spcBef>
+                  <a:spcPts val="0"/>
+                </a:spcBef>
+                <a:spcAft>
+                  <a:spcPts val="0"/>
+                </a:spcAft>
+              </a:pPr>
+              <a:r>
+                <a:rPr sz="880">
+                  <a:solidFill>
+                    <a:srgbClr val="4D4D4D">
+                      <a:alpha val="100000"/>
+                    </a:srgbClr>
+                  </a:solidFill>
+                  <a:latin typeface="Helvetica"/>
+                  <a:cs typeface="Helvetica"/>
+                </a:rPr>
+                <a:t>20</a:t>
+              </a:r>
+            </a:p>
+          </p:txBody>
+        </p:sp>
+        <p:sp>
+          <p:nvSpPr>
+            <p:cNvPr id="85" name="tx85"/>
+            <p:cNvSpPr/>
+            <p:nvPr/>
+          </p:nvSpPr>
+          <p:spPr>
+            <a:xfrm>
+              <a:off x="6954818" y="5716183"/>
+              <a:ext cx="124358" cy="80101"/>
+            </a:xfrm>
+            <a:prstGeom prst="rect">
+              <a:avLst/>
+            </a:prstGeom>
+            <a:noFill/>
+          </p:spPr>
+          <p:txBody>
+            <a:bodyPr lIns="0" rIns="0" tIns="0" bIns="0" anchorCtr="1" anchor="ctr" wrap="none"/>
+            <a:lstStyle/>
+            <a:p>
+              <a:pPr algn="l" marL="0" marR="0" indent="0">
+                <a:lnSpc>
+                  <a:spcPts val="880"/>
+                </a:lnSpc>
+                <a:spcBef>
+                  <a:spcPts val="0"/>
+                </a:spcBef>
+                <a:spcAft>
+                  <a:spcPts val="0"/>
+                </a:spcAft>
+              </a:pPr>
+              <a:r>
+                <a:rPr sz="880">
+                  <a:solidFill>
+                    <a:srgbClr val="4D4D4D">
+                      <a:alpha val="100000"/>
+                    </a:srgbClr>
+                  </a:solidFill>
+                  <a:latin typeface="Helvetica"/>
+                  <a:cs typeface="Helvetica"/>
+                </a:rPr>
+                <a:t>30</a:t>
+              </a:r>
+            </a:p>
+          </p:txBody>
+        </p:sp>
+        <p:sp>
+          <p:nvSpPr>
+            <p:cNvPr id="86" name="tx86"/>
+            <p:cNvSpPr/>
+            <p:nvPr/>
+          </p:nvSpPr>
+          <p:spPr>
+            <a:xfrm>
+              <a:off x="7768419" y="5716183"/>
+              <a:ext cx="124358" cy="80101"/>
+            </a:xfrm>
+            <a:prstGeom prst="rect">
+              <a:avLst/>
+            </a:prstGeom>
+            <a:noFill/>
+          </p:spPr>
+          <p:txBody>
+            <a:bodyPr lIns="0" rIns="0" tIns="0" bIns="0" anchorCtr="1" anchor="ctr" wrap="none"/>
+            <a:lstStyle/>
+            <a:p>
+              <a:pPr algn="l" marL="0" marR="0" indent="0">
+                <a:lnSpc>
+                  <a:spcPts val="880"/>
+                </a:lnSpc>
+                <a:spcBef>
+                  <a:spcPts val="0"/>
+                </a:spcBef>
+                <a:spcAft>
+                  <a:spcPts val="0"/>
+                </a:spcAft>
+              </a:pPr>
+              <a:r>
+                <a:rPr sz="880">
+                  <a:solidFill>
+                    <a:srgbClr val="4D4D4D">
+                      <a:alpha val="100000"/>
+                    </a:srgbClr>
+                  </a:solidFill>
+                  <a:latin typeface="Helvetica"/>
+                  <a:cs typeface="Helvetica"/>
+                </a:rPr>
+                <a:t>40</a:t>
+              </a:r>
+            </a:p>
+          </p:txBody>
+        </p:sp>
+        <p:sp>
+          <p:nvSpPr>
+            <p:cNvPr id="87" name="tx87"/>
+            <p:cNvSpPr/>
+            <p:nvPr/>
+          </p:nvSpPr>
+          <p:spPr>
+            <a:xfrm>
+              <a:off x="2928340" y="5855859"/>
+              <a:ext cx="3578047" cy="100218"/>
+            </a:xfrm>
+            <a:prstGeom prst="rect">
+              <a:avLst/>
+            </a:prstGeom>
+            <a:noFill/>
+          </p:spPr>
+          <p:txBody>
+            <a:bodyPr lIns="0" rIns="0" tIns="0" bIns="0" anchorCtr="1" anchor="ctr" wrap="none"/>
+            <a:lstStyle/>
+            <a:p>
+              <a:pPr algn="l" marL="0" marR="0" indent="0">
+                <a:lnSpc>
+                  <a:spcPts val="1100"/>
+                </a:lnSpc>
+                <a:spcBef>
+                  <a:spcPts val="0"/>
+                </a:spcBef>
+                <a:spcAft>
+                  <a:spcPts val="0"/>
+                </a:spcAft>
+              </a:pPr>
+              <a:r>
+                <a:rPr sz="1100">
+                  <a:solidFill>
+                    <a:srgbClr val="000000">
+                      <a:alpha val="100000"/>
+                    </a:srgbClr>
+                  </a:solidFill>
+                  <a:latin typeface="Helvetica"/>
+                  <a:cs typeface="Helvetica"/>
+                </a:rPr>
+                <a:t>eGFR difference (%): 100 × (CKD-EPI Cr-Cys − CG) / CG</a:t>
+              </a:r>
+            </a:p>
+          </p:txBody>
+        </p:sp>
+        <p:sp>
+          <p:nvSpPr>
+            <p:cNvPr id="88" name="tx88"/>
+            <p:cNvSpPr/>
+            <p:nvPr/>
+          </p:nvSpPr>
+          <p:spPr>
+            <a:xfrm rot="-5400000">
+              <a:off x="138035" y="4944909"/>
+              <a:ext cx="1016904" cy="100218"/>
+            </a:xfrm>
+            <a:prstGeom prst="rect">
+              <a:avLst/>
+            </a:prstGeom>
+            <a:noFill/>
+          </p:spPr>
+          <p:txBody>
+            <a:bodyPr lIns="0" rIns="0" tIns="0" bIns="0" anchorCtr="1" anchor="ctr" wrap="none"/>
+            <a:lstStyle/>
+            <a:p>
+              <a:pPr algn="l" marL="0" marR="0" indent="0">
+                <a:lnSpc>
+                  <a:spcPts val="1100"/>
+                </a:lnSpc>
+                <a:spcBef>
+                  <a:spcPts val="0"/>
+                </a:spcBef>
+                <a:spcAft>
+                  <a:spcPts val="0"/>
+                </a:spcAft>
+              </a:pPr>
+              <a:r>
+                <a:rPr sz="1100">
+                  <a:solidFill>
+                    <a:srgbClr val="000000">
+                      <a:alpha val="100000"/>
+                    </a:srgbClr>
+                  </a:solidFill>
+                  <a:latin typeface="Helvetica"/>
+                  <a:cs typeface="Helvetica"/>
+                </a:rPr>
+                <a:t>subHR (95% CI)</a:t>
+              </a:r>
+            </a:p>
+          </p:txBody>
+        </p:sp>
+        <p:sp>
+          <p:nvSpPr>
+            <p:cNvPr id="89" name="tx89"/>
+            <p:cNvSpPr/>
+            <p:nvPr/>
+          </p:nvSpPr>
+          <p:spPr>
+            <a:xfrm>
+              <a:off x="887106" y="4159544"/>
+              <a:ext cx="6385163" cy="82021"/>
+            </a:xfrm>
+            <a:prstGeom prst="rect">
+              <a:avLst/>
+            </a:prstGeom>
+            <a:noFill/>
+          </p:spPr>
+          <p:txBody>
+            <a:bodyPr lIns="0" rIns="0" tIns="0" bIns="0" anchorCtr="1" anchor="ctr" wrap="none"/>
+            <a:lstStyle/>
+            <a:p>
+              <a:pPr algn="l" marL="0" marR="0" indent="0">
+                <a:lnSpc>
+                  <a:spcPts val="900"/>
+                </a:lnSpc>
+                <a:spcBef>
+                  <a:spcPts val="0"/>
+                </a:spcBef>
+                <a:spcAft>
+                  <a:spcPts val="0"/>
+                </a:spcAft>
+              </a:pPr>
+              <a:r>
+                <a:rPr sz="900">
+                  <a:solidFill>
+                    <a:srgbClr val="404040">
+                      <a:alpha val="100000"/>
+                    </a:srgbClr>
+                  </a:solidFill>
+                  <a:latin typeface="Helvetica"/>
+                  <a:cs typeface="Helvetica"/>
+                </a:rPr>
+                <a:t>subHR per 10 % decline: 1.38 (0.84-2.27), p = 0.205  |  per IQR decline (Δ = 29.9 %): 2.62 (0.59-11.65)  |  IQR: [-15.0, 14.9] %</a:t>
+              </a:r>
+            </a:p>
+          </p:txBody>
+        </p:sp>
+        <p:sp>
+          <p:nvSpPr>
+            <p:cNvPr id="90" name="tx90"/>
+            <p:cNvSpPr/>
+            <p:nvPr/>
+          </p:nvSpPr>
+          <p:spPr>
+            <a:xfrm>
+              <a:off x="887106" y="3932770"/>
               <a:ext cx="2486253" cy="120152"/>
             </a:xfrm>
             <a:prstGeom prst="rect">
